--- a/DMcourse/Chapter8.pptx
+++ b/DMcourse/Chapter8.pptx
@@ -5,10 +5,10 @@
     <p:sldMasterId id="2147483672" r:id="rId1"/>
   </p:sldMasterIdLst>
   <p:notesMasterIdLst>
-    <p:notesMasterId r:id="rId42"/>
+    <p:notesMasterId r:id="rId38"/>
   </p:notesMasterIdLst>
   <p:handoutMasterIdLst>
-    <p:handoutMasterId r:id="rId43"/>
+    <p:handoutMasterId r:id="rId39"/>
   </p:handoutMasterIdLst>
   <p:sldIdLst>
     <p:sldId id="338" r:id="rId2"/>
@@ -44,13 +44,9 @@
     <p:sldId id="287" r:id="rId32"/>
     <p:sldId id="288" r:id="rId33"/>
     <p:sldId id="289" r:id="rId34"/>
-    <p:sldId id="299" r:id="rId35"/>
-    <p:sldId id="300" r:id="rId36"/>
-    <p:sldId id="301" r:id="rId37"/>
-    <p:sldId id="302" r:id="rId38"/>
-    <p:sldId id="321" r:id="rId39"/>
-    <p:sldId id="322" r:id="rId40"/>
-    <p:sldId id="324" r:id="rId41"/>
+    <p:sldId id="321" r:id="rId35"/>
+    <p:sldId id="322" r:id="rId36"/>
+    <p:sldId id="324" r:id="rId37"/>
   </p:sldIdLst>
   <p:sldSz cx="9144000" cy="6858000" type="screen4x3"/>
   <p:notesSz cx="7304088" cy="9590088"/>
@@ -514,7 +510,7 @@
           <a:p>
             <a:fld id="{7415830B-B976-4DC8-93A0-A38CBFE46F8A}" type="datetimeFigureOut">
               <a:rPr lang="en-US"/>
-              <a:t>3/25/2025</a:t>
+              <a:t>3/9/2026</a:t>
             </a:fld>
             <a:endParaRPr lang="en-US"/>
           </a:p>
@@ -679,7 +675,7 @@
           <a:p>
             <a:fld id="{7AB9731E-17D4-455B-8CEF-653BE9B92AC2}" type="datetimeFigureOut">
               <a:rPr lang="en-US"/>
-              <a:t>3/25/2025</a:t>
+              <a:t>3/9/2026</a:t>
             </a:fld>
             <a:endParaRPr lang="en-US"/>
           </a:p>
@@ -1508,7 +1504,7 @@
                 <a:tabLst/>
                 <a:defRPr/>
               </a:pPr>
-              <a:t>3/25/2025</a:t>
+              <a:t>3/9/2026</a:t>
             </a:fld>
             <a:endParaRPr kumimoji="0" lang="en-US" sz="1200" b="0" i="0" u="none" strike="noStrike" kern="1200" cap="none" spc="0" normalizeH="0" baseline="0" noProof="0">
               <a:ln>
@@ -1917,7 +1913,7 @@
                 <a:tabLst/>
                 <a:defRPr/>
               </a:pPr>
-              <a:t>3/25/2025</a:t>
+              <a:t>3/9/2026</a:t>
             </a:fld>
             <a:endParaRPr kumimoji="0" lang="en-US" sz="1200" b="0" i="0" u="none" strike="noStrike" kern="1200" cap="none" spc="0" normalizeH="0" baseline="0" noProof="0">
               <a:ln>
@@ -2326,7 +2322,7 @@
                 <a:tabLst/>
                 <a:defRPr/>
               </a:pPr>
-              <a:t>3/25/2025</a:t>
+              <a:t>3/9/2026</a:t>
             </a:fld>
             <a:endParaRPr kumimoji="0" lang="en-US" sz="1200" b="0" i="0" u="none" strike="noStrike" kern="1200" cap="none" spc="0" normalizeH="0" baseline="0" noProof="0">
               <a:ln>
@@ -2735,7 +2731,7 @@
                 <a:tabLst/>
                 <a:defRPr/>
               </a:pPr>
-              <a:t>3/25/2025</a:t>
+              <a:t>3/9/2026</a:t>
             </a:fld>
             <a:endParaRPr kumimoji="0" lang="en-US" sz="1200" b="0" i="0" u="none" strike="noStrike" kern="1200" cap="none" spc="0" normalizeH="0" baseline="0" noProof="0">
               <a:ln>
@@ -3144,7 +3140,7 @@
                 <a:tabLst/>
                 <a:defRPr/>
               </a:pPr>
-              <a:t>3/25/2025</a:t>
+              <a:t>3/9/2026</a:t>
             </a:fld>
             <a:endParaRPr kumimoji="0" lang="en-US" sz="1200" b="0" i="0" u="none" strike="noStrike" kern="1200" cap="none" spc="0" normalizeH="0" baseline="0" noProof="0">
               <a:ln>
@@ -3553,7 +3549,7 @@
                 <a:tabLst/>
                 <a:defRPr/>
               </a:pPr>
-              <a:t>3/25/2025</a:t>
+              <a:t>3/9/2026</a:t>
             </a:fld>
             <a:endParaRPr kumimoji="0" lang="en-US" sz="1200" b="0" i="0" u="none" strike="noStrike" kern="1200" cap="none" spc="0" normalizeH="0" baseline="0" noProof="0">
               <a:ln>
@@ -3962,7 +3958,7 @@
                 <a:tabLst/>
                 <a:defRPr/>
               </a:pPr>
-              <a:t>3/25/2025</a:t>
+              <a:t>3/9/2026</a:t>
             </a:fld>
             <a:endParaRPr kumimoji="0" lang="en-US" sz="1200" b="0" i="0" u="none" strike="noStrike" kern="1200" cap="none" spc="0" normalizeH="0" baseline="0" noProof="0">
               <a:ln>
@@ -4371,7 +4367,7 @@
                 <a:tabLst/>
                 <a:defRPr/>
               </a:pPr>
-              <a:t>3/25/2025</a:t>
+              <a:t>3/9/2026</a:t>
             </a:fld>
             <a:endParaRPr kumimoji="0" lang="en-US" sz="1200" b="0" i="0" u="none" strike="noStrike" kern="1200" cap="none" spc="0" normalizeH="0" baseline="0" noProof="0">
               <a:ln>
@@ -4780,7 +4776,7 @@
                 <a:tabLst/>
                 <a:defRPr/>
               </a:pPr>
-              <a:t>3/25/2025</a:t>
+              <a:t>3/9/2026</a:t>
             </a:fld>
             <a:endParaRPr kumimoji="0" lang="en-US" sz="1200" b="0" i="0" u="none" strike="noStrike" kern="1200" cap="none" spc="0" normalizeH="0" baseline="0" noProof="0">
               <a:ln>
@@ -5189,7 +5185,7 @@
                 <a:tabLst/>
                 <a:defRPr/>
               </a:pPr>
-              <a:t>3/25/2025</a:t>
+              <a:t>3/9/2026</a:t>
             </a:fld>
             <a:endParaRPr kumimoji="0" lang="en-US" sz="1200" b="0" i="0" u="none" strike="noStrike" kern="1200" cap="none" spc="0" normalizeH="0" baseline="0" noProof="0">
               <a:ln>
@@ -5598,7 +5594,7 @@
                 <a:tabLst/>
                 <a:defRPr/>
               </a:pPr>
-              <a:t>3/25/2025</a:t>
+              <a:t>3/9/2026</a:t>
             </a:fld>
             <a:endParaRPr kumimoji="0" lang="en-US" sz="1200" b="0" i="0" u="none" strike="noStrike" kern="1200" cap="none" spc="0" normalizeH="0" baseline="0" noProof="0">
               <a:ln>
@@ -6007,7 +6003,7 @@
                 <a:tabLst/>
                 <a:defRPr/>
               </a:pPr>
-              <a:t>3/25/2025</a:t>
+              <a:t>3/9/2026</a:t>
             </a:fld>
             <a:endParaRPr kumimoji="0" lang="en-US" sz="1200" b="0" i="0" u="none" strike="noStrike" kern="1200" cap="none" spc="0" normalizeH="0" baseline="0" noProof="0">
               <a:ln>
@@ -6416,7 +6412,7 @@
                 <a:tabLst/>
                 <a:defRPr/>
               </a:pPr>
-              <a:t>3/25/2025</a:t>
+              <a:t>3/9/2026</a:t>
             </a:fld>
             <a:endParaRPr kumimoji="0" lang="en-US" sz="1200" b="0" i="0" u="none" strike="noStrike" kern="1200" cap="none" spc="0" normalizeH="0" baseline="0" noProof="0">
               <a:ln>
@@ -6825,7 +6821,7 @@
                 <a:tabLst/>
                 <a:defRPr/>
               </a:pPr>
-              <a:t>3/25/2025</a:t>
+              <a:t>3/9/2026</a:t>
             </a:fld>
             <a:endParaRPr kumimoji="0" lang="en-US" sz="1200" b="0" i="0" u="none" strike="noStrike" kern="1200" cap="none" spc="0" normalizeH="0" baseline="0" noProof="0">
               <a:ln>
@@ -7234,7 +7230,7 @@
                 <a:tabLst/>
                 <a:defRPr/>
               </a:pPr>
-              <a:t>3/25/2025</a:t>
+              <a:t>3/9/2026</a:t>
             </a:fld>
             <a:endParaRPr kumimoji="0" lang="en-US" sz="1200" b="0" i="0" u="none" strike="noStrike" kern="1200" cap="none" spc="0" normalizeH="0" baseline="0" noProof="0">
               <a:ln>
@@ -7643,7 +7639,7 @@
                 <a:tabLst/>
                 <a:defRPr/>
               </a:pPr>
-              <a:t>3/25/2025</a:t>
+              <a:t>3/9/2026</a:t>
             </a:fld>
             <a:endParaRPr kumimoji="0" lang="en-US" sz="1200" b="0" i="0" u="none" strike="noStrike" kern="1200" cap="none" spc="0" normalizeH="0" baseline="0" noProof="0">
               <a:ln>
@@ -8052,7 +8048,7 @@
                 <a:tabLst/>
                 <a:defRPr/>
               </a:pPr>
-              <a:t>3/25/2025</a:t>
+              <a:t>3/9/2026</a:t>
             </a:fld>
             <a:endParaRPr kumimoji="0" lang="en-US" sz="1200" b="0" i="0" u="none" strike="noStrike" kern="1200" cap="none" spc="0" normalizeH="0" baseline="0" noProof="0">
               <a:ln>
@@ -8461,7 +8457,7 @@
                 <a:tabLst/>
                 <a:defRPr/>
               </a:pPr>
-              <a:t>3/25/2025</a:t>
+              <a:t>3/9/2026</a:t>
             </a:fld>
             <a:endParaRPr kumimoji="0" lang="en-US" sz="1200" b="0" i="0" u="none" strike="noStrike" kern="1200" cap="none" spc="0" normalizeH="0" baseline="0" noProof="0">
               <a:ln>
@@ -8870,7 +8866,7 @@
                 <a:tabLst/>
                 <a:defRPr/>
               </a:pPr>
-              <a:t>3/25/2025</a:t>
+              <a:t>3/9/2026</a:t>
             </a:fld>
             <a:endParaRPr kumimoji="0" lang="en-US" sz="1200" b="0" i="0" u="none" strike="noStrike" kern="1200" cap="none" spc="0" normalizeH="0" baseline="0" noProof="0">
               <a:ln>
@@ -9279,7 +9275,7 @@
                 <a:tabLst/>
                 <a:defRPr/>
               </a:pPr>
-              <a:t>3/25/2025</a:t>
+              <a:t>3/9/2026</a:t>
             </a:fld>
             <a:endParaRPr kumimoji="0" lang="en-US" sz="1200" b="0" i="0" u="none" strike="noStrike" kern="1200" cap="none" spc="0" normalizeH="0" baseline="0" noProof="0">
               <a:ln>
@@ -9688,7 +9684,7 @@
                 <a:tabLst/>
                 <a:defRPr/>
               </a:pPr>
-              <a:t>3/25/2025</a:t>
+              <a:t>3/9/2026</a:t>
             </a:fld>
             <a:endParaRPr kumimoji="0" lang="en-US" sz="1200" b="0" i="0" u="none" strike="noStrike" kern="1200" cap="none" spc="0" normalizeH="0" baseline="0" noProof="0">
               <a:ln>
@@ -10097,7 +10093,7 @@
                 <a:tabLst/>
                 <a:defRPr/>
               </a:pPr>
-              <a:t>3/25/2025</a:t>
+              <a:t>3/9/2026</a:t>
             </a:fld>
             <a:endParaRPr kumimoji="0" lang="en-US" sz="1200" b="0" i="0" u="none" strike="noStrike" kern="1200" cap="none" spc="0" normalizeH="0" baseline="0" noProof="0">
               <a:ln>
@@ -10418,7 +10414,7 @@
 </p:notes>
 </file>
 
-<file path=ppt/notesSlides/notesSlide30.xml><?xml version="1.0" encoding="utf-8"?>
+<file path=ppt/notesSlides/notesSlide4.xml><?xml version="1.0" encoding="utf-8"?>
 <p:notes xmlns:a="http://schemas.openxmlformats.org/drawingml/2006/main" xmlns:r="http://schemas.openxmlformats.org/officeDocument/2006/relationships" xmlns:p="http://schemas.openxmlformats.org/presentationml/2006/main">
   <p:cSld>
     <p:spTree>
@@ -10506,1643 +10502,7 @@
                 <a:tabLst/>
                 <a:defRPr/>
               </a:pPr>
-              <a:t>3/25/2025</a:t>
-            </a:fld>
-            <a:endParaRPr kumimoji="0" lang="en-US" sz="1200" b="0" i="0" u="none" strike="noStrike" kern="1200" cap="none" spc="0" normalizeH="0" baseline="0" noProof="0">
-              <a:ln>
-                <a:noFill/>
-              </a:ln>
-              <a:solidFill>
-                <a:schemeClr val="tx1"/>
-              </a:solidFill>
-              <a:effectLst/>
-              <a:uLnTx/>
-              <a:uFillTx/>
-              <a:latin typeface="+mn-lt"/>
-              <a:ea typeface="+mn-ea"/>
-              <a:cs typeface="+mn-cs"/>
-            </a:endParaRPr>
-          </a:p>
-        </p:txBody>
-      </p:sp>
-      <p:sp>
-        <p:nvSpPr>
-          <p:cNvPr id="9" name="Slide Number Placeholder 12"/>
-          <p:cNvSpPr txBox="1">
-            <a:spLocks noGrp="1"/>
-          </p:cNvSpPr>
-          <p:nvPr/>
-        </p:nvSpPr>
-        <p:spPr>
-          <a:xfrm>
-            <a:off x="4134600" y="9110880"/>
-            <a:ext cx="3169440" cy="479160"/>
-          </a:xfrm>
-          <a:prstGeom prst="rect">
-            <a:avLst/>
-          </a:prstGeom>
-          <a:noFill/>
-          <a:ln/>
-        </p:spPr>
-        <p:txBody>
-          <a:bodyPr lIns="0" tIns="0" rIns="0" bIns="0" anchor="b">
-            <a:noAutofit/>
-          </a:bodyPr>
-          <a:lstStyle/>
-          <a:p>
-            <a:pPr marL="0" marR="0" lvl="0" indent="0" algn="r" defTabSz="914400" rtl="0" eaLnBrk="1" fontAlgn="auto" latinLnBrk="0" hangingPunct="0">
-              <a:lnSpc>
-                <a:spcPct val="100000"/>
-              </a:lnSpc>
-              <a:spcBef>
-                <a:spcPts val="0"/>
-              </a:spcBef>
-              <a:spcAft>
-                <a:spcPts val="0"/>
-              </a:spcAft>
-              <a:buClrTx/>
-              <a:buSzTx/>
-              <a:buFontTx/>
-              <a:buNone/>
-              <a:tabLst>
-                <a:tab pos="0" algn="l"/>
-                <a:tab pos="914400" algn="l"/>
-                <a:tab pos="1828800" algn="l"/>
-                <a:tab pos="2743199" algn="l"/>
-                <a:tab pos="3657600" algn="l"/>
-                <a:tab pos="4572000" algn="l"/>
-                <a:tab pos="5486399" algn="l"/>
-                <a:tab pos="6400799" algn="l"/>
-                <a:tab pos="7315200" algn="l"/>
-                <a:tab pos="8229600" algn="l"/>
-                <a:tab pos="9144000" algn="l"/>
-                <a:tab pos="10058400" algn="l"/>
-              </a:tabLst>
-              <a:defRPr/>
-            </a:pPr>
-            <a:fld id="{6DE4D7BE-C413-480C-A9DE-41D35076C406}" type="slidenum">
-              <a:rPr kumimoji="0" lang="en-US" sz="1400" b="0" i="0" u="none" strike="noStrike" kern="1200" cap="none" spc="0" normalizeH="0" baseline="0" noProof="0" smtClean="0">
-                <a:ln>
-                  <a:noFill/>
-                </a:ln>
-                <a:solidFill>
-                  <a:srgbClr val="000000"/>
-                </a:solidFill>
-                <a:effectLst/>
-                <a:uLnTx/>
-                <a:uFillTx/>
-                <a:latin typeface="Times New Roman" pitchFamily="18"/>
-                <a:ea typeface="Bitstream Vera Sans" pitchFamily="2"/>
-                <a:cs typeface="Lucidasans" pitchFamily="2"/>
-              </a:rPr>
-              <a:pPr marL="0" marR="0" lvl="0" indent="0" algn="r" defTabSz="914400" rtl="0" eaLnBrk="1" fontAlgn="auto" latinLnBrk="0" hangingPunct="0">
-                <a:lnSpc>
-                  <a:spcPct val="100000"/>
-                </a:lnSpc>
-                <a:spcBef>
-                  <a:spcPts val="0"/>
-                </a:spcBef>
-                <a:spcAft>
-                  <a:spcPts val="0"/>
-                </a:spcAft>
-                <a:buClrTx/>
-                <a:buSzTx/>
-                <a:buFontTx/>
-                <a:buNone/>
-                <a:tabLst>
-                  <a:tab pos="0" algn="l"/>
-                  <a:tab pos="914400" algn="l"/>
-                  <a:tab pos="1828800" algn="l"/>
-                  <a:tab pos="2743199" algn="l"/>
-                  <a:tab pos="3657600" algn="l"/>
-                  <a:tab pos="4572000" algn="l"/>
-                  <a:tab pos="5486399" algn="l"/>
-                  <a:tab pos="6400799" algn="l"/>
-                  <a:tab pos="7315200" algn="l"/>
-                  <a:tab pos="8229600" algn="l"/>
-                  <a:tab pos="9144000" algn="l"/>
-                  <a:tab pos="10058400" algn="l"/>
-                </a:tabLst>
-                <a:defRPr/>
-              </a:pPr>
-              <a:t>34</a:t>
-            </a:fld>
-            <a:endParaRPr kumimoji="0" lang="en-US" sz="1400" b="0" i="0" u="none" strike="noStrike" kern="1200" cap="none" spc="0" normalizeH="0" baseline="0" noProof="0">
-              <a:ln>
-                <a:noFill/>
-              </a:ln>
-              <a:solidFill>
-                <a:srgbClr val="000000"/>
-              </a:solidFill>
-              <a:effectLst/>
-              <a:uLnTx/>
-              <a:uFillTx/>
-              <a:latin typeface="Times New Roman" pitchFamily="18"/>
-              <a:ea typeface="Bitstream Vera Sans" pitchFamily="2"/>
-              <a:cs typeface="Lucidasans" pitchFamily="2"/>
-            </a:endParaRPr>
-          </a:p>
-        </p:txBody>
-      </p:sp>
-      <p:sp>
-        <p:nvSpPr>
-          <p:cNvPr id="11" name="Slide Number Placeholder 6"/>
-          <p:cNvSpPr txBox="1">
-            <a:spLocks noGrp="1"/>
-          </p:cNvSpPr>
-          <p:nvPr/>
-        </p:nvSpPr>
-        <p:spPr>
-          <a:xfrm>
-            <a:off x="4134600" y="9110880"/>
-            <a:ext cx="3169440" cy="479160"/>
-          </a:xfrm>
-          <a:prstGeom prst="rect">
-            <a:avLst/>
-          </a:prstGeom>
-          <a:noFill/>
-          <a:ln/>
-        </p:spPr>
-        <p:txBody>
-          <a:bodyPr vert="horz" lIns="91440" tIns="45720" rIns="91440" bIns="45720" rtlCol="0" anchor="b">
-            <a:noAutofit/>
-          </a:bodyPr>
-          <a:lstStyle/>
-          <a:p>
-            <a:pPr marL="0" marR="0" lvl="0" indent="0" algn="r" defTabSz="914400" rtl="0" eaLnBrk="1" fontAlgn="auto" latinLnBrk="0" hangingPunct="0">
-              <a:lnSpc>
-                <a:spcPct val="100000"/>
-              </a:lnSpc>
-              <a:spcBef>
-                <a:spcPts val="0"/>
-              </a:spcBef>
-              <a:spcAft>
-                <a:spcPts val="0"/>
-              </a:spcAft>
-              <a:buClrTx/>
-              <a:buSzTx/>
-              <a:buFontTx/>
-              <a:buNone/>
-              <a:tabLst>
-                <a:tab pos="0" algn="l"/>
-                <a:tab pos="914400" algn="l"/>
-                <a:tab pos="1828800" algn="l"/>
-                <a:tab pos="2743199" algn="l"/>
-                <a:tab pos="3657600" algn="l"/>
-                <a:tab pos="4572000" algn="l"/>
-                <a:tab pos="5486399" algn="l"/>
-                <a:tab pos="6400799" algn="l"/>
-                <a:tab pos="7315200" algn="l"/>
-                <a:tab pos="8229600" algn="l"/>
-                <a:tab pos="9144000" algn="l"/>
-                <a:tab pos="10058400" algn="l"/>
-              </a:tabLst>
-              <a:defRPr/>
-            </a:pPr>
-            <a:fld id="{5424ECAC-F659-46B6-9681-A7897C9B9D9E}" type="slidenum">
-              <a:rPr kumimoji="0" lang="en-US" sz="1400" b="0" i="0" u="none" strike="noStrike" kern="1200" cap="none" spc="0" normalizeH="0" baseline="0" noProof="0" smtClean="0">
-                <a:ln>
-                  <a:noFill/>
-                </a:ln>
-                <a:solidFill>
-                  <a:srgbClr val="000000"/>
-                </a:solidFill>
-                <a:effectLst/>
-                <a:uLnTx/>
-                <a:uFillTx/>
-                <a:latin typeface="Times New Roman" pitchFamily="18"/>
-                <a:ea typeface="Bitstream Vera Sans" pitchFamily="2"/>
-                <a:cs typeface="Lucidasans" pitchFamily="2"/>
-              </a:rPr>
-              <a:pPr marL="0" marR="0" lvl="0" indent="0" algn="r" defTabSz="914400" rtl="0" eaLnBrk="1" fontAlgn="auto" latinLnBrk="0" hangingPunct="0">
-                <a:lnSpc>
-                  <a:spcPct val="100000"/>
-                </a:lnSpc>
-                <a:spcBef>
-                  <a:spcPts val="0"/>
-                </a:spcBef>
-                <a:spcAft>
-                  <a:spcPts val="0"/>
-                </a:spcAft>
-                <a:buClrTx/>
-                <a:buSzTx/>
-                <a:buFontTx/>
-                <a:buNone/>
-                <a:tabLst>
-                  <a:tab pos="0" algn="l"/>
-                  <a:tab pos="914400" algn="l"/>
-                  <a:tab pos="1828800" algn="l"/>
-                  <a:tab pos="2743199" algn="l"/>
-                  <a:tab pos="3657600" algn="l"/>
-                  <a:tab pos="4572000" algn="l"/>
-                  <a:tab pos="5486399" algn="l"/>
-                  <a:tab pos="6400799" algn="l"/>
-                  <a:tab pos="7315200" algn="l"/>
-                  <a:tab pos="8229600" algn="l"/>
-                  <a:tab pos="9144000" algn="l"/>
-                  <a:tab pos="10058400" algn="l"/>
-                </a:tabLst>
-                <a:defRPr/>
-              </a:pPr>
-              <a:t>34</a:t>
-            </a:fld>
-            <a:endParaRPr kumimoji="0" lang="en-US" sz="1400" b="0" i="0" u="none" strike="noStrike" kern="1200" cap="none" spc="0" normalizeH="0" baseline="0" noProof="0">
-              <a:ln>
-                <a:noFill/>
-              </a:ln>
-              <a:solidFill>
-                <a:srgbClr val="000000"/>
-              </a:solidFill>
-              <a:effectLst/>
-              <a:uLnTx/>
-              <a:uFillTx/>
-              <a:latin typeface="Times New Roman" pitchFamily="18"/>
-              <a:ea typeface="Bitstream Vera Sans" pitchFamily="2"/>
-              <a:cs typeface="Lucidasans" pitchFamily="2"/>
-            </a:endParaRPr>
-          </a:p>
-        </p:txBody>
-      </p:sp>
-      <p:sp>
-        <p:nvSpPr>
-          <p:cNvPr id="2" name="Slide Image Placeholder 1"/>
-          <p:cNvSpPr>
-            <a:spLocks noGrp="1" noRot="1" noChangeAspect="1" noResize="1"/>
-          </p:cNvSpPr>
-          <p:nvPr>
-            <p:ph type="sldImg"/>
-          </p:nvPr>
-        </p:nvSpPr>
-        <p:spPr>
-          <a:xfrm>
-            <a:off x="1254125" y="728663"/>
-            <a:ext cx="4795838" cy="3595687"/>
-          </a:xfrm>
-          <a:solidFill>
-            <a:schemeClr val="accent1"/>
-          </a:solidFill>
-          <a:ln w="25400">
-            <a:solidFill>
-              <a:schemeClr val="accent1">
-                <a:shade val="50000"/>
-              </a:schemeClr>
-            </a:solidFill>
-            <a:prstDash val="solid"/>
-          </a:ln>
-        </p:spPr>
-      </p:sp>
-      <p:sp>
-        <p:nvSpPr>
-          <p:cNvPr id="3" name="Notes Placeholder 2"/>
-          <p:cNvSpPr txBox="1">
-            <a:spLocks noGrp="1"/>
-          </p:cNvSpPr>
-          <p:nvPr>
-            <p:ph type="body" sz="quarter" idx="1"/>
-          </p:nvPr>
-        </p:nvSpPr>
-        <p:spPr>
-          <a:xfrm>
-            <a:off x="730440" y="4555440"/>
-            <a:ext cx="5843160" cy="4315320"/>
-          </a:xfrm>
-          <a:noFill/>
-          <a:ln>
-            <a:noFill/>
-          </a:ln>
-        </p:spPr>
-        <p:txBody>
-          <a:bodyPr lIns="0" tIns="0" rIns="0" bIns="0"/>
-          <a:lstStyle/>
-          <a:p>
-            <a:endParaRPr lang="en-US"/>
-          </a:p>
-        </p:txBody>
-      </p:sp>
-    </p:spTree>
-  </p:cSld>
-  <p:clrMapOvr>
-    <a:masterClrMapping/>
-  </p:clrMapOvr>
-</p:notes>
-</file>
-
-<file path=ppt/notesSlides/notesSlide31.xml><?xml version="1.0" encoding="utf-8"?>
-<p:notes xmlns:a="http://schemas.openxmlformats.org/drawingml/2006/main" xmlns:r="http://schemas.openxmlformats.org/officeDocument/2006/relationships" xmlns:p="http://schemas.openxmlformats.org/presentationml/2006/main">
-  <p:cSld>
-    <p:spTree>
-      <p:nvGrpSpPr>
-        <p:cNvPr id="1" name=""/>
-        <p:cNvGrpSpPr/>
-        <p:nvPr/>
-      </p:nvGrpSpPr>
-      <p:grpSpPr>
-        <a:xfrm>
-          <a:off x="0" y="0"/>
-          <a:ext cx="0" cy="0"/>
-          <a:chOff x="0" y="0"/>
-          <a:chExt cx="0" cy="0"/>
-        </a:xfrm>
-      </p:grpSpPr>
-      <p:sp>
-        <p:nvSpPr>
-          <p:cNvPr id="5" name="Date Placeholder 2"/>
-          <p:cNvSpPr txBox="1">
-            <a:spLocks noGrp="1"/>
-          </p:cNvSpPr>
-          <p:nvPr/>
-        </p:nvSpPr>
-        <p:spPr>
-          <a:xfrm>
-            <a:off x="4137025" y="0"/>
-            <a:ext cx="3165475" cy="481013"/>
-          </a:xfrm>
-          <a:prstGeom prst="rect">
-            <a:avLst/>
-          </a:prstGeom>
-          <a:noFill/>
-        </p:spPr>
-        <p:txBody>
-          <a:bodyPr vert="horz" lIns="91440" tIns="45720" rIns="91440" bIns="45720" rtlCol="0"/>
-          <a:lstStyle/>
-          <a:p>
-            <a:pPr marL="0" marR="0" lvl="0" indent="0" algn="r" defTabSz="914400" rtl="0" eaLnBrk="1" fontAlgn="auto" latinLnBrk="0" hangingPunct="1">
-              <a:lnSpc>
-                <a:spcPct val="100000"/>
-              </a:lnSpc>
-              <a:spcBef>
-                <a:spcPts val="0"/>
-              </a:spcBef>
-              <a:spcAft>
-                <a:spcPts val="0"/>
-              </a:spcAft>
-              <a:buClrTx/>
-              <a:buSzTx/>
-              <a:buFontTx/>
-              <a:buNone/>
-              <a:tabLst/>
-              <a:defRPr/>
-            </a:pPr>
-            <a:fld id="{7AB9731E-17D4-455B-8CEF-653BE9B92AC2}" type="datetimeFigureOut">
-              <a:rPr kumimoji="0" lang="en-US" sz="1200" b="0" i="0" u="none" strike="noStrike" kern="1200" cap="none" spc="0" normalizeH="0" baseline="0" noProof="0" smtClean="0">
-                <a:ln>
-                  <a:noFill/>
-                </a:ln>
-                <a:solidFill>
-                  <a:schemeClr val="tx1"/>
-                </a:solidFill>
-                <a:effectLst/>
-                <a:uLnTx/>
-                <a:uFillTx/>
-                <a:latin typeface="+mn-lt"/>
-                <a:ea typeface="+mn-ea"/>
-                <a:cs typeface="+mn-cs"/>
-              </a:rPr>
-              <a:pPr marL="0" marR="0" lvl="0" indent="0" algn="r" defTabSz="914400" rtl="0" eaLnBrk="1" fontAlgn="auto" latinLnBrk="0" hangingPunct="1">
-                <a:lnSpc>
-                  <a:spcPct val="100000"/>
-                </a:lnSpc>
-                <a:spcBef>
-                  <a:spcPts val="0"/>
-                </a:spcBef>
-                <a:spcAft>
-                  <a:spcPts val="0"/>
-                </a:spcAft>
-                <a:buClrTx/>
-                <a:buSzTx/>
-                <a:buFontTx/>
-                <a:buNone/>
-                <a:tabLst/>
-                <a:defRPr/>
-              </a:pPr>
-              <a:t>3/25/2025</a:t>
-            </a:fld>
-            <a:endParaRPr kumimoji="0" lang="en-US" sz="1200" b="0" i="0" u="none" strike="noStrike" kern="1200" cap="none" spc="0" normalizeH="0" baseline="0" noProof="0">
-              <a:ln>
-                <a:noFill/>
-              </a:ln>
-              <a:solidFill>
-                <a:schemeClr val="tx1"/>
-              </a:solidFill>
-              <a:effectLst/>
-              <a:uLnTx/>
-              <a:uFillTx/>
-              <a:latin typeface="+mn-lt"/>
-              <a:ea typeface="+mn-ea"/>
-              <a:cs typeface="+mn-cs"/>
-            </a:endParaRPr>
-          </a:p>
-        </p:txBody>
-      </p:sp>
-      <p:sp>
-        <p:nvSpPr>
-          <p:cNvPr id="9" name="Slide Number Placeholder 12"/>
-          <p:cNvSpPr txBox="1">
-            <a:spLocks noGrp="1"/>
-          </p:cNvSpPr>
-          <p:nvPr/>
-        </p:nvSpPr>
-        <p:spPr>
-          <a:xfrm>
-            <a:off x="4134600" y="9110880"/>
-            <a:ext cx="3169440" cy="479160"/>
-          </a:xfrm>
-          <a:prstGeom prst="rect">
-            <a:avLst/>
-          </a:prstGeom>
-          <a:noFill/>
-          <a:ln/>
-        </p:spPr>
-        <p:txBody>
-          <a:bodyPr lIns="0" tIns="0" rIns="0" bIns="0" anchor="b">
-            <a:noAutofit/>
-          </a:bodyPr>
-          <a:lstStyle/>
-          <a:p>
-            <a:pPr marL="0" marR="0" lvl="0" indent="0" algn="r" defTabSz="914400" rtl="0" eaLnBrk="1" fontAlgn="auto" latinLnBrk="0" hangingPunct="0">
-              <a:lnSpc>
-                <a:spcPct val="100000"/>
-              </a:lnSpc>
-              <a:spcBef>
-                <a:spcPts val="0"/>
-              </a:spcBef>
-              <a:spcAft>
-                <a:spcPts val="0"/>
-              </a:spcAft>
-              <a:buClrTx/>
-              <a:buSzTx/>
-              <a:buFontTx/>
-              <a:buNone/>
-              <a:tabLst>
-                <a:tab pos="0" algn="l"/>
-                <a:tab pos="914400" algn="l"/>
-                <a:tab pos="1828800" algn="l"/>
-                <a:tab pos="2743199" algn="l"/>
-                <a:tab pos="3657600" algn="l"/>
-                <a:tab pos="4572000" algn="l"/>
-                <a:tab pos="5486399" algn="l"/>
-                <a:tab pos="6400799" algn="l"/>
-                <a:tab pos="7315200" algn="l"/>
-                <a:tab pos="8229600" algn="l"/>
-                <a:tab pos="9144000" algn="l"/>
-                <a:tab pos="10058400" algn="l"/>
-              </a:tabLst>
-              <a:defRPr/>
-            </a:pPr>
-            <a:fld id="{C27E8626-D85A-4DDA-B871-7D4CFA7A2EEB}" type="slidenum">
-              <a:rPr kumimoji="0" lang="en-US" sz="1400" b="0" i="0" u="none" strike="noStrike" kern="1200" cap="none" spc="0" normalizeH="0" baseline="0" noProof="0" smtClean="0">
-                <a:ln>
-                  <a:noFill/>
-                </a:ln>
-                <a:solidFill>
-                  <a:srgbClr val="000000"/>
-                </a:solidFill>
-                <a:effectLst/>
-                <a:uLnTx/>
-                <a:uFillTx/>
-                <a:latin typeface="Times New Roman" pitchFamily="18"/>
-                <a:ea typeface="Bitstream Vera Sans" pitchFamily="2"/>
-                <a:cs typeface="Lucidasans" pitchFamily="2"/>
-              </a:rPr>
-              <a:pPr marL="0" marR="0" lvl="0" indent="0" algn="r" defTabSz="914400" rtl="0" eaLnBrk="1" fontAlgn="auto" latinLnBrk="0" hangingPunct="0">
-                <a:lnSpc>
-                  <a:spcPct val="100000"/>
-                </a:lnSpc>
-                <a:spcBef>
-                  <a:spcPts val="0"/>
-                </a:spcBef>
-                <a:spcAft>
-                  <a:spcPts val="0"/>
-                </a:spcAft>
-                <a:buClrTx/>
-                <a:buSzTx/>
-                <a:buFontTx/>
-                <a:buNone/>
-                <a:tabLst>
-                  <a:tab pos="0" algn="l"/>
-                  <a:tab pos="914400" algn="l"/>
-                  <a:tab pos="1828800" algn="l"/>
-                  <a:tab pos="2743199" algn="l"/>
-                  <a:tab pos="3657600" algn="l"/>
-                  <a:tab pos="4572000" algn="l"/>
-                  <a:tab pos="5486399" algn="l"/>
-                  <a:tab pos="6400799" algn="l"/>
-                  <a:tab pos="7315200" algn="l"/>
-                  <a:tab pos="8229600" algn="l"/>
-                  <a:tab pos="9144000" algn="l"/>
-                  <a:tab pos="10058400" algn="l"/>
-                </a:tabLst>
-                <a:defRPr/>
-              </a:pPr>
-              <a:t>35</a:t>
-            </a:fld>
-            <a:endParaRPr kumimoji="0" lang="en-US" sz="1400" b="0" i="0" u="none" strike="noStrike" kern="1200" cap="none" spc="0" normalizeH="0" baseline="0" noProof="0">
-              <a:ln>
-                <a:noFill/>
-              </a:ln>
-              <a:solidFill>
-                <a:srgbClr val="000000"/>
-              </a:solidFill>
-              <a:effectLst/>
-              <a:uLnTx/>
-              <a:uFillTx/>
-              <a:latin typeface="Times New Roman" pitchFamily="18"/>
-              <a:ea typeface="Bitstream Vera Sans" pitchFamily="2"/>
-              <a:cs typeface="Lucidasans" pitchFamily="2"/>
-            </a:endParaRPr>
-          </a:p>
-        </p:txBody>
-      </p:sp>
-      <p:sp>
-        <p:nvSpPr>
-          <p:cNvPr id="11" name="Slide Number Placeholder 6"/>
-          <p:cNvSpPr txBox="1">
-            <a:spLocks noGrp="1"/>
-          </p:cNvSpPr>
-          <p:nvPr/>
-        </p:nvSpPr>
-        <p:spPr>
-          <a:xfrm>
-            <a:off x="4134600" y="9110880"/>
-            <a:ext cx="3169440" cy="479160"/>
-          </a:xfrm>
-          <a:prstGeom prst="rect">
-            <a:avLst/>
-          </a:prstGeom>
-          <a:noFill/>
-          <a:ln/>
-        </p:spPr>
-        <p:txBody>
-          <a:bodyPr vert="horz" lIns="91440" tIns="45720" rIns="91440" bIns="45720" rtlCol="0" anchor="b">
-            <a:noAutofit/>
-          </a:bodyPr>
-          <a:lstStyle/>
-          <a:p>
-            <a:pPr marL="0" marR="0" lvl="0" indent="0" algn="r" defTabSz="914400" rtl="0" eaLnBrk="1" fontAlgn="auto" latinLnBrk="0" hangingPunct="0">
-              <a:lnSpc>
-                <a:spcPct val="100000"/>
-              </a:lnSpc>
-              <a:spcBef>
-                <a:spcPts val="0"/>
-              </a:spcBef>
-              <a:spcAft>
-                <a:spcPts val="0"/>
-              </a:spcAft>
-              <a:buClrTx/>
-              <a:buSzTx/>
-              <a:buFontTx/>
-              <a:buNone/>
-              <a:tabLst>
-                <a:tab pos="0" algn="l"/>
-                <a:tab pos="914400" algn="l"/>
-                <a:tab pos="1828800" algn="l"/>
-                <a:tab pos="2743199" algn="l"/>
-                <a:tab pos="3657600" algn="l"/>
-                <a:tab pos="4572000" algn="l"/>
-                <a:tab pos="5486399" algn="l"/>
-                <a:tab pos="6400799" algn="l"/>
-                <a:tab pos="7315200" algn="l"/>
-                <a:tab pos="8229600" algn="l"/>
-                <a:tab pos="9144000" algn="l"/>
-                <a:tab pos="10058400" algn="l"/>
-              </a:tabLst>
-              <a:defRPr/>
-            </a:pPr>
-            <a:fld id="{FD88670C-DA0D-4BDF-83F0-BE935918AF44}" type="slidenum">
-              <a:rPr kumimoji="0" lang="en-US" sz="1400" b="0" i="0" u="none" strike="noStrike" kern="1200" cap="none" spc="0" normalizeH="0" baseline="0" noProof="0" smtClean="0">
-                <a:ln>
-                  <a:noFill/>
-                </a:ln>
-                <a:solidFill>
-                  <a:srgbClr val="000000"/>
-                </a:solidFill>
-                <a:effectLst/>
-                <a:uLnTx/>
-                <a:uFillTx/>
-                <a:latin typeface="Times New Roman" pitchFamily="18"/>
-                <a:ea typeface="Bitstream Vera Sans" pitchFamily="2"/>
-                <a:cs typeface="Lucidasans" pitchFamily="2"/>
-              </a:rPr>
-              <a:pPr marL="0" marR="0" lvl="0" indent="0" algn="r" defTabSz="914400" rtl="0" eaLnBrk="1" fontAlgn="auto" latinLnBrk="0" hangingPunct="0">
-                <a:lnSpc>
-                  <a:spcPct val="100000"/>
-                </a:lnSpc>
-                <a:spcBef>
-                  <a:spcPts val="0"/>
-                </a:spcBef>
-                <a:spcAft>
-                  <a:spcPts val="0"/>
-                </a:spcAft>
-                <a:buClrTx/>
-                <a:buSzTx/>
-                <a:buFontTx/>
-                <a:buNone/>
-                <a:tabLst>
-                  <a:tab pos="0" algn="l"/>
-                  <a:tab pos="914400" algn="l"/>
-                  <a:tab pos="1828800" algn="l"/>
-                  <a:tab pos="2743199" algn="l"/>
-                  <a:tab pos="3657600" algn="l"/>
-                  <a:tab pos="4572000" algn="l"/>
-                  <a:tab pos="5486399" algn="l"/>
-                  <a:tab pos="6400799" algn="l"/>
-                  <a:tab pos="7315200" algn="l"/>
-                  <a:tab pos="8229600" algn="l"/>
-                  <a:tab pos="9144000" algn="l"/>
-                  <a:tab pos="10058400" algn="l"/>
-                </a:tabLst>
-                <a:defRPr/>
-              </a:pPr>
-              <a:t>35</a:t>
-            </a:fld>
-            <a:endParaRPr kumimoji="0" lang="en-US" sz="1400" b="0" i="0" u="none" strike="noStrike" kern="1200" cap="none" spc="0" normalizeH="0" baseline="0" noProof="0">
-              <a:ln>
-                <a:noFill/>
-              </a:ln>
-              <a:solidFill>
-                <a:srgbClr val="000000"/>
-              </a:solidFill>
-              <a:effectLst/>
-              <a:uLnTx/>
-              <a:uFillTx/>
-              <a:latin typeface="Times New Roman" pitchFamily="18"/>
-              <a:ea typeface="Bitstream Vera Sans" pitchFamily="2"/>
-              <a:cs typeface="Lucidasans" pitchFamily="2"/>
-            </a:endParaRPr>
-          </a:p>
-        </p:txBody>
-      </p:sp>
-      <p:sp>
-        <p:nvSpPr>
-          <p:cNvPr id="2" name="Slide Image Placeholder 1"/>
-          <p:cNvSpPr>
-            <a:spLocks noGrp="1" noRot="1" noChangeAspect="1" noResize="1"/>
-          </p:cNvSpPr>
-          <p:nvPr>
-            <p:ph type="sldImg"/>
-          </p:nvPr>
-        </p:nvSpPr>
-        <p:spPr>
-          <a:xfrm>
-            <a:off x="1254125" y="728663"/>
-            <a:ext cx="4795838" cy="3595687"/>
-          </a:xfrm>
-          <a:solidFill>
-            <a:schemeClr val="accent1"/>
-          </a:solidFill>
-          <a:ln w="25400">
-            <a:solidFill>
-              <a:schemeClr val="accent1">
-                <a:shade val="50000"/>
-              </a:schemeClr>
-            </a:solidFill>
-            <a:prstDash val="solid"/>
-          </a:ln>
-        </p:spPr>
-      </p:sp>
-      <p:sp>
-        <p:nvSpPr>
-          <p:cNvPr id="3" name="Notes Placeholder 2"/>
-          <p:cNvSpPr txBox="1">
-            <a:spLocks noGrp="1"/>
-          </p:cNvSpPr>
-          <p:nvPr>
-            <p:ph type="body" sz="quarter" idx="1"/>
-          </p:nvPr>
-        </p:nvSpPr>
-        <p:spPr>
-          <a:xfrm>
-            <a:off x="730440" y="4555440"/>
-            <a:ext cx="5843160" cy="4315320"/>
-          </a:xfrm>
-          <a:noFill/>
-          <a:ln>
-            <a:noFill/>
-          </a:ln>
-        </p:spPr>
-        <p:txBody>
-          <a:bodyPr lIns="0" tIns="0" rIns="0" bIns="0"/>
-          <a:lstStyle/>
-          <a:p>
-            <a:endParaRPr lang="en-US"/>
-          </a:p>
-        </p:txBody>
-      </p:sp>
-    </p:spTree>
-  </p:cSld>
-  <p:clrMapOvr>
-    <a:masterClrMapping/>
-  </p:clrMapOvr>
-</p:notes>
-</file>
-
-<file path=ppt/notesSlides/notesSlide32.xml><?xml version="1.0" encoding="utf-8"?>
-<p:notes xmlns:a="http://schemas.openxmlformats.org/drawingml/2006/main" xmlns:r="http://schemas.openxmlformats.org/officeDocument/2006/relationships" xmlns:p="http://schemas.openxmlformats.org/presentationml/2006/main">
-  <p:cSld>
-    <p:spTree>
-      <p:nvGrpSpPr>
-        <p:cNvPr id="1" name=""/>
-        <p:cNvGrpSpPr/>
-        <p:nvPr/>
-      </p:nvGrpSpPr>
-      <p:grpSpPr>
-        <a:xfrm>
-          <a:off x="0" y="0"/>
-          <a:ext cx="0" cy="0"/>
-          <a:chOff x="0" y="0"/>
-          <a:chExt cx="0" cy="0"/>
-        </a:xfrm>
-      </p:grpSpPr>
-      <p:sp>
-        <p:nvSpPr>
-          <p:cNvPr id="5" name="Date Placeholder 2"/>
-          <p:cNvSpPr txBox="1">
-            <a:spLocks noGrp="1"/>
-          </p:cNvSpPr>
-          <p:nvPr/>
-        </p:nvSpPr>
-        <p:spPr>
-          <a:xfrm>
-            <a:off x="4137025" y="0"/>
-            <a:ext cx="3165475" cy="481013"/>
-          </a:xfrm>
-          <a:prstGeom prst="rect">
-            <a:avLst/>
-          </a:prstGeom>
-          <a:noFill/>
-        </p:spPr>
-        <p:txBody>
-          <a:bodyPr vert="horz" lIns="91440" tIns="45720" rIns="91440" bIns="45720" rtlCol="0"/>
-          <a:lstStyle/>
-          <a:p>
-            <a:pPr marL="0" marR="0" lvl="0" indent="0" algn="r" defTabSz="914400" rtl="0" eaLnBrk="1" fontAlgn="auto" latinLnBrk="0" hangingPunct="1">
-              <a:lnSpc>
-                <a:spcPct val="100000"/>
-              </a:lnSpc>
-              <a:spcBef>
-                <a:spcPts val="0"/>
-              </a:spcBef>
-              <a:spcAft>
-                <a:spcPts val="0"/>
-              </a:spcAft>
-              <a:buClrTx/>
-              <a:buSzTx/>
-              <a:buFontTx/>
-              <a:buNone/>
-              <a:tabLst/>
-              <a:defRPr/>
-            </a:pPr>
-            <a:fld id="{7AB9731E-17D4-455B-8CEF-653BE9B92AC2}" type="datetimeFigureOut">
-              <a:rPr kumimoji="0" lang="en-US" sz="1200" b="0" i="0" u="none" strike="noStrike" kern="1200" cap="none" spc="0" normalizeH="0" baseline="0" noProof="0" smtClean="0">
-                <a:ln>
-                  <a:noFill/>
-                </a:ln>
-                <a:solidFill>
-                  <a:schemeClr val="tx1"/>
-                </a:solidFill>
-                <a:effectLst/>
-                <a:uLnTx/>
-                <a:uFillTx/>
-                <a:latin typeface="+mn-lt"/>
-                <a:ea typeface="+mn-ea"/>
-                <a:cs typeface="+mn-cs"/>
-              </a:rPr>
-              <a:pPr marL="0" marR="0" lvl="0" indent="0" algn="r" defTabSz="914400" rtl="0" eaLnBrk="1" fontAlgn="auto" latinLnBrk="0" hangingPunct="1">
-                <a:lnSpc>
-                  <a:spcPct val="100000"/>
-                </a:lnSpc>
-                <a:spcBef>
-                  <a:spcPts val="0"/>
-                </a:spcBef>
-                <a:spcAft>
-                  <a:spcPts val="0"/>
-                </a:spcAft>
-                <a:buClrTx/>
-                <a:buSzTx/>
-                <a:buFontTx/>
-                <a:buNone/>
-                <a:tabLst/>
-                <a:defRPr/>
-              </a:pPr>
-              <a:t>3/25/2025</a:t>
-            </a:fld>
-            <a:endParaRPr kumimoji="0" lang="en-US" sz="1200" b="0" i="0" u="none" strike="noStrike" kern="1200" cap="none" spc="0" normalizeH="0" baseline="0" noProof="0">
-              <a:ln>
-                <a:noFill/>
-              </a:ln>
-              <a:solidFill>
-                <a:schemeClr val="tx1"/>
-              </a:solidFill>
-              <a:effectLst/>
-              <a:uLnTx/>
-              <a:uFillTx/>
-              <a:latin typeface="+mn-lt"/>
-              <a:ea typeface="+mn-ea"/>
-              <a:cs typeface="+mn-cs"/>
-            </a:endParaRPr>
-          </a:p>
-        </p:txBody>
-      </p:sp>
-      <p:sp>
-        <p:nvSpPr>
-          <p:cNvPr id="9" name="Slide Number Placeholder 12"/>
-          <p:cNvSpPr txBox="1">
-            <a:spLocks noGrp="1"/>
-          </p:cNvSpPr>
-          <p:nvPr/>
-        </p:nvSpPr>
-        <p:spPr>
-          <a:xfrm>
-            <a:off x="4134600" y="9110880"/>
-            <a:ext cx="3169440" cy="479160"/>
-          </a:xfrm>
-          <a:prstGeom prst="rect">
-            <a:avLst/>
-          </a:prstGeom>
-          <a:noFill/>
-          <a:ln/>
-        </p:spPr>
-        <p:txBody>
-          <a:bodyPr lIns="0" tIns="0" rIns="0" bIns="0" anchor="b">
-            <a:noAutofit/>
-          </a:bodyPr>
-          <a:lstStyle/>
-          <a:p>
-            <a:pPr marL="0" marR="0" lvl="0" indent="0" algn="r" defTabSz="914400" rtl="0" eaLnBrk="1" fontAlgn="auto" latinLnBrk="0" hangingPunct="0">
-              <a:lnSpc>
-                <a:spcPct val="100000"/>
-              </a:lnSpc>
-              <a:spcBef>
-                <a:spcPts val="0"/>
-              </a:spcBef>
-              <a:spcAft>
-                <a:spcPts val="0"/>
-              </a:spcAft>
-              <a:buClrTx/>
-              <a:buSzTx/>
-              <a:buFontTx/>
-              <a:buNone/>
-              <a:tabLst>
-                <a:tab pos="0" algn="l"/>
-                <a:tab pos="914400" algn="l"/>
-                <a:tab pos="1828800" algn="l"/>
-                <a:tab pos="2743199" algn="l"/>
-                <a:tab pos="3657600" algn="l"/>
-                <a:tab pos="4572000" algn="l"/>
-                <a:tab pos="5486399" algn="l"/>
-                <a:tab pos="6400799" algn="l"/>
-                <a:tab pos="7315200" algn="l"/>
-                <a:tab pos="8229600" algn="l"/>
-                <a:tab pos="9144000" algn="l"/>
-                <a:tab pos="10058400" algn="l"/>
-              </a:tabLst>
-              <a:defRPr/>
-            </a:pPr>
-            <a:fld id="{96B9CC4E-A0E0-46F0-BD4A-28F19A04DBF5}" type="slidenum">
-              <a:rPr kumimoji="0" lang="en-US" sz="1400" b="0" i="0" u="none" strike="noStrike" kern="1200" cap="none" spc="0" normalizeH="0" baseline="0" noProof="0" smtClean="0">
-                <a:ln>
-                  <a:noFill/>
-                </a:ln>
-                <a:solidFill>
-                  <a:srgbClr val="000000"/>
-                </a:solidFill>
-                <a:effectLst/>
-                <a:uLnTx/>
-                <a:uFillTx/>
-                <a:latin typeface="Times New Roman" pitchFamily="18"/>
-                <a:ea typeface="Bitstream Vera Sans" pitchFamily="2"/>
-                <a:cs typeface="Lucidasans" pitchFamily="2"/>
-              </a:rPr>
-              <a:pPr marL="0" marR="0" lvl="0" indent="0" algn="r" defTabSz="914400" rtl="0" eaLnBrk="1" fontAlgn="auto" latinLnBrk="0" hangingPunct="0">
-                <a:lnSpc>
-                  <a:spcPct val="100000"/>
-                </a:lnSpc>
-                <a:spcBef>
-                  <a:spcPts val="0"/>
-                </a:spcBef>
-                <a:spcAft>
-                  <a:spcPts val="0"/>
-                </a:spcAft>
-                <a:buClrTx/>
-                <a:buSzTx/>
-                <a:buFontTx/>
-                <a:buNone/>
-                <a:tabLst>
-                  <a:tab pos="0" algn="l"/>
-                  <a:tab pos="914400" algn="l"/>
-                  <a:tab pos="1828800" algn="l"/>
-                  <a:tab pos="2743199" algn="l"/>
-                  <a:tab pos="3657600" algn="l"/>
-                  <a:tab pos="4572000" algn="l"/>
-                  <a:tab pos="5486399" algn="l"/>
-                  <a:tab pos="6400799" algn="l"/>
-                  <a:tab pos="7315200" algn="l"/>
-                  <a:tab pos="8229600" algn="l"/>
-                  <a:tab pos="9144000" algn="l"/>
-                  <a:tab pos="10058400" algn="l"/>
-                </a:tabLst>
-                <a:defRPr/>
-              </a:pPr>
-              <a:t>36</a:t>
-            </a:fld>
-            <a:endParaRPr kumimoji="0" lang="en-US" sz="1400" b="0" i="0" u="none" strike="noStrike" kern="1200" cap="none" spc="0" normalizeH="0" baseline="0" noProof="0">
-              <a:ln>
-                <a:noFill/>
-              </a:ln>
-              <a:solidFill>
-                <a:srgbClr val="000000"/>
-              </a:solidFill>
-              <a:effectLst/>
-              <a:uLnTx/>
-              <a:uFillTx/>
-              <a:latin typeface="Times New Roman" pitchFamily="18"/>
-              <a:ea typeface="Bitstream Vera Sans" pitchFamily="2"/>
-              <a:cs typeface="Lucidasans" pitchFamily="2"/>
-            </a:endParaRPr>
-          </a:p>
-        </p:txBody>
-      </p:sp>
-      <p:sp>
-        <p:nvSpPr>
-          <p:cNvPr id="11" name="Slide Number Placeholder 6"/>
-          <p:cNvSpPr txBox="1">
-            <a:spLocks noGrp="1"/>
-          </p:cNvSpPr>
-          <p:nvPr/>
-        </p:nvSpPr>
-        <p:spPr>
-          <a:xfrm>
-            <a:off x="4134600" y="9110880"/>
-            <a:ext cx="3169440" cy="479160"/>
-          </a:xfrm>
-          <a:prstGeom prst="rect">
-            <a:avLst/>
-          </a:prstGeom>
-          <a:noFill/>
-          <a:ln/>
-        </p:spPr>
-        <p:txBody>
-          <a:bodyPr vert="horz" lIns="91440" tIns="45720" rIns="91440" bIns="45720" rtlCol="0" anchor="b">
-            <a:noAutofit/>
-          </a:bodyPr>
-          <a:lstStyle/>
-          <a:p>
-            <a:pPr marL="0" marR="0" lvl="0" indent="0" algn="r" defTabSz="914400" rtl="0" eaLnBrk="1" fontAlgn="auto" latinLnBrk="0" hangingPunct="0">
-              <a:lnSpc>
-                <a:spcPct val="100000"/>
-              </a:lnSpc>
-              <a:spcBef>
-                <a:spcPts val="0"/>
-              </a:spcBef>
-              <a:spcAft>
-                <a:spcPts val="0"/>
-              </a:spcAft>
-              <a:buClrTx/>
-              <a:buSzTx/>
-              <a:buFontTx/>
-              <a:buNone/>
-              <a:tabLst>
-                <a:tab pos="0" algn="l"/>
-                <a:tab pos="914400" algn="l"/>
-                <a:tab pos="1828800" algn="l"/>
-                <a:tab pos="2743199" algn="l"/>
-                <a:tab pos="3657600" algn="l"/>
-                <a:tab pos="4572000" algn="l"/>
-                <a:tab pos="5486399" algn="l"/>
-                <a:tab pos="6400799" algn="l"/>
-                <a:tab pos="7315200" algn="l"/>
-                <a:tab pos="8229600" algn="l"/>
-                <a:tab pos="9144000" algn="l"/>
-                <a:tab pos="10058400" algn="l"/>
-              </a:tabLst>
-              <a:defRPr/>
-            </a:pPr>
-            <a:fld id="{02F6B012-0BD7-4A6F-8BD3-F9D4F5FFC1E4}" type="slidenum">
-              <a:rPr kumimoji="0" lang="en-US" sz="1400" b="0" i="0" u="none" strike="noStrike" kern="1200" cap="none" spc="0" normalizeH="0" baseline="0" noProof="0" smtClean="0">
-                <a:ln>
-                  <a:noFill/>
-                </a:ln>
-                <a:solidFill>
-                  <a:srgbClr val="000000"/>
-                </a:solidFill>
-                <a:effectLst/>
-                <a:uLnTx/>
-                <a:uFillTx/>
-                <a:latin typeface="Times New Roman" pitchFamily="18"/>
-                <a:ea typeface="Bitstream Vera Sans" pitchFamily="2"/>
-                <a:cs typeface="Lucidasans" pitchFamily="2"/>
-              </a:rPr>
-              <a:pPr marL="0" marR="0" lvl="0" indent="0" algn="r" defTabSz="914400" rtl="0" eaLnBrk="1" fontAlgn="auto" latinLnBrk="0" hangingPunct="0">
-                <a:lnSpc>
-                  <a:spcPct val="100000"/>
-                </a:lnSpc>
-                <a:spcBef>
-                  <a:spcPts val="0"/>
-                </a:spcBef>
-                <a:spcAft>
-                  <a:spcPts val="0"/>
-                </a:spcAft>
-                <a:buClrTx/>
-                <a:buSzTx/>
-                <a:buFontTx/>
-                <a:buNone/>
-                <a:tabLst>
-                  <a:tab pos="0" algn="l"/>
-                  <a:tab pos="914400" algn="l"/>
-                  <a:tab pos="1828800" algn="l"/>
-                  <a:tab pos="2743199" algn="l"/>
-                  <a:tab pos="3657600" algn="l"/>
-                  <a:tab pos="4572000" algn="l"/>
-                  <a:tab pos="5486399" algn="l"/>
-                  <a:tab pos="6400799" algn="l"/>
-                  <a:tab pos="7315200" algn="l"/>
-                  <a:tab pos="8229600" algn="l"/>
-                  <a:tab pos="9144000" algn="l"/>
-                  <a:tab pos="10058400" algn="l"/>
-                </a:tabLst>
-                <a:defRPr/>
-              </a:pPr>
-              <a:t>36</a:t>
-            </a:fld>
-            <a:endParaRPr kumimoji="0" lang="en-US" sz="1400" b="0" i="0" u="none" strike="noStrike" kern="1200" cap="none" spc="0" normalizeH="0" baseline="0" noProof="0">
-              <a:ln>
-                <a:noFill/>
-              </a:ln>
-              <a:solidFill>
-                <a:srgbClr val="000000"/>
-              </a:solidFill>
-              <a:effectLst/>
-              <a:uLnTx/>
-              <a:uFillTx/>
-              <a:latin typeface="Times New Roman" pitchFamily="18"/>
-              <a:ea typeface="Bitstream Vera Sans" pitchFamily="2"/>
-              <a:cs typeface="Lucidasans" pitchFamily="2"/>
-            </a:endParaRPr>
-          </a:p>
-        </p:txBody>
-      </p:sp>
-      <p:sp>
-        <p:nvSpPr>
-          <p:cNvPr id="2" name="Slide Image Placeholder 1"/>
-          <p:cNvSpPr>
-            <a:spLocks noGrp="1" noRot="1" noChangeAspect="1" noResize="1"/>
-          </p:cNvSpPr>
-          <p:nvPr>
-            <p:ph type="sldImg"/>
-          </p:nvPr>
-        </p:nvSpPr>
-        <p:spPr>
-          <a:xfrm>
-            <a:off x="1254125" y="728663"/>
-            <a:ext cx="4795838" cy="3595687"/>
-          </a:xfrm>
-          <a:solidFill>
-            <a:schemeClr val="accent1"/>
-          </a:solidFill>
-          <a:ln w="25400">
-            <a:solidFill>
-              <a:schemeClr val="accent1">
-                <a:shade val="50000"/>
-              </a:schemeClr>
-            </a:solidFill>
-            <a:prstDash val="solid"/>
-          </a:ln>
-        </p:spPr>
-      </p:sp>
-      <p:sp>
-        <p:nvSpPr>
-          <p:cNvPr id="3" name="Notes Placeholder 2"/>
-          <p:cNvSpPr txBox="1">
-            <a:spLocks noGrp="1"/>
-          </p:cNvSpPr>
-          <p:nvPr>
-            <p:ph type="body" sz="quarter" idx="1"/>
-          </p:nvPr>
-        </p:nvSpPr>
-        <p:spPr>
-          <a:xfrm>
-            <a:off x="730440" y="4555440"/>
-            <a:ext cx="5843160" cy="4315320"/>
-          </a:xfrm>
-          <a:noFill/>
-          <a:ln>
-            <a:noFill/>
-          </a:ln>
-        </p:spPr>
-        <p:txBody>
-          <a:bodyPr lIns="0" tIns="0" rIns="0" bIns="0"/>
-          <a:lstStyle/>
-          <a:p>
-            <a:endParaRPr lang="en-US"/>
-          </a:p>
-        </p:txBody>
-      </p:sp>
-    </p:spTree>
-  </p:cSld>
-  <p:clrMapOvr>
-    <a:masterClrMapping/>
-  </p:clrMapOvr>
-</p:notes>
-</file>
-
-<file path=ppt/notesSlides/notesSlide33.xml><?xml version="1.0" encoding="utf-8"?>
-<p:notes xmlns:a="http://schemas.openxmlformats.org/drawingml/2006/main" xmlns:r="http://schemas.openxmlformats.org/officeDocument/2006/relationships" xmlns:p="http://schemas.openxmlformats.org/presentationml/2006/main">
-  <p:cSld>
-    <p:spTree>
-      <p:nvGrpSpPr>
-        <p:cNvPr id="1" name=""/>
-        <p:cNvGrpSpPr/>
-        <p:nvPr/>
-      </p:nvGrpSpPr>
-      <p:grpSpPr>
-        <a:xfrm>
-          <a:off x="0" y="0"/>
-          <a:ext cx="0" cy="0"/>
-          <a:chOff x="0" y="0"/>
-          <a:chExt cx="0" cy="0"/>
-        </a:xfrm>
-      </p:grpSpPr>
-      <p:sp>
-        <p:nvSpPr>
-          <p:cNvPr id="5" name="Date Placeholder 2"/>
-          <p:cNvSpPr txBox="1">
-            <a:spLocks noGrp="1"/>
-          </p:cNvSpPr>
-          <p:nvPr/>
-        </p:nvSpPr>
-        <p:spPr>
-          <a:xfrm>
-            <a:off x="4137025" y="0"/>
-            <a:ext cx="3165475" cy="481013"/>
-          </a:xfrm>
-          <a:prstGeom prst="rect">
-            <a:avLst/>
-          </a:prstGeom>
-          <a:noFill/>
-        </p:spPr>
-        <p:txBody>
-          <a:bodyPr vert="horz" lIns="91440" tIns="45720" rIns="91440" bIns="45720" rtlCol="0"/>
-          <a:lstStyle/>
-          <a:p>
-            <a:pPr marL="0" marR="0" lvl="0" indent="0" algn="r" defTabSz="914400" rtl="0" eaLnBrk="1" fontAlgn="auto" latinLnBrk="0" hangingPunct="1">
-              <a:lnSpc>
-                <a:spcPct val="100000"/>
-              </a:lnSpc>
-              <a:spcBef>
-                <a:spcPts val="0"/>
-              </a:spcBef>
-              <a:spcAft>
-                <a:spcPts val="0"/>
-              </a:spcAft>
-              <a:buClrTx/>
-              <a:buSzTx/>
-              <a:buFontTx/>
-              <a:buNone/>
-              <a:tabLst/>
-              <a:defRPr/>
-            </a:pPr>
-            <a:fld id="{7AB9731E-17D4-455B-8CEF-653BE9B92AC2}" type="datetimeFigureOut">
-              <a:rPr kumimoji="0" lang="en-US" sz="1200" b="0" i="0" u="none" strike="noStrike" kern="1200" cap="none" spc="0" normalizeH="0" baseline="0" noProof="0" smtClean="0">
-                <a:ln>
-                  <a:noFill/>
-                </a:ln>
-                <a:solidFill>
-                  <a:schemeClr val="tx1"/>
-                </a:solidFill>
-                <a:effectLst/>
-                <a:uLnTx/>
-                <a:uFillTx/>
-                <a:latin typeface="+mn-lt"/>
-                <a:ea typeface="+mn-ea"/>
-                <a:cs typeface="+mn-cs"/>
-              </a:rPr>
-              <a:pPr marL="0" marR="0" lvl="0" indent="0" algn="r" defTabSz="914400" rtl="0" eaLnBrk="1" fontAlgn="auto" latinLnBrk="0" hangingPunct="1">
-                <a:lnSpc>
-                  <a:spcPct val="100000"/>
-                </a:lnSpc>
-                <a:spcBef>
-                  <a:spcPts val="0"/>
-                </a:spcBef>
-                <a:spcAft>
-                  <a:spcPts val="0"/>
-                </a:spcAft>
-                <a:buClrTx/>
-                <a:buSzTx/>
-                <a:buFontTx/>
-                <a:buNone/>
-                <a:tabLst/>
-                <a:defRPr/>
-              </a:pPr>
-              <a:t>3/25/2025</a:t>
-            </a:fld>
-            <a:endParaRPr kumimoji="0" lang="en-US" sz="1200" b="0" i="0" u="none" strike="noStrike" kern="1200" cap="none" spc="0" normalizeH="0" baseline="0" noProof="0">
-              <a:ln>
-                <a:noFill/>
-              </a:ln>
-              <a:solidFill>
-                <a:schemeClr val="tx1"/>
-              </a:solidFill>
-              <a:effectLst/>
-              <a:uLnTx/>
-              <a:uFillTx/>
-              <a:latin typeface="+mn-lt"/>
-              <a:ea typeface="+mn-ea"/>
-              <a:cs typeface="+mn-cs"/>
-            </a:endParaRPr>
-          </a:p>
-        </p:txBody>
-      </p:sp>
-      <p:sp>
-        <p:nvSpPr>
-          <p:cNvPr id="9" name="Slide Number Placeholder 12"/>
-          <p:cNvSpPr txBox="1">
-            <a:spLocks noGrp="1"/>
-          </p:cNvSpPr>
-          <p:nvPr/>
-        </p:nvSpPr>
-        <p:spPr>
-          <a:xfrm>
-            <a:off x="4134600" y="9110880"/>
-            <a:ext cx="3169440" cy="479160"/>
-          </a:xfrm>
-          <a:prstGeom prst="rect">
-            <a:avLst/>
-          </a:prstGeom>
-          <a:noFill/>
-          <a:ln/>
-        </p:spPr>
-        <p:txBody>
-          <a:bodyPr lIns="0" tIns="0" rIns="0" bIns="0" anchor="b">
-            <a:noAutofit/>
-          </a:bodyPr>
-          <a:lstStyle/>
-          <a:p>
-            <a:pPr marL="0" marR="0" lvl="0" indent="0" algn="r" defTabSz="914400" rtl="0" eaLnBrk="1" fontAlgn="auto" latinLnBrk="0" hangingPunct="0">
-              <a:lnSpc>
-                <a:spcPct val="100000"/>
-              </a:lnSpc>
-              <a:spcBef>
-                <a:spcPts val="0"/>
-              </a:spcBef>
-              <a:spcAft>
-                <a:spcPts val="0"/>
-              </a:spcAft>
-              <a:buClrTx/>
-              <a:buSzTx/>
-              <a:buFontTx/>
-              <a:buNone/>
-              <a:tabLst>
-                <a:tab pos="0" algn="l"/>
-                <a:tab pos="914400" algn="l"/>
-                <a:tab pos="1828800" algn="l"/>
-                <a:tab pos="2743199" algn="l"/>
-                <a:tab pos="3657600" algn="l"/>
-                <a:tab pos="4572000" algn="l"/>
-                <a:tab pos="5486399" algn="l"/>
-                <a:tab pos="6400799" algn="l"/>
-                <a:tab pos="7315200" algn="l"/>
-                <a:tab pos="8229600" algn="l"/>
-                <a:tab pos="9144000" algn="l"/>
-                <a:tab pos="10058400" algn="l"/>
-              </a:tabLst>
-              <a:defRPr/>
-            </a:pPr>
-            <a:fld id="{D279A442-77E9-45E9-8D46-35556E2335E6}" type="slidenum">
-              <a:rPr kumimoji="0" lang="en-US" sz="1400" b="0" i="0" u="none" strike="noStrike" kern="1200" cap="none" spc="0" normalizeH="0" baseline="0" noProof="0" smtClean="0">
-                <a:ln>
-                  <a:noFill/>
-                </a:ln>
-                <a:solidFill>
-                  <a:srgbClr val="000000"/>
-                </a:solidFill>
-                <a:effectLst/>
-                <a:uLnTx/>
-                <a:uFillTx/>
-                <a:latin typeface="Times New Roman" pitchFamily="18"/>
-                <a:ea typeface="Bitstream Vera Sans" pitchFamily="2"/>
-                <a:cs typeface="Lucidasans" pitchFamily="2"/>
-              </a:rPr>
-              <a:pPr marL="0" marR="0" lvl="0" indent="0" algn="r" defTabSz="914400" rtl="0" eaLnBrk="1" fontAlgn="auto" latinLnBrk="0" hangingPunct="0">
-                <a:lnSpc>
-                  <a:spcPct val="100000"/>
-                </a:lnSpc>
-                <a:spcBef>
-                  <a:spcPts val="0"/>
-                </a:spcBef>
-                <a:spcAft>
-                  <a:spcPts val="0"/>
-                </a:spcAft>
-                <a:buClrTx/>
-                <a:buSzTx/>
-                <a:buFontTx/>
-                <a:buNone/>
-                <a:tabLst>
-                  <a:tab pos="0" algn="l"/>
-                  <a:tab pos="914400" algn="l"/>
-                  <a:tab pos="1828800" algn="l"/>
-                  <a:tab pos="2743199" algn="l"/>
-                  <a:tab pos="3657600" algn="l"/>
-                  <a:tab pos="4572000" algn="l"/>
-                  <a:tab pos="5486399" algn="l"/>
-                  <a:tab pos="6400799" algn="l"/>
-                  <a:tab pos="7315200" algn="l"/>
-                  <a:tab pos="8229600" algn="l"/>
-                  <a:tab pos="9144000" algn="l"/>
-                  <a:tab pos="10058400" algn="l"/>
-                </a:tabLst>
-                <a:defRPr/>
-              </a:pPr>
-              <a:t>37</a:t>
-            </a:fld>
-            <a:endParaRPr kumimoji="0" lang="en-US" sz="1400" b="0" i="0" u="none" strike="noStrike" kern="1200" cap="none" spc="0" normalizeH="0" baseline="0" noProof="0">
-              <a:ln>
-                <a:noFill/>
-              </a:ln>
-              <a:solidFill>
-                <a:srgbClr val="000000"/>
-              </a:solidFill>
-              <a:effectLst/>
-              <a:uLnTx/>
-              <a:uFillTx/>
-              <a:latin typeface="Times New Roman" pitchFamily="18"/>
-              <a:ea typeface="Bitstream Vera Sans" pitchFamily="2"/>
-              <a:cs typeface="Lucidasans" pitchFamily="2"/>
-            </a:endParaRPr>
-          </a:p>
-        </p:txBody>
-      </p:sp>
-      <p:sp>
-        <p:nvSpPr>
-          <p:cNvPr id="11" name="Slide Number Placeholder 6"/>
-          <p:cNvSpPr txBox="1">
-            <a:spLocks noGrp="1"/>
-          </p:cNvSpPr>
-          <p:nvPr/>
-        </p:nvSpPr>
-        <p:spPr>
-          <a:xfrm>
-            <a:off x="4134600" y="9110880"/>
-            <a:ext cx="3169440" cy="479160"/>
-          </a:xfrm>
-          <a:prstGeom prst="rect">
-            <a:avLst/>
-          </a:prstGeom>
-          <a:noFill/>
-          <a:ln/>
-        </p:spPr>
-        <p:txBody>
-          <a:bodyPr vert="horz" lIns="91440" tIns="45720" rIns="91440" bIns="45720" rtlCol="0" anchor="b">
-            <a:noAutofit/>
-          </a:bodyPr>
-          <a:lstStyle/>
-          <a:p>
-            <a:pPr marL="0" marR="0" lvl="0" indent="0" algn="r" defTabSz="914400" rtl="0" eaLnBrk="1" fontAlgn="auto" latinLnBrk="0" hangingPunct="0">
-              <a:lnSpc>
-                <a:spcPct val="100000"/>
-              </a:lnSpc>
-              <a:spcBef>
-                <a:spcPts val="0"/>
-              </a:spcBef>
-              <a:spcAft>
-                <a:spcPts val="0"/>
-              </a:spcAft>
-              <a:buClrTx/>
-              <a:buSzTx/>
-              <a:buFontTx/>
-              <a:buNone/>
-              <a:tabLst>
-                <a:tab pos="0" algn="l"/>
-                <a:tab pos="914400" algn="l"/>
-                <a:tab pos="1828800" algn="l"/>
-                <a:tab pos="2743199" algn="l"/>
-                <a:tab pos="3657600" algn="l"/>
-                <a:tab pos="4572000" algn="l"/>
-                <a:tab pos="5486399" algn="l"/>
-                <a:tab pos="6400799" algn="l"/>
-                <a:tab pos="7315200" algn="l"/>
-                <a:tab pos="8229600" algn="l"/>
-                <a:tab pos="9144000" algn="l"/>
-                <a:tab pos="10058400" algn="l"/>
-              </a:tabLst>
-              <a:defRPr/>
-            </a:pPr>
-            <a:fld id="{0E0C5F12-54CB-427F-B722-4FCDF61A76B3}" type="slidenum">
-              <a:rPr kumimoji="0" lang="en-US" sz="1400" b="0" i="0" u="none" strike="noStrike" kern="1200" cap="none" spc="0" normalizeH="0" baseline="0" noProof="0" smtClean="0">
-                <a:ln>
-                  <a:noFill/>
-                </a:ln>
-                <a:solidFill>
-                  <a:srgbClr val="000000"/>
-                </a:solidFill>
-                <a:effectLst/>
-                <a:uLnTx/>
-                <a:uFillTx/>
-                <a:latin typeface="Times New Roman" pitchFamily="18"/>
-                <a:ea typeface="Bitstream Vera Sans" pitchFamily="2"/>
-                <a:cs typeface="Lucidasans" pitchFamily="2"/>
-              </a:rPr>
-              <a:pPr marL="0" marR="0" lvl="0" indent="0" algn="r" defTabSz="914400" rtl="0" eaLnBrk="1" fontAlgn="auto" latinLnBrk="0" hangingPunct="0">
-                <a:lnSpc>
-                  <a:spcPct val="100000"/>
-                </a:lnSpc>
-                <a:spcBef>
-                  <a:spcPts val="0"/>
-                </a:spcBef>
-                <a:spcAft>
-                  <a:spcPts val="0"/>
-                </a:spcAft>
-                <a:buClrTx/>
-                <a:buSzTx/>
-                <a:buFontTx/>
-                <a:buNone/>
-                <a:tabLst>
-                  <a:tab pos="0" algn="l"/>
-                  <a:tab pos="914400" algn="l"/>
-                  <a:tab pos="1828800" algn="l"/>
-                  <a:tab pos="2743199" algn="l"/>
-                  <a:tab pos="3657600" algn="l"/>
-                  <a:tab pos="4572000" algn="l"/>
-                  <a:tab pos="5486399" algn="l"/>
-                  <a:tab pos="6400799" algn="l"/>
-                  <a:tab pos="7315200" algn="l"/>
-                  <a:tab pos="8229600" algn="l"/>
-                  <a:tab pos="9144000" algn="l"/>
-                  <a:tab pos="10058400" algn="l"/>
-                </a:tabLst>
-                <a:defRPr/>
-              </a:pPr>
-              <a:t>37</a:t>
-            </a:fld>
-            <a:endParaRPr kumimoji="0" lang="en-US" sz="1400" b="0" i="0" u="none" strike="noStrike" kern="1200" cap="none" spc="0" normalizeH="0" baseline="0" noProof="0">
-              <a:ln>
-                <a:noFill/>
-              </a:ln>
-              <a:solidFill>
-                <a:srgbClr val="000000"/>
-              </a:solidFill>
-              <a:effectLst/>
-              <a:uLnTx/>
-              <a:uFillTx/>
-              <a:latin typeface="Times New Roman" pitchFamily="18"/>
-              <a:ea typeface="Bitstream Vera Sans" pitchFamily="2"/>
-              <a:cs typeface="Lucidasans" pitchFamily="2"/>
-            </a:endParaRPr>
-          </a:p>
-        </p:txBody>
-      </p:sp>
-      <p:sp>
-        <p:nvSpPr>
-          <p:cNvPr id="2" name="Slide Image Placeholder 1"/>
-          <p:cNvSpPr>
-            <a:spLocks noGrp="1" noRot="1" noChangeAspect="1" noResize="1"/>
-          </p:cNvSpPr>
-          <p:nvPr>
-            <p:ph type="sldImg"/>
-          </p:nvPr>
-        </p:nvSpPr>
-        <p:spPr>
-          <a:xfrm>
-            <a:off x="1254125" y="728663"/>
-            <a:ext cx="4795838" cy="3595687"/>
-          </a:xfrm>
-          <a:solidFill>
-            <a:schemeClr val="accent1"/>
-          </a:solidFill>
-          <a:ln w="25400">
-            <a:solidFill>
-              <a:schemeClr val="accent1">
-                <a:shade val="50000"/>
-              </a:schemeClr>
-            </a:solidFill>
-            <a:prstDash val="solid"/>
-          </a:ln>
-        </p:spPr>
-      </p:sp>
-      <p:sp>
-        <p:nvSpPr>
-          <p:cNvPr id="3" name="Notes Placeholder 2"/>
-          <p:cNvSpPr txBox="1">
-            <a:spLocks noGrp="1"/>
-          </p:cNvSpPr>
-          <p:nvPr>
-            <p:ph type="body" sz="quarter" idx="1"/>
-          </p:nvPr>
-        </p:nvSpPr>
-        <p:spPr>
-          <a:xfrm>
-            <a:off x="730440" y="4555440"/>
-            <a:ext cx="5843160" cy="4315320"/>
-          </a:xfrm>
-          <a:noFill/>
-          <a:ln>
-            <a:noFill/>
-          </a:ln>
-        </p:spPr>
-        <p:txBody>
-          <a:bodyPr lIns="0" tIns="0" rIns="0" bIns="0"/>
-          <a:lstStyle/>
-          <a:p>
-            <a:endParaRPr lang="en-US"/>
-          </a:p>
-        </p:txBody>
-      </p:sp>
-    </p:spTree>
-  </p:cSld>
-  <p:clrMapOvr>
-    <a:masterClrMapping/>
-  </p:clrMapOvr>
-</p:notes>
-</file>
-
-<file path=ppt/notesSlides/notesSlide4.xml><?xml version="1.0" encoding="utf-8"?>
-<p:notes xmlns:a="http://schemas.openxmlformats.org/drawingml/2006/main" xmlns:r="http://schemas.openxmlformats.org/officeDocument/2006/relationships" xmlns:p="http://schemas.openxmlformats.org/presentationml/2006/main">
-  <p:cSld>
-    <p:spTree>
-      <p:nvGrpSpPr>
-        <p:cNvPr id="1" name=""/>
-        <p:cNvGrpSpPr/>
-        <p:nvPr/>
-      </p:nvGrpSpPr>
-      <p:grpSpPr>
-        <a:xfrm>
-          <a:off x="0" y="0"/>
-          <a:ext cx="0" cy="0"/>
-          <a:chOff x="0" y="0"/>
-          <a:chExt cx="0" cy="0"/>
-        </a:xfrm>
-      </p:grpSpPr>
-      <p:sp>
-        <p:nvSpPr>
-          <p:cNvPr id="5" name="Date Placeholder 2"/>
-          <p:cNvSpPr txBox="1">
-            <a:spLocks noGrp="1"/>
-          </p:cNvSpPr>
-          <p:nvPr/>
-        </p:nvSpPr>
-        <p:spPr>
-          <a:xfrm>
-            <a:off x="4137025" y="0"/>
-            <a:ext cx="3165475" cy="481013"/>
-          </a:xfrm>
-          <a:prstGeom prst="rect">
-            <a:avLst/>
-          </a:prstGeom>
-          <a:noFill/>
-        </p:spPr>
-        <p:txBody>
-          <a:bodyPr vert="horz" lIns="91440" tIns="45720" rIns="91440" bIns="45720" rtlCol="0"/>
-          <a:lstStyle/>
-          <a:p>
-            <a:pPr marL="0" marR="0" lvl="0" indent="0" algn="r" defTabSz="914400" rtl="0" eaLnBrk="1" fontAlgn="auto" latinLnBrk="0" hangingPunct="1">
-              <a:lnSpc>
-                <a:spcPct val="100000"/>
-              </a:lnSpc>
-              <a:spcBef>
-                <a:spcPts val="0"/>
-              </a:spcBef>
-              <a:spcAft>
-                <a:spcPts val="0"/>
-              </a:spcAft>
-              <a:buClrTx/>
-              <a:buSzTx/>
-              <a:buFontTx/>
-              <a:buNone/>
-              <a:tabLst/>
-              <a:defRPr/>
-            </a:pPr>
-            <a:fld id="{7AB9731E-17D4-455B-8CEF-653BE9B92AC2}" type="datetimeFigureOut">
-              <a:rPr kumimoji="0" lang="en-US" sz="1200" b="0" i="0" u="none" strike="noStrike" kern="1200" cap="none" spc="0" normalizeH="0" baseline="0" noProof="0" smtClean="0">
-                <a:ln>
-                  <a:noFill/>
-                </a:ln>
-                <a:solidFill>
-                  <a:schemeClr val="tx1"/>
-                </a:solidFill>
-                <a:effectLst/>
-                <a:uLnTx/>
-                <a:uFillTx/>
-                <a:latin typeface="+mn-lt"/>
-                <a:ea typeface="+mn-ea"/>
-                <a:cs typeface="+mn-cs"/>
-              </a:rPr>
-              <a:pPr marL="0" marR="0" lvl="0" indent="0" algn="r" defTabSz="914400" rtl="0" eaLnBrk="1" fontAlgn="auto" latinLnBrk="0" hangingPunct="1">
-                <a:lnSpc>
-                  <a:spcPct val="100000"/>
-                </a:lnSpc>
-                <a:spcBef>
-                  <a:spcPts val="0"/>
-                </a:spcBef>
-                <a:spcAft>
-                  <a:spcPts val="0"/>
-                </a:spcAft>
-                <a:buClrTx/>
-                <a:buSzTx/>
-                <a:buFontTx/>
-                <a:buNone/>
-                <a:tabLst/>
-                <a:defRPr/>
-              </a:pPr>
-              <a:t>3/25/2025</a:t>
+              <a:t>3/9/2026</a:t>
             </a:fld>
             <a:endParaRPr kumimoji="0" lang="en-US" sz="1200" b="0" i="0" u="none" strike="noStrike" kern="1200" cap="none" spc="0" normalizeH="0" baseline="0" noProof="0">
               <a:ln>
@@ -12551,7 +10911,7 @@
                 <a:tabLst/>
                 <a:defRPr/>
               </a:pPr>
-              <a:t>3/25/2025</a:t>
+              <a:t>3/9/2026</a:t>
             </a:fld>
             <a:endParaRPr kumimoji="0" lang="en-US" sz="1200" b="0" i="0" u="none" strike="noStrike" kern="1200" cap="none" spc="0" normalizeH="0" baseline="0" noProof="0">
               <a:ln>
@@ -12960,7 +11320,7 @@
                 <a:tabLst/>
                 <a:defRPr/>
               </a:pPr>
-              <a:t>3/25/2025</a:t>
+              <a:t>3/9/2026</a:t>
             </a:fld>
             <a:endParaRPr kumimoji="0" lang="en-US" sz="1200" b="0" i="0" u="none" strike="noStrike" kern="1200" cap="none" spc="0" normalizeH="0" baseline="0" noProof="0">
               <a:ln>
@@ -13369,7 +11729,7 @@
                 <a:tabLst/>
                 <a:defRPr/>
               </a:pPr>
-              <a:t>3/25/2025</a:t>
+              <a:t>3/9/2026</a:t>
             </a:fld>
             <a:endParaRPr kumimoji="0" lang="en-US" sz="1200" b="0" i="0" u="none" strike="noStrike" kern="1200" cap="none" spc="0" normalizeH="0" baseline="0" noProof="0">
               <a:ln>
@@ -13778,7 +12138,7 @@
                 <a:tabLst/>
                 <a:defRPr/>
               </a:pPr>
-              <a:t>3/25/2025</a:t>
+              <a:t>3/9/2026</a:t>
             </a:fld>
             <a:endParaRPr kumimoji="0" lang="en-US" sz="1200" b="0" i="0" u="none" strike="noStrike" kern="1200" cap="none" spc="0" normalizeH="0" baseline="0" noProof="0">
               <a:ln>
@@ -14187,7 +12547,7 @@
                 <a:tabLst/>
                 <a:defRPr/>
               </a:pPr>
-              <a:t>3/25/2025</a:t>
+              <a:t>3/9/2026</a:t>
             </a:fld>
             <a:endParaRPr kumimoji="0" lang="en-US" sz="1200" b="0" i="0" u="none" strike="noStrike" kern="1200" cap="none" spc="0" normalizeH="0" baseline="0" noProof="0">
               <a:ln>
@@ -14645,7 +13005,7 @@
                   </a:prstClr>
                 </a:solidFill>
               </a:rPr>
-              <a:t>25/03/2025</a:t>
+              <a:t>9/03/2026</a:t>
             </a:fld>
             <a:endParaRPr lang="en-NZ">
               <a:solidFill>
@@ -14846,7 +13206,7 @@
                   </a:prstClr>
                 </a:solidFill>
               </a:rPr>
-              <a:t>25/03/2025</a:t>
+              <a:t>9/03/2026</a:t>
             </a:fld>
             <a:endParaRPr lang="en-NZ">
               <a:solidFill>
@@ -15057,7 +13417,7 @@
                   </a:prstClr>
                 </a:solidFill>
               </a:rPr>
-              <a:t>25/03/2025</a:t>
+              <a:t>9/03/2026</a:t>
             </a:fld>
             <a:endParaRPr lang="en-NZ">
               <a:solidFill>
@@ -15258,7 +13618,7 @@
                   </a:prstClr>
                 </a:solidFill>
               </a:rPr>
-              <a:t>25/03/2025</a:t>
+              <a:t>9/03/2026</a:t>
             </a:fld>
             <a:endParaRPr lang="en-NZ">
               <a:solidFill>
@@ -15535,7 +13895,7 @@
                   </a:prstClr>
                 </a:solidFill>
               </a:rPr>
-              <a:t>25/03/2025</a:t>
+              <a:t>9/03/2026</a:t>
             </a:fld>
             <a:endParaRPr lang="en-NZ">
               <a:solidFill>
@@ -15798,7 +14158,7 @@
                   </a:prstClr>
                 </a:solidFill>
               </a:rPr>
-              <a:t>25/03/2025</a:t>
+              <a:t>9/03/2026</a:t>
             </a:fld>
             <a:endParaRPr lang="en-NZ">
               <a:solidFill>
@@ -16196,7 +14556,7 @@
                   </a:prstClr>
                 </a:solidFill>
               </a:rPr>
-              <a:t>25/03/2025</a:t>
+              <a:t>9/03/2026</a:t>
             </a:fld>
             <a:endParaRPr lang="en-NZ">
               <a:solidFill>
@@ -16345,7 +14705,7 @@
                   </a:prstClr>
                 </a:solidFill>
               </a:rPr>
-              <a:t>25/03/2025</a:t>
+              <a:t>9/03/2026</a:t>
             </a:fld>
             <a:endParaRPr lang="en-NZ">
               <a:solidFill>
@@ -16471,7 +14831,7 @@
                   </a:prstClr>
                 </a:solidFill>
               </a:rPr>
-              <a:t>25/03/2025</a:t>
+              <a:t>9/03/2026</a:t>
             </a:fld>
             <a:endParaRPr lang="en-NZ">
               <a:solidFill>
@@ -16779,7 +15139,7 @@
                   </a:prstClr>
                 </a:solidFill>
               </a:rPr>
-              <a:t>25/03/2025</a:t>
+              <a:t>9/03/2026</a:t>
             </a:fld>
             <a:endParaRPr lang="en-NZ">
               <a:solidFill>
@@ -17063,7 +15423,7 @@
                   </a:prstClr>
                 </a:solidFill>
               </a:rPr>
-              <a:t>25/03/2025</a:t>
+              <a:t>9/03/2026</a:t>
             </a:fld>
             <a:endParaRPr lang="en-NZ">
               <a:solidFill>
@@ -17307,7 +15667,7 @@
                   </a:prstClr>
                 </a:solidFill>
               </a:rPr>
-              <a:t>25/03/2025</a:t>
+              <a:t>9/03/2026</a:t>
             </a:fld>
             <a:endParaRPr lang="en-NZ">
               <a:solidFill>
@@ -20462,13 +18822,12 @@
             </a:r>
           </a:p>
           <a:p>
-            <a:pPr marL="457200" lvl="0" indent="-457200">
+            <a:pPr marL="0" lvl="0" indent="0">
               <a:spcBef>
                 <a:spcPts val="598"/>
               </a:spcBef>
               <a:buSzPct val="100000"/>
-              <a:buFont typeface="Arial"/>
-              <a:buChar char="•"/>
+              <a:buNone/>
               <a:tabLst>
                 <a:tab pos="0" algn="l"/>
                 <a:tab pos="914400" algn="l"/>
@@ -20484,12 +18843,9 @@
                 <a:tab pos="10058400" algn="l"/>
               </a:tabLst>
             </a:pPr>
-            <a:r>
-              <a:rPr lang="en-NZ" sz="2400" dirty="0">
-                <a:ea typeface="Gothic" pitchFamily="2"/>
-              </a:rPr>
-              <a:t>Calibrating class probabilities</a:t>
-            </a:r>
+            <a:endParaRPr lang="en-NZ" sz="2400" dirty="0">
+              <a:ea typeface="Gothic" pitchFamily="2"/>
+            </a:endParaRPr>
           </a:p>
         </p:txBody>
       </p:sp>
@@ -20704,12 +19060,12 @@
           <a:graphicData uri="http://schemas.openxmlformats.org/presentationml/2006/ole">
             <mc:AlternateContent xmlns:mc="http://schemas.openxmlformats.org/markup-compatibility/2006">
               <mc:Choice xmlns:v="urn:schemas-microsoft-com:vml" Requires="v">
-                <p:oleObj spid="_x0000_s2051" name="Equation" r:id="rId3" imgW="1257300" imgH="203200" progId="Equation.3">
+                <p:oleObj name="Equation" r:id="rId2" imgW="1257300" imgH="203200" progId="Equation.3">
                   <p:embed/>
                 </p:oleObj>
               </mc:Choice>
               <mc:Fallback>
-                <p:oleObj name="Equation" r:id="rId3" imgW="1257300" imgH="203200" progId="Equation.3">
+                <p:oleObj name="Equation" r:id="rId2" imgW="1257300" imgH="203200" progId="Equation.3">
                   <p:embed/>
                   <p:pic>
                     <p:nvPicPr>
@@ -20718,7 +19074,7 @@
                       <p:nvPr/>
                     </p:nvPicPr>
                     <p:blipFill>
-                      <a:blip r:embed="rId4"/>
+                      <a:blip r:embed="rId3"/>
                       <a:stretch>
                         <a:fillRect/>
                       </a:stretch>
@@ -21109,12 +19465,12 @@
           <a:graphicData uri="http://schemas.openxmlformats.org/presentationml/2006/ole">
             <mc:AlternateContent xmlns:mc="http://schemas.openxmlformats.org/markup-compatibility/2006">
               <mc:Choice xmlns:v="urn:schemas-microsoft-com:vml" Requires="v">
-                <p:oleObj spid="_x0000_s3075" name="Equation" r:id="rId3" imgW="1625600" imgH="279400" progId="Equation.3">
+                <p:oleObj name="Equation" r:id="rId2" imgW="1625600" imgH="279400" progId="Equation.3">
                   <p:embed/>
                 </p:oleObj>
               </mc:Choice>
               <mc:Fallback>
-                <p:oleObj name="Equation" r:id="rId3" imgW="1625600" imgH="279400" progId="Equation.3">
+                <p:oleObj name="Equation" r:id="rId2" imgW="1625600" imgH="279400" progId="Equation.3">
                   <p:embed/>
                   <p:pic>
                     <p:nvPicPr>
@@ -21123,7 +19479,7 @@
                       <p:nvPr/>
                     </p:nvPicPr>
                     <p:blipFill>
-                      <a:blip r:embed="rId4"/>
+                      <a:blip r:embed="rId3"/>
                       <a:stretch>
                         <a:fillRect/>
                       </a:stretch>
@@ -21439,12 +19795,12 @@
           <a:graphicData uri="http://schemas.openxmlformats.org/presentationml/2006/ole">
             <mc:AlternateContent xmlns:mc="http://schemas.openxmlformats.org/markup-compatibility/2006">
               <mc:Choice xmlns:v="urn:schemas-microsoft-com:vml" Requires="v">
-                <p:oleObj spid="_x0000_s4099" name="Equation" r:id="rId4" imgW="2489200" imgH="431800" progId="Equation.3">
+                <p:oleObj name="Equation" r:id="rId3" imgW="2489200" imgH="431800" progId="Equation.3">
                   <p:embed/>
                 </p:oleObj>
               </mc:Choice>
               <mc:Fallback>
-                <p:oleObj name="Equation" r:id="rId4" imgW="2489200" imgH="431800" progId="Equation.3">
+                <p:oleObj name="Equation" r:id="rId3" imgW="2489200" imgH="431800" progId="Equation.3">
                   <p:embed/>
                   <p:pic>
                     <p:nvPicPr>
@@ -21453,7 +19809,7 @@
                       <p:nvPr/>
                     </p:nvPicPr>
                     <p:blipFill>
-                      <a:blip r:embed="rId5"/>
+                      <a:blip r:embed="rId4"/>
                       <a:stretch>
                         <a:fillRect/>
                       </a:stretch>
@@ -23575,12 +21931,12 @@
           <a:graphicData uri="http://schemas.openxmlformats.org/presentationml/2006/ole">
             <mc:AlternateContent xmlns:mc="http://schemas.openxmlformats.org/markup-compatibility/2006">
               <mc:Choice xmlns:v="urn:schemas-microsoft-com:vml" Requires="v">
-                <p:oleObj spid="_x0000_s5123" name="Equation" r:id="rId4" imgW="2451100" imgH="419100" progId="Equation.3">
+                <p:oleObj name="Equation" r:id="rId3" imgW="2451100" imgH="419100" progId="Equation.3">
                   <p:embed/>
                 </p:oleObj>
               </mc:Choice>
               <mc:Fallback>
-                <p:oleObj name="Equation" r:id="rId4" imgW="2451100" imgH="419100" progId="Equation.3">
+                <p:oleObj name="Equation" r:id="rId3" imgW="2451100" imgH="419100" progId="Equation.3">
                   <p:embed/>
                   <p:pic>
                     <p:nvPicPr>
@@ -23589,7 +21945,7 @@
                       <p:nvPr/>
                     </p:nvPicPr>
                     <p:blipFill>
-                      <a:blip r:embed="rId5"/>
+                      <a:blip r:embed="rId4"/>
                       <a:stretch>
                         <a:fillRect/>
                       </a:stretch>
@@ -23620,7 +21976,7 @@
 
 <file path=ppt/slides/slide34.xml><?xml version="1.0" encoding="utf-8"?>
 <p:sld xmlns:a="http://schemas.openxmlformats.org/drawingml/2006/main" xmlns:r="http://schemas.openxmlformats.org/officeDocument/2006/relationships" xmlns:p="http://schemas.openxmlformats.org/presentationml/2006/main">
-  <p:cSld name="page44">
+  <p:cSld>
     <p:spTree>
       <p:nvGrpSpPr>
         <p:cNvPr id="1" name=""/>
@@ -23637,7 +21993,229 @@
       </p:grpSpPr>
       <p:sp>
         <p:nvSpPr>
-          <p:cNvPr id="6" name="Slide Number Placeholder 5"/>
+          <p:cNvPr id="2" name="Title 1"/>
+          <p:cNvSpPr>
+            <a:spLocks noGrp="1"/>
+          </p:cNvSpPr>
+          <p:nvPr>
+            <p:ph type="title"/>
+          </p:nvPr>
+        </p:nvSpPr>
+        <p:spPr/>
+        <p:txBody>
+          <a:bodyPr/>
+          <a:lstStyle/>
+          <a:p>
+            <a:r>
+              <a:rPr lang="en-CA" dirty="0" err="1"/>
+              <a:t>Weka</a:t>
+            </a:r>
+            <a:r>
+              <a:rPr lang="en-CA" dirty="0"/>
+              <a:t> implementations</a:t>
+            </a:r>
+          </a:p>
+        </p:txBody>
+      </p:sp>
+      <p:sp>
+        <p:nvSpPr>
+          <p:cNvPr id="3" name="Content Placeholder 2"/>
+          <p:cNvSpPr>
+            <a:spLocks noGrp="1"/>
+          </p:cNvSpPr>
+          <p:nvPr>
+            <p:ph idx="1"/>
+          </p:nvPr>
+        </p:nvSpPr>
+        <p:spPr>
+          <a:xfrm>
+            <a:off x="330063" y="1215407"/>
+            <a:ext cx="8395080" cy="4961556"/>
+          </a:xfrm>
+        </p:spPr>
+        <p:txBody>
+          <a:bodyPr>
+            <a:normAutofit/>
+          </a:bodyPr>
+          <a:lstStyle/>
+          <a:p>
+            <a:r>
+              <a:rPr lang="en-US" dirty="0"/>
+              <a:t>Attribute selection</a:t>
+            </a:r>
+            <a:endParaRPr lang="en-CA" dirty="0"/>
+          </a:p>
+          <a:p>
+            <a:pPr lvl="1"/>
+            <a:r>
+              <a:rPr lang="en-US" sz="1900" dirty="0" err="1"/>
+              <a:t>CfsSubsetEval</a:t>
+            </a:r>
+            <a:r>
+              <a:rPr lang="en-US" sz="1900" dirty="0"/>
+              <a:t> (correlation-based attribute subset evaluator)</a:t>
+            </a:r>
+            <a:endParaRPr lang="en-CA" sz="1900" dirty="0"/>
+          </a:p>
+          <a:p>
+            <a:pPr lvl="1"/>
+            <a:r>
+              <a:rPr lang="en-US" sz="1900" dirty="0" err="1"/>
+              <a:t>ConsistencySubsetEval</a:t>
+            </a:r>
+            <a:r>
+              <a:rPr lang="en-US" sz="1900" dirty="0"/>
+              <a:t> (measures class consistency for a given set of attributes, in the </a:t>
+            </a:r>
+            <a:r>
+              <a:rPr lang="en-US" sz="1900" dirty="0" err="1"/>
+              <a:t>consistencySubsetEval</a:t>
+            </a:r>
+            <a:r>
+              <a:rPr lang="en-US" sz="1900" dirty="0"/>
+              <a:t> package)</a:t>
+            </a:r>
+            <a:endParaRPr lang="en-CA" sz="1900" dirty="0"/>
+          </a:p>
+          <a:p>
+            <a:pPr lvl="1"/>
+            <a:r>
+              <a:rPr lang="en-US" sz="1900" dirty="0" err="1"/>
+              <a:t>ClassifierSubsetEval</a:t>
+            </a:r>
+            <a:r>
+              <a:rPr lang="en-US" sz="1900" dirty="0"/>
+              <a:t> (uses a classifier for evaluating subsets of attributes, in the </a:t>
+            </a:r>
+            <a:r>
+              <a:rPr lang="en-US" sz="1900" dirty="0" err="1"/>
+              <a:t>classifierBasedAttributeSelection</a:t>
+            </a:r>
+            <a:r>
+              <a:rPr lang="en-US" sz="1900" dirty="0"/>
+              <a:t> package)</a:t>
+            </a:r>
+            <a:endParaRPr lang="en-CA" sz="1900" dirty="0"/>
+          </a:p>
+          <a:p>
+            <a:pPr lvl="1"/>
+            <a:r>
+              <a:rPr lang="en-US" sz="1900" dirty="0" err="1"/>
+              <a:t>SVMAttributeEval</a:t>
+            </a:r>
+            <a:r>
+              <a:rPr lang="en-US" sz="1900" dirty="0"/>
+              <a:t> (ranks attributes according to the magnitude of the coefficients learned by an SVM, in the </a:t>
+            </a:r>
+            <a:r>
+              <a:rPr lang="en-US" sz="1900" dirty="0" err="1"/>
+              <a:t>SVMAttributeEval</a:t>
+            </a:r>
+            <a:r>
+              <a:rPr lang="en-US" sz="1900" dirty="0"/>
+              <a:t> package)</a:t>
+            </a:r>
+          </a:p>
+          <a:p>
+            <a:pPr lvl="1"/>
+            <a:r>
+              <a:rPr lang="en-US" sz="1900" dirty="0" err="1"/>
+              <a:t>ReliefF</a:t>
+            </a:r>
+            <a:r>
+              <a:rPr lang="en-US" sz="1900" dirty="0"/>
+              <a:t> (instance-based approach for ranking attributes)</a:t>
+            </a:r>
+          </a:p>
+          <a:p>
+            <a:pPr lvl="1"/>
+            <a:r>
+              <a:rPr lang="en-US" sz="1900" dirty="0" err="1"/>
+              <a:t>WrapperSubsetEval</a:t>
+            </a:r>
+            <a:r>
+              <a:rPr lang="en-US" sz="1900" dirty="0"/>
+              <a:t> (uses a classifier plus cross-validation)</a:t>
+            </a:r>
+            <a:endParaRPr lang="en-CA" sz="1900" dirty="0"/>
+          </a:p>
+          <a:p>
+            <a:pPr lvl="1"/>
+            <a:r>
+              <a:rPr lang="en-US" sz="1900" dirty="0" err="1"/>
+              <a:t>GreedyStepwise</a:t>
+            </a:r>
+            <a:r>
+              <a:rPr lang="en-US" sz="1900" dirty="0"/>
+              <a:t> (forward selection and backward elimination search)</a:t>
+            </a:r>
+            <a:endParaRPr lang="en-CA" sz="1900" dirty="0"/>
+          </a:p>
+          <a:p>
+            <a:pPr lvl="1"/>
+            <a:r>
+              <a:rPr lang="en-US" sz="1900" dirty="0" err="1"/>
+              <a:t>LinearForwardSelection</a:t>
+            </a:r>
+            <a:r>
+              <a:rPr lang="en-US" sz="1900" dirty="0"/>
+              <a:t> (forward selection with a sliding window of attribute choices at each step of the search, in the </a:t>
+            </a:r>
+            <a:r>
+              <a:rPr lang="en-US" sz="1900" dirty="0" err="1"/>
+              <a:t>linearForwardSelection</a:t>
+            </a:r>
+            <a:r>
+              <a:rPr lang="en-US" sz="1900" dirty="0"/>
+              <a:t> package)</a:t>
+            </a:r>
+            <a:endParaRPr lang="en-CA" sz="1900" dirty="0"/>
+          </a:p>
+          <a:p>
+            <a:pPr lvl="1"/>
+            <a:r>
+              <a:rPr lang="en-US" sz="1900" dirty="0" err="1"/>
+              <a:t>BestFirst</a:t>
+            </a:r>
+            <a:r>
+              <a:rPr lang="en-US" sz="1900" dirty="0"/>
+              <a:t> (search method that uses greedy hill-climbing with backtracking)</a:t>
+            </a:r>
+            <a:endParaRPr lang="en-CA" sz="1900" dirty="0"/>
+          </a:p>
+          <a:p>
+            <a:pPr lvl="1"/>
+            <a:r>
+              <a:rPr lang="en-US" sz="1900" dirty="0" err="1"/>
+              <a:t>RaceSearch</a:t>
+            </a:r>
+            <a:r>
+              <a:rPr lang="en-US" sz="1900" dirty="0"/>
+              <a:t> (uses the race search methodology, in the </a:t>
+            </a:r>
+            <a:r>
+              <a:rPr lang="en-US" sz="1900" dirty="0" err="1"/>
+              <a:t>raceSearch</a:t>
+            </a:r>
+            <a:r>
+              <a:rPr lang="en-US" sz="1900" dirty="0"/>
+              <a:t> package)</a:t>
+            </a:r>
+            <a:endParaRPr lang="en-CA" sz="1900" dirty="0"/>
+          </a:p>
+          <a:p>
+            <a:pPr lvl="1"/>
+            <a:r>
+              <a:rPr lang="en-US" sz="1900" dirty="0"/>
+              <a:t>Ranker (ranks individual attributes according to their evaluation)</a:t>
+            </a:r>
+            <a:endParaRPr lang="en-CA" sz="1900" dirty="0"/>
+          </a:p>
+        </p:txBody>
+      </p:sp>
+      <p:sp>
+        <p:nvSpPr>
+          <p:cNvPr id="4" name="Slide Number Placeholder 3"/>
           <p:cNvSpPr>
             <a:spLocks noGrp="1"/>
           </p:cNvSpPr>
@@ -23659,94 +22237,12 @@
           </a:p>
         </p:txBody>
       </p:sp>
-      <p:sp>
-        <p:nvSpPr>
-          <p:cNvPr id="2" name="Title 1"/>
-          <p:cNvSpPr txBox="1">
-            <a:spLocks noGrp="1"/>
-          </p:cNvSpPr>
-          <p:nvPr>
-            <p:ph type="title" idx="4294967295"/>
-          </p:nvPr>
-        </p:nvSpPr>
-        <p:spPr>
-          <a:xfrm>
-            <a:off x="1493838" y="-179388"/>
-            <a:ext cx="7650162" cy="1144588"/>
-          </a:xfrm>
-        </p:spPr>
-        <p:txBody>
-          <a:bodyPr/>
-          <a:lstStyle/>
-          <a:p>
-            <a:pPr lvl="0"/>
-            <a:r>
-              <a:rPr lang="en-US" dirty="0"/>
-              <a:t>Calibrating class probabilities</a:t>
-            </a:r>
-          </a:p>
-        </p:txBody>
-      </p:sp>
-      <p:sp>
-        <p:nvSpPr>
-          <p:cNvPr id="3" name="Text Placeholder 2"/>
-          <p:cNvSpPr txBox="1">
-            <a:spLocks noGrp="1"/>
-          </p:cNvSpPr>
-          <p:nvPr>
-            <p:ph type="body" idx="4294967295"/>
-          </p:nvPr>
-        </p:nvSpPr>
-        <p:spPr>
-          <a:xfrm>
-            <a:off x="914400" y="1079500"/>
-            <a:ext cx="6921008" cy="5019675"/>
-          </a:xfrm>
-        </p:spPr>
-        <p:txBody>
-          <a:bodyPr>
-            <a:normAutofit/>
-          </a:bodyPr>
-          <a:lstStyle/>
-          <a:p>
-            <a:pPr lvl="0"/>
-            <a:r>
-              <a:rPr lang="en-US" dirty="0"/>
-              <a:t>Class probability estimation is harder than classification:</a:t>
-            </a:r>
-          </a:p>
-          <a:p>
-            <a:pPr lvl="1"/>
-            <a:r>
-              <a:rPr lang="en-US" dirty="0"/>
-              <a:t>Classification error is minimized as long as the correct class is predicted with maximum probability</a:t>
-            </a:r>
-          </a:p>
-          <a:p>
-            <a:pPr lvl="1"/>
-            <a:r>
-              <a:rPr lang="en-US" dirty="0"/>
-              <a:t>Estimates that yield correct classification may be quite poor with respect to quadratic or informational loss</a:t>
-            </a:r>
-            <a:endParaRPr lang="en-US" sz="2400" dirty="0"/>
-          </a:p>
-          <a:p>
-            <a:pPr lvl="0"/>
-            <a:r>
-              <a:rPr lang="en-US" dirty="0"/>
-              <a:t>But: it is often important to have accurate class probabilities</a:t>
-            </a:r>
-          </a:p>
-          <a:p>
-            <a:pPr lvl="1"/>
-            <a:r>
-              <a:rPr lang="en-US" dirty="0"/>
-              <a:t>E.g. cost-sensitive prediction using the minimum expected cost method</a:t>
-            </a:r>
-          </a:p>
-        </p:txBody>
-      </p:sp>
     </p:spTree>
+    <p:extLst>
+      <p:ext uri="{BB962C8B-B14F-4D97-AF65-F5344CB8AC3E}">
+        <p14:creationId xmlns:p14="http://schemas.microsoft.com/office/powerpoint/2010/main" val="2440831861"/>
+      </p:ext>
+    </p:extLst>
   </p:cSld>
   <p:clrMapOvr>
     <a:masterClrMapping/>
@@ -23755,587 +22251,6 @@
 </file>
 
 <file path=ppt/slides/slide35.xml><?xml version="1.0" encoding="utf-8"?>
-<p:sld xmlns:a="http://schemas.openxmlformats.org/drawingml/2006/main" xmlns:r="http://schemas.openxmlformats.org/officeDocument/2006/relationships" xmlns:p="http://schemas.openxmlformats.org/presentationml/2006/main">
-  <p:cSld name="page45">
-    <p:spTree>
-      <p:nvGrpSpPr>
-        <p:cNvPr id="1" name=""/>
-        <p:cNvGrpSpPr/>
-        <p:nvPr/>
-      </p:nvGrpSpPr>
-      <p:grpSpPr>
-        <a:xfrm>
-          <a:off x="0" y="0"/>
-          <a:ext cx="0" cy="0"/>
-          <a:chOff x="0" y="0"/>
-          <a:chExt cx="0" cy="0"/>
-        </a:xfrm>
-      </p:grpSpPr>
-      <p:sp>
-        <p:nvSpPr>
-          <p:cNvPr id="8" name="Slide Number Placeholder 7"/>
-          <p:cNvSpPr>
-            <a:spLocks noGrp="1"/>
-          </p:cNvSpPr>
-          <p:nvPr>
-            <p:ph type="sldNum" sz="quarter" idx="12"/>
-          </p:nvPr>
-        </p:nvSpPr>
-        <p:spPr/>
-        <p:txBody>
-          <a:bodyPr/>
-          <a:lstStyle/>
-          <a:p>
-            <a:fld id="{CC0D3929-19F2-429B-ADDC-CA064EDFCD10}" type="slidenum">
-              <a:rPr lang="en-NZ" smtClean="0"/>
-              <a:pPr/>
-              <a:t>35</a:t>
-            </a:fld>
-            <a:endParaRPr lang="en-NZ"/>
-          </a:p>
-        </p:txBody>
-      </p:sp>
-      <p:sp>
-        <p:nvSpPr>
-          <p:cNvPr id="2" name="Title 1"/>
-          <p:cNvSpPr txBox="1">
-            <a:spLocks noGrp="1"/>
-          </p:cNvSpPr>
-          <p:nvPr>
-            <p:ph type="title" idx="4294967295"/>
-          </p:nvPr>
-        </p:nvSpPr>
-        <p:spPr>
-          <a:xfrm>
-            <a:off x="272661" y="-161925"/>
-            <a:ext cx="8871339" cy="1144588"/>
-          </a:xfrm>
-        </p:spPr>
-        <p:txBody>
-          <a:bodyPr/>
-          <a:lstStyle/>
-          <a:p>
-            <a:pPr lvl="0"/>
-            <a:r>
-              <a:rPr lang="en-US" dirty="0"/>
-              <a:t>Visualizing inaccurate probability estimates</a:t>
-            </a:r>
-          </a:p>
-        </p:txBody>
-      </p:sp>
-      <p:sp>
-        <p:nvSpPr>
-          <p:cNvPr id="3" name="Text Placeholder 2"/>
-          <p:cNvSpPr txBox="1">
-            <a:spLocks noGrp="1"/>
-          </p:cNvSpPr>
-          <p:nvPr>
-            <p:ph type="body" idx="4294967295"/>
-          </p:nvPr>
-        </p:nvSpPr>
-        <p:spPr>
-          <a:xfrm>
-            <a:off x="200908" y="881063"/>
-            <a:ext cx="8229600" cy="5580062"/>
-          </a:xfrm>
-        </p:spPr>
-        <p:txBody>
-          <a:bodyPr>
-            <a:normAutofit/>
-          </a:bodyPr>
-          <a:lstStyle/>
-          <a:p>
-            <a:pPr lvl="0"/>
-            <a:r>
-              <a:rPr lang="en-US" dirty="0"/>
-              <a:t>Consider a two class problem. Probabilities that are correct for classification may be:</a:t>
-            </a:r>
-          </a:p>
-          <a:p>
-            <a:pPr lvl="1"/>
-            <a:r>
-              <a:rPr lang="en-US" dirty="0"/>
-              <a:t>Too optimistic – too close to either 0 or 1</a:t>
-            </a:r>
-          </a:p>
-          <a:p>
-            <a:pPr lvl="1"/>
-            <a:r>
-              <a:rPr lang="en-US" dirty="0"/>
-              <a:t>Too pessimistic – not close enough to 0 or 1</a:t>
-            </a:r>
-          </a:p>
-        </p:txBody>
-      </p:sp>
-      <p:pic>
-        <p:nvPicPr>
-          <p:cNvPr id="4" name="Picture 3"/>
-          <p:cNvPicPr>
-            <a:picLocks noChangeAspect="1"/>
-          </p:cNvPicPr>
-          <p:nvPr/>
-        </p:nvPicPr>
-        <p:blipFill>
-          <a:blip r:embed="rId3">
-            <a:lum/>
-            <a:alphaModFix/>
-          </a:blip>
-          <a:srcRect/>
-          <a:stretch>
-            <a:fillRect/>
-          </a:stretch>
-        </p:blipFill>
-        <p:spPr>
-          <a:xfrm>
-            <a:off x="3563640" y="2303125"/>
-            <a:ext cx="5544000" cy="4158000"/>
-          </a:xfrm>
-          <a:prstGeom prst="rect">
-            <a:avLst/>
-          </a:prstGeom>
-          <a:noFill/>
-          <a:ln>
-            <a:noFill/>
-          </a:ln>
-        </p:spPr>
-      </p:pic>
-      <p:sp>
-        <p:nvSpPr>
-          <p:cNvPr id="5" name="TextBox 4"/>
-          <p:cNvSpPr txBox="1"/>
-          <p:nvPr/>
-        </p:nvSpPr>
-        <p:spPr>
-          <a:xfrm>
-            <a:off x="339097" y="3065216"/>
-            <a:ext cx="3332656" cy="1980000"/>
-          </a:xfrm>
-          <a:prstGeom prst="rect">
-            <a:avLst/>
-          </a:prstGeom>
-          <a:noFill/>
-          <a:ln>
-            <a:noFill/>
-          </a:ln>
-        </p:spPr>
-        <p:txBody>
-          <a:bodyPr lIns="108000" tIns="63000" rIns="108000" bIns="63000"/>
-          <a:lstStyle/>
-          <a:p>
-            <a:pPr marL="0" marR="0" lvl="0" indent="0" algn="l" rtl="0" hangingPunct="0">
-              <a:lnSpc>
-                <a:spcPct val="100000"/>
-              </a:lnSpc>
-              <a:spcBef>
-                <a:spcPts val="697"/>
-              </a:spcBef>
-              <a:spcAft>
-                <a:spcPts val="0"/>
-              </a:spcAft>
-              <a:buNone/>
-              <a:tabLst>
-                <a:tab pos="799920" algn="l"/>
-                <a:tab pos="1714319" algn="l"/>
-                <a:tab pos="2628720" algn="l"/>
-                <a:tab pos="3543120" algn="l"/>
-                <a:tab pos="4457520" algn="l"/>
-                <a:tab pos="5371920" algn="l"/>
-                <a:tab pos="6286319" algn="l"/>
-                <a:tab pos="7200720" algn="l"/>
-                <a:tab pos="8115119" algn="l"/>
-                <a:tab pos="9029519" algn="l"/>
-              </a:tabLst>
-            </a:pPr>
-            <a:r>
-              <a:rPr lang="en-US" sz="2400" b="0" i="1" u="none" strike="noStrike" baseline="0" dirty="0">
-                <a:ln>
-                  <a:noFill/>
-                </a:ln>
-                <a:solidFill>
-                  <a:srgbClr val="000000"/>
-                </a:solidFill>
-                <a:ea typeface="Utopia" pitchFamily="34"/>
-                <a:cs typeface="Utopia" pitchFamily="34"/>
-              </a:rPr>
-              <a:t>Reliability</a:t>
-            </a:r>
-            <a:r>
-              <a:rPr lang="en-US" sz="2400" b="0" i="0" u="none" strike="noStrike" baseline="0" dirty="0">
-                <a:ln>
-                  <a:noFill/>
-                </a:ln>
-                <a:solidFill>
-                  <a:srgbClr val="000000"/>
-                </a:solidFill>
-                <a:ea typeface="Utopia" pitchFamily="34"/>
-                <a:cs typeface="Utopia" pitchFamily="34"/>
-              </a:rPr>
-              <a:t> </a:t>
-            </a:r>
-            <a:r>
-              <a:rPr lang="en-US" sz="2400" b="0" i="1" u="none" strike="noStrike" baseline="0" dirty="0">
-                <a:ln>
-                  <a:noFill/>
-                </a:ln>
-                <a:solidFill>
-                  <a:srgbClr val="000000"/>
-                </a:solidFill>
-                <a:ea typeface="Utopia" pitchFamily="34"/>
-                <a:cs typeface="Utopia" pitchFamily="34"/>
-              </a:rPr>
-              <a:t>diagram</a:t>
-            </a:r>
-            <a:r>
-              <a:rPr lang="en-US" sz="2400" b="0" i="0" u="none" strike="noStrike" baseline="0" dirty="0">
-                <a:ln>
-                  <a:noFill/>
-                </a:ln>
-                <a:solidFill>
-                  <a:srgbClr val="000000"/>
-                </a:solidFill>
-                <a:ea typeface="Utopia" pitchFamily="34"/>
-                <a:cs typeface="Utopia" pitchFamily="34"/>
-              </a:rPr>
-              <a:t> showing overoptimistic probability estimation for a two-class problem</a:t>
-            </a:r>
-          </a:p>
-        </p:txBody>
-      </p:sp>
-    </p:spTree>
-  </p:cSld>
-  <p:clrMapOvr>
-    <a:masterClrMapping/>
-  </p:clrMapOvr>
-</p:sld>
-</file>
-
-<file path=ppt/slides/slide36.xml><?xml version="1.0" encoding="utf-8"?>
-<p:sld xmlns:a="http://schemas.openxmlformats.org/drawingml/2006/main" xmlns:r="http://schemas.openxmlformats.org/officeDocument/2006/relationships" xmlns:p="http://schemas.openxmlformats.org/presentationml/2006/main">
-  <p:cSld name="page46">
-    <p:spTree>
-      <p:nvGrpSpPr>
-        <p:cNvPr id="1" name=""/>
-        <p:cNvGrpSpPr/>
-        <p:nvPr/>
-      </p:nvGrpSpPr>
-      <p:grpSpPr>
-        <a:xfrm>
-          <a:off x="0" y="0"/>
-          <a:ext cx="0" cy="0"/>
-          <a:chOff x="0" y="0"/>
-          <a:chExt cx="0" cy="0"/>
-        </a:xfrm>
-      </p:grpSpPr>
-      <p:sp>
-        <p:nvSpPr>
-          <p:cNvPr id="6" name="Slide Number Placeholder 5"/>
-          <p:cNvSpPr>
-            <a:spLocks noGrp="1"/>
-          </p:cNvSpPr>
-          <p:nvPr>
-            <p:ph type="sldNum" sz="quarter" idx="12"/>
-          </p:nvPr>
-        </p:nvSpPr>
-        <p:spPr/>
-        <p:txBody>
-          <a:bodyPr/>
-          <a:lstStyle/>
-          <a:p>
-            <a:fld id="{CC0D3929-19F2-429B-ADDC-CA064EDFCD10}" type="slidenum">
-              <a:rPr lang="en-NZ" smtClean="0"/>
-              <a:pPr/>
-              <a:t>36</a:t>
-            </a:fld>
-            <a:endParaRPr lang="en-NZ"/>
-          </a:p>
-        </p:txBody>
-      </p:sp>
-      <p:sp>
-        <p:nvSpPr>
-          <p:cNvPr id="2" name="Title 1"/>
-          <p:cNvSpPr txBox="1">
-            <a:spLocks noGrp="1"/>
-          </p:cNvSpPr>
-          <p:nvPr>
-            <p:ph type="title" idx="4294967295"/>
-          </p:nvPr>
-        </p:nvSpPr>
-        <p:spPr>
-          <a:xfrm>
-            <a:off x="1493838" y="-179388"/>
-            <a:ext cx="7650162" cy="1144588"/>
-          </a:xfrm>
-        </p:spPr>
-        <p:txBody>
-          <a:bodyPr/>
-          <a:lstStyle/>
-          <a:p>
-            <a:pPr lvl="0"/>
-            <a:r>
-              <a:rPr lang="en-US" dirty="0"/>
-              <a:t>Calibrating class probabilities</a:t>
-            </a:r>
-          </a:p>
-        </p:txBody>
-      </p:sp>
-      <p:sp>
-        <p:nvSpPr>
-          <p:cNvPr id="3" name="Text Placeholder 2"/>
-          <p:cNvSpPr txBox="1">
-            <a:spLocks noGrp="1"/>
-          </p:cNvSpPr>
-          <p:nvPr>
-            <p:ph type="body" idx="4294967295"/>
-          </p:nvPr>
-        </p:nvSpPr>
-        <p:spPr>
-          <a:xfrm>
-            <a:off x="229610" y="1442403"/>
-            <a:ext cx="8811246" cy="4276483"/>
-          </a:xfrm>
-        </p:spPr>
-        <p:txBody>
-          <a:bodyPr>
-            <a:normAutofit/>
-          </a:bodyPr>
-          <a:lstStyle/>
-          <a:p>
-            <a:pPr lvl="0"/>
-            <a:r>
-              <a:rPr lang="en-US" dirty="0"/>
-              <a:t>Reliability diagram is generated by collecting predicted probabilities and relative class frequencies from a 10-fold cross-validation</a:t>
-            </a:r>
-          </a:p>
-          <a:p>
-            <a:r>
-              <a:rPr lang="en-US" dirty="0"/>
-              <a:t>Predicted probabilities are discretized into 20 ranges via equal-frequency discretization</a:t>
-            </a:r>
-          </a:p>
-          <a:p>
-            <a:r>
-              <a:rPr lang="en-US" dirty="0"/>
-              <a:t>We can use this for </a:t>
-            </a:r>
-            <a:r>
-              <a:rPr lang="en-US" i="1" dirty="0"/>
-              <a:t>calibration </a:t>
-            </a:r>
-            <a:r>
-              <a:rPr lang="en-US" dirty="0"/>
-              <a:t>of the probability estimates: correct bias by mapping observed curve to the diagonal</a:t>
-            </a:r>
-          </a:p>
-          <a:p>
-            <a:r>
-              <a:rPr lang="en-US" dirty="0"/>
-              <a:t>Yields a discretization-based approach to the calibration of class probability estimates</a:t>
-            </a:r>
-          </a:p>
-          <a:p>
-            <a:pPr lvl="0"/>
-            <a:r>
-              <a:rPr lang="en-US" dirty="0"/>
-              <a:t>Discretization-based calibration is fast </a:t>
-            </a:r>
-            <a:r>
-              <a:rPr lang="en-US" sz="2400" dirty="0"/>
-              <a:t>but determining an appropriate number of discretization intervals is not easy</a:t>
-            </a:r>
-          </a:p>
-        </p:txBody>
-      </p:sp>
-    </p:spTree>
-  </p:cSld>
-  <p:clrMapOvr>
-    <a:masterClrMapping/>
-  </p:clrMapOvr>
-</p:sld>
-</file>
-
-<file path=ppt/slides/slide37.xml><?xml version="1.0" encoding="utf-8"?>
-<p:sld xmlns:a="http://schemas.openxmlformats.org/drawingml/2006/main" xmlns:r="http://schemas.openxmlformats.org/officeDocument/2006/relationships" xmlns:p="http://schemas.openxmlformats.org/presentationml/2006/main">
-  <p:cSld name="page47">
-    <p:spTree>
-      <p:nvGrpSpPr>
-        <p:cNvPr id="1" name=""/>
-        <p:cNvGrpSpPr/>
-        <p:nvPr/>
-      </p:nvGrpSpPr>
-      <p:grpSpPr>
-        <a:xfrm>
-          <a:off x="0" y="0"/>
-          <a:ext cx="0" cy="0"/>
-          <a:chOff x="0" y="0"/>
-          <a:chExt cx="0" cy="0"/>
-        </a:xfrm>
-      </p:grpSpPr>
-      <p:sp>
-        <p:nvSpPr>
-          <p:cNvPr id="6" name="Slide Number Placeholder 5"/>
-          <p:cNvSpPr>
-            <a:spLocks noGrp="1"/>
-          </p:cNvSpPr>
-          <p:nvPr>
-            <p:ph type="sldNum" sz="quarter" idx="12"/>
-          </p:nvPr>
-        </p:nvSpPr>
-        <p:spPr/>
-        <p:txBody>
-          <a:bodyPr/>
-          <a:lstStyle/>
-          <a:p>
-            <a:fld id="{CC0D3929-19F2-429B-ADDC-CA064EDFCD10}" type="slidenum">
-              <a:rPr lang="en-NZ" smtClean="0"/>
-              <a:pPr/>
-              <a:t>37</a:t>
-            </a:fld>
-            <a:endParaRPr lang="en-NZ"/>
-          </a:p>
-        </p:txBody>
-      </p:sp>
-      <p:sp>
-        <p:nvSpPr>
-          <p:cNvPr id="2" name="Title 1"/>
-          <p:cNvSpPr txBox="1">
-            <a:spLocks noGrp="1"/>
-          </p:cNvSpPr>
-          <p:nvPr>
-            <p:ph type="title" idx="4294967295"/>
-          </p:nvPr>
-        </p:nvSpPr>
-        <p:spPr>
-          <a:xfrm>
-            <a:off x="1493838" y="-146050"/>
-            <a:ext cx="7650162" cy="1144588"/>
-          </a:xfrm>
-        </p:spPr>
-        <p:txBody>
-          <a:bodyPr/>
-          <a:lstStyle/>
-          <a:p>
-            <a:pPr lvl="0"/>
-            <a:r>
-              <a:rPr lang="en-US" dirty="0"/>
-              <a:t>Calibrating class probabilities</a:t>
-            </a:r>
-          </a:p>
-        </p:txBody>
-      </p:sp>
-      <p:sp>
-        <p:nvSpPr>
-          <p:cNvPr id="3" name="Text Placeholder 2"/>
-          <p:cNvSpPr txBox="1">
-            <a:spLocks noGrp="1"/>
-          </p:cNvSpPr>
-          <p:nvPr>
-            <p:ph type="body" idx="4294967295"/>
-          </p:nvPr>
-        </p:nvSpPr>
-        <p:spPr>
-          <a:xfrm>
-            <a:off x="469532" y="1143001"/>
-            <a:ext cx="8241260" cy="5322139"/>
-          </a:xfrm>
-        </p:spPr>
-        <p:txBody>
-          <a:bodyPr>
-            <a:normAutofit/>
-          </a:bodyPr>
-          <a:lstStyle/>
-          <a:p>
-            <a:pPr lvl="0"/>
-            <a:r>
-              <a:rPr lang="en-US" dirty="0"/>
-              <a:t>Can view calibration as a function estimation problem</a:t>
-            </a:r>
-          </a:p>
-          <a:p>
-            <a:pPr lvl="1"/>
-            <a:r>
-              <a:rPr lang="en-US" dirty="0"/>
-              <a:t>One input – estimated class probability – and one output – the calibrated probability</a:t>
-            </a:r>
-          </a:p>
-          <a:p>
-            <a:pPr lvl="0"/>
-            <a:r>
-              <a:rPr lang="en-US" dirty="0"/>
-              <a:t>Reasonable assumption in many cases: the function is piecewise constant and monotonically increasing</a:t>
-            </a:r>
-          </a:p>
-          <a:p>
-            <a:r>
-              <a:rPr lang="en-US" dirty="0"/>
-              <a:t>Can use </a:t>
-            </a:r>
-            <a:r>
-              <a:rPr lang="en-US" i="1" dirty="0"/>
-              <a:t>isotonic regression, </a:t>
-            </a:r>
-            <a:r>
-              <a:rPr lang="en-US" dirty="0"/>
-              <a:t>which estimates a monotonically increasing piece-wise constant function</a:t>
-            </a:r>
-            <a:r>
-              <a:rPr lang="en-US" i="1" dirty="0"/>
-              <a:t>:</a:t>
-            </a:r>
-            <a:br>
-              <a:rPr lang="en-US" i="1" dirty="0"/>
-            </a:br>
-            <a:r>
-              <a:rPr lang="en-US" dirty="0"/>
-              <a:t>Minimizes squared error between observed class “probabilities” (0/1) and resulting calibrated class probabilities</a:t>
-            </a:r>
-          </a:p>
-          <a:p>
-            <a:r>
-              <a:rPr lang="en-US" dirty="0"/>
-              <a:t>Alternatively, can use </a:t>
-            </a:r>
-            <a:r>
-              <a:rPr lang="en-US" i="1" dirty="0"/>
-              <a:t>logistic regression</a:t>
-            </a:r>
-            <a:r>
-              <a:rPr lang="en-US" dirty="0"/>
-              <a:t> to estimate the calibration function</a:t>
-            </a:r>
-          </a:p>
-          <a:p>
-            <a:pPr lvl="1"/>
-            <a:r>
-              <a:rPr lang="en-US" dirty="0"/>
-              <a:t>Note: must use the </a:t>
-            </a:r>
-            <a:r>
-              <a:rPr lang="en-US" i="1" dirty="0"/>
-              <a:t>log-odds </a:t>
-            </a:r>
-            <a:r>
-              <a:rPr lang="en-US" dirty="0"/>
-              <a:t>of the estimated class probabilities as input</a:t>
-            </a:r>
-          </a:p>
-          <a:p>
-            <a:r>
-              <a:rPr lang="en-US" dirty="0"/>
-              <a:t>Advantage: multiclass logistic regression can be used for calibration in the multiclass case</a:t>
-            </a:r>
-            <a:endParaRPr lang="en-US" sz="3200" dirty="0"/>
-          </a:p>
-        </p:txBody>
-      </p:sp>
-    </p:spTree>
-  </p:cSld>
-  <p:clrMapOvr>
-    <a:masterClrMapping/>
-  </p:clrMapOvr>
-</p:sld>
-</file>
-
-<file path=ppt/slides/slide38.xml><?xml version="1.0" encoding="utf-8"?>
 <p:sld xmlns:a="http://schemas.openxmlformats.org/drawingml/2006/main" xmlns:r="http://schemas.openxmlformats.org/officeDocument/2006/relationships" xmlns:p="http://schemas.openxmlformats.org/presentationml/2006/main">
   <p:cSld>
     <p:spTree>
@@ -24388,12 +22303,7 @@
             <p:ph idx="1"/>
           </p:nvPr>
         </p:nvSpPr>
-        <p:spPr>
-          <a:xfrm>
-            <a:off x="330063" y="1215407"/>
-            <a:ext cx="8395080" cy="4961556"/>
-          </a:xfrm>
-        </p:spPr>
+        <p:spPr/>
         <p:txBody>
           <a:bodyPr>
             <a:normAutofit/>
@@ -24401,176 +22311,118 @@
           <a:lstStyle/>
           <a:p>
             <a:r>
+              <a:rPr lang="en-US" sz="2600" dirty="0"/>
+              <a:t>Learning decision tables: </a:t>
+            </a:r>
+            <a:r>
+              <a:rPr lang="en-US" sz="2600" dirty="0" err="1"/>
+              <a:t>DecisionTable</a:t>
+            </a:r>
+            <a:endParaRPr lang="en-CA" sz="2600" dirty="0"/>
+          </a:p>
+          <a:p>
+            <a:r>
               <a:rPr lang="en-US" dirty="0"/>
-              <a:t>Attribute selection</a:t>
+              <a:t>Discretization</a:t>
             </a:r>
             <a:endParaRPr lang="en-CA" dirty="0"/>
           </a:p>
           <a:p>
             <a:pPr lvl="1"/>
             <a:r>
-              <a:rPr lang="en-US" sz="1900" dirty="0" err="1"/>
-              <a:t>CfsSubsetEval</a:t>
-            </a:r>
-            <a:r>
-              <a:rPr lang="en-US" sz="1900" dirty="0"/>
-              <a:t> (correlation-based attribute subset evaluator)</a:t>
-            </a:r>
-            <a:endParaRPr lang="en-CA" sz="1900" dirty="0"/>
+              <a:rPr lang="en-US" dirty="0"/>
+              <a:t>Discretize (unsupervised and supervised versions)</a:t>
+            </a:r>
+            <a:endParaRPr lang="en-CA" dirty="0"/>
           </a:p>
           <a:p>
             <a:pPr lvl="1"/>
             <a:r>
-              <a:rPr lang="en-US" sz="1900" dirty="0" err="1"/>
-              <a:t>ConsistencySubsetEval</a:t>
-            </a:r>
-            <a:r>
-              <a:rPr lang="en-US" sz="1900" dirty="0"/>
-              <a:t> (measures class consistency for a given set of attributes, in the </a:t>
-            </a:r>
-            <a:r>
-              <a:rPr lang="en-US" sz="1900" dirty="0" err="1"/>
-              <a:t>consistencySubsetEval</a:t>
-            </a:r>
-            <a:r>
-              <a:rPr lang="en-US" sz="1900" dirty="0"/>
+              <a:rPr lang="en-US" dirty="0" err="1"/>
+              <a:t>PKIDiscretize</a:t>
+            </a:r>
+            <a:r>
+              <a:rPr lang="en-US" dirty="0"/>
+              <a:t> (proportional k-interval discretization)</a:t>
+            </a:r>
+            <a:endParaRPr lang="en-CA" dirty="0"/>
+          </a:p>
+          <a:p>
+            <a:pPr lvl="0"/>
+            <a:r>
+              <a:rPr lang="en-US" dirty="0" err="1"/>
+              <a:t>PrincipalComponents</a:t>
+            </a:r>
+            <a:r>
+              <a:rPr lang="en-US" dirty="0"/>
+              <a:t> and </a:t>
+            </a:r>
+            <a:r>
+              <a:rPr lang="en-US" dirty="0" err="1"/>
+              <a:t>RandomProjection</a:t>
+            </a:r>
+            <a:r>
+              <a:rPr lang="en-US" dirty="0"/>
+              <a:t> </a:t>
+            </a:r>
+          </a:p>
+          <a:p>
+            <a:pPr lvl="0"/>
+            <a:r>
+              <a:rPr lang="en-US" dirty="0" err="1"/>
+              <a:t>FastICA</a:t>
+            </a:r>
+            <a:r>
+              <a:rPr lang="en-US" dirty="0"/>
+              <a:t> (independent component analysis, in the </a:t>
+            </a:r>
+            <a:r>
+              <a:rPr lang="en-US" dirty="0" err="1"/>
+              <a:t>StudentFilters</a:t>
+            </a:r>
+            <a:r>
+              <a:rPr lang="en-US" dirty="0"/>
               <a:t> package)</a:t>
             </a:r>
-            <a:endParaRPr lang="en-CA" sz="1900" dirty="0"/>
-          </a:p>
-          <a:p>
-            <a:pPr lvl="1"/>
-            <a:r>
-              <a:rPr lang="en-US" sz="1900" dirty="0" err="1"/>
-              <a:t>ClassifierSubsetEval</a:t>
-            </a:r>
-            <a:r>
-              <a:rPr lang="en-US" sz="1900" dirty="0"/>
-              <a:t> (uses a classifier for evaluating subsets of attributes, in the </a:t>
-            </a:r>
-            <a:r>
-              <a:rPr lang="en-US" sz="1900" dirty="0" err="1"/>
-              <a:t>classifierBasedAttributeSelection</a:t>
-            </a:r>
-            <a:r>
-              <a:rPr lang="en-US" sz="1900" dirty="0"/>
-              <a:t> package)</a:t>
-            </a:r>
-            <a:endParaRPr lang="en-CA" sz="1900" dirty="0"/>
-          </a:p>
-          <a:p>
-            <a:pPr lvl="1"/>
-            <a:r>
-              <a:rPr lang="en-US" sz="1900" dirty="0" err="1"/>
-              <a:t>SVMAttributeEval</a:t>
-            </a:r>
-            <a:r>
-              <a:rPr lang="en-US" sz="1900" dirty="0"/>
-              <a:t> (ranks attributes according to the magnitude of the coefficients learned by an SVM, in the </a:t>
-            </a:r>
-            <a:r>
-              <a:rPr lang="en-US" sz="1900" dirty="0" err="1"/>
-              <a:t>SVMAttributeEval</a:t>
-            </a:r>
-            <a:r>
-              <a:rPr lang="en-US" sz="1900" dirty="0"/>
-              <a:t> package)</a:t>
-            </a:r>
-          </a:p>
-          <a:p>
-            <a:pPr lvl="1"/>
-            <a:r>
-              <a:rPr lang="en-US" sz="1900" dirty="0" err="1"/>
-              <a:t>ReliefF</a:t>
-            </a:r>
-            <a:r>
-              <a:rPr lang="en-US" sz="1900" dirty="0"/>
-              <a:t> (instance-based approach for ranking attributes)</a:t>
-            </a:r>
-          </a:p>
-          <a:p>
-            <a:pPr lvl="1"/>
-            <a:r>
-              <a:rPr lang="en-US" sz="1900" dirty="0" err="1"/>
-              <a:t>WrapperSubsetEval</a:t>
-            </a:r>
-            <a:r>
-              <a:rPr lang="en-US" sz="1900" dirty="0"/>
-              <a:t> (uses a classifier plus cross-validation)</a:t>
-            </a:r>
-            <a:endParaRPr lang="en-CA" sz="1900" dirty="0"/>
-          </a:p>
-          <a:p>
-            <a:pPr lvl="1"/>
-            <a:r>
-              <a:rPr lang="en-US" sz="1900" dirty="0" err="1"/>
-              <a:t>GreedyStepwise</a:t>
-            </a:r>
-            <a:r>
-              <a:rPr lang="en-US" sz="1900" dirty="0"/>
-              <a:t> (forward selection and backward elimination search)</a:t>
-            </a:r>
-            <a:endParaRPr lang="en-CA" sz="1900" dirty="0"/>
-          </a:p>
-          <a:p>
-            <a:pPr lvl="1"/>
-            <a:r>
-              <a:rPr lang="en-US" sz="1900" dirty="0" err="1"/>
-              <a:t>LinearForwardSelection</a:t>
-            </a:r>
-            <a:r>
-              <a:rPr lang="en-US" sz="1900" dirty="0"/>
-              <a:t> (forward selection with a sliding window of attribute choices at each step of the search, in the </a:t>
-            </a:r>
-            <a:r>
-              <a:rPr lang="en-US" sz="1900" dirty="0" err="1"/>
-              <a:t>linearForwardSelection</a:t>
-            </a:r>
-            <a:r>
-              <a:rPr lang="en-US" sz="1900" dirty="0"/>
-              <a:t> package)</a:t>
-            </a:r>
-            <a:endParaRPr lang="en-CA" sz="1900" dirty="0"/>
-          </a:p>
-          <a:p>
-            <a:pPr lvl="1"/>
-            <a:r>
-              <a:rPr lang="en-US" sz="1900" dirty="0" err="1"/>
-              <a:t>BestFirst</a:t>
-            </a:r>
-            <a:r>
-              <a:rPr lang="en-US" sz="1900" dirty="0"/>
-              <a:t> (search method that uses greedy hill-climbing with backtracking)</a:t>
-            </a:r>
-            <a:endParaRPr lang="en-CA" sz="1900" dirty="0"/>
-          </a:p>
-          <a:p>
-            <a:pPr lvl="1"/>
-            <a:r>
-              <a:rPr lang="en-US" sz="1900" dirty="0" err="1"/>
-              <a:t>RaceSearch</a:t>
-            </a:r>
-            <a:r>
-              <a:rPr lang="en-US" sz="1900" dirty="0"/>
-              <a:t> (uses the race search methodology, in the </a:t>
-            </a:r>
-            <a:r>
-              <a:rPr lang="en-US" sz="1900" dirty="0" err="1"/>
-              <a:t>raceSearch</a:t>
-            </a:r>
-            <a:r>
-              <a:rPr lang="en-US" sz="1900" dirty="0"/>
-              <a:t> package)</a:t>
-            </a:r>
-            <a:endParaRPr lang="en-CA" sz="1900" dirty="0"/>
-          </a:p>
-          <a:p>
-            <a:pPr lvl="1"/>
-            <a:r>
-              <a:rPr lang="en-US" sz="1900" dirty="0"/>
-              <a:t>Ranker (ranks individual attributes according to their evaluation)</a:t>
-            </a:r>
-            <a:endParaRPr lang="en-CA" sz="1900" dirty="0"/>
+            <a:endParaRPr lang="en-CA" dirty="0"/>
+          </a:p>
+          <a:p>
+            <a:pPr lvl="0"/>
+            <a:r>
+              <a:rPr lang="en-US" dirty="0" err="1"/>
+              <a:t>StringToWordVector</a:t>
+            </a:r>
+            <a:r>
+              <a:rPr lang="en-US" dirty="0"/>
+              <a:t> (text to attribute vectors)</a:t>
+            </a:r>
+            <a:endParaRPr lang="en-CA" dirty="0"/>
+          </a:p>
+          <a:p>
+            <a:pPr lvl="0"/>
+            <a:r>
+              <a:rPr lang="en-US" dirty="0" err="1"/>
+              <a:t>PLSFilter</a:t>
+            </a:r>
+            <a:r>
+              <a:rPr lang="en-US" dirty="0"/>
+              <a:t> (partial least squares transformation) </a:t>
+            </a:r>
+            <a:endParaRPr lang="en-CA" dirty="0"/>
+          </a:p>
+          <a:p>
+            <a:pPr lvl="0"/>
+            <a:r>
+              <a:rPr lang="en-US" dirty="0"/>
+              <a:t>Resampling and reservoir sampling</a:t>
+            </a:r>
+            <a:endParaRPr lang="en-CA" dirty="0"/>
+          </a:p>
+          <a:p>
+            <a:endParaRPr lang="en-CA" dirty="0"/>
+          </a:p>
+          <a:p>
+            <a:endParaRPr lang="en-CA" dirty="0"/>
           </a:p>
         </p:txBody>
       </p:sp>
@@ -24592,7 +22444,7 @@
             <a:fld id="{CC0D3929-19F2-429B-ADDC-CA064EDFCD10}" type="slidenum">
               <a:rPr lang="en-NZ" smtClean="0"/>
               <a:pPr/>
-              <a:t>38</a:t>
+              <a:t>35</a:t>
             </a:fld>
             <a:endParaRPr lang="en-NZ"/>
           </a:p>
@@ -24601,7 +22453,7 @@
     </p:spTree>
     <p:extLst>
       <p:ext uri="{BB962C8B-B14F-4D97-AF65-F5344CB8AC3E}">
-        <p14:creationId xmlns:p14="http://schemas.microsoft.com/office/powerpoint/2010/main" val="2440831861"/>
+        <p14:creationId xmlns:p14="http://schemas.microsoft.com/office/powerpoint/2010/main" val="2810373431"/>
       </p:ext>
     </p:extLst>
   </p:cSld>
@@ -24611,7 +22463,7 @@
 </p:sld>
 </file>
 
-<file path=ppt/slides/slide39.xml><?xml version="1.0" encoding="utf-8"?>
+<file path=ppt/slides/slide36.xml><?xml version="1.0" encoding="utf-8"?>
 <p:sld xmlns:a="http://schemas.openxmlformats.org/drawingml/2006/main" xmlns:r="http://schemas.openxmlformats.org/officeDocument/2006/relationships" xmlns:p="http://schemas.openxmlformats.org/presentationml/2006/main">
   <p:cSld>
     <p:spTree>
@@ -24666,120 +22518,43 @@
         </p:nvSpPr>
         <p:spPr/>
         <p:txBody>
-          <a:bodyPr>
-            <a:normAutofit/>
-          </a:bodyPr>
-          <a:lstStyle/>
-          <a:p>
-            <a:r>
-              <a:rPr lang="en-US" sz="2600" dirty="0"/>
-              <a:t>Learning decision tables: </a:t>
-            </a:r>
-            <a:r>
-              <a:rPr lang="en-US" sz="2600" dirty="0" err="1"/>
-              <a:t>DecisionTable</a:t>
-            </a:r>
-            <a:endParaRPr lang="en-CA" sz="2600" dirty="0"/>
-          </a:p>
-          <a:p>
+          <a:bodyPr/>
+          <a:lstStyle/>
+          <a:p>
+            <a:pPr lvl="0"/>
+            <a:r>
+              <a:rPr lang="en-US" dirty="0" err="1"/>
+              <a:t>OneClassClassifier</a:t>
+            </a:r>
+            <a:endParaRPr lang="en-US" dirty="0"/>
+          </a:p>
+          <a:p>
+            <a:pPr lvl="1"/>
             <a:r>
               <a:rPr lang="en-US" dirty="0"/>
-              <a:t>Discretization</a:t>
-            </a:r>
-            <a:endParaRPr lang="en-CA" dirty="0"/>
+              <a:t>Implements one-class classification using artificial data (available in the </a:t>
+            </a:r>
+            <a:r>
+              <a:rPr lang="en-US" dirty="0" err="1"/>
+              <a:t>oneClassClassifier</a:t>
+            </a:r>
+            <a:r>
+              <a:rPr lang="en-US" dirty="0"/>
+              <a:t> package) </a:t>
+            </a:r>
+          </a:p>
+          <a:p>
+            <a:r>
+              <a:rPr lang="en-US" dirty="0"/>
+              <a:t>Many other preprocessing tools are available:</a:t>
+            </a:r>
           </a:p>
           <a:p>
             <a:pPr lvl="1"/>
             <a:r>
               <a:rPr lang="en-US" dirty="0"/>
-              <a:t>Discretize (unsupervised and supervised versions)</a:t>
-            </a:r>
-            <a:endParaRPr lang="en-CA" dirty="0"/>
-          </a:p>
-          <a:p>
-            <a:pPr lvl="1"/>
-            <a:r>
-              <a:rPr lang="en-US" dirty="0" err="1"/>
-              <a:t>PKIDiscretize</a:t>
-            </a:r>
-            <a:r>
-              <a:rPr lang="en-US" dirty="0"/>
-              <a:t> (proportional k-interval discretization)</a:t>
-            </a:r>
-            <a:endParaRPr lang="en-CA" dirty="0"/>
-          </a:p>
-          <a:p>
-            <a:pPr lvl="0"/>
-            <a:r>
-              <a:rPr lang="en-US" dirty="0" err="1"/>
-              <a:t>PrincipalComponents</a:t>
-            </a:r>
-            <a:r>
-              <a:rPr lang="en-US" dirty="0"/>
-              <a:t> and </a:t>
-            </a:r>
-            <a:r>
-              <a:rPr lang="en-US" dirty="0" err="1"/>
-              <a:t>RandomProjection</a:t>
-            </a:r>
-            <a:r>
-              <a:rPr lang="en-US" dirty="0"/>
-              <a:t> </a:t>
-            </a:r>
-          </a:p>
-          <a:p>
-            <a:pPr lvl="0"/>
-            <a:r>
-              <a:rPr lang="en-US" dirty="0" err="1"/>
-              <a:t>FastICA</a:t>
-            </a:r>
-            <a:r>
-              <a:rPr lang="en-US" dirty="0"/>
-              <a:t> (independent component analysis, in the </a:t>
-            </a:r>
-            <a:r>
-              <a:rPr lang="en-US" dirty="0" err="1"/>
-              <a:t>StudentFilters</a:t>
-            </a:r>
-            <a:r>
-              <a:rPr lang="en-US" dirty="0"/>
-              <a:t> package)</a:t>
-            </a:r>
-            <a:endParaRPr lang="en-CA" dirty="0"/>
-          </a:p>
-          <a:p>
-            <a:pPr lvl="0"/>
-            <a:r>
-              <a:rPr lang="en-US" dirty="0" err="1"/>
-              <a:t>StringToWordVector</a:t>
-            </a:r>
-            <a:r>
-              <a:rPr lang="en-US" dirty="0"/>
-              <a:t> (text to attribute vectors)</a:t>
-            </a:r>
-            <a:endParaRPr lang="en-CA" dirty="0"/>
-          </a:p>
-          <a:p>
-            <a:pPr lvl="0"/>
-            <a:r>
-              <a:rPr lang="en-US" dirty="0" err="1"/>
-              <a:t>PLSFilter</a:t>
-            </a:r>
-            <a:r>
-              <a:rPr lang="en-US" dirty="0"/>
-              <a:t> (partial least squares transformation) </a:t>
-            </a:r>
-            <a:endParaRPr lang="en-CA" dirty="0"/>
-          </a:p>
-          <a:p>
-            <a:pPr lvl="0"/>
-            <a:r>
-              <a:rPr lang="en-US" dirty="0"/>
-              <a:t>Resampling and reservoir sampling</a:t>
-            </a:r>
-            <a:endParaRPr lang="en-CA" dirty="0"/>
-          </a:p>
-          <a:p>
+              <a:t>Arithmetic operations; time-series operations; obfuscation; generating cluster membership values; adding noise; various conversions between numeric, binary, and nominal attributes; and various data cleansing operations </a:t>
+            </a:r>
             <a:endParaRPr lang="en-CA" dirty="0"/>
           </a:p>
           <a:p>
@@ -24805,7 +22580,7 @@
             <a:fld id="{CC0D3929-19F2-429B-ADDC-CA064EDFCD10}" type="slidenum">
               <a:rPr lang="en-NZ" smtClean="0"/>
               <a:pPr/>
-              <a:t>39</a:t>
+              <a:t>36</a:t>
             </a:fld>
             <a:endParaRPr lang="en-NZ"/>
           </a:p>
@@ -24814,7 +22589,7 @@
     </p:spTree>
     <p:extLst>
       <p:ext uri="{BB962C8B-B14F-4D97-AF65-F5344CB8AC3E}">
-        <p14:creationId xmlns:p14="http://schemas.microsoft.com/office/powerpoint/2010/main" val="2810373431"/>
+        <p14:creationId xmlns:p14="http://schemas.microsoft.com/office/powerpoint/2010/main" val="3912771623"/>
       </p:ext>
     </p:extLst>
   </p:cSld>
@@ -24959,142 +22734,6 @@
 </p:sld>
 </file>
 
-<file path=ppt/slides/slide40.xml><?xml version="1.0" encoding="utf-8"?>
-<p:sld xmlns:a="http://schemas.openxmlformats.org/drawingml/2006/main" xmlns:r="http://schemas.openxmlformats.org/officeDocument/2006/relationships" xmlns:p="http://schemas.openxmlformats.org/presentationml/2006/main">
-  <p:cSld>
-    <p:spTree>
-      <p:nvGrpSpPr>
-        <p:cNvPr id="1" name=""/>
-        <p:cNvGrpSpPr/>
-        <p:nvPr/>
-      </p:nvGrpSpPr>
-      <p:grpSpPr>
-        <a:xfrm>
-          <a:off x="0" y="0"/>
-          <a:ext cx="0" cy="0"/>
-          <a:chOff x="0" y="0"/>
-          <a:chExt cx="0" cy="0"/>
-        </a:xfrm>
-      </p:grpSpPr>
-      <p:sp>
-        <p:nvSpPr>
-          <p:cNvPr id="2" name="Title 1"/>
-          <p:cNvSpPr>
-            <a:spLocks noGrp="1"/>
-          </p:cNvSpPr>
-          <p:nvPr>
-            <p:ph type="title"/>
-          </p:nvPr>
-        </p:nvSpPr>
-        <p:spPr/>
-        <p:txBody>
-          <a:bodyPr/>
-          <a:lstStyle/>
-          <a:p>
-            <a:r>
-              <a:rPr lang="en-CA" dirty="0" err="1"/>
-              <a:t>Weka</a:t>
-            </a:r>
-            <a:r>
-              <a:rPr lang="en-CA" dirty="0"/>
-              <a:t> implementations</a:t>
-            </a:r>
-          </a:p>
-        </p:txBody>
-      </p:sp>
-      <p:sp>
-        <p:nvSpPr>
-          <p:cNvPr id="3" name="Content Placeholder 2"/>
-          <p:cNvSpPr>
-            <a:spLocks noGrp="1"/>
-          </p:cNvSpPr>
-          <p:nvPr>
-            <p:ph idx="1"/>
-          </p:nvPr>
-        </p:nvSpPr>
-        <p:spPr/>
-        <p:txBody>
-          <a:bodyPr/>
-          <a:lstStyle/>
-          <a:p>
-            <a:pPr lvl="0"/>
-            <a:r>
-              <a:rPr lang="en-US" dirty="0" err="1"/>
-              <a:t>OneClassClassifier</a:t>
-            </a:r>
-            <a:endParaRPr lang="en-US" dirty="0"/>
-          </a:p>
-          <a:p>
-            <a:pPr lvl="1"/>
-            <a:r>
-              <a:rPr lang="en-US" dirty="0"/>
-              <a:t>Implements one-class classification using artificial data (available in the </a:t>
-            </a:r>
-            <a:r>
-              <a:rPr lang="en-US" dirty="0" err="1"/>
-              <a:t>oneClassClassifier</a:t>
-            </a:r>
-            <a:r>
-              <a:rPr lang="en-US" dirty="0"/>
-              <a:t> package) </a:t>
-            </a:r>
-          </a:p>
-          <a:p>
-            <a:r>
-              <a:rPr lang="en-US" dirty="0"/>
-              <a:t>Many other preprocessing tools are available:</a:t>
-            </a:r>
-          </a:p>
-          <a:p>
-            <a:pPr lvl="1"/>
-            <a:r>
-              <a:rPr lang="en-US" dirty="0"/>
-              <a:t>Arithmetic operations; time-series operations; obfuscation; generating cluster membership values; adding noise; various conversions between numeric, binary, and nominal attributes; and various data cleansing operations </a:t>
-            </a:r>
-            <a:endParaRPr lang="en-CA" dirty="0"/>
-          </a:p>
-          <a:p>
-            <a:endParaRPr lang="en-CA" dirty="0"/>
-          </a:p>
-        </p:txBody>
-      </p:sp>
-      <p:sp>
-        <p:nvSpPr>
-          <p:cNvPr id="4" name="Slide Number Placeholder 3"/>
-          <p:cNvSpPr>
-            <a:spLocks noGrp="1"/>
-          </p:cNvSpPr>
-          <p:nvPr>
-            <p:ph type="sldNum" sz="quarter" idx="12"/>
-          </p:nvPr>
-        </p:nvSpPr>
-        <p:spPr/>
-        <p:txBody>
-          <a:bodyPr/>
-          <a:lstStyle/>
-          <a:p>
-            <a:fld id="{CC0D3929-19F2-429B-ADDC-CA064EDFCD10}" type="slidenum">
-              <a:rPr lang="en-NZ" smtClean="0"/>
-              <a:pPr/>
-              <a:t>40</a:t>
-            </a:fld>
-            <a:endParaRPr lang="en-NZ"/>
-          </a:p>
-        </p:txBody>
-      </p:sp>
-    </p:spTree>
-    <p:extLst>
-      <p:ext uri="{BB962C8B-B14F-4D97-AF65-F5344CB8AC3E}">
-        <p14:creationId xmlns:p14="http://schemas.microsoft.com/office/powerpoint/2010/main" val="3912771623"/>
-      </p:ext>
-    </p:extLst>
-  </p:cSld>
-  <p:clrMapOvr>
-    <a:masterClrMapping/>
-  </p:clrMapOvr>
-</p:sld>
-</file>
-
 <file path=ppt/slides/slide5.xml><?xml version="1.0" encoding="utf-8"?>
 <p:sld xmlns:a="http://schemas.openxmlformats.org/drawingml/2006/main" xmlns:r="http://schemas.openxmlformats.org/officeDocument/2006/relationships" xmlns:p="http://schemas.openxmlformats.org/presentationml/2006/main">
   <p:cSld name="Scheme-independent attribute selection">
@@ -25407,12 +23046,12 @@
           <a:graphicData uri="http://schemas.openxmlformats.org/presentationml/2006/ole">
             <mc:AlternateContent xmlns:mc="http://schemas.openxmlformats.org/markup-compatibility/2006">
               <mc:Choice xmlns:v="urn:schemas-microsoft-com:vml" Requires="v">
-                <p:oleObj spid="_x0000_s1028" name="Equation" r:id="rId4" imgW="2628900" imgH="419100" progId="Equation.3">
+                <p:oleObj name="Equation" r:id="rId3" imgW="2628900" imgH="419100" progId="Equation.3">
                   <p:embed/>
                 </p:oleObj>
               </mc:Choice>
               <mc:Fallback>
-                <p:oleObj name="Equation" r:id="rId4" imgW="2628900" imgH="419100" progId="Equation.3">
+                <p:oleObj name="Equation" r:id="rId3" imgW="2628900" imgH="419100" progId="Equation.3">
                   <p:embed/>
                   <p:pic>
                     <p:nvPicPr>
@@ -25421,7 +23060,7 @@
                       <p:nvPr/>
                     </p:nvPicPr>
                     <p:blipFill>
-                      <a:blip r:embed="rId5"/>
+                      <a:blip r:embed="rId4"/>
                       <a:stretch>
                         <a:fillRect/>
                       </a:stretch>
@@ -25464,12 +23103,12 @@
           <a:graphicData uri="http://schemas.openxmlformats.org/presentationml/2006/ole">
             <mc:AlternateContent xmlns:mc="http://schemas.openxmlformats.org/markup-compatibility/2006">
               <mc:Choice xmlns:v="urn:schemas-microsoft-com:vml" Requires="v">
-                <p:oleObj spid="_x0000_s1029" name="Equation" r:id="rId6" imgW="1968500" imgH="342900" progId="Equation.3">
+                <p:oleObj name="Equation" r:id="rId5" imgW="1968500" imgH="342900" progId="Equation.3">
                   <p:embed/>
                 </p:oleObj>
               </mc:Choice>
               <mc:Fallback>
-                <p:oleObj name="Equation" r:id="rId6" imgW="1968500" imgH="342900" progId="Equation.3">
+                <p:oleObj name="Equation" r:id="rId5" imgW="1968500" imgH="342900" progId="Equation.3">
                   <p:embed/>
                   <p:pic>
                     <p:nvPicPr>
@@ -25478,7 +23117,7 @@
                       <p:nvPr/>
                     </p:nvPicPr>
                     <p:blipFill>
-                      <a:blip r:embed="rId7"/>
+                      <a:blip r:embed="rId6"/>
                       <a:stretch>
                         <a:fillRect/>
                       </a:stretch>

--- a/DMcourse/Chapter8.pptx
+++ b/DMcourse/Chapter8.pptx
@@ -510,7 +510,7 @@
           <a:p>
             <a:fld id="{7415830B-B976-4DC8-93A0-A38CBFE46F8A}" type="datetimeFigureOut">
               <a:rPr lang="en-US"/>
-              <a:t>3/9/2026</a:t>
+              <a:t>3/11/2026</a:t>
             </a:fld>
             <a:endParaRPr lang="en-US"/>
           </a:p>
@@ -675,7 +675,7 @@
           <a:p>
             <a:fld id="{7AB9731E-17D4-455B-8CEF-653BE9B92AC2}" type="datetimeFigureOut">
               <a:rPr lang="en-US"/>
-              <a:t>3/9/2026</a:t>
+              <a:t>3/11/2026</a:t>
             </a:fld>
             <a:endParaRPr lang="en-US"/>
           </a:p>
@@ -1504,7 +1504,7 @@
                 <a:tabLst/>
                 <a:defRPr/>
               </a:pPr>
-              <a:t>3/9/2026</a:t>
+              <a:t>3/11/2026</a:t>
             </a:fld>
             <a:endParaRPr kumimoji="0" lang="en-US" sz="1200" b="0" i="0" u="none" strike="noStrike" kern="1200" cap="none" spc="0" normalizeH="0" baseline="0" noProof="0">
               <a:ln>
@@ -1913,7 +1913,7 @@
                 <a:tabLst/>
                 <a:defRPr/>
               </a:pPr>
-              <a:t>3/9/2026</a:t>
+              <a:t>3/11/2026</a:t>
             </a:fld>
             <a:endParaRPr kumimoji="0" lang="en-US" sz="1200" b="0" i="0" u="none" strike="noStrike" kern="1200" cap="none" spc="0" normalizeH="0" baseline="0" noProof="0">
               <a:ln>
@@ -2322,7 +2322,7 @@
                 <a:tabLst/>
                 <a:defRPr/>
               </a:pPr>
-              <a:t>3/9/2026</a:t>
+              <a:t>3/11/2026</a:t>
             </a:fld>
             <a:endParaRPr kumimoji="0" lang="en-US" sz="1200" b="0" i="0" u="none" strike="noStrike" kern="1200" cap="none" spc="0" normalizeH="0" baseline="0" noProof="0">
               <a:ln>
@@ -2731,7 +2731,7 @@
                 <a:tabLst/>
                 <a:defRPr/>
               </a:pPr>
-              <a:t>3/9/2026</a:t>
+              <a:t>3/11/2026</a:t>
             </a:fld>
             <a:endParaRPr kumimoji="0" lang="en-US" sz="1200" b="0" i="0" u="none" strike="noStrike" kern="1200" cap="none" spc="0" normalizeH="0" baseline="0" noProof="0">
               <a:ln>
@@ -3140,7 +3140,7 @@
                 <a:tabLst/>
                 <a:defRPr/>
               </a:pPr>
-              <a:t>3/9/2026</a:t>
+              <a:t>3/11/2026</a:t>
             </a:fld>
             <a:endParaRPr kumimoji="0" lang="en-US" sz="1200" b="0" i="0" u="none" strike="noStrike" kern="1200" cap="none" spc="0" normalizeH="0" baseline="0" noProof="0">
               <a:ln>
@@ -3549,7 +3549,7 @@
                 <a:tabLst/>
                 <a:defRPr/>
               </a:pPr>
-              <a:t>3/9/2026</a:t>
+              <a:t>3/11/2026</a:t>
             </a:fld>
             <a:endParaRPr kumimoji="0" lang="en-US" sz="1200" b="0" i="0" u="none" strike="noStrike" kern="1200" cap="none" spc="0" normalizeH="0" baseline="0" noProof="0">
               <a:ln>
@@ -3958,7 +3958,7 @@
                 <a:tabLst/>
                 <a:defRPr/>
               </a:pPr>
-              <a:t>3/9/2026</a:t>
+              <a:t>3/11/2026</a:t>
             </a:fld>
             <a:endParaRPr kumimoji="0" lang="en-US" sz="1200" b="0" i="0" u="none" strike="noStrike" kern="1200" cap="none" spc="0" normalizeH="0" baseline="0" noProof="0">
               <a:ln>
@@ -4367,7 +4367,7 @@
                 <a:tabLst/>
                 <a:defRPr/>
               </a:pPr>
-              <a:t>3/9/2026</a:t>
+              <a:t>3/11/2026</a:t>
             </a:fld>
             <a:endParaRPr kumimoji="0" lang="en-US" sz="1200" b="0" i="0" u="none" strike="noStrike" kern="1200" cap="none" spc="0" normalizeH="0" baseline="0" noProof="0">
               <a:ln>
@@ -4776,7 +4776,7 @@
                 <a:tabLst/>
                 <a:defRPr/>
               </a:pPr>
-              <a:t>3/9/2026</a:t>
+              <a:t>3/11/2026</a:t>
             </a:fld>
             <a:endParaRPr kumimoji="0" lang="en-US" sz="1200" b="0" i="0" u="none" strike="noStrike" kern="1200" cap="none" spc="0" normalizeH="0" baseline="0" noProof="0">
               <a:ln>
@@ -5185,7 +5185,7 @@
                 <a:tabLst/>
                 <a:defRPr/>
               </a:pPr>
-              <a:t>3/9/2026</a:t>
+              <a:t>3/11/2026</a:t>
             </a:fld>
             <a:endParaRPr kumimoji="0" lang="en-US" sz="1200" b="0" i="0" u="none" strike="noStrike" kern="1200" cap="none" spc="0" normalizeH="0" baseline="0" noProof="0">
               <a:ln>
@@ -5594,7 +5594,7 @@
                 <a:tabLst/>
                 <a:defRPr/>
               </a:pPr>
-              <a:t>3/9/2026</a:t>
+              <a:t>3/11/2026</a:t>
             </a:fld>
             <a:endParaRPr kumimoji="0" lang="en-US" sz="1200" b="0" i="0" u="none" strike="noStrike" kern="1200" cap="none" spc="0" normalizeH="0" baseline="0" noProof="0">
               <a:ln>
@@ -6003,7 +6003,7 @@
                 <a:tabLst/>
                 <a:defRPr/>
               </a:pPr>
-              <a:t>3/9/2026</a:t>
+              <a:t>3/11/2026</a:t>
             </a:fld>
             <a:endParaRPr kumimoji="0" lang="en-US" sz="1200" b="0" i="0" u="none" strike="noStrike" kern="1200" cap="none" spc="0" normalizeH="0" baseline="0" noProof="0">
               <a:ln>
@@ -6412,7 +6412,7 @@
                 <a:tabLst/>
                 <a:defRPr/>
               </a:pPr>
-              <a:t>3/9/2026</a:t>
+              <a:t>3/11/2026</a:t>
             </a:fld>
             <a:endParaRPr kumimoji="0" lang="en-US" sz="1200" b="0" i="0" u="none" strike="noStrike" kern="1200" cap="none" spc="0" normalizeH="0" baseline="0" noProof="0">
               <a:ln>
@@ -6821,7 +6821,7 @@
                 <a:tabLst/>
                 <a:defRPr/>
               </a:pPr>
-              <a:t>3/9/2026</a:t>
+              <a:t>3/11/2026</a:t>
             </a:fld>
             <a:endParaRPr kumimoji="0" lang="en-US" sz="1200" b="0" i="0" u="none" strike="noStrike" kern="1200" cap="none" spc="0" normalizeH="0" baseline="0" noProof="0">
               <a:ln>
@@ -7230,7 +7230,7 @@
                 <a:tabLst/>
                 <a:defRPr/>
               </a:pPr>
-              <a:t>3/9/2026</a:t>
+              <a:t>3/11/2026</a:t>
             </a:fld>
             <a:endParaRPr kumimoji="0" lang="en-US" sz="1200" b="0" i="0" u="none" strike="noStrike" kern="1200" cap="none" spc="0" normalizeH="0" baseline="0" noProof="0">
               <a:ln>
@@ -7639,7 +7639,7 @@
                 <a:tabLst/>
                 <a:defRPr/>
               </a:pPr>
-              <a:t>3/9/2026</a:t>
+              <a:t>3/11/2026</a:t>
             </a:fld>
             <a:endParaRPr kumimoji="0" lang="en-US" sz="1200" b="0" i="0" u="none" strike="noStrike" kern="1200" cap="none" spc="0" normalizeH="0" baseline="0" noProof="0">
               <a:ln>
@@ -8048,7 +8048,7 @@
                 <a:tabLst/>
                 <a:defRPr/>
               </a:pPr>
-              <a:t>3/9/2026</a:t>
+              <a:t>3/11/2026</a:t>
             </a:fld>
             <a:endParaRPr kumimoji="0" lang="en-US" sz="1200" b="0" i="0" u="none" strike="noStrike" kern="1200" cap="none" spc="0" normalizeH="0" baseline="0" noProof="0">
               <a:ln>
@@ -8457,7 +8457,7 @@
                 <a:tabLst/>
                 <a:defRPr/>
               </a:pPr>
-              <a:t>3/9/2026</a:t>
+              <a:t>3/11/2026</a:t>
             </a:fld>
             <a:endParaRPr kumimoji="0" lang="en-US" sz="1200" b="0" i="0" u="none" strike="noStrike" kern="1200" cap="none" spc="0" normalizeH="0" baseline="0" noProof="0">
               <a:ln>
@@ -8866,7 +8866,7 @@
                 <a:tabLst/>
                 <a:defRPr/>
               </a:pPr>
-              <a:t>3/9/2026</a:t>
+              <a:t>3/11/2026</a:t>
             </a:fld>
             <a:endParaRPr kumimoji="0" lang="en-US" sz="1200" b="0" i="0" u="none" strike="noStrike" kern="1200" cap="none" spc="0" normalizeH="0" baseline="0" noProof="0">
               <a:ln>
@@ -9275,7 +9275,7 @@
                 <a:tabLst/>
                 <a:defRPr/>
               </a:pPr>
-              <a:t>3/9/2026</a:t>
+              <a:t>3/11/2026</a:t>
             </a:fld>
             <a:endParaRPr kumimoji="0" lang="en-US" sz="1200" b="0" i="0" u="none" strike="noStrike" kern="1200" cap="none" spc="0" normalizeH="0" baseline="0" noProof="0">
               <a:ln>
@@ -9684,7 +9684,7 @@
                 <a:tabLst/>
                 <a:defRPr/>
               </a:pPr>
-              <a:t>3/9/2026</a:t>
+              <a:t>3/11/2026</a:t>
             </a:fld>
             <a:endParaRPr kumimoji="0" lang="en-US" sz="1200" b="0" i="0" u="none" strike="noStrike" kern="1200" cap="none" spc="0" normalizeH="0" baseline="0" noProof="0">
               <a:ln>
@@ -10093,7 +10093,7 @@
                 <a:tabLst/>
                 <a:defRPr/>
               </a:pPr>
-              <a:t>3/9/2026</a:t>
+              <a:t>3/11/2026</a:t>
             </a:fld>
             <a:endParaRPr kumimoji="0" lang="en-US" sz="1200" b="0" i="0" u="none" strike="noStrike" kern="1200" cap="none" spc="0" normalizeH="0" baseline="0" noProof="0">
               <a:ln>
@@ -10502,7 +10502,7 @@
                 <a:tabLst/>
                 <a:defRPr/>
               </a:pPr>
-              <a:t>3/9/2026</a:t>
+              <a:t>3/11/2026</a:t>
             </a:fld>
             <a:endParaRPr kumimoji="0" lang="en-US" sz="1200" b="0" i="0" u="none" strike="noStrike" kern="1200" cap="none" spc="0" normalizeH="0" baseline="0" noProof="0">
               <a:ln>
@@ -10911,7 +10911,7 @@
                 <a:tabLst/>
                 <a:defRPr/>
               </a:pPr>
-              <a:t>3/9/2026</a:t>
+              <a:t>3/11/2026</a:t>
             </a:fld>
             <a:endParaRPr kumimoji="0" lang="en-US" sz="1200" b="0" i="0" u="none" strike="noStrike" kern="1200" cap="none" spc="0" normalizeH="0" baseline="0" noProof="0">
               <a:ln>
@@ -11320,7 +11320,7 @@
                 <a:tabLst/>
                 <a:defRPr/>
               </a:pPr>
-              <a:t>3/9/2026</a:t>
+              <a:t>3/11/2026</a:t>
             </a:fld>
             <a:endParaRPr kumimoji="0" lang="en-US" sz="1200" b="0" i="0" u="none" strike="noStrike" kern="1200" cap="none" spc="0" normalizeH="0" baseline="0" noProof="0">
               <a:ln>
@@ -11729,7 +11729,7 @@
                 <a:tabLst/>
                 <a:defRPr/>
               </a:pPr>
-              <a:t>3/9/2026</a:t>
+              <a:t>3/11/2026</a:t>
             </a:fld>
             <a:endParaRPr kumimoji="0" lang="en-US" sz="1200" b="0" i="0" u="none" strike="noStrike" kern="1200" cap="none" spc="0" normalizeH="0" baseline="0" noProof="0">
               <a:ln>
@@ -12138,7 +12138,7 @@
                 <a:tabLst/>
                 <a:defRPr/>
               </a:pPr>
-              <a:t>3/9/2026</a:t>
+              <a:t>3/11/2026</a:t>
             </a:fld>
             <a:endParaRPr kumimoji="0" lang="en-US" sz="1200" b="0" i="0" u="none" strike="noStrike" kern="1200" cap="none" spc="0" normalizeH="0" baseline="0" noProof="0">
               <a:ln>
@@ -12547,7 +12547,7 @@
                 <a:tabLst/>
                 <a:defRPr/>
               </a:pPr>
-              <a:t>3/9/2026</a:t>
+              <a:t>3/11/2026</a:t>
             </a:fld>
             <a:endParaRPr kumimoji="0" lang="en-US" sz="1200" b="0" i="0" u="none" strike="noStrike" kern="1200" cap="none" spc="0" normalizeH="0" baseline="0" noProof="0">
               <a:ln>
@@ -13005,7 +13005,7 @@
                   </a:prstClr>
                 </a:solidFill>
               </a:rPr>
-              <a:t>9/03/2026</a:t>
+              <a:t>11/03/2026</a:t>
             </a:fld>
             <a:endParaRPr lang="en-NZ">
               <a:solidFill>
@@ -13206,7 +13206,7 @@
                   </a:prstClr>
                 </a:solidFill>
               </a:rPr>
-              <a:t>9/03/2026</a:t>
+              <a:t>11/03/2026</a:t>
             </a:fld>
             <a:endParaRPr lang="en-NZ">
               <a:solidFill>
@@ -13417,7 +13417,7 @@
                   </a:prstClr>
                 </a:solidFill>
               </a:rPr>
-              <a:t>9/03/2026</a:t>
+              <a:t>11/03/2026</a:t>
             </a:fld>
             <a:endParaRPr lang="en-NZ">
               <a:solidFill>
@@ -13618,7 +13618,7 @@
                   </a:prstClr>
                 </a:solidFill>
               </a:rPr>
-              <a:t>9/03/2026</a:t>
+              <a:t>11/03/2026</a:t>
             </a:fld>
             <a:endParaRPr lang="en-NZ">
               <a:solidFill>
@@ -13895,7 +13895,7 @@
                   </a:prstClr>
                 </a:solidFill>
               </a:rPr>
-              <a:t>9/03/2026</a:t>
+              <a:t>11/03/2026</a:t>
             </a:fld>
             <a:endParaRPr lang="en-NZ">
               <a:solidFill>
@@ -14158,7 +14158,7 @@
                   </a:prstClr>
                 </a:solidFill>
               </a:rPr>
-              <a:t>9/03/2026</a:t>
+              <a:t>11/03/2026</a:t>
             </a:fld>
             <a:endParaRPr lang="en-NZ">
               <a:solidFill>
@@ -14556,7 +14556,7 @@
                   </a:prstClr>
                 </a:solidFill>
               </a:rPr>
-              <a:t>9/03/2026</a:t>
+              <a:t>11/03/2026</a:t>
             </a:fld>
             <a:endParaRPr lang="en-NZ">
               <a:solidFill>
@@ -14705,7 +14705,7 @@
                   </a:prstClr>
                 </a:solidFill>
               </a:rPr>
-              <a:t>9/03/2026</a:t>
+              <a:t>11/03/2026</a:t>
             </a:fld>
             <a:endParaRPr lang="en-NZ">
               <a:solidFill>
@@ -14831,7 +14831,7 @@
                   </a:prstClr>
                 </a:solidFill>
               </a:rPr>
-              <a:t>9/03/2026</a:t>
+              <a:t>11/03/2026</a:t>
             </a:fld>
             <a:endParaRPr lang="en-NZ">
               <a:solidFill>
@@ -15139,7 +15139,7 @@
                   </a:prstClr>
                 </a:solidFill>
               </a:rPr>
-              <a:t>9/03/2026</a:t>
+              <a:t>11/03/2026</a:t>
             </a:fld>
             <a:endParaRPr lang="en-NZ">
               <a:solidFill>
@@ -15423,7 +15423,7 @@
                   </a:prstClr>
                 </a:solidFill>
               </a:rPr>
-              <a:t>9/03/2026</a:t>
+              <a:t>11/03/2026</a:t>
             </a:fld>
             <a:endParaRPr lang="en-NZ">
               <a:solidFill>
@@ -15667,7 +15667,7 @@
                   </a:prstClr>
                 </a:solidFill>
               </a:rPr>
-              <a:t>9/03/2026</a:t>
+              <a:t>11/03/2026</a:t>
             </a:fld>
             <a:endParaRPr lang="en-NZ">
               <a:solidFill>
@@ -20953,15 +20953,13 @@
             <a:pPr lvl="1"/>
             <a:r>
               <a:rPr lang="en-US" dirty="0"/>
-              <a:t>Converting multi-class problems into two-class ones</a:t>
-            </a:r>
-          </a:p>
-          <a:p>
-            <a:pPr lvl="1"/>
-            <a:r>
-              <a:rPr lang="en-US" dirty="0"/>
-              <a:t>Re-calibrating probability estimates</a:t>
-            </a:r>
+              <a:t>Converting multi-class problems into </a:t>
+            </a:r>
+            <a:r>
+              <a:rPr lang="en-US"/>
+              <a:t>two-class ones</a:t>
+            </a:r>
+            <a:endParaRPr lang="en-US" dirty="0"/>
           </a:p>
           <a:p>
             <a:endParaRPr lang="en-CA" dirty="0"/>

--- a/DMcourse/Chapter8.pptx
+++ b/DMcourse/Chapter8.pptx
@@ -5,10 +5,10 @@
     <p:sldMasterId id="2147483672" r:id="rId1"/>
   </p:sldMasterIdLst>
   <p:notesMasterIdLst>
-    <p:notesMasterId r:id="rId44"/>
+    <p:notesMasterId r:id="rId45"/>
   </p:notesMasterIdLst>
   <p:handoutMasterIdLst>
-    <p:handoutMasterId r:id="rId45"/>
+    <p:handoutMasterId r:id="rId46"/>
   </p:handoutMasterIdLst>
   <p:sldIdLst>
     <p:sldId id="338" r:id="rId2"/>
@@ -50,9 +50,10 @@
     <p:sldId id="287" r:id="rId38"/>
     <p:sldId id="288" r:id="rId39"/>
     <p:sldId id="289" r:id="rId40"/>
-    <p:sldId id="321" r:id="rId41"/>
-    <p:sldId id="322" r:id="rId42"/>
-    <p:sldId id="324" r:id="rId43"/>
+    <p:sldId id="290" r:id="rId41"/>
+    <p:sldId id="321" r:id="rId42"/>
+    <p:sldId id="322" r:id="rId43"/>
+    <p:sldId id="324" r:id="rId44"/>
   </p:sldIdLst>
   <p:sldSz cx="9144000" cy="6858000" type="screen4x3"/>
   <p:notesSz cx="7304088" cy="9590088"/>
@@ -516,7 +517,7 @@
           <a:p>
             <a:fld id="{7415830B-B976-4DC8-93A0-A38CBFE46F8A}" type="datetimeFigureOut">
               <a:rPr lang="en-US"/>
-              <a:t>3/15/2026</a:t>
+              <a:t>3/16/2026</a:t>
             </a:fld>
             <a:endParaRPr lang="en-US"/>
           </a:p>
@@ -681,7 +682,7 @@
           <a:p>
             <a:fld id="{7AB9731E-17D4-455B-8CEF-653BE9B92AC2}" type="datetimeFigureOut">
               <a:rPr lang="en-US"/>
-              <a:t>3/15/2026</a:t>
+              <a:t>3/16/2026</a:t>
             </a:fld>
             <a:endParaRPr lang="en-US"/>
           </a:p>
@@ -1510,7 +1511,7 @@
                 <a:tabLst/>
                 <a:defRPr/>
               </a:pPr>
-              <a:t>3/15/2026</a:t>
+              <a:t>3/16/2026</a:t>
             </a:fld>
             <a:endParaRPr kumimoji="0" lang="en-US" sz="1200" b="0" i="0" u="none" strike="noStrike" kern="1200" cap="none" spc="0" normalizeH="0" baseline="0" noProof="0">
               <a:ln>
@@ -1919,7 +1920,7 @@
                 <a:tabLst/>
                 <a:defRPr/>
               </a:pPr>
-              <a:t>3/15/2026</a:t>
+              <a:t>3/16/2026</a:t>
             </a:fld>
             <a:endParaRPr kumimoji="0" lang="en-US" sz="1200" b="0" i="0" u="none" strike="noStrike" kern="1200" cap="none" spc="0" normalizeH="0" baseline="0" noProof="0">
               <a:ln>
@@ -2328,7 +2329,7 @@
                 <a:tabLst/>
                 <a:defRPr/>
               </a:pPr>
-              <a:t>3/15/2026</a:t>
+              <a:t>3/16/2026</a:t>
             </a:fld>
             <a:endParaRPr kumimoji="0" lang="en-US" sz="1200" b="0" i="0" u="none" strike="noStrike" kern="1200" cap="none" spc="0" normalizeH="0" baseline="0" noProof="0">
               <a:ln>
@@ -2737,7 +2738,7 @@
                 <a:tabLst/>
                 <a:defRPr/>
               </a:pPr>
-              <a:t>3/15/2026</a:t>
+              <a:t>3/16/2026</a:t>
             </a:fld>
             <a:endParaRPr kumimoji="0" lang="en-US" sz="1200" b="0" i="0" u="none" strike="noStrike" kern="1200" cap="none" spc="0" normalizeH="0" baseline="0" noProof="0">
               <a:ln>
@@ -3146,7 +3147,7 @@
                 <a:tabLst/>
                 <a:defRPr/>
               </a:pPr>
-              <a:t>3/15/2026</a:t>
+              <a:t>3/16/2026</a:t>
             </a:fld>
             <a:endParaRPr kumimoji="0" lang="en-US" sz="1200" b="0" i="0" u="none" strike="noStrike" kern="1200" cap="none" spc="0" normalizeH="0" baseline="0" noProof="0">
               <a:ln>
@@ -3555,7 +3556,7 @@
                 <a:tabLst/>
                 <a:defRPr/>
               </a:pPr>
-              <a:t>3/15/2026</a:t>
+              <a:t>3/16/2026</a:t>
             </a:fld>
             <a:endParaRPr kumimoji="0" lang="en-US" sz="1200" b="0" i="0" u="none" strike="noStrike" kern="1200" cap="none" spc="0" normalizeH="0" baseline="0" noProof="0">
               <a:ln>
@@ -3964,7 +3965,7 @@
                 <a:tabLst/>
                 <a:defRPr/>
               </a:pPr>
-              <a:t>3/15/2026</a:t>
+              <a:t>3/16/2026</a:t>
             </a:fld>
             <a:endParaRPr kumimoji="0" lang="en-US" sz="1200" b="0" i="0" u="none" strike="noStrike" kern="1200" cap="none" spc="0" normalizeH="0" baseline="0" noProof="0">
               <a:ln>
@@ -4373,7 +4374,7 @@
                 <a:tabLst/>
                 <a:defRPr/>
               </a:pPr>
-              <a:t>3/15/2026</a:t>
+              <a:t>3/16/2026</a:t>
             </a:fld>
             <a:endParaRPr kumimoji="0" lang="en-US" sz="1200" b="0" i="0" u="none" strike="noStrike" kern="1200" cap="none" spc="0" normalizeH="0" baseline="0" noProof="0">
               <a:ln>
@@ -4782,7 +4783,7 @@
                 <a:tabLst/>
                 <a:defRPr/>
               </a:pPr>
-              <a:t>3/15/2026</a:t>
+              <a:t>3/16/2026</a:t>
             </a:fld>
             <a:endParaRPr kumimoji="0" lang="en-US" sz="1200" b="0" i="0" u="none" strike="noStrike" kern="1200" cap="none" spc="0" normalizeH="0" baseline="0" noProof="0">
               <a:ln>
@@ -5191,7 +5192,7 @@
                 <a:tabLst/>
                 <a:defRPr/>
               </a:pPr>
-              <a:t>3/15/2026</a:t>
+              <a:t>3/16/2026</a:t>
             </a:fld>
             <a:endParaRPr kumimoji="0" lang="en-US" sz="1200" b="0" i="0" u="none" strike="noStrike" kern="1200" cap="none" spc="0" normalizeH="0" baseline="0" noProof="0">
               <a:ln>
@@ -5600,7 +5601,7 @@
                 <a:tabLst/>
                 <a:defRPr/>
               </a:pPr>
-              <a:t>3/15/2026</a:t>
+              <a:t>3/16/2026</a:t>
             </a:fld>
             <a:endParaRPr kumimoji="0" lang="en-US" sz="1200" b="0" i="0" u="none" strike="noStrike" kern="1200" cap="none" spc="0" normalizeH="0" baseline="0" noProof="0">
               <a:ln>
@@ -6009,7 +6010,7 @@
                 <a:tabLst/>
                 <a:defRPr/>
               </a:pPr>
-              <a:t>3/15/2026</a:t>
+              <a:t>3/16/2026</a:t>
             </a:fld>
             <a:endParaRPr kumimoji="0" lang="en-US" sz="1200" b="0" i="0" u="none" strike="noStrike" kern="1200" cap="none" spc="0" normalizeH="0" baseline="0" noProof="0">
               <a:ln>
@@ -6418,7 +6419,7 @@
                 <a:tabLst/>
                 <a:defRPr/>
               </a:pPr>
-              <a:t>3/15/2026</a:t>
+              <a:t>3/16/2026</a:t>
             </a:fld>
             <a:endParaRPr kumimoji="0" lang="en-US" sz="1200" b="0" i="0" u="none" strike="noStrike" kern="1200" cap="none" spc="0" normalizeH="0" baseline="0" noProof="0">
               <a:ln>
@@ -6827,7 +6828,7 @@
                 <a:tabLst/>
                 <a:defRPr/>
               </a:pPr>
-              <a:t>3/15/2026</a:t>
+              <a:t>3/16/2026</a:t>
             </a:fld>
             <a:endParaRPr kumimoji="0" lang="en-US" sz="1200" b="0" i="0" u="none" strike="noStrike" kern="1200" cap="none" spc="0" normalizeH="0" baseline="0" noProof="0">
               <a:ln>
@@ -7236,7 +7237,7 @@
                 <a:tabLst/>
                 <a:defRPr/>
               </a:pPr>
-              <a:t>3/15/2026</a:t>
+              <a:t>3/16/2026</a:t>
             </a:fld>
             <a:endParaRPr kumimoji="0" lang="en-US" sz="1200" b="0" i="0" u="none" strike="noStrike" kern="1200" cap="none" spc="0" normalizeH="0" baseline="0" noProof="0">
               <a:ln>
@@ -7645,7 +7646,7 @@
                 <a:tabLst/>
                 <a:defRPr/>
               </a:pPr>
-              <a:t>3/15/2026</a:t>
+              <a:t>3/16/2026</a:t>
             </a:fld>
             <a:endParaRPr kumimoji="0" lang="en-US" sz="1200" b="0" i="0" u="none" strike="noStrike" kern="1200" cap="none" spc="0" normalizeH="0" baseline="0" noProof="0">
               <a:ln>
@@ -8054,7 +8055,7 @@
                 <a:tabLst/>
                 <a:defRPr/>
               </a:pPr>
-              <a:t>3/15/2026</a:t>
+              <a:t>3/16/2026</a:t>
             </a:fld>
             <a:endParaRPr kumimoji="0" lang="en-US" sz="1200" b="0" i="0" u="none" strike="noStrike" kern="1200" cap="none" spc="0" normalizeH="0" baseline="0" noProof="0">
               <a:ln>
@@ -8463,7 +8464,7 @@
                 <a:tabLst/>
                 <a:defRPr/>
               </a:pPr>
-              <a:t>3/15/2026</a:t>
+              <a:t>3/16/2026</a:t>
             </a:fld>
             <a:endParaRPr kumimoji="0" lang="en-US" sz="1200" b="0" i="0" u="none" strike="noStrike" kern="1200" cap="none" spc="0" normalizeH="0" baseline="0" noProof="0">
               <a:ln>
@@ -8872,7 +8873,7 @@
                 <a:tabLst/>
                 <a:defRPr/>
               </a:pPr>
-              <a:t>3/15/2026</a:t>
+              <a:t>3/16/2026</a:t>
             </a:fld>
             <a:endParaRPr kumimoji="0" lang="en-US" sz="1200" b="0" i="0" u="none" strike="noStrike" kern="1200" cap="none" spc="0" normalizeH="0" baseline="0" noProof="0">
               <a:ln>
@@ -9281,7 +9282,7 @@
                 <a:tabLst/>
                 <a:defRPr/>
               </a:pPr>
-              <a:t>3/15/2026</a:t>
+              <a:t>3/16/2026</a:t>
             </a:fld>
             <a:endParaRPr kumimoji="0" lang="en-US" sz="1200" b="0" i="0" u="none" strike="noStrike" kern="1200" cap="none" spc="0" normalizeH="0" baseline="0" noProof="0">
               <a:ln>
@@ -9690,7 +9691,7 @@
                 <a:tabLst/>
                 <a:defRPr/>
               </a:pPr>
-              <a:t>3/15/2026</a:t>
+              <a:t>3/16/2026</a:t>
             </a:fld>
             <a:endParaRPr kumimoji="0" lang="en-US" sz="1200" b="0" i="0" u="none" strike="noStrike" kern="1200" cap="none" spc="0" normalizeH="0" baseline="0" noProof="0">
               <a:ln>
@@ -10099,7 +10100,7 @@
                 <a:tabLst/>
                 <a:defRPr/>
               </a:pPr>
-              <a:t>3/15/2026</a:t>
+              <a:t>3/16/2026</a:t>
             </a:fld>
             <a:endParaRPr kumimoji="0" lang="en-US" sz="1200" b="0" i="0" u="none" strike="noStrike" kern="1200" cap="none" spc="0" normalizeH="0" baseline="0" noProof="0">
               <a:ln>
@@ -10508,7 +10509,7 @@
                 <a:tabLst/>
                 <a:defRPr/>
               </a:pPr>
-              <a:t>3/15/2026</a:t>
+              <a:t>3/16/2026</a:t>
             </a:fld>
             <a:endParaRPr kumimoji="0" lang="en-US" sz="1200" b="0" i="0" u="none" strike="noStrike" kern="1200" cap="none" spc="0" normalizeH="0" baseline="0" noProof="0">
               <a:ln>
@@ -10917,7 +10918,7 @@
                 <a:tabLst/>
                 <a:defRPr/>
               </a:pPr>
-              <a:t>3/15/2026</a:t>
+              <a:t>3/16/2026</a:t>
             </a:fld>
             <a:endParaRPr kumimoji="0" lang="en-US" sz="1200" b="0" i="0" u="none" strike="noStrike" kern="1200" cap="none" spc="0" normalizeH="0" baseline="0" noProof="0">
               <a:ln>
@@ -11326,7 +11327,7 @@
                 <a:tabLst/>
                 <a:defRPr/>
               </a:pPr>
-              <a:t>3/15/2026</a:t>
+              <a:t>3/16/2026</a:t>
             </a:fld>
             <a:endParaRPr kumimoji="0" lang="en-US" sz="1200" b="0" i="0" u="none" strike="noStrike" kern="1200" cap="none" spc="0" normalizeH="0" baseline="0" noProof="0">
               <a:ln>
@@ -11735,7 +11736,7 @@
                 <a:tabLst/>
                 <a:defRPr/>
               </a:pPr>
-              <a:t>3/15/2026</a:t>
+              <a:t>3/16/2026</a:t>
             </a:fld>
             <a:endParaRPr kumimoji="0" lang="en-US" sz="1200" b="0" i="0" u="none" strike="noStrike" kern="1200" cap="none" spc="0" normalizeH="0" baseline="0" noProof="0">
               <a:ln>
@@ -12144,7 +12145,7 @@
                 <a:tabLst/>
                 <a:defRPr/>
               </a:pPr>
-              <a:t>3/15/2026</a:t>
+              <a:t>3/16/2026</a:t>
             </a:fld>
             <a:endParaRPr kumimoji="0" lang="en-US" sz="1200" b="0" i="0" u="none" strike="noStrike" kern="1200" cap="none" spc="0" normalizeH="0" baseline="0" noProof="0">
               <a:ln>
@@ -12553,7 +12554,7 @@
                 <a:tabLst/>
                 <a:defRPr/>
               </a:pPr>
-              <a:t>3/15/2026</a:t>
+              <a:t>3/16/2026</a:t>
             </a:fld>
             <a:endParaRPr kumimoji="0" lang="en-US" sz="1200" b="0" i="0" u="none" strike="noStrike" kern="1200" cap="none" spc="0" normalizeH="0" baseline="0" noProof="0">
               <a:ln>
@@ -12874,7 +12875,7 @@
 </p:notes>
 </file>
 
-<file path=ppt/notesSlides/notesSlide4.xml><?xml version="1.0" encoding="utf-8"?>
+<file path=ppt/notesSlides/notesSlide36.xml><?xml version="1.0" encoding="utf-8"?>
 <p:notes xmlns:a="http://schemas.openxmlformats.org/drawingml/2006/main" xmlns:r="http://schemas.openxmlformats.org/officeDocument/2006/relationships" xmlns:p="http://schemas.openxmlformats.org/presentationml/2006/main">
   <p:cSld>
     <p:spTree>
@@ -12962,7 +12963,416 @@
                 <a:tabLst/>
                 <a:defRPr/>
               </a:pPr>
-              <a:t>3/15/2026</a:t>
+              <a:t>3/16/2026</a:t>
+            </a:fld>
+            <a:endParaRPr kumimoji="0" lang="en-US" sz="1200" b="0" i="0" u="none" strike="noStrike" kern="1200" cap="none" spc="0" normalizeH="0" baseline="0" noProof="0">
+              <a:ln>
+                <a:noFill/>
+              </a:ln>
+              <a:solidFill>
+                <a:schemeClr val="tx1"/>
+              </a:solidFill>
+              <a:effectLst/>
+              <a:uLnTx/>
+              <a:uFillTx/>
+              <a:latin typeface="+mn-lt"/>
+              <a:ea typeface="+mn-ea"/>
+              <a:cs typeface="+mn-cs"/>
+            </a:endParaRPr>
+          </a:p>
+        </p:txBody>
+      </p:sp>
+      <p:sp>
+        <p:nvSpPr>
+          <p:cNvPr id="9" name="Slide Number Placeholder 12"/>
+          <p:cNvSpPr txBox="1">
+            <a:spLocks noGrp="1"/>
+          </p:cNvSpPr>
+          <p:nvPr/>
+        </p:nvSpPr>
+        <p:spPr>
+          <a:xfrm>
+            <a:off x="4134600" y="9110880"/>
+            <a:ext cx="3169440" cy="479160"/>
+          </a:xfrm>
+          <a:prstGeom prst="rect">
+            <a:avLst/>
+          </a:prstGeom>
+          <a:noFill/>
+          <a:ln/>
+        </p:spPr>
+        <p:txBody>
+          <a:bodyPr lIns="0" tIns="0" rIns="0" bIns="0" anchor="b">
+            <a:noAutofit/>
+          </a:bodyPr>
+          <a:lstStyle/>
+          <a:p>
+            <a:pPr marL="0" marR="0" lvl="0" indent="0" algn="r" defTabSz="914400" rtl="0" eaLnBrk="1" fontAlgn="auto" latinLnBrk="0" hangingPunct="0">
+              <a:lnSpc>
+                <a:spcPct val="100000"/>
+              </a:lnSpc>
+              <a:spcBef>
+                <a:spcPts val="0"/>
+              </a:spcBef>
+              <a:spcAft>
+                <a:spcPts val="0"/>
+              </a:spcAft>
+              <a:buClrTx/>
+              <a:buSzTx/>
+              <a:buFontTx/>
+              <a:buNone/>
+              <a:tabLst>
+                <a:tab pos="0" algn="l"/>
+                <a:tab pos="914400" algn="l"/>
+                <a:tab pos="1828800" algn="l"/>
+                <a:tab pos="2743199" algn="l"/>
+                <a:tab pos="3657600" algn="l"/>
+                <a:tab pos="4572000" algn="l"/>
+                <a:tab pos="5486399" algn="l"/>
+                <a:tab pos="6400799" algn="l"/>
+                <a:tab pos="7315200" algn="l"/>
+                <a:tab pos="8229600" algn="l"/>
+                <a:tab pos="9144000" algn="l"/>
+                <a:tab pos="10058400" algn="l"/>
+              </a:tabLst>
+              <a:defRPr/>
+            </a:pPr>
+            <a:fld id="{641BCE0A-E5AD-43C8-8985-56C0ED0AF2EB}" type="slidenum">
+              <a:rPr kumimoji="0" lang="en-US" sz="1400" b="0" i="0" u="none" strike="noStrike" kern="1200" cap="none" spc="0" normalizeH="0" baseline="0" noProof="0" smtClean="0">
+                <a:ln>
+                  <a:noFill/>
+                </a:ln>
+                <a:solidFill>
+                  <a:srgbClr val="000000"/>
+                </a:solidFill>
+                <a:effectLst/>
+                <a:uLnTx/>
+                <a:uFillTx/>
+                <a:latin typeface="Times New Roman" pitchFamily="18"/>
+                <a:ea typeface="Bitstream Vera Sans" pitchFamily="2"/>
+                <a:cs typeface="Lucidasans" pitchFamily="2"/>
+              </a:rPr>
+              <a:pPr marL="0" marR="0" lvl="0" indent="0" algn="r" defTabSz="914400" rtl="0" eaLnBrk="1" fontAlgn="auto" latinLnBrk="0" hangingPunct="0">
+                <a:lnSpc>
+                  <a:spcPct val="100000"/>
+                </a:lnSpc>
+                <a:spcBef>
+                  <a:spcPts val="0"/>
+                </a:spcBef>
+                <a:spcAft>
+                  <a:spcPts val="0"/>
+                </a:spcAft>
+                <a:buClrTx/>
+                <a:buSzTx/>
+                <a:buFontTx/>
+                <a:buNone/>
+                <a:tabLst>
+                  <a:tab pos="0" algn="l"/>
+                  <a:tab pos="914400" algn="l"/>
+                  <a:tab pos="1828800" algn="l"/>
+                  <a:tab pos="2743199" algn="l"/>
+                  <a:tab pos="3657600" algn="l"/>
+                  <a:tab pos="4572000" algn="l"/>
+                  <a:tab pos="5486399" algn="l"/>
+                  <a:tab pos="6400799" algn="l"/>
+                  <a:tab pos="7315200" algn="l"/>
+                  <a:tab pos="8229600" algn="l"/>
+                  <a:tab pos="9144000" algn="l"/>
+                  <a:tab pos="10058400" algn="l"/>
+                </a:tabLst>
+                <a:defRPr/>
+              </a:pPr>
+              <a:t>40</a:t>
+            </a:fld>
+            <a:endParaRPr kumimoji="0" lang="en-US" sz="1400" b="0" i="0" u="none" strike="noStrike" kern="1200" cap="none" spc="0" normalizeH="0" baseline="0" noProof="0">
+              <a:ln>
+                <a:noFill/>
+              </a:ln>
+              <a:solidFill>
+                <a:srgbClr val="000000"/>
+              </a:solidFill>
+              <a:effectLst/>
+              <a:uLnTx/>
+              <a:uFillTx/>
+              <a:latin typeface="Times New Roman" pitchFamily="18"/>
+              <a:ea typeface="Bitstream Vera Sans" pitchFamily="2"/>
+              <a:cs typeface="Lucidasans" pitchFamily="2"/>
+            </a:endParaRPr>
+          </a:p>
+        </p:txBody>
+      </p:sp>
+      <p:sp>
+        <p:nvSpPr>
+          <p:cNvPr id="11" name="Slide Number Placeholder 6"/>
+          <p:cNvSpPr txBox="1">
+            <a:spLocks noGrp="1"/>
+          </p:cNvSpPr>
+          <p:nvPr/>
+        </p:nvSpPr>
+        <p:spPr>
+          <a:xfrm>
+            <a:off x="4134600" y="9110880"/>
+            <a:ext cx="3169440" cy="479160"/>
+          </a:xfrm>
+          <a:prstGeom prst="rect">
+            <a:avLst/>
+          </a:prstGeom>
+          <a:noFill/>
+          <a:ln/>
+        </p:spPr>
+        <p:txBody>
+          <a:bodyPr vert="horz" lIns="91440" tIns="45720" rIns="91440" bIns="45720" rtlCol="0" anchor="b">
+            <a:noAutofit/>
+          </a:bodyPr>
+          <a:lstStyle/>
+          <a:p>
+            <a:pPr marL="0" marR="0" lvl="0" indent="0" algn="r" defTabSz="914400" rtl="0" eaLnBrk="1" fontAlgn="auto" latinLnBrk="0" hangingPunct="0">
+              <a:lnSpc>
+                <a:spcPct val="100000"/>
+              </a:lnSpc>
+              <a:spcBef>
+                <a:spcPts val="0"/>
+              </a:spcBef>
+              <a:spcAft>
+                <a:spcPts val="0"/>
+              </a:spcAft>
+              <a:buClrTx/>
+              <a:buSzTx/>
+              <a:buFontTx/>
+              <a:buNone/>
+              <a:tabLst>
+                <a:tab pos="0" algn="l"/>
+                <a:tab pos="914400" algn="l"/>
+                <a:tab pos="1828800" algn="l"/>
+                <a:tab pos="2743199" algn="l"/>
+                <a:tab pos="3657600" algn="l"/>
+                <a:tab pos="4572000" algn="l"/>
+                <a:tab pos="5486399" algn="l"/>
+                <a:tab pos="6400799" algn="l"/>
+                <a:tab pos="7315200" algn="l"/>
+                <a:tab pos="8229600" algn="l"/>
+                <a:tab pos="9144000" algn="l"/>
+                <a:tab pos="10058400" algn="l"/>
+              </a:tabLst>
+              <a:defRPr/>
+            </a:pPr>
+            <a:fld id="{CEDE2FCE-1E45-4376-839D-13C7DE5C9D3D}" type="slidenum">
+              <a:rPr kumimoji="0" lang="en-US" sz="1400" b="0" i="0" u="none" strike="noStrike" kern="1200" cap="none" spc="0" normalizeH="0" baseline="0" noProof="0" smtClean="0">
+                <a:ln>
+                  <a:noFill/>
+                </a:ln>
+                <a:solidFill>
+                  <a:srgbClr val="000000"/>
+                </a:solidFill>
+                <a:effectLst/>
+                <a:uLnTx/>
+                <a:uFillTx/>
+                <a:latin typeface="Times New Roman" pitchFamily="18"/>
+                <a:ea typeface="Bitstream Vera Sans" pitchFamily="2"/>
+                <a:cs typeface="Lucidasans" pitchFamily="2"/>
+              </a:rPr>
+              <a:pPr marL="0" marR="0" lvl="0" indent="0" algn="r" defTabSz="914400" rtl="0" eaLnBrk="1" fontAlgn="auto" latinLnBrk="0" hangingPunct="0">
+                <a:lnSpc>
+                  <a:spcPct val="100000"/>
+                </a:lnSpc>
+                <a:spcBef>
+                  <a:spcPts val="0"/>
+                </a:spcBef>
+                <a:spcAft>
+                  <a:spcPts val="0"/>
+                </a:spcAft>
+                <a:buClrTx/>
+                <a:buSzTx/>
+                <a:buFontTx/>
+                <a:buNone/>
+                <a:tabLst>
+                  <a:tab pos="0" algn="l"/>
+                  <a:tab pos="914400" algn="l"/>
+                  <a:tab pos="1828800" algn="l"/>
+                  <a:tab pos="2743199" algn="l"/>
+                  <a:tab pos="3657600" algn="l"/>
+                  <a:tab pos="4572000" algn="l"/>
+                  <a:tab pos="5486399" algn="l"/>
+                  <a:tab pos="6400799" algn="l"/>
+                  <a:tab pos="7315200" algn="l"/>
+                  <a:tab pos="8229600" algn="l"/>
+                  <a:tab pos="9144000" algn="l"/>
+                  <a:tab pos="10058400" algn="l"/>
+                </a:tabLst>
+                <a:defRPr/>
+              </a:pPr>
+              <a:t>40</a:t>
+            </a:fld>
+            <a:endParaRPr kumimoji="0" lang="en-US" sz="1400" b="0" i="0" u="none" strike="noStrike" kern="1200" cap="none" spc="0" normalizeH="0" baseline="0" noProof="0">
+              <a:ln>
+                <a:noFill/>
+              </a:ln>
+              <a:solidFill>
+                <a:srgbClr val="000000"/>
+              </a:solidFill>
+              <a:effectLst/>
+              <a:uLnTx/>
+              <a:uFillTx/>
+              <a:latin typeface="Times New Roman" pitchFamily="18"/>
+              <a:ea typeface="Bitstream Vera Sans" pitchFamily="2"/>
+              <a:cs typeface="Lucidasans" pitchFamily="2"/>
+            </a:endParaRPr>
+          </a:p>
+        </p:txBody>
+      </p:sp>
+      <p:sp>
+        <p:nvSpPr>
+          <p:cNvPr id="2" name="Slide Image Placeholder 1"/>
+          <p:cNvSpPr>
+            <a:spLocks noGrp="1" noRot="1" noChangeAspect="1" noResize="1"/>
+          </p:cNvSpPr>
+          <p:nvPr>
+            <p:ph type="sldImg"/>
+          </p:nvPr>
+        </p:nvSpPr>
+        <p:spPr>
+          <a:xfrm>
+            <a:off x="1254125" y="728663"/>
+            <a:ext cx="4795838" cy="3595687"/>
+          </a:xfrm>
+          <a:solidFill>
+            <a:schemeClr val="accent1"/>
+          </a:solidFill>
+          <a:ln w="25400">
+            <a:solidFill>
+              <a:schemeClr val="accent1">
+                <a:shade val="50000"/>
+              </a:schemeClr>
+            </a:solidFill>
+            <a:prstDash val="solid"/>
+          </a:ln>
+        </p:spPr>
+      </p:sp>
+      <p:sp>
+        <p:nvSpPr>
+          <p:cNvPr id="3" name="Notes Placeholder 2"/>
+          <p:cNvSpPr txBox="1">
+            <a:spLocks noGrp="1"/>
+          </p:cNvSpPr>
+          <p:nvPr>
+            <p:ph type="body" sz="quarter" idx="1"/>
+          </p:nvPr>
+        </p:nvSpPr>
+        <p:spPr>
+          <a:xfrm>
+            <a:off x="730440" y="4555440"/>
+            <a:ext cx="5843160" cy="4315320"/>
+          </a:xfrm>
+          <a:noFill/>
+          <a:ln>
+            <a:noFill/>
+          </a:ln>
+        </p:spPr>
+        <p:txBody>
+          <a:bodyPr lIns="0" tIns="0" rIns="0" bIns="0"/>
+          <a:lstStyle/>
+          <a:p>
+            <a:endParaRPr lang="en-US"/>
+          </a:p>
+        </p:txBody>
+      </p:sp>
+    </p:spTree>
+  </p:cSld>
+  <p:clrMapOvr>
+    <a:masterClrMapping/>
+  </p:clrMapOvr>
+</p:notes>
+</file>
+
+<file path=ppt/notesSlides/notesSlide4.xml><?xml version="1.0" encoding="utf-8"?>
+<p:notes xmlns:a="http://schemas.openxmlformats.org/drawingml/2006/main" xmlns:r="http://schemas.openxmlformats.org/officeDocument/2006/relationships" xmlns:p="http://schemas.openxmlformats.org/presentationml/2006/main">
+  <p:cSld>
+    <p:spTree>
+      <p:nvGrpSpPr>
+        <p:cNvPr id="1" name=""/>
+        <p:cNvGrpSpPr/>
+        <p:nvPr/>
+      </p:nvGrpSpPr>
+      <p:grpSpPr>
+        <a:xfrm>
+          <a:off x="0" y="0"/>
+          <a:ext cx="0" cy="0"/>
+          <a:chOff x="0" y="0"/>
+          <a:chExt cx="0" cy="0"/>
+        </a:xfrm>
+      </p:grpSpPr>
+      <p:sp>
+        <p:nvSpPr>
+          <p:cNvPr id="5" name="Date Placeholder 2"/>
+          <p:cNvSpPr txBox="1">
+            <a:spLocks noGrp="1"/>
+          </p:cNvSpPr>
+          <p:nvPr/>
+        </p:nvSpPr>
+        <p:spPr>
+          <a:xfrm>
+            <a:off x="4137025" y="0"/>
+            <a:ext cx="3165475" cy="481013"/>
+          </a:xfrm>
+          <a:prstGeom prst="rect">
+            <a:avLst/>
+          </a:prstGeom>
+          <a:noFill/>
+        </p:spPr>
+        <p:txBody>
+          <a:bodyPr vert="horz" lIns="91440" tIns="45720" rIns="91440" bIns="45720" rtlCol="0"/>
+          <a:lstStyle/>
+          <a:p>
+            <a:pPr marL="0" marR="0" lvl="0" indent="0" algn="r" defTabSz="914400" rtl="0" eaLnBrk="1" fontAlgn="auto" latinLnBrk="0" hangingPunct="1">
+              <a:lnSpc>
+                <a:spcPct val="100000"/>
+              </a:lnSpc>
+              <a:spcBef>
+                <a:spcPts val="0"/>
+              </a:spcBef>
+              <a:spcAft>
+                <a:spcPts val="0"/>
+              </a:spcAft>
+              <a:buClrTx/>
+              <a:buSzTx/>
+              <a:buFontTx/>
+              <a:buNone/>
+              <a:tabLst/>
+              <a:defRPr/>
+            </a:pPr>
+            <a:fld id="{7AB9731E-17D4-455B-8CEF-653BE9B92AC2}" type="datetimeFigureOut">
+              <a:rPr kumimoji="0" lang="en-US" sz="1200" b="0" i="0" u="none" strike="noStrike" kern="1200" cap="none" spc="0" normalizeH="0" baseline="0" noProof="0" smtClean="0">
+                <a:ln>
+                  <a:noFill/>
+                </a:ln>
+                <a:solidFill>
+                  <a:schemeClr val="tx1"/>
+                </a:solidFill>
+                <a:effectLst/>
+                <a:uLnTx/>
+                <a:uFillTx/>
+                <a:latin typeface="+mn-lt"/>
+                <a:ea typeface="+mn-ea"/>
+                <a:cs typeface="+mn-cs"/>
+              </a:rPr>
+              <a:pPr marL="0" marR="0" lvl="0" indent="0" algn="r" defTabSz="914400" rtl="0" eaLnBrk="1" fontAlgn="auto" latinLnBrk="0" hangingPunct="1">
+                <a:lnSpc>
+                  <a:spcPct val="100000"/>
+                </a:lnSpc>
+                <a:spcBef>
+                  <a:spcPts val="0"/>
+                </a:spcBef>
+                <a:spcAft>
+                  <a:spcPts val="0"/>
+                </a:spcAft>
+                <a:buClrTx/>
+                <a:buSzTx/>
+                <a:buFontTx/>
+                <a:buNone/>
+                <a:tabLst/>
+                <a:defRPr/>
+              </a:pPr>
+              <a:t>3/16/2026</a:t>
             </a:fld>
             <a:endParaRPr kumimoji="0" lang="en-US" sz="1200" b="0" i="0" u="none" strike="noStrike" kern="1200" cap="none" spc="0" normalizeH="0" baseline="0" noProof="0">
               <a:ln>
@@ -13371,7 +13781,7 @@
                 <a:tabLst/>
                 <a:defRPr/>
               </a:pPr>
-              <a:t>3/15/2026</a:t>
+              <a:t>3/16/2026</a:t>
             </a:fld>
             <a:endParaRPr kumimoji="0" lang="en-US" sz="1200" b="0" i="0" u="none" strike="noStrike" kern="1200" cap="none" spc="0" normalizeH="0" baseline="0" noProof="0">
               <a:ln>
@@ -13780,7 +14190,7 @@
                 <a:tabLst/>
                 <a:defRPr/>
               </a:pPr>
-              <a:t>3/15/2026</a:t>
+              <a:t>3/16/2026</a:t>
             </a:fld>
             <a:endParaRPr kumimoji="0" lang="en-US" sz="1200" b="0" i="0" u="none" strike="noStrike" kern="1200" cap="none" spc="0" normalizeH="0" baseline="0" noProof="0">
               <a:ln>
@@ -14189,7 +14599,7 @@
                 <a:tabLst/>
                 <a:defRPr/>
               </a:pPr>
-              <a:t>3/15/2026</a:t>
+              <a:t>3/16/2026</a:t>
             </a:fld>
             <a:endParaRPr kumimoji="0" lang="en-US" sz="1200" b="0" i="0" u="none" strike="noStrike" kern="1200" cap="none" spc="0" normalizeH="0" baseline="0" noProof="0">
               <a:ln>
@@ -14598,7 +15008,7 @@
                 <a:tabLst/>
                 <a:defRPr/>
               </a:pPr>
-              <a:t>3/15/2026</a:t>
+              <a:t>3/16/2026</a:t>
             </a:fld>
             <a:endParaRPr kumimoji="0" lang="en-US" sz="1200" b="0" i="0" u="none" strike="noStrike" kern="1200" cap="none" spc="0" normalizeH="0" baseline="0" noProof="0">
               <a:ln>
@@ -15007,7 +15417,7 @@
                 <a:tabLst/>
                 <a:defRPr/>
               </a:pPr>
-              <a:t>3/15/2026</a:t>
+              <a:t>3/16/2026</a:t>
             </a:fld>
             <a:endParaRPr kumimoji="0" lang="en-US" sz="1200" b="0" i="0" u="none" strike="noStrike" kern="1200" cap="none" spc="0" normalizeH="0" baseline="0" noProof="0">
               <a:ln>
@@ -15465,7 +15875,7 @@
                   </a:prstClr>
                 </a:solidFill>
               </a:rPr>
-              <a:t>15/03/2026</a:t>
+              <a:t>16/03/2026</a:t>
             </a:fld>
             <a:endParaRPr lang="en-NZ">
               <a:solidFill>
@@ -15666,7 +16076,7 @@
                   </a:prstClr>
                 </a:solidFill>
               </a:rPr>
-              <a:t>15/03/2026</a:t>
+              <a:t>16/03/2026</a:t>
             </a:fld>
             <a:endParaRPr lang="en-NZ">
               <a:solidFill>
@@ -15877,7 +16287,7 @@
                   </a:prstClr>
                 </a:solidFill>
               </a:rPr>
-              <a:t>15/03/2026</a:t>
+              <a:t>16/03/2026</a:t>
             </a:fld>
             <a:endParaRPr lang="en-NZ">
               <a:solidFill>
@@ -16078,7 +16488,7 @@
                   </a:prstClr>
                 </a:solidFill>
               </a:rPr>
-              <a:t>15/03/2026</a:t>
+              <a:t>16/03/2026</a:t>
             </a:fld>
             <a:endParaRPr lang="en-NZ">
               <a:solidFill>
@@ -16355,7 +16765,7 @@
                   </a:prstClr>
                 </a:solidFill>
               </a:rPr>
-              <a:t>15/03/2026</a:t>
+              <a:t>16/03/2026</a:t>
             </a:fld>
             <a:endParaRPr lang="en-NZ">
               <a:solidFill>
@@ -16618,7 +17028,7 @@
                   </a:prstClr>
                 </a:solidFill>
               </a:rPr>
-              <a:t>15/03/2026</a:t>
+              <a:t>16/03/2026</a:t>
             </a:fld>
             <a:endParaRPr lang="en-NZ">
               <a:solidFill>
@@ -17016,7 +17426,7 @@
                   </a:prstClr>
                 </a:solidFill>
               </a:rPr>
-              <a:t>15/03/2026</a:t>
+              <a:t>16/03/2026</a:t>
             </a:fld>
             <a:endParaRPr lang="en-NZ">
               <a:solidFill>
@@ -17165,7 +17575,7 @@
                   </a:prstClr>
                 </a:solidFill>
               </a:rPr>
-              <a:t>15/03/2026</a:t>
+              <a:t>16/03/2026</a:t>
             </a:fld>
             <a:endParaRPr lang="en-NZ">
               <a:solidFill>
@@ -17291,7 +17701,7 @@
                   </a:prstClr>
                 </a:solidFill>
               </a:rPr>
-              <a:t>15/03/2026</a:t>
+              <a:t>16/03/2026</a:t>
             </a:fld>
             <a:endParaRPr lang="en-NZ">
               <a:solidFill>
@@ -17599,7 +18009,7 @@
                   </a:prstClr>
                 </a:solidFill>
               </a:rPr>
-              <a:t>15/03/2026</a:t>
+              <a:t>16/03/2026</a:t>
             </a:fld>
             <a:endParaRPr lang="en-NZ">
               <a:solidFill>
@@ -17883,7 +18293,7 @@
                   </a:prstClr>
                 </a:solidFill>
               </a:rPr>
-              <a:t>15/03/2026</a:t>
+              <a:t>16/03/2026</a:t>
             </a:fld>
             <a:endParaRPr lang="en-NZ">
               <a:solidFill>
@@ -18127,7 +18537,7 @@
                   </a:prstClr>
                 </a:solidFill>
               </a:rPr>
-              <a:t>15/03/2026</a:t>
+              <a:t>16/03/2026</a:t>
             </a:fld>
             <a:endParaRPr lang="en-NZ">
               <a:solidFill>
@@ -27833,229 +28243,7 @@
       </p:grpSpPr>
       <p:sp>
         <p:nvSpPr>
-          <p:cNvPr id="2" name="Title 1"/>
-          <p:cNvSpPr>
-            <a:spLocks noGrp="1"/>
-          </p:cNvSpPr>
-          <p:nvPr>
-            <p:ph type="title"/>
-          </p:nvPr>
-        </p:nvSpPr>
-        <p:spPr/>
-        <p:txBody>
-          <a:bodyPr/>
-          <a:lstStyle/>
-          <a:p>
-            <a:r>
-              <a:rPr lang="en-CA" dirty="0" err="1"/>
-              <a:t>Weka</a:t>
-            </a:r>
-            <a:r>
-              <a:rPr lang="en-CA" dirty="0"/>
-              <a:t> implementations</a:t>
-            </a:r>
-          </a:p>
-        </p:txBody>
-      </p:sp>
-      <p:sp>
-        <p:nvSpPr>
-          <p:cNvPr id="3" name="Content Placeholder 2"/>
-          <p:cNvSpPr>
-            <a:spLocks noGrp="1"/>
-          </p:cNvSpPr>
-          <p:nvPr>
-            <p:ph idx="1"/>
-          </p:nvPr>
-        </p:nvSpPr>
-        <p:spPr>
-          <a:xfrm>
-            <a:off x="330063" y="1215407"/>
-            <a:ext cx="8395080" cy="4961556"/>
-          </a:xfrm>
-        </p:spPr>
-        <p:txBody>
-          <a:bodyPr>
-            <a:normAutofit/>
-          </a:bodyPr>
-          <a:lstStyle/>
-          <a:p>
-            <a:r>
-              <a:rPr lang="en-US" dirty="0"/>
-              <a:t>Attribute selection</a:t>
-            </a:r>
-            <a:endParaRPr lang="en-CA" dirty="0"/>
-          </a:p>
-          <a:p>
-            <a:pPr lvl="1"/>
-            <a:r>
-              <a:rPr lang="en-US" sz="1900" dirty="0" err="1"/>
-              <a:t>CfsSubsetEval</a:t>
-            </a:r>
-            <a:r>
-              <a:rPr lang="en-US" sz="1900" dirty="0"/>
-              <a:t> (correlation-based attribute subset evaluator)</a:t>
-            </a:r>
-            <a:endParaRPr lang="en-CA" sz="1900" dirty="0"/>
-          </a:p>
-          <a:p>
-            <a:pPr lvl="1"/>
-            <a:r>
-              <a:rPr lang="en-US" sz="1900" dirty="0" err="1"/>
-              <a:t>ConsistencySubsetEval</a:t>
-            </a:r>
-            <a:r>
-              <a:rPr lang="en-US" sz="1900" dirty="0"/>
-              <a:t> (measures class consistency for a given set of attributes, in the </a:t>
-            </a:r>
-            <a:r>
-              <a:rPr lang="en-US" sz="1900" dirty="0" err="1"/>
-              <a:t>consistencySubsetEval</a:t>
-            </a:r>
-            <a:r>
-              <a:rPr lang="en-US" sz="1900" dirty="0"/>
-              <a:t> package)</a:t>
-            </a:r>
-            <a:endParaRPr lang="en-CA" sz="1900" dirty="0"/>
-          </a:p>
-          <a:p>
-            <a:pPr lvl="1"/>
-            <a:r>
-              <a:rPr lang="en-US" sz="1900" dirty="0" err="1"/>
-              <a:t>ClassifierSubsetEval</a:t>
-            </a:r>
-            <a:r>
-              <a:rPr lang="en-US" sz="1900" dirty="0"/>
-              <a:t> (uses a classifier for evaluating subsets of attributes, in the </a:t>
-            </a:r>
-            <a:r>
-              <a:rPr lang="en-US" sz="1900" dirty="0" err="1"/>
-              <a:t>classifierBasedAttributeSelection</a:t>
-            </a:r>
-            <a:r>
-              <a:rPr lang="en-US" sz="1900" dirty="0"/>
-              <a:t> package)</a:t>
-            </a:r>
-            <a:endParaRPr lang="en-CA" sz="1900" dirty="0"/>
-          </a:p>
-          <a:p>
-            <a:pPr lvl="1"/>
-            <a:r>
-              <a:rPr lang="en-US" sz="1900" dirty="0" err="1"/>
-              <a:t>SVMAttributeEval</a:t>
-            </a:r>
-            <a:r>
-              <a:rPr lang="en-US" sz="1900" dirty="0"/>
-              <a:t> (ranks attributes according to the magnitude of the coefficients learned by an SVM, in the </a:t>
-            </a:r>
-            <a:r>
-              <a:rPr lang="en-US" sz="1900" dirty="0" err="1"/>
-              <a:t>SVMAttributeEval</a:t>
-            </a:r>
-            <a:r>
-              <a:rPr lang="en-US" sz="1900" dirty="0"/>
-              <a:t> package)</a:t>
-            </a:r>
-          </a:p>
-          <a:p>
-            <a:pPr lvl="1"/>
-            <a:r>
-              <a:rPr lang="en-US" sz="1900" dirty="0" err="1"/>
-              <a:t>ReliefF</a:t>
-            </a:r>
-            <a:r>
-              <a:rPr lang="en-US" sz="1900" dirty="0"/>
-              <a:t> (instance-based approach for ranking attributes)</a:t>
-            </a:r>
-          </a:p>
-          <a:p>
-            <a:pPr lvl="1"/>
-            <a:r>
-              <a:rPr lang="en-US" sz="1900" dirty="0" err="1"/>
-              <a:t>WrapperSubsetEval</a:t>
-            </a:r>
-            <a:r>
-              <a:rPr lang="en-US" sz="1900" dirty="0"/>
-              <a:t> (uses a classifier plus cross-validation)</a:t>
-            </a:r>
-            <a:endParaRPr lang="en-CA" sz="1900" dirty="0"/>
-          </a:p>
-          <a:p>
-            <a:pPr lvl="1"/>
-            <a:r>
-              <a:rPr lang="en-US" sz="1900" dirty="0" err="1"/>
-              <a:t>GreedyStepwise</a:t>
-            </a:r>
-            <a:r>
-              <a:rPr lang="en-US" sz="1900" dirty="0"/>
-              <a:t> (forward selection and backward elimination search)</a:t>
-            </a:r>
-            <a:endParaRPr lang="en-CA" sz="1900" dirty="0"/>
-          </a:p>
-          <a:p>
-            <a:pPr lvl="1"/>
-            <a:r>
-              <a:rPr lang="en-US" sz="1900" dirty="0" err="1"/>
-              <a:t>LinearForwardSelection</a:t>
-            </a:r>
-            <a:r>
-              <a:rPr lang="en-US" sz="1900" dirty="0"/>
-              <a:t> (forward selection with a sliding window of attribute choices at each step of the search, in the </a:t>
-            </a:r>
-            <a:r>
-              <a:rPr lang="en-US" sz="1900" dirty="0" err="1"/>
-              <a:t>linearForwardSelection</a:t>
-            </a:r>
-            <a:r>
-              <a:rPr lang="en-US" sz="1900" dirty="0"/>
-              <a:t> package)</a:t>
-            </a:r>
-            <a:endParaRPr lang="en-CA" sz="1900" dirty="0"/>
-          </a:p>
-          <a:p>
-            <a:pPr lvl="1"/>
-            <a:r>
-              <a:rPr lang="en-US" sz="1900" dirty="0" err="1"/>
-              <a:t>BestFirst</a:t>
-            </a:r>
-            <a:r>
-              <a:rPr lang="en-US" sz="1900" dirty="0"/>
-              <a:t> (search method that uses greedy hill-climbing with backtracking)</a:t>
-            </a:r>
-            <a:endParaRPr lang="en-CA" sz="1900" dirty="0"/>
-          </a:p>
-          <a:p>
-            <a:pPr lvl="1"/>
-            <a:r>
-              <a:rPr lang="en-US" sz="1900" dirty="0" err="1"/>
-              <a:t>RaceSearch</a:t>
-            </a:r>
-            <a:r>
-              <a:rPr lang="en-US" sz="1900" dirty="0"/>
-              <a:t> (uses the race search methodology, in the </a:t>
-            </a:r>
-            <a:r>
-              <a:rPr lang="en-US" sz="1900" dirty="0" err="1"/>
-              <a:t>raceSearch</a:t>
-            </a:r>
-            <a:r>
-              <a:rPr lang="en-US" sz="1900" dirty="0"/>
-              <a:t> package)</a:t>
-            </a:r>
-            <a:endParaRPr lang="en-CA" sz="1900" dirty="0"/>
-          </a:p>
-          <a:p>
-            <a:pPr lvl="1"/>
-            <a:r>
-              <a:rPr lang="en-US" sz="1900" dirty="0"/>
-              <a:t>Ranker (ranks individual attributes according to their evaluation)</a:t>
-            </a:r>
-            <a:endParaRPr lang="en-CA" sz="1900" dirty="0"/>
-          </a:p>
-        </p:txBody>
-      </p:sp>
-      <p:sp>
-        <p:nvSpPr>
-          <p:cNvPr id="4" name="Slide Number Placeholder 3"/>
+          <p:cNvPr id="6" name="Slide Number Placeholder 5"/>
           <p:cNvSpPr>
             <a:spLocks noGrp="1"/>
           </p:cNvSpPr>
@@ -28077,12 +28265,123 @@
           </a:p>
         </p:txBody>
       </p:sp>
+      <p:sp>
+        <p:nvSpPr>
+          <p:cNvPr id="2" name="Title 1"/>
+          <p:cNvSpPr txBox="1">
+            <a:spLocks noGrp="1"/>
+          </p:cNvSpPr>
+          <p:nvPr>
+            <p:ph type="title" idx="4294967295"/>
+          </p:nvPr>
+        </p:nvSpPr>
+        <p:spPr>
+          <a:xfrm>
+            <a:off x="358764" y="-179388"/>
+            <a:ext cx="8452482" cy="1144588"/>
+          </a:xfrm>
+        </p:spPr>
+        <p:txBody>
+          <a:bodyPr>
+            <a:normAutofit/>
+          </a:bodyPr>
+          <a:lstStyle/>
+          <a:p>
+            <a:pPr lvl="0"/>
+            <a:r>
+              <a:rPr lang="en-US" dirty="0"/>
+              <a:t>Transforming multiple classes to binary ones</a:t>
+            </a:r>
+          </a:p>
+        </p:txBody>
+      </p:sp>
+      <p:sp>
+        <p:nvSpPr>
+          <p:cNvPr id="3" name="Text Placeholder 2"/>
+          <p:cNvSpPr txBox="1">
+            <a:spLocks noGrp="1"/>
+          </p:cNvSpPr>
+          <p:nvPr>
+            <p:ph type="body" idx="4294967295"/>
+          </p:nvPr>
+        </p:nvSpPr>
+        <p:spPr>
+          <a:xfrm>
+            <a:off x="358764" y="1224215"/>
+            <a:ext cx="8229600" cy="4674060"/>
+          </a:xfrm>
+        </p:spPr>
+        <p:txBody>
+          <a:bodyPr>
+            <a:normAutofit/>
+          </a:bodyPr>
+          <a:lstStyle/>
+          <a:p>
+            <a:pPr marL="457200" lvl="0" indent="-457200">
+              <a:buFont typeface="Arial"/>
+              <a:buChar char="•"/>
+            </a:pPr>
+            <a:r>
+              <a:rPr lang="en-US" dirty="0"/>
+              <a:t>Some learning algorithms only work with two class problems</a:t>
+            </a:r>
+          </a:p>
+          <a:p>
+            <a:pPr marL="457200" lvl="0" indent="-457200">
+              <a:buFont typeface="Arial"/>
+              <a:buChar char="•"/>
+            </a:pPr>
+            <a:r>
+              <a:rPr lang="en-US" dirty="0"/>
+              <a:t>Sophisticated multi-class variants exist in many cases but can be very slow or difficult to implement</a:t>
+            </a:r>
+          </a:p>
+          <a:p>
+            <a:pPr marL="457200" lvl="0" indent="-457200">
+              <a:buFont typeface="Arial"/>
+              <a:buChar char="•"/>
+            </a:pPr>
+            <a:r>
+              <a:rPr lang="en-US" dirty="0"/>
+              <a:t>A common alternative is to transform multi-class problems into multiple two-class ones</a:t>
+            </a:r>
+          </a:p>
+          <a:p>
+            <a:pPr marL="457200" lvl="0" indent="-457200">
+              <a:buFont typeface="Arial"/>
+              <a:buChar char="•"/>
+            </a:pPr>
+            <a:r>
+              <a:rPr lang="en-US" dirty="0"/>
+              <a:t>Simple methods:</a:t>
+            </a:r>
+          </a:p>
+          <a:p>
+            <a:pPr lvl="1"/>
+            <a:r>
+              <a:rPr lang="en-US" dirty="0"/>
+              <a:t>Discriminate each class against the union of the others – </a:t>
+            </a:r>
+            <a:r>
+              <a:rPr lang="en-US" i="1" dirty="0"/>
+              <a:t>one-vs.-rest</a:t>
+            </a:r>
+          </a:p>
+          <a:p>
+            <a:pPr lvl="1"/>
+            <a:r>
+              <a:rPr lang="en-US" dirty="0"/>
+              <a:t>Build a classifier for every pair of classes – </a:t>
+            </a:r>
+            <a:r>
+              <a:rPr lang="en-US" i="1"/>
+              <a:t>pairwise classification</a:t>
+            </a:r>
+            <a:endParaRPr lang="en-US" i="1" dirty="0"/>
+          </a:p>
+        </p:txBody>
+      </p:sp>
     </p:spTree>
-    <p:extLst>
-      <p:ext uri="{BB962C8B-B14F-4D97-AF65-F5344CB8AC3E}">
-        <p14:creationId xmlns:p14="http://schemas.microsoft.com/office/powerpoint/2010/main" val="2440831861"/>
-      </p:ext>
-    </p:extLst>
   </p:cSld>
   <p:clrMapOvr>
     <a:masterClrMapping/>
@@ -28143,7 +28442,12 @@
             <p:ph idx="1"/>
           </p:nvPr>
         </p:nvSpPr>
-        <p:spPr/>
+        <p:spPr>
+          <a:xfrm>
+            <a:off x="330063" y="1215407"/>
+            <a:ext cx="8395080" cy="4961556"/>
+          </a:xfrm>
+        </p:spPr>
         <p:txBody>
           <a:bodyPr>
             <a:normAutofit/>
@@ -28151,118 +28455,176 @@
           <a:lstStyle/>
           <a:p>
             <a:r>
-              <a:rPr lang="en-US" sz="2600" dirty="0"/>
-              <a:t>Learning decision tables: </a:t>
-            </a:r>
-            <a:r>
-              <a:rPr lang="en-US" sz="2600" dirty="0" err="1"/>
-              <a:t>DecisionTable</a:t>
-            </a:r>
-            <a:endParaRPr lang="en-CA" sz="2600" dirty="0"/>
-          </a:p>
-          <a:p>
-            <a:r>
               <a:rPr lang="en-US" dirty="0"/>
-              <a:t>Discretization</a:t>
+              <a:t>Attribute selection</a:t>
             </a:r>
             <a:endParaRPr lang="en-CA" dirty="0"/>
           </a:p>
           <a:p>
             <a:pPr lvl="1"/>
             <a:r>
-              <a:rPr lang="en-US" dirty="0"/>
-              <a:t>Discretize (unsupervised and supervised versions)</a:t>
-            </a:r>
-            <a:endParaRPr lang="en-CA" dirty="0"/>
+              <a:rPr lang="en-US" sz="1900" dirty="0" err="1"/>
+              <a:t>CfsSubsetEval</a:t>
+            </a:r>
+            <a:r>
+              <a:rPr lang="en-US" sz="1900" dirty="0"/>
+              <a:t> (correlation-based attribute subset evaluator)</a:t>
+            </a:r>
+            <a:endParaRPr lang="en-CA" sz="1900" dirty="0"/>
           </a:p>
           <a:p>
             <a:pPr lvl="1"/>
             <a:r>
-              <a:rPr lang="en-US" dirty="0" err="1"/>
-              <a:t>PKIDiscretize</a:t>
-            </a:r>
-            <a:r>
-              <a:rPr lang="en-US" dirty="0"/>
-              <a:t> (proportional k-interval discretization)</a:t>
-            </a:r>
-            <a:endParaRPr lang="en-CA" dirty="0"/>
-          </a:p>
-          <a:p>
-            <a:pPr lvl="0"/>
-            <a:r>
-              <a:rPr lang="en-US" dirty="0" err="1"/>
-              <a:t>PrincipalComponents</a:t>
-            </a:r>
-            <a:r>
-              <a:rPr lang="en-US" dirty="0"/>
-              <a:t> and </a:t>
-            </a:r>
-            <a:r>
-              <a:rPr lang="en-US" dirty="0" err="1"/>
-              <a:t>RandomProjection</a:t>
-            </a:r>
-            <a:r>
-              <a:rPr lang="en-US" dirty="0"/>
-              <a:t> </a:t>
-            </a:r>
-          </a:p>
-          <a:p>
-            <a:pPr lvl="0"/>
-            <a:r>
-              <a:rPr lang="en-US" dirty="0" err="1"/>
-              <a:t>FastICA</a:t>
-            </a:r>
-            <a:r>
-              <a:rPr lang="en-US" dirty="0"/>
-              <a:t> (independent component analysis, in the </a:t>
-            </a:r>
-            <a:r>
-              <a:rPr lang="en-US" dirty="0" err="1"/>
-              <a:t>StudentFilters</a:t>
-            </a:r>
-            <a:r>
-              <a:rPr lang="en-US" dirty="0"/>
+              <a:rPr lang="en-US" sz="1900" dirty="0" err="1"/>
+              <a:t>ConsistencySubsetEval</a:t>
+            </a:r>
+            <a:r>
+              <a:rPr lang="en-US" sz="1900" dirty="0"/>
+              <a:t> (measures class consistency for a given set of attributes, in the </a:t>
+            </a:r>
+            <a:r>
+              <a:rPr lang="en-US" sz="1900" dirty="0" err="1"/>
+              <a:t>consistencySubsetEval</a:t>
+            </a:r>
+            <a:r>
+              <a:rPr lang="en-US" sz="1900" dirty="0"/>
               <a:t> package)</a:t>
             </a:r>
-            <a:endParaRPr lang="en-CA" dirty="0"/>
-          </a:p>
-          <a:p>
-            <a:pPr lvl="0"/>
-            <a:r>
-              <a:rPr lang="en-US" dirty="0" err="1"/>
-              <a:t>StringToWordVector</a:t>
-            </a:r>
-            <a:r>
-              <a:rPr lang="en-US" dirty="0"/>
-              <a:t> (text to attribute vectors)</a:t>
-            </a:r>
-            <a:endParaRPr lang="en-CA" dirty="0"/>
-          </a:p>
-          <a:p>
-            <a:pPr lvl="0"/>
-            <a:r>
-              <a:rPr lang="en-US" dirty="0" err="1"/>
-              <a:t>PLSFilter</a:t>
-            </a:r>
-            <a:r>
-              <a:rPr lang="en-US" dirty="0"/>
-              <a:t> (partial least squares transformation) </a:t>
-            </a:r>
-            <a:endParaRPr lang="en-CA" dirty="0"/>
-          </a:p>
-          <a:p>
-            <a:pPr lvl="0"/>
-            <a:r>
-              <a:rPr lang="en-US" dirty="0"/>
-              <a:t>Resampling and reservoir sampling</a:t>
-            </a:r>
-            <a:endParaRPr lang="en-CA" dirty="0"/>
-          </a:p>
-          <a:p>
-            <a:endParaRPr lang="en-CA" dirty="0"/>
-          </a:p>
-          <a:p>
-            <a:endParaRPr lang="en-CA" dirty="0"/>
+            <a:endParaRPr lang="en-CA" sz="1900" dirty="0"/>
+          </a:p>
+          <a:p>
+            <a:pPr lvl="1"/>
+            <a:r>
+              <a:rPr lang="en-US" sz="1900" dirty="0" err="1"/>
+              <a:t>ClassifierSubsetEval</a:t>
+            </a:r>
+            <a:r>
+              <a:rPr lang="en-US" sz="1900" dirty="0"/>
+              <a:t> (uses a classifier for evaluating subsets of attributes, in the </a:t>
+            </a:r>
+            <a:r>
+              <a:rPr lang="en-US" sz="1900" dirty="0" err="1"/>
+              <a:t>classifierBasedAttributeSelection</a:t>
+            </a:r>
+            <a:r>
+              <a:rPr lang="en-US" sz="1900" dirty="0"/>
+              <a:t> package)</a:t>
+            </a:r>
+            <a:endParaRPr lang="en-CA" sz="1900" dirty="0"/>
+          </a:p>
+          <a:p>
+            <a:pPr lvl="1"/>
+            <a:r>
+              <a:rPr lang="en-US" sz="1900" dirty="0" err="1"/>
+              <a:t>SVMAttributeEval</a:t>
+            </a:r>
+            <a:r>
+              <a:rPr lang="en-US" sz="1900" dirty="0"/>
+              <a:t> (ranks attributes according to the magnitude of the coefficients learned by an SVM, in the </a:t>
+            </a:r>
+            <a:r>
+              <a:rPr lang="en-US" sz="1900" dirty="0" err="1"/>
+              <a:t>SVMAttributeEval</a:t>
+            </a:r>
+            <a:r>
+              <a:rPr lang="en-US" sz="1900" dirty="0"/>
+              <a:t> package)</a:t>
+            </a:r>
+          </a:p>
+          <a:p>
+            <a:pPr lvl="1"/>
+            <a:r>
+              <a:rPr lang="en-US" sz="1900" dirty="0" err="1"/>
+              <a:t>ReliefF</a:t>
+            </a:r>
+            <a:r>
+              <a:rPr lang="en-US" sz="1900" dirty="0"/>
+              <a:t> (instance-based approach for ranking attributes)</a:t>
+            </a:r>
+          </a:p>
+          <a:p>
+            <a:pPr lvl="1"/>
+            <a:r>
+              <a:rPr lang="en-US" sz="1900" dirty="0" err="1"/>
+              <a:t>WrapperSubsetEval</a:t>
+            </a:r>
+            <a:r>
+              <a:rPr lang="en-US" sz="1900" dirty="0"/>
+              <a:t> (uses a classifier plus cross-validation)</a:t>
+            </a:r>
+            <a:endParaRPr lang="en-CA" sz="1900" dirty="0"/>
+          </a:p>
+          <a:p>
+            <a:pPr lvl="1"/>
+            <a:r>
+              <a:rPr lang="en-US" sz="1900" dirty="0" err="1"/>
+              <a:t>GreedyStepwise</a:t>
+            </a:r>
+            <a:r>
+              <a:rPr lang="en-US" sz="1900" dirty="0"/>
+              <a:t> (forward selection and backward elimination search)</a:t>
+            </a:r>
+            <a:endParaRPr lang="en-CA" sz="1900" dirty="0"/>
+          </a:p>
+          <a:p>
+            <a:pPr lvl="1"/>
+            <a:r>
+              <a:rPr lang="en-US" sz="1900" dirty="0" err="1"/>
+              <a:t>LinearForwardSelection</a:t>
+            </a:r>
+            <a:r>
+              <a:rPr lang="en-US" sz="1900" dirty="0"/>
+              <a:t> (forward selection with a sliding window of attribute choices at each step of the search, in the </a:t>
+            </a:r>
+            <a:r>
+              <a:rPr lang="en-US" sz="1900" dirty="0" err="1"/>
+              <a:t>linearForwardSelection</a:t>
+            </a:r>
+            <a:r>
+              <a:rPr lang="en-US" sz="1900" dirty="0"/>
+              <a:t> package)</a:t>
+            </a:r>
+            <a:endParaRPr lang="en-CA" sz="1900" dirty="0"/>
+          </a:p>
+          <a:p>
+            <a:pPr lvl="1"/>
+            <a:r>
+              <a:rPr lang="en-US" sz="1900" dirty="0" err="1"/>
+              <a:t>BestFirst</a:t>
+            </a:r>
+            <a:r>
+              <a:rPr lang="en-US" sz="1900" dirty="0"/>
+              <a:t> (search method that uses greedy hill-climbing with backtracking)</a:t>
+            </a:r>
+            <a:endParaRPr lang="en-CA" sz="1900" dirty="0"/>
+          </a:p>
+          <a:p>
+            <a:pPr lvl="1"/>
+            <a:r>
+              <a:rPr lang="en-US" sz="1900" dirty="0" err="1"/>
+              <a:t>RaceSearch</a:t>
+            </a:r>
+            <a:r>
+              <a:rPr lang="en-US" sz="1900" dirty="0"/>
+              <a:t> (uses the race search methodology, in the </a:t>
+            </a:r>
+            <a:r>
+              <a:rPr lang="en-US" sz="1900" dirty="0" err="1"/>
+              <a:t>raceSearch</a:t>
+            </a:r>
+            <a:r>
+              <a:rPr lang="en-US" sz="1900" dirty="0"/>
+              <a:t> package)</a:t>
+            </a:r>
+            <a:endParaRPr lang="en-CA" sz="1900" dirty="0"/>
+          </a:p>
+          <a:p>
+            <a:pPr lvl="1"/>
+            <a:r>
+              <a:rPr lang="en-US" sz="1900" dirty="0"/>
+              <a:t>Ranker (ranks individual attributes according to their evaluation)</a:t>
+            </a:r>
+            <a:endParaRPr lang="en-CA" sz="1900" dirty="0"/>
           </a:p>
         </p:txBody>
       </p:sp>
@@ -28293,7 +28655,7 @@
     </p:spTree>
     <p:extLst>
       <p:ext uri="{BB962C8B-B14F-4D97-AF65-F5344CB8AC3E}">
-        <p14:creationId xmlns:p14="http://schemas.microsoft.com/office/powerpoint/2010/main" val="2810373431"/>
+        <p14:creationId xmlns:p14="http://schemas.microsoft.com/office/powerpoint/2010/main" val="2440831861"/>
       </p:ext>
     </p:extLst>
   </p:cSld>
@@ -28358,43 +28720,120 @@
         </p:nvSpPr>
         <p:spPr/>
         <p:txBody>
-          <a:bodyPr/>
-          <a:lstStyle/>
+          <a:bodyPr>
+            <a:normAutofit/>
+          </a:bodyPr>
+          <a:lstStyle/>
+          <a:p>
+            <a:r>
+              <a:rPr lang="en-US" sz="2600" dirty="0"/>
+              <a:t>Learning decision tables: </a:t>
+            </a:r>
+            <a:r>
+              <a:rPr lang="en-US" sz="2600" dirty="0" err="1"/>
+              <a:t>DecisionTable</a:t>
+            </a:r>
+            <a:endParaRPr lang="en-CA" sz="2600" dirty="0"/>
+          </a:p>
+          <a:p>
+            <a:r>
+              <a:rPr lang="en-US" dirty="0"/>
+              <a:t>Discretization</a:t>
+            </a:r>
+            <a:endParaRPr lang="en-CA" dirty="0"/>
+          </a:p>
+          <a:p>
+            <a:pPr lvl="1"/>
+            <a:r>
+              <a:rPr lang="en-US" dirty="0"/>
+              <a:t>Discretize (unsupervised and supervised versions)</a:t>
+            </a:r>
+            <a:endParaRPr lang="en-CA" dirty="0"/>
+          </a:p>
+          <a:p>
+            <a:pPr lvl="1"/>
+            <a:r>
+              <a:rPr lang="en-US" dirty="0" err="1"/>
+              <a:t>PKIDiscretize</a:t>
+            </a:r>
+            <a:r>
+              <a:rPr lang="en-US" dirty="0"/>
+              <a:t> (proportional k-interval discretization)</a:t>
+            </a:r>
+            <a:endParaRPr lang="en-CA" dirty="0"/>
+          </a:p>
           <a:p>
             <a:pPr lvl="0"/>
             <a:r>
               <a:rPr lang="en-US" dirty="0" err="1"/>
-              <a:t>OneClassClassifier</a:t>
-            </a:r>
-            <a:endParaRPr lang="en-US" dirty="0"/>
-          </a:p>
-          <a:p>
-            <a:pPr lvl="1"/>
+              <a:t>PrincipalComponents</a:t>
+            </a:r>
             <a:r>
               <a:rPr lang="en-US" dirty="0"/>
-              <a:t>Implements one-class classification using artificial data (available in the </a:t>
+              <a:t> and </a:t>
             </a:r>
             <a:r>
               <a:rPr lang="en-US" dirty="0" err="1"/>
-              <a:t>oneClassClassifier</a:t>
+              <a:t>RandomProjection</a:t>
             </a:r>
             <a:r>
               <a:rPr lang="en-US" dirty="0"/>
-              <a:t> package) </a:t>
-            </a:r>
-          </a:p>
-          <a:p>
+              <a:t> </a:t>
+            </a:r>
+          </a:p>
+          <a:p>
+            <a:pPr lvl="0"/>
+            <a:r>
+              <a:rPr lang="en-US" dirty="0" err="1"/>
+              <a:t>FastICA</a:t>
+            </a:r>
             <a:r>
               <a:rPr lang="en-US" dirty="0"/>
-              <a:t>Many other preprocessing tools are available:</a:t>
-            </a:r>
-          </a:p>
-          <a:p>
-            <a:pPr lvl="1"/>
+              <a:t> (independent component analysis, in the </a:t>
+            </a:r>
+            <a:r>
+              <a:rPr lang="en-US" dirty="0" err="1"/>
+              <a:t>StudentFilters</a:t>
+            </a:r>
             <a:r>
               <a:rPr lang="en-US" dirty="0"/>
-              <a:t>Arithmetic operations; time-series operations; obfuscation; generating cluster membership values; adding noise; various conversions between numeric, binary, and nominal attributes; and various data cleansing operations </a:t>
-            </a:r>
+              <a:t> package)</a:t>
+            </a:r>
+            <a:endParaRPr lang="en-CA" dirty="0"/>
+          </a:p>
+          <a:p>
+            <a:pPr lvl="0"/>
+            <a:r>
+              <a:rPr lang="en-US" dirty="0" err="1"/>
+              <a:t>StringToWordVector</a:t>
+            </a:r>
+            <a:r>
+              <a:rPr lang="en-US" dirty="0"/>
+              <a:t> (text to attribute vectors)</a:t>
+            </a:r>
+            <a:endParaRPr lang="en-CA" dirty="0"/>
+          </a:p>
+          <a:p>
+            <a:pPr lvl="0"/>
+            <a:r>
+              <a:rPr lang="en-US" dirty="0" err="1"/>
+              <a:t>PLSFilter</a:t>
+            </a:r>
+            <a:r>
+              <a:rPr lang="en-US" dirty="0"/>
+              <a:t> (partial least squares transformation) </a:t>
+            </a:r>
+            <a:endParaRPr lang="en-CA" dirty="0"/>
+          </a:p>
+          <a:p>
+            <a:pPr lvl="0"/>
+            <a:r>
+              <a:rPr lang="en-US" dirty="0"/>
+              <a:t>Resampling and reservoir sampling</a:t>
+            </a:r>
+            <a:endParaRPr lang="en-CA" dirty="0"/>
+          </a:p>
+          <a:p>
             <a:endParaRPr lang="en-CA" dirty="0"/>
           </a:p>
           <a:p>
@@ -28421,6 +28860,142 @@
               <a:rPr lang="en-NZ" smtClean="0"/>
               <a:pPr/>
               <a:t>42</a:t>
+            </a:fld>
+            <a:endParaRPr lang="en-NZ"/>
+          </a:p>
+        </p:txBody>
+      </p:sp>
+    </p:spTree>
+    <p:extLst>
+      <p:ext uri="{BB962C8B-B14F-4D97-AF65-F5344CB8AC3E}">
+        <p14:creationId xmlns:p14="http://schemas.microsoft.com/office/powerpoint/2010/main" val="2810373431"/>
+      </p:ext>
+    </p:extLst>
+  </p:cSld>
+  <p:clrMapOvr>
+    <a:masterClrMapping/>
+  </p:clrMapOvr>
+</p:sld>
+</file>
+
+<file path=ppt/slides/slide43.xml><?xml version="1.0" encoding="utf-8"?>
+<p:sld xmlns:a="http://schemas.openxmlformats.org/drawingml/2006/main" xmlns:r="http://schemas.openxmlformats.org/officeDocument/2006/relationships" xmlns:p="http://schemas.openxmlformats.org/presentationml/2006/main">
+  <p:cSld>
+    <p:spTree>
+      <p:nvGrpSpPr>
+        <p:cNvPr id="1" name=""/>
+        <p:cNvGrpSpPr/>
+        <p:nvPr/>
+      </p:nvGrpSpPr>
+      <p:grpSpPr>
+        <a:xfrm>
+          <a:off x="0" y="0"/>
+          <a:ext cx="0" cy="0"/>
+          <a:chOff x="0" y="0"/>
+          <a:chExt cx="0" cy="0"/>
+        </a:xfrm>
+      </p:grpSpPr>
+      <p:sp>
+        <p:nvSpPr>
+          <p:cNvPr id="2" name="Title 1"/>
+          <p:cNvSpPr>
+            <a:spLocks noGrp="1"/>
+          </p:cNvSpPr>
+          <p:nvPr>
+            <p:ph type="title"/>
+          </p:nvPr>
+        </p:nvSpPr>
+        <p:spPr/>
+        <p:txBody>
+          <a:bodyPr/>
+          <a:lstStyle/>
+          <a:p>
+            <a:r>
+              <a:rPr lang="en-CA" dirty="0" err="1"/>
+              <a:t>Weka</a:t>
+            </a:r>
+            <a:r>
+              <a:rPr lang="en-CA" dirty="0"/>
+              <a:t> implementations</a:t>
+            </a:r>
+          </a:p>
+        </p:txBody>
+      </p:sp>
+      <p:sp>
+        <p:nvSpPr>
+          <p:cNvPr id="3" name="Content Placeholder 2"/>
+          <p:cNvSpPr>
+            <a:spLocks noGrp="1"/>
+          </p:cNvSpPr>
+          <p:nvPr>
+            <p:ph idx="1"/>
+          </p:nvPr>
+        </p:nvSpPr>
+        <p:spPr/>
+        <p:txBody>
+          <a:bodyPr/>
+          <a:lstStyle/>
+          <a:p>
+            <a:pPr lvl="0"/>
+            <a:r>
+              <a:rPr lang="en-US" dirty="0" err="1"/>
+              <a:t>OneClassClassifier</a:t>
+            </a:r>
+            <a:endParaRPr lang="en-US" dirty="0"/>
+          </a:p>
+          <a:p>
+            <a:pPr lvl="1"/>
+            <a:r>
+              <a:rPr lang="en-US" dirty="0"/>
+              <a:t>Implements one-class classification using artificial data (available in the </a:t>
+            </a:r>
+            <a:r>
+              <a:rPr lang="en-US" dirty="0" err="1"/>
+              <a:t>oneClassClassifier</a:t>
+            </a:r>
+            <a:r>
+              <a:rPr lang="en-US" dirty="0"/>
+              <a:t> package) </a:t>
+            </a:r>
+          </a:p>
+          <a:p>
+            <a:r>
+              <a:rPr lang="en-US" dirty="0"/>
+              <a:t>Many other preprocessing tools are available:</a:t>
+            </a:r>
+          </a:p>
+          <a:p>
+            <a:pPr lvl="1"/>
+            <a:r>
+              <a:rPr lang="en-US" dirty="0"/>
+              <a:t>Arithmetic operations; time-series operations; obfuscation; generating cluster membership values; adding noise; various conversions between numeric, binary, and nominal attributes; and various data cleansing operations </a:t>
+            </a:r>
+            <a:endParaRPr lang="en-CA" dirty="0"/>
+          </a:p>
+          <a:p>
+            <a:endParaRPr lang="en-CA" dirty="0"/>
+          </a:p>
+        </p:txBody>
+      </p:sp>
+      <p:sp>
+        <p:nvSpPr>
+          <p:cNvPr id="4" name="Slide Number Placeholder 3"/>
+          <p:cNvSpPr>
+            <a:spLocks noGrp="1"/>
+          </p:cNvSpPr>
+          <p:nvPr>
+            <p:ph type="sldNum" sz="quarter" idx="12"/>
+          </p:nvPr>
+        </p:nvSpPr>
+        <p:spPr/>
+        <p:txBody>
+          <a:bodyPr/>
+          <a:lstStyle/>
+          <a:p>
+            <a:fld id="{CC0D3929-19F2-429B-ADDC-CA064EDFCD10}" type="slidenum">
+              <a:rPr lang="en-NZ" smtClean="0"/>
+              <a:pPr/>
+              <a:t>43</a:t>
             </a:fld>
             <a:endParaRPr lang="en-NZ"/>
           </a:p>

--- a/DMcourse/Chapter8.pptx
+++ b/DMcourse/Chapter8.pptx
@@ -5,55 +5,57 @@
     <p:sldMasterId id="2147483672" r:id="rId1"/>
   </p:sldMasterIdLst>
   <p:notesMasterIdLst>
-    <p:notesMasterId r:id="rId45"/>
+    <p:notesMasterId r:id="rId47"/>
   </p:notesMasterIdLst>
   <p:handoutMasterIdLst>
-    <p:handoutMasterId r:id="rId46"/>
+    <p:handoutMasterId r:id="rId48"/>
   </p:handoutMasterIdLst>
   <p:sldIdLst>
     <p:sldId id="338" r:id="rId2"/>
     <p:sldId id="257" r:id="rId3"/>
     <p:sldId id="258" r:id="rId4"/>
-    <p:sldId id="259" r:id="rId5"/>
-    <p:sldId id="260" r:id="rId6"/>
-    <p:sldId id="303" r:id="rId7"/>
-    <p:sldId id="261" r:id="rId8"/>
-    <p:sldId id="262" r:id="rId9"/>
-    <p:sldId id="263" r:id="rId10"/>
-    <p:sldId id="264" r:id="rId11"/>
-    <p:sldId id="265" r:id="rId12"/>
-    <p:sldId id="266" r:id="rId13"/>
-    <p:sldId id="267" r:id="rId14"/>
-    <p:sldId id="268" r:id="rId15"/>
-    <p:sldId id="269" r:id="rId16"/>
-    <p:sldId id="270" r:id="rId17"/>
-    <p:sldId id="271" r:id="rId18"/>
-    <p:sldId id="272" r:id="rId19"/>
-    <p:sldId id="273" r:id="rId20"/>
-    <p:sldId id="274" r:id="rId21"/>
-    <p:sldId id="275" r:id="rId22"/>
-    <p:sldId id="276" r:id="rId23"/>
-    <p:sldId id="277" r:id="rId24"/>
-    <p:sldId id="278" r:id="rId25"/>
-    <p:sldId id="325" r:id="rId26"/>
-    <p:sldId id="326" r:id="rId27"/>
-    <p:sldId id="327" r:id="rId28"/>
-    <p:sldId id="328" r:id="rId29"/>
-    <p:sldId id="279" r:id="rId30"/>
-    <p:sldId id="280" r:id="rId31"/>
-    <p:sldId id="281" r:id="rId32"/>
-    <p:sldId id="282" r:id="rId33"/>
-    <p:sldId id="283" r:id="rId34"/>
-    <p:sldId id="284" r:id="rId35"/>
-    <p:sldId id="285" r:id="rId36"/>
-    <p:sldId id="286" r:id="rId37"/>
-    <p:sldId id="287" r:id="rId38"/>
-    <p:sldId id="288" r:id="rId39"/>
-    <p:sldId id="289" r:id="rId40"/>
-    <p:sldId id="290" r:id="rId41"/>
-    <p:sldId id="321" r:id="rId42"/>
-    <p:sldId id="322" r:id="rId43"/>
-    <p:sldId id="324" r:id="rId44"/>
+    <p:sldId id="339" r:id="rId5"/>
+    <p:sldId id="296" r:id="rId6"/>
+    <p:sldId id="259" r:id="rId7"/>
+    <p:sldId id="260" r:id="rId8"/>
+    <p:sldId id="303" r:id="rId9"/>
+    <p:sldId id="261" r:id="rId10"/>
+    <p:sldId id="262" r:id="rId11"/>
+    <p:sldId id="263" r:id="rId12"/>
+    <p:sldId id="264" r:id="rId13"/>
+    <p:sldId id="265" r:id="rId14"/>
+    <p:sldId id="266" r:id="rId15"/>
+    <p:sldId id="267" r:id="rId16"/>
+    <p:sldId id="268" r:id="rId17"/>
+    <p:sldId id="269" r:id="rId18"/>
+    <p:sldId id="270" r:id="rId19"/>
+    <p:sldId id="271" r:id="rId20"/>
+    <p:sldId id="272" r:id="rId21"/>
+    <p:sldId id="273" r:id="rId22"/>
+    <p:sldId id="274" r:id="rId23"/>
+    <p:sldId id="275" r:id="rId24"/>
+    <p:sldId id="276" r:id="rId25"/>
+    <p:sldId id="277" r:id="rId26"/>
+    <p:sldId id="278" r:id="rId27"/>
+    <p:sldId id="325" r:id="rId28"/>
+    <p:sldId id="326" r:id="rId29"/>
+    <p:sldId id="327" r:id="rId30"/>
+    <p:sldId id="328" r:id="rId31"/>
+    <p:sldId id="279" r:id="rId32"/>
+    <p:sldId id="280" r:id="rId33"/>
+    <p:sldId id="281" r:id="rId34"/>
+    <p:sldId id="282" r:id="rId35"/>
+    <p:sldId id="283" r:id="rId36"/>
+    <p:sldId id="284" r:id="rId37"/>
+    <p:sldId id="285" r:id="rId38"/>
+    <p:sldId id="286" r:id="rId39"/>
+    <p:sldId id="287" r:id="rId40"/>
+    <p:sldId id="288" r:id="rId41"/>
+    <p:sldId id="289" r:id="rId42"/>
+    <p:sldId id="290" r:id="rId43"/>
+    <p:sldId id="321" r:id="rId44"/>
+    <p:sldId id="322" r:id="rId45"/>
+    <p:sldId id="324" r:id="rId46"/>
   </p:sldIdLst>
   <p:sldSz cx="9144000" cy="6858000" type="screen4x3"/>
   <p:notesSz cx="7304088" cy="9590088"/>
@@ -1630,7 +1632,7 @@
                 </a:tabLst>
                 <a:defRPr/>
               </a:pPr>
-              <a:t>10</a:t>
+              <a:t>12</a:t>
             </a:fld>
             <a:endParaRPr kumimoji="0" lang="en-US" sz="1400" b="0" i="0" u="none" strike="noStrike" kern="1200" cap="none" spc="0" normalizeH="0" baseline="0" noProof="0">
               <a:ln>
@@ -1749,7 +1751,7 @@
                 </a:tabLst>
                 <a:defRPr/>
               </a:pPr>
-              <a:t>10</a:t>
+              <a:t>12</a:t>
             </a:fld>
             <a:endParaRPr kumimoji="0" lang="en-US" sz="1400" b="0" i="0" u="none" strike="noStrike" kern="1200" cap="none" spc="0" normalizeH="0" baseline="0" noProof="0">
               <a:ln>
@@ -2039,7 +2041,7 @@
                 </a:tabLst>
                 <a:defRPr/>
               </a:pPr>
-              <a:t>11</a:t>
+              <a:t>13</a:t>
             </a:fld>
             <a:endParaRPr kumimoji="0" lang="en-US" sz="1400" b="0" i="0" u="none" strike="noStrike" kern="1200" cap="none" spc="0" normalizeH="0" baseline="0" noProof="0">
               <a:ln>
@@ -2158,7 +2160,7 @@
                 </a:tabLst>
                 <a:defRPr/>
               </a:pPr>
-              <a:t>11</a:t>
+              <a:t>13</a:t>
             </a:fld>
             <a:endParaRPr kumimoji="0" lang="en-US" sz="1400" b="0" i="0" u="none" strike="noStrike" kern="1200" cap="none" spc="0" normalizeH="0" baseline="0" noProof="0">
               <a:ln>
@@ -2448,7 +2450,7 @@
                 </a:tabLst>
                 <a:defRPr/>
               </a:pPr>
-              <a:t>12</a:t>
+              <a:t>14</a:t>
             </a:fld>
             <a:endParaRPr kumimoji="0" lang="en-US" sz="1400" b="0" i="0" u="none" strike="noStrike" kern="1200" cap="none" spc="0" normalizeH="0" baseline="0" noProof="0">
               <a:ln>
@@ -2567,7 +2569,7 @@
                 </a:tabLst>
                 <a:defRPr/>
               </a:pPr>
-              <a:t>12</a:t>
+              <a:t>14</a:t>
             </a:fld>
             <a:endParaRPr kumimoji="0" lang="en-US" sz="1400" b="0" i="0" u="none" strike="noStrike" kern="1200" cap="none" spc="0" normalizeH="0" baseline="0" noProof="0">
               <a:ln>
@@ -2857,7 +2859,7 @@
                 </a:tabLst>
                 <a:defRPr/>
               </a:pPr>
-              <a:t>13</a:t>
+              <a:t>15</a:t>
             </a:fld>
             <a:endParaRPr kumimoji="0" lang="en-US" sz="1400" b="0" i="0" u="none" strike="noStrike" kern="1200" cap="none" spc="0" normalizeH="0" baseline="0" noProof="0">
               <a:ln>
@@ -2976,7 +2978,7 @@
                 </a:tabLst>
                 <a:defRPr/>
               </a:pPr>
-              <a:t>13</a:t>
+              <a:t>15</a:t>
             </a:fld>
             <a:endParaRPr kumimoji="0" lang="en-US" sz="1400" b="0" i="0" u="none" strike="noStrike" kern="1200" cap="none" spc="0" normalizeH="0" baseline="0" noProof="0">
               <a:ln>
@@ -3266,7 +3268,7 @@
                 </a:tabLst>
                 <a:defRPr/>
               </a:pPr>
-              <a:t>14</a:t>
+              <a:t>16</a:t>
             </a:fld>
             <a:endParaRPr kumimoji="0" lang="en-US" sz="1400" b="0" i="0" u="none" strike="noStrike" kern="1200" cap="none" spc="0" normalizeH="0" baseline="0" noProof="0">
               <a:ln>
@@ -3385,7 +3387,7 @@
                 </a:tabLst>
                 <a:defRPr/>
               </a:pPr>
-              <a:t>14</a:t>
+              <a:t>16</a:t>
             </a:fld>
             <a:endParaRPr kumimoji="0" lang="en-US" sz="1400" b="0" i="0" u="none" strike="noStrike" kern="1200" cap="none" spc="0" normalizeH="0" baseline="0" noProof="0">
               <a:ln>
@@ -3675,7 +3677,7 @@
                 </a:tabLst>
                 <a:defRPr/>
               </a:pPr>
-              <a:t>15</a:t>
+              <a:t>17</a:t>
             </a:fld>
             <a:endParaRPr kumimoji="0" lang="en-US" sz="1400" b="0" i="0" u="none" strike="noStrike" kern="1200" cap="none" spc="0" normalizeH="0" baseline="0" noProof="0">
               <a:ln>
@@ -3794,7 +3796,7 @@
                 </a:tabLst>
                 <a:defRPr/>
               </a:pPr>
-              <a:t>15</a:t>
+              <a:t>17</a:t>
             </a:fld>
             <a:endParaRPr kumimoji="0" lang="en-US" sz="1400" b="0" i="0" u="none" strike="noStrike" kern="1200" cap="none" spc="0" normalizeH="0" baseline="0" noProof="0">
               <a:ln>
@@ -4084,7 +4086,7 @@
                 </a:tabLst>
                 <a:defRPr/>
               </a:pPr>
-              <a:t>16</a:t>
+              <a:t>18</a:t>
             </a:fld>
             <a:endParaRPr kumimoji="0" lang="en-US" sz="1400" b="0" i="0" u="none" strike="noStrike" kern="1200" cap="none" spc="0" normalizeH="0" baseline="0" noProof="0">
               <a:ln>
@@ -4203,7 +4205,7 @@
                 </a:tabLst>
                 <a:defRPr/>
               </a:pPr>
-              <a:t>16</a:t>
+              <a:t>18</a:t>
             </a:fld>
             <a:endParaRPr kumimoji="0" lang="en-US" sz="1400" b="0" i="0" u="none" strike="noStrike" kern="1200" cap="none" spc="0" normalizeH="0" baseline="0" noProof="0">
               <a:ln>
@@ -4493,7 +4495,7 @@
                 </a:tabLst>
                 <a:defRPr/>
               </a:pPr>
-              <a:t>17</a:t>
+              <a:t>19</a:t>
             </a:fld>
             <a:endParaRPr kumimoji="0" lang="en-US" sz="1400" b="0" i="0" u="none" strike="noStrike" kern="1200" cap="none" spc="0" normalizeH="0" baseline="0" noProof="0">
               <a:ln>
@@ -4612,7 +4614,7 @@
                 </a:tabLst>
                 <a:defRPr/>
               </a:pPr>
-              <a:t>17</a:t>
+              <a:t>19</a:t>
             </a:fld>
             <a:endParaRPr kumimoji="0" lang="en-US" sz="1400" b="0" i="0" u="none" strike="noStrike" kern="1200" cap="none" spc="0" normalizeH="0" baseline="0" noProof="0">
               <a:ln>
@@ -4902,7 +4904,7 @@
                 </a:tabLst>
                 <a:defRPr/>
               </a:pPr>
-              <a:t>18</a:t>
+              <a:t>20</a:t>
             </a:fld>
             <a:endParaRPr kumimoji="0" lang="en-US" sz="1400" b="0" i="0" u="none" strike="noStrike" kern="1200" cap="none" spc="0" normalizeH="0" baseline="0" noProof="0">
               <a:ln>
@@ -5021,7 +5023,7 @@
                 </a:tabLst>
                 <a:defRPr/>
               </a:pPr>
-              <a:t>18</a:t>
+              <a:t>20</a:t>
             </a:fld>
             <a:endParaRPr kumimoji="0" lang="en-US" sz="1400" b="0" i="0" u="none" strike="noStrike" kern="1200" cap="none" spc="0" normalizeH="0" baseline="0" noProof="0">
               <a:ln>
@@ -5311,7 +5313,7 @@
                 </a:tabLst>
                 <a:defRPr/>
               </a:pPr>
-              <a:t>19</a:t>
+              <a:t>21</a:t>
             </a:fld>
             <a:endParaRPr kumimoji="0" lang="en-US" sz="1400" b="0" i="0" u="none" strike="noStrike" kern="1200" cap="none" spc="0" normalizeH="0" baseline="0" noProof="0">
               <a:ln>
@@ -5430,7 +5432,7 @@
                 </a:tabLst>
                 <a:defRPr/>
               </a:pPr>
-              <a:t>19</a:t>
+              <a:t>21</a:t>
             </a:fld>
             <a:endParaRPr kumimoji="0" lang="en-US" sz="1400" b="0" i="0" u="none" strike="noStrike" kern="1200" cap="none" spc="0" normalizeH="0" baseline="0" noProof="0">
               <a:ln>
@@ -6129,7 +6131,7 @@
                 </a:tabLst>
                 <a:defRPr/>
               </a:pPr>
-              <a:t>20</a:t>
+              <a:t>22</a:t>
             </a:fld>
             <a:endParaRPr kumimoji="0" lang="en-US" sz="1400" b="0" i="0" u="none" strike="noStrike" kern="1200" cap="none" spc="0" normalizeH="0" baseline="0" noProof="0">
               <a:ln>
@@ -6248,7 +6250,7 @@
                 </a:tabLst>
                 <a:defRPr/>
               </a:pPr>
-              <a:t>20</a:t>
+              <a:t>22</a:t>
             </a:fld>
             <a:endParaRPr kumimoji="0" lang="en-US" sz="1400" b="0" i="0" u="none" strike="noStrike" kern="1200" cap="none" spc="0" normalizeH="0" baseline="0" noProof="0">
               <a:ln>
@@ -6538,7 +6540,7 @@
                 </a:tabLst>
                 <a:defRPr/>
               </a:pPr>
-              <a:t>21</a:t>
+              <a:t>23</a:t>
             </a:fld>
             <a:endParaRPr kumimoji="0" lang="en-US" sz="1400" b="0" i="0" u="none" strike="noStrike" kern="1200" cap="none" spc="0" normalizeH="0" baseline="0" noProof="0">
               <a:ln>
@@ -6657,7 +6659,7 @@
                 </a:tabLst>
                 <a:defRPr/>
               </a:pPr>
-              <a:t>21</a:t>
+              <a:t>23</a:t>
             </a:fld>
             <a:endParaRPr kumimoji="0" lang="en-US" sz="1400" b="0" i="0" u="none" strike="noStrike" kern="1200" cap="none" spc="0" normalizeH="0" baseline="0" noProof="0">
               <a:ln>
@@ -6947,7 +6949,7 @@
                 </a:tabLst>
                 <a:defRPr/>
               </a:pPr>
-              <a:t>22</a:t>
+              <a:t>24</a:t>
             </a:fld>
             <a:endParaRPr kumimoji="0" lang="en-US" sz="1400" b="0" i="0" u="none" strike="noStrike" kern="1200" cap="none" spc="0" normalizeH="0" baseline="0" noProof="0">
               <a:ln>
@@ -7066,7 +7068,7 @@
                 </a:tabLst>
                 <a:defRPr/>
               </a:pPr>
-              <a:t>22</a:t>
+              <a:t>24</a:t>
             </a:fld>
             <a:endParaRPr kumimoji="0" lang="en-US" sz="1400" b="0" i="0" u="none" strike="noStrike" kern="1200" cap="none" spc="0" normalizeH="0" baseline="0" noProof="0">
               <a:ln>
@@ -7356,7 +7358,7 @@
                 </a:tabLst>
                 <a:defRPr/>
               </a:pPr>
-              <a:t>23</a:t>
+              <a:t>25</a:t>
             </a:fld>
             <a:endParaRPr kumimoji="0" lang="en-US" sz="1400" b="0" i="0" u="none" strike="noStrike" kern="1200" cap="none" spc="0" normalizeH="0" baseline="0" noProof="0">
               <a:ln>
@@ -7475,7 +7477,7 @@
                 </a:tabLst>
                 <a:defRPr/>
               </a:pPr>
-              <a:t>23</a:t>
+              <a:t>25</a:t>
             </a:fld>
             <a:endParaRPr kumimoji="0" lang="en-US" sz="1400" b="0" i="0" u="none" strike="noStrike" kern="1200" cap="none" spc="0" normalizeH="0" baseline="0" noProof="0">
               <a:ln>
@@ -7765,7 +7767,7 @@
                 </a:tabLst>
                 <a:defRPr/>
               </a:pPr>
-              <a:t>24</a:t>
+              <a:t>26</a:t>
             </a:fld>
             <a:endParaRPr kumimoji="0" lang="en-US" sz="1400" b="0" i="0" u="none" strike="noStrike" kern="1200" cap="none" spc="0" normalizeH="0" baseline="0" noProof="0">
               <a:ln>
@@ -7884,7 +7886,7 @@
                 </a:tabLst>
                 <a:defRPr/>
               </a:pPr>
-              <a:t>24</a:t>
+              <a:t>26</a:t>
             </a:fld>
             <a:endParaRPr kumimoji="0" lang="en-US" sz="1400" b="0" i="0" u="none" strike="noStrike" kern="1200" cap="none" spc="0" normalizeH="0" baseline="0" noProof="0">
               <a:ln>
@@ -8174,7 +8176,7 @@
                 </a:tabLst>
                 <a:defRPr/>
               </a:pPr>
-              <a:t>29</a:t>
+              <a:t>31</a:t>
             </a:fld>
             <a:endParaRPr kumimoji="0" lang="en-US" sz="1400" b="0" i="0" u="none" strike="noStrike" kern="1200" cap="none" spc="0" normalizeH="0" baseline="0" noProof="0">
               <a:ln>
@@ -8293,7 +8295,7 @@
                 </a:tabLst>
                 <a:defRPr/>
               </a:pPr>
-              <a:t>29</a:t>
+              <a:t>31</a:t>
             </a:fld>
             <a:endParaRPr kumimoji="0" lang="en-US" sz="1400" b="0" i="0" u="none" strike="noStrike" kern="1200" cap="none" spc="0" normalizeH="0" baseline="0" noProof="0">
               <a:ln>
@@ -8583,7 +8585,7 @@
                 </a:tabLst>
                 <a:defRPr/>
               </a:pPr>
-              <a:t>30</a:t>
+              <a:t>32</a:t>
             </a:fld>
             <a:endParaRPr kumimoji="0" lang="en-US" sz="1400" b="0" i="0" u="none" strike="noStrike" kern="1200" cap="none" spc="0" normalizeH="0" baseline="0" noProof="0">
               <a:ln>
@@ -8702,7 +8704,7 @@
                 </a:tabLst>
                 <a:defRPr/>
               </a:pPr>
-              <a:t>30</a:t>
+              <a:t>32</a:t>
             </a:fld>
             <a:endParaRPr kumimoji="0" lang="en-US" sz="1400" b="0" i="0" u="none" strike="noStrike" kern="1200" cap="none" spc="0" normalizeH="0" baseline="0" noProof="0">
               <a:ln>
@@ -8992,7 +8994,7 @@
                 </a:tabLst>
                 <a:defRPr/>
               </a:pPr>
-              <a:t>31</a:t>
+              <a:t>33</a:t>
             </a:fld>
             <a:endParaRPr kumimoji="0" lang="en-US" sz="1400" b="0" i="0" u="none" strike="noStrike" kern="1200" cap="none" spc="0" normalizeH="0" baseline="0" noProof="0">
               <a:ln>
@@ -9111,7 +9113,7 @@
                 </a:tabLst>
                 <a:defRPr/>
               </a:pPr>
-              <a:t>31</a:t>
+              <a:t>33</a:t>
             </a:fld>
             <a:endParaRPr kumimoji="0" lang="en-US" sz="1400" b="0" i="0" u="none" strike="noStrike" kern="1200" cap="none" spc="0" normalizeH="0" baseline="0" noProof="0">
               <a:ln>
@@ -9401,7 +9403,7 @@
                 </a:tabLst>
                 <a:defRPr/>
               </a:pPr>
-              <a:t>32</a:t>
+              <a:t>34</a:t>
             </a:fld>
             <a:endParaRPr kumimoji="0" lang="en-US" sz="1400" b="0" i="0" u="none" strike="noStrike" kern="1200" cap="none" spc="0" normalizeH="0" baseline="0" noProof="0">
               <a:ln>
@@ -9520,7 +9522,7 @@
                 </a:tabLst>
                 <a:defRPr/>
               </a:pPr>
-              <a:t>32</a:t>
+              <a:t>34</a:t>
             </a:fld>
             <a:endParaRPr kumimoji="0" lang="en-US" sz="1400" b="0" i="0" u="none" strike="noStrike" kern="1200" cap="none" spc="0" normalizeH="0" baseline="0" noProof="0">
               <a:ln>
@@ -9810,7 +9812,7 @@
                 </a:tabLst>
                 <a:defRPr/>
               </a:pPr>
-              <a:t>33</a:t>
+              <a:t>35</a:t>
             </a:fld>
             <a:endParaRPr kumimoji="0" lang="en-US" sz="1400" b="0" i="0" u="none" strike="noStrike" kern="1200" cap="none" spc="0" normalizeH="0" baseline="0" noProof="0">
               <a:ln>
@@ -9929,7 +9931,7 @@
                 </a:tabLst>
                 <a:defRPr/>
               </a:pPr>
-              <a:t>33</a:t>
+              <a:t>35</a:t>
             </a:fld>
             <a:endParaRPr kumimoji="0" lang="en-US" sz="1400" b="0" i="0" u="none" strike="noStrike" kern="1200" cap="none" spc="0" normalizeH="0" baseline="0" noProof="0">
               <a:ln>
@@ -10628,7 +10630,7 @@
                 </a:tabLst>
                 <a:defRPr/>
               </a:pPr>
-              <a:t>34</a:t>
+              <a:t>36</a:t>
             </a:fld>
             <a:endParaRPr kumimoji="0" lang="en-US" sz="1400" b="0" i="0" u="none" strike="noStrike" kern="1200" cap="none" spc="0" normalizeH="0" baseline="0" noProof="0">
               <a:ln>
@@ -10747,7 +10749,7 @@
                 </a:tabLst>
                 <a:defRPr/>
               </a:pPr>
-              <a:t>34</a:t>
+              <a:t>36</a:t>
             </a:fld>
             <a:endParaRPr kumimoji="0" lang="en-US" sz="1400" b="0" i="0" u="none" strike="noStrike" kern="1200" cap="none" spc="0" normalizeH="0" baseline="0" noProof="0">
               <a:ln>
@@ -11037,7 +11039,7 @@
                 </a:tabLst>
                 <a:defRPr/>
               </a:pPr>
-              <a:t>35</a:t>
+              <a:t>37</a:t>
             </a:fld>
             <a:endParaRPr kumimoji="0" lang="en-US" sz="1400" b="0" i="0" u="none" strike="noStrike" kern="1200" cap="none" spc="0" normalizeH="0" baseline="0" noProof="0">
               <a:ln>
@@ -11156,7 +11158,7 @@
                 </a:tabLst>
                 <a:defRPr/>
               </a:pPr>
-              <a:t>35</a:t>
+              <a:t>37</a:t>
             </a:fld>
             <a:endParaRPr kumimoji="0" lang="en-US" sz="1400" b="0" i="0" u="none" strike="noStrike" kern="1200" cap="none" spc="0" normalizeH="0" baseline="0" noProof="0">
               <a:ln>
@@ -11446,7 +11448,7 @@
                 </a:tabLst>
                 <a:defRPr/>
               </a:pPr>
-              <a:t>36</a:t>
+              <a:t>38</a:t>
             </a:fld>
             <a:endParaRPr kumimoji="0" lang="en-US" sz="1400" b="0" i="0" u="none" strike="noStrike" kern="1200" cap="none" spc="0" normalizeH="0" baseline="0" noProof="0">
               <a:ln>
@@ -11565,7 +11567,7 @@
                 </a:tabLst>
                 <a:defRPr/>
               </a:pPr>
-              <a:t>36</a:t>
+              <a:t>38</a:t>
             </a:fld>
             <a:endParaRPr kumimoji="0" lang="en-US" sz="1400" b="0" i="0" u="none" strike="noStrike" kern="1200" cap="none" spc="0" normalizeH="0" baseline="0" noProof="0">
               <a:ln>
@@ -11855,7 +11857,7 @@
                 </a:tabLst>
                 <a:defRPr/>
               </a:pPr>
-              <a:t>37</a:t>
+              <a:t>39</a:t>
             </a:fld>
             <a:endParaRPr kumimoji="0" lang="en-US" sz="1400" b="0" i="0" u="none" strike="noStrike" kern="1200" cap="none" spc="0" normalizeH="0" baseline="0" noProof="0">
               <a:ln>
@@ -11974,7 +11976,7 @@
                 </a:tabLst>
                 <a:defRPr/>
               </a:pPr>
-              <a:t>37</a:t>
+              <a:t>39</a:t>
             </a:fld>
             <a:endParaRPr kumimoji="0" lang="en-US" sz="1400" b="0" i="0" u="none" strike="noStrike" kern="1200" cap="none" spc="0" normalizeH="0" baseline="0" noProof="0">
               <a:ln>
@@ -12264,7 +12266,7 @@
                 </a:tabLst>
                 <a:defRPr/>
               </a:pPr>
-              <a:t>38</a:t>
+              <a:t>40</a:t>
             </a:fld>
             <a:endParaRPr kumimoji="0" lang="en-US" sz="1400" b="0" i="0" u="none" strike="noStrike" kern="1200" cap="none" spc="0" normalizeH="0" baseline="0" noProof="0">
               <a:ln>
@@ -12383,7 +12385,7 @@
                 </a:tabLst>
                 <a:defRPr/>
               </a:pPr>
-              <a:t>38</a:t>
+              <a:t>40</a:t>
             </a:fld>
             <a:endParaRPr kumimoji="0" lang="en-US" sz="1400" b="0" i="0" u="none" strike="noStrike" kern="1200" cap="none" spc="0" normalizeH="0" baseline="0" noProof="0">
               <a:ln>
@@ -12673,7 +12675,7 @@
                 </a:tabLst>
                 <a:defRPr/>
               </a:pPr>
-              <a:t>39</a:t>
+              <a:t>41</a:t>
             </a:fld>
             <a:endParaRPr kumimoji="0" lang="en-US" sz="1400" b="0" i="0" u="none" strike="noStrike" kern="1200" cap="none" spc="0" normalizeH="0" baseline="0" noProof="0">
               <a:ln>
@@ -12792,7 +12794,7 @@
                 </a:tabLst>
                 <a:defRPr/>
               </a:pPr>
-              <a:t>39</a:t>
+              <a:t>41</a:t>
             </a:fld>
             <a:endParaRPr kumimoji="0" lang="en-US" sz="1400" b="0" i="0" u="none" strike="noStrike" kern="1200" cap="none" spc="0" normalizeH="0" baseline="0" noProof="0">
               <a:ln>
@@ -13082,7 +13084,7 @@
                 </a:tabLst>
                 <a:defRPr/>
               </a:pPr>
-              <a:t>40</a:t>
+              <a:t>42</a:t>
             </a:fld>
             <a:endParaRPr kumimoji="0" lang="en-US" sz="1400" b="0" i="0" u="none" strike="noStrike" kern="1200" cap="none" spc="0" normalizeH="0" baseline="0" noProof="0">
               <a:ln>
@@ -13201,7 +13203,7 @@
                 </a:tabLst>
                 <a:defRPr/>
               </a:pPr>
-              <a:t>40</a:t>
+              <a:t>42</a:t>
             </a:fld>
             <a:endParaRPr kumimoji="0" lang="en-US" sz="1400" b="0" i="0" u="none" strike="noStrike" kern="1200" cap="none" spc="0" normalizeH="0" baseline="0" noProof="0">
               <a:ln>
@@ -13491,7 +13493,7 @@
                 </a:tabLst>
                 <a:defRPr/>
               </a:pPr>
-              <a:t>4</a:t>
+              <a:t>6</a:t>
             </a:fld>
             <a:endParaRPr kumimoji="0" lang="en-US" sz="1400" b="0" i="0" u="none" strike="noStrike" kern="1200" cap="none" spc="0" normalizeH="0" baseline="0" noProof="0">
               <a:ln>
@@ -13610,7 +13612,7 @@
                 </a:tabLst>
                 <a:defRPr/>
               </a:pPr>
-              <a:t>4</a:t>
+              <a:t>6</a:t>
             </a:fld>
             <a:endParaRPr kumimoji="0" lang="en-US" sz="1400" b="0" i="0" u="none" strike="noStrike" kern="1200" cap="none" spc="0" normalizeH="0" baseline="0" noProof="0">
               <a:ln>
@@ -13900,7 +13902,7 @@
                 </a:tabLst>
                 <a:defRPr/>
               </a:pPr>
-              <a:t>5</a:t>
+              <a:t>7</a:t>
             </a:fld>
             <a:endParaRPr kumimoji="0" lang="en-US" sz="1400" b="0" i="0" u="none" strike="noStrike" kern="1200" cap="none" spc="0" normalizeH="0" baseline="0" noProof="0">
               <a:ln>
@@ -14019,7 +14021,7 @@
                 </a:tabLst>
                 <a:defRPr/>
               </a:pPr>
-              <a:t>5</a:t>
+              <a:t>7</a:t>
             </a:fld>
             <a:endParaRPr kumimoji="0" lang="en-US" sz="1400" b="0" i="0" u="none" strike="noStrike" kern="1200" cap="none" spc="0" normalizeH="0" baseline="0" noProof="0">
               <a:ln>
@@ -14309,7 +14311,7 @@
                 </a:tabLst>
                 <a:defRPr/>
               </a:pPr>
-              <a:t>6</a:t>
+              <a:t>8</a:t>
             </a:fld>
             <a:endParaRPr kumimoji="0" lang="en-US" sz="1400" b="0" i="0" u="none" strike="noStrike" kern="1200" cap="none" spc="0" normalizeH="0" baseline="0" noProof="0">
               <a:ln>
@@ -14428,7 +14430,7 @@
                 </a:tabLst>
                 <a:defRPr/>
               </a:pPr>
-              <a:t>6</a:t>
+              <a:t>8</a:t>
             </a:fld>
             <a:endParaRPr kumimoji="0" lang="en-US" sz="1400" b="0" i="0" u="none" strike="noStrike" kern="1200" cap="none" spc="0" normalizeH="0" baseline="0" noProof="0">
               <a:ln>
@@ -14718,7 +14720,7 @@
                 </a:tabLst>
                 <a:defRPr/>
               </a:pPr>
-              <a:t>7</a:t>
+              <a:t>9</a:t>
             </a:fld>
             <a:endParaRPr kumimoji="0" lang="en-US" sz="1400" b="0" i="0" u="none" strike="noStrike" kern="1200" cap="none" spc="0" normalizeH="0" baseline="0" noProof="0">
               <a:ln>
@@ -14837,7 +14839,7 @@
                 </a:tabLst>
                 <a:defRPr/>
               </a:pPr>
-              <a:t>7</a:t>
+              <a:t>9</a:t>
             </a:fld>
             <a:endParaRPr kumimoji="0" lang="en-US" sz="1400" b="0" i="0" u="none" strike="noStrike" kern="1200" cap="none" spc="0" normalizeH="0" baseline="0" noProof="0">
               <a:ln>
@@ -15127,7 +15129,7 @@
                 </a:tabLst>
                 <a:defRPr/>
               </a:pPr>
-              <a:t>8</a:t>
+              <a:t>10</a:t>
             </a:fld>
             <a:endParaRPr kumimoji="0" lang="en-US" sz="1400" b="0" i="0" u="none" strike="noStrike" kern="1200" cap="none" spc="0" normalizeH="0" baseline="0" noProof="0">
               <a:ln>
@@ -15246,7 +15248,7 @@
                 </a:tabLst>
                 <a:defRPr/>
               </a:pPr>
-              <a:t>8</a:t>
+              <a:t>10</a:t>
             </a:fld>
             <a:endParaRPr kumimoji="0" lang="en-US" sz="1400" b="0" i="0" u="none" strike="noStrike" kern="1200" cap="none" spc="0" normalizeH="0" baseline="0" noProof="0">
               <a:ln>
@@ -15536,7 +15538,7 @@
                 </a:tabLst>
                 <a:defRPr/>
               </a:pPr>
-              <a:t>9</a:t>
+              <a:t>11</a:t>
             </a:fld>
             <a:endParaRPr kumimoji="0" lang="en-US" sz="1400" b="0" i="0" u="none" strike="noStrike" kern="1200" cap="none" spc="0" normalizeH="0" baseline="0" noProof="0">
               <a:ln>
@@ -15655,7 +15657,7 @@
                 </a:tabLst>
                 <a:defRPr/>
               </a:pPr>
-              <a:t>9</a:t>
+              <a:t>11</a:t>
             </a:fld>
             <a:endParaRPr kumimoji="0" lang="en-US" sz="1400" b="0" i="0" u="none" strike="noStrike" kern="1200" cap="none" spc="0" normalizeH="0" baseline="0" noProof="0">
               <a:ln>
@@ -19452,7 +19454,7 @@
 
 <file path=ppt/slides/slide10.xml><?xml version="1.0" encoding="utf-8"?>
 <p:sld xmlns:a="http://schemas.openxmlformats.org/drawingml/2006/main" xmlns:r="http://schemas.openxmlformats.org/officeDocument/2006/relationships" xmlns:p="http://schemas.openxmlformats.org/presentationml/2006/main">
-  <p:cSld name="Attribute discretization (numeric attributes only)">
+  <p:cSld name="Searching attribute space">
     <p:spTree>
       <p:nvGrpSpPr>
         <p:cNvPr id="1" name=""/>
@@ -19484,8 +19486,8 @@
           <a:p>
             <a:pPr lvl="0"/>
             <a:r>
-              <a:rPr lang="en-US"/>
-              <a:t>Attribute discretization</a:t>
+              <a:rPr lang="en-US" dirty="0"/>
+              <a:t>Searching the attribute space</a:t>
             </a:r>
           </a:p>
         </p:txBody>
@@ -19507,65 +19509,68 @@
           <a:p>
             <a:r>
               <a:rPr lang="en-CA" dirty="0"/>
-              <a:t>Discretization can be useful even if a learning algorithm can be run on numeric attributes directly</a:t>
-            </a:r>
-          </a:p>
-          <a:p>
-            <a:r>
+              <a:t>Number of attribute subsets is</a:t>
+            </a:r>
+            <a:br>
               <a:rPr lang="en-CA" dirty="0"/>
-              <a:t>Avoids normality assumption in Naïve Bayes and clustering</a:t>
-            </a:r>
-          </a:p>
-          <a:p>
+            </a:br>
             <a:r>
               <a:rPr lang="en-CA" dirty="0"/>
-              <a:t>Examples of discretization we have already encountered:</a:t>
+              <a:t>exponential in the number of attributes</a:t>
+            </a:r>
+          </a:p>
+          <a:p>
+            <a:r>
+              <a:rPr lang="en-CA" dirty="0"/>
+              <a:t>Common greedy approaches:</a:t>
             </a:r>
           </a:p>
           <a:p>
             <a:pPr lvl="1"/>
             <a:r>
               <a:rPr lang="en-CA" dirty="0"/>
-              <a:t>1R: uses simple discretization scheme</a:t>
+              <a:t>forward selection</a:t>
             </a:r>
           </a:p>
           <a:p>
             <a:pPr lvl="1"/>
             <a:r>
               <a:rPr lang="en-CA" dirty="0"/>
-              <a:t>C4.5 performs local discretization</a:t>
+              <a:t>backward elimination</a:t>
             </a:r>
           </a:p>
           <a:p>
             <a:r>
               <a:rPr lang="en-CA" dirty="0"/>
-              <a:t>Global discretization can be advantageous because it is based on more data</a:t>
-            </a:r>
-          </a:p>
-          <a:p>
+              <a:t>More sophisticated strategies:</a:t>
+            </a:r>
+          </a:p>
+          <a:p>
+            <a:pPr lvl="1"/>
             <a:r>
               <a:rPr lang="en-CA" dirty="0"/>
-              <a:t>Apply learner to</a:t>
+              <a:t>Bidirectional search</a:t>
             </a:r>
           </a:p>
           <a:p>
             <a:pPr lvl="1"/>
             <a:r>
               <a:rPr lang="en-CA" dirty="0"/>
-              <a:t>k -valued discretized attribute or  to</a:t>
+              <a:t>Best-first search: can find optimum solution</a:t>
             </a:r>
           </a:p>
           <a:p>
             <a:pPr lvl="1"/>
             <a:r>
               <a:rPr lang="en-CA" dirty="0"/>
-              <a:t>k – 1 binary attributes that code the cut points</a:t>
-            </a:r>
-          </a:p>
-          <a:p>
+              <a:t>Beam search: approximation to best-first search</a:t>
+            </a:r>
+          </a:p>
+          <a:p>
+            <a:pPr lvl="1"/>
             <a:r>
               <a:rPr lang="en-CA" dirty="0"/>
-              <a:t>The latter approach often works better when learning decision trees or rule sets</a:t>
+              <a:t>Genetic algorithms</a:t>
             </a:r>
           </a:p>
         </p:txBody>
@@ -19604,7 +19609,7 @@
 
 <file path=ppt/slides/slide11.xml><?xml version="1.0" encoding="utf-8"?>
 <p:sld xmlns:a="http://schemas.openxmlformats.org/drawingml/2006/main" xmlns:r="http://schemas.openxmlformats.org/officeDocument/2006/relationships" xmlns:p="http://schemas.openxmlformats.org/presentationml/2006/main">
-  <p:cSld name="Discretization: unsupervised">
+  <p:cSld name="Scheme-specific selection">
     <p:spTree>
       <p:nvGrpSpPr>
         <p:cNvPr id="1" name=""/>
@@ -19665,8 +19670,8 @@
           <a:p>
             <a:pPr lvl="0"/>
             <a:r>
-              <a:rPr lang="en-US" dirty="0"/>
-              <a:t>Discretization: unsupervised</a:t>
+              <a:rPr lang="en-US"/>
+              <a:t>Scheme-specific selection</a:t>
             </a:r>
           </a:p>
         </p:txBody>
@@ -19679,8 +19684,8 @@
         </p:nvSpPr>
         <p:spPr>
           <a:xfrm>
-            <a:off x="530970" y="1114559"/>
-            <a:ext cx="8158297" cy="4588733"/>
+            <a:off x="408990" y="826559"/>
+            <a:ext cx="8021966" cy="5792653"/>
           </a:xfrm>
           <a:prstGeom prst="rect">
             <a:avLst/>
@@ -19725,26 +19730,17 @@
               </a:tabLst>
             </a:pPr>
             <a:r>
-              <a:rPr lang="en-US" sz="2400" i="1" dirty="0">
+              <a:rPr lang="en-US" sz="2400" b="0" i="1" u="none" strike="noStrike" baseline="0" dirty="0">
+                <a:ln>
+                  <a:noFill/>
+                </a:ln>
                 <a:solidFill>
                   <a:srgbClr val="000000"/>
                 </a:solidFill>
-                <a:latin typeface="Calibri"/>
                 <a:ea typeface="Gothic" pitchFamily="2"/>
-                <a:cs typeface="Calibri"/>
+                <a:cs typeface="Lucidasans" pitchFamily="2"/>
               </a:rPr>
-              <a:t>Unsupervised discretization</a:t>
-            </a:r>
-            <a:r>
-              <a:rPr lang="en-US" sz="2400" dirty="0">
-                <a:solidFill>
-                  <a:srgbClr val="000000"/>
-                </a:solidFill>
-                <a:latin typeface="Calibri"/>
-                <a:ea typeface="Gothic" pitchFamily="2"/>
-                <a:cs typeface="Calibri"/>
-              </a:rPr>
-              <a:t>: d</a:t>
+              <a:t>Wrapper </a:t>
             </a:r>
             <a:r>
               <a:rPr lang="en-US" sz="2400" b="0" i="0" u="none" strike="noStrike" baseline="0" dirty="0">
@@ -19754,47 +19750,10 @@
                 <a:solidFill>
                   <a:srgbClr val="000000"/>
                 </a:solidFill>
-                <a:latin typeface="Calibri"/>
                 <a:ea typeface="Gothic" pitchFamily="2"/>
-                <a:cs typeface="Calibri"/>
+                <a:cs typeface="Lucidasans" pitchFamily="2"/>
               </a:rPr>
-              <a:t>etermine intervals without knowing class labels</a:t>
-            </a:r>
-          </a:p>
-          <a:p>
-            <a:pPr marL="457200" lvl="2" hangingPunct="0">
-              <a:spcBef>
-                <a:spcPts val="598"/>
-              </a:spcBef>
-              <a:buSzPct val="100000"/>
-              <a:tabLst>
-                <a:tab pos="0" algn="l"/>
-                <a:tab pos="914400" algn="l"/>
-                <a:tab pos="1828800" algn="l"/>
-                <a:tab pos="2743199" algn="l"/>
-                <a:tab pos="3657600" algn="l"/>
-                <a:tab pos="4572000" algn="l"/>
-                <a:tab pos="5486399" algn="l"/>
-                <a:tab pos="6400799" algn="l"/>
-                <a:tab pos="7315200" algn="l"/>
-                <a:tab pos="8229600" algn="l"/>
-                <a:tab pos="9144000" algn="l"/>
-                <a:tab pos="10058400" algn="l"/>
-              </a:tabLst>
-            </a:pPr>
-            <a:r>
-              <a:rPr lang="en-US" sz="2000" b="0" i="0" u="none" strike="noStrike" baseline="0" dirty="0">
-                <a:ln>
-                  <a:noFill/>
-                </a:ln>
-                <a:solidFill>
-                  <a:srgbClr val="000000"/>
-                </a:solidFill>
-                <a:latin typeface="Calibri"/>
-                <a:ea typeface="Gothic" pitchFamily="2"/>
-                <a:cs typeface="Calibri"/>
-              </a:rPr>
-              <a:t>When clustering, the only possible way!</a:t>
+              <a:t>approach to attribute selection: attributes are selected with target scheme in the loop</a:t>
             </a:r>
           </a:p>
           <a:p>
@@ -19834,49 +19793,18 @@
                 <a:solidFill>
                   <a:srgbClr val="000000"/>
                 </a:solidFill>
-                <a:latin typeface="Calibri"/>
                 <a:ea typeface="Gothic" pitchFamily="2"/>
-                <a:cs typeface="Calibri"/>
+                <a:cs typeface="Lucidasans" pitchFamily="2"/>
               </a:rPr>
-              <a:t>Two well-known</a:t>
-            </a:r>
-            <a:r>
-              <a:rPr lang="en-US" sz="2400" b="0" i="0" u="none" strike="noStrike" dirty="0">
-                <a:ln>
-                  <a:noFill/>
-                </a:ln>
-                <a:solidFill>
-                  <a:srgbClr val="000000"/>
-                </a:solidFill>
-                <a:latin typeface="Calibri"/>
-                <a:ea typeface="Gothic" pitchFamily="2"/>
-                <a:cs typeface="Calibri"/>
-              </a:rPr>
-              <a:t> </a:t>
-            </a:r>
-            <a:r>
-              <a:rPr lang="en-US" sz="2400" b="0" i="0" u="none" strike="noStrike" baseline="0" dirty="0">
-                <a:ln>
-                  <a:noFill/>
-                </a:ln>
-                <a:solidFill>
-                  <a:srgbClr val="000000"/>
-                </a:solidFill>
-                <a:latin typeface="Calibri"/>
-                <a:ea typeface="Gothic" pitchFamily="2"/>
-                <a:cs typeface="Calibri"/>
-              </a:rPr>
-              <a:t>strategies:</a:t>
-            </a:r>
-          </a:p>
-          <a:p>
-            <a:pPr marL="800100" lvl="2" indent="-342900" hangingPunct="0">
+              <a:t>Implement “wrapper” around learning scheme</a:t>
+            </a:r>
+          </a:p>
+          <a:p>
+            <a:pPr lvl="1" hangingPunct="0">
               <a:spcBef>
-                <a:spcPts val="598"/>
+                <a:spcPts val="697"/>
               </a:spcBef>
               <a:buSzPct val="100000"/>
-              <a:buFont typeface="Arial"/>
-              <a:buChar char="•"/>
               <a:tabLst>
                 <a:tab pos="0" algn="l"/>
                 <a:tab pos="914400" algn="l"/>
@@ -19893,71 +19821,6 @@
               </a:tabLst>
             </a:pPr>
             <a:r>
-              <a:rPr lang="en-US" sz="2000" b="0" i="1" u="none" strike="noStrike" baseline="0" dirty="0">
-                <a:ln>
-                  <a:noFill/>
-                </a:ln>
-                <a:solidFill>
-                  <a:srgbClr val="000000"/>
-                </a:solidFill>
-                <a:latin typeface="Calibri"/>
-                <a:ea typeface="Gothic" pitchFamily="2"/>
-                <a:cs typeface="Calibri"/>
-              </a:rPr>
-              <a:t>Equal-interval binning</a:t>
-            </a:r>
-          </a:p>
-          <a:p>
-            <a:pPr marL="800100" lvl="2" indent="-342900" hangingPunct="0">
-              <a:spcBef>
-                <a:spcPts val="598"/>
-              </a:spcBef>
-              <a:buSzPct val="100000"/>
-              <a:buFont typeface="Arial"/>
-              <a:buChar char="•"/>
-              <a:tabLst>
-                <a:tab pos="0" algn="l"/>
-                <a:tab pos="914400" algn="l"/>
-                <a:tab pos="1828800" algn="l"/>
-                <a:tab pos="2743199" algn="l"/>
-                <a:tab pos="3657600" algn="l"/>
-                <a:tab pos="4572000" algn="l"/>
-                <a:tab pos="5486399" algn="l"/>
-                <a:tab pos="6400799" algn="l"/>
-                <a:tab pos="7315200" algn="l"/>
-                <a:tab pos="8229600" algn="l"/>
-                <a:tab pos="9144000" algn="l"/>
-                <a:tab pos="10058400" algn="l"/>
-              </a:tabLst>
-            </a:pPr>
-            <a:r>
-              <a:rPr lang="en-US" sz="2000" b="0" i="1" u="none" strike="noStrike" baseline="0" dirty="0">
-                <a:ln>
-                  <a:noFill/>
-                </a:ln>
-                <a:solidFill>
-                  <a:srgbClr val="000000"/>
-                </a:solidFill>
-                <a:latin typeface="Calibri"/>
-                <a:ea typeface="Gothic" pitchFamily="2"/>
-                <a:cs typeface="Calibri"/>
-              </a:rPr>
-              <a:t>Equal-frequency binning</a:t>
-            </a:r>
-            <a:br>
-              <a:rPr lang="en-US" sz="2000" b="0" i="1" u="none" strike="noStrike" baseline="0" dirty="0">
-                <a:ln>
-                  <a:noFill/>
-                </a:ln>
-                <a:solidFill>
-                  <a:srgbClr val="000000"/>
-                </a:solidFill>
-                <a:latin typeface="Calibri"/>
-                <a:ea typeface="Gothic" pitchFamily="2"/>
-                <a:cs typeface="Calibri"/>
-              </a:rPr>
-            </a:br>
-            <a:r>
               <a:rPr lang="en-US" sz="2000" b="0" i="0" u="none" strike="noStrike" baseline="0" dirty="0">
                 <a:ln>
                   <a:noFill/>
@@ -19965,39 +19828,10 @@
                 <a:solidFill>
                   <a:srgbClr val="000000"/>
                 </a:solidFill>
-                <a:latin typeface="Calibri"/>
                 <a:ea typeface="Gothic" pitchFamily="2"/>
-                <a:cs typeface="Calibri"/>
+                <a:cs typeface="Lucidasans" pitchFamily="2"/>
               </a:rPr>
-              <a:t>(also called </a:t>
-            </a:r>
-            <a:r>
-              <a:rPr lang="en-US" sz="2000" b="0" i="1" u="none" strike="noStrike" baseline="0" dirty="0">
-                <a:ln>
-                  <a:noFill/>
-                </a:ln>
-                <a:solidFill>
-                  <a:srgbClr val="000000"/>
-                </a:solidFill>
-                <a:latin typeface="Calibri"/>
-                <a:ea typeface="Gothic" pitchFamily="2"/>
-                <a:cs typeface="Calibri"/>
-              </a:rPr>
-              <a:t>histogram equalization</a:t>
-            </a:r>
-            <a:r>
-              <a:rPr lang="en-US" sz="2000" b="0" i="0" u="none" strike="noStrike" baseline="0" dirty="0">
-                <a:ln>
-                  <a:noFill/>
-                </a:ln>
-                <a:solidFill>
-                  <a:srgbClr val="000000"/>
-                </a:solidFill>
-                <a:latin typeface="Calibri"/>
-                <a:ea typeface="Gothic" pitchFamily="2"/>
-                <a:cs typeface="Calibri"/>
-              </a:rPr>
-              <a:t>)</a:t>
+              <a:t>Evaluation criterion: cross-validation performance</a:t>
             </a:r>
           </a:p>
           <a:p>
@@ -20030,6 +19864,1043 @@
               </a:tabLst>
             </a:pPr>
             <a:r>
+              <a:rPr lang="en-US" sz="2400" b="0" i="0" u="none" strike="noStrike" baseline="0" dirty="0">
+                <a:ln>
+                  <a:noFill/>
+                </a:ln>
+                <a:solidFill>
+                  <a:srgbClr val="000000"/>
+                </a:solidFill>
+                <a:ea typeface="Gothic" pitchFamily="2"/>
+                <a:cs typeface="Lucidasans" pitchFamily="2"/>
+              </a:rPr>
+              <a:t>Time consuming in</a:t>
+            </a:r>
+            <a:r>
+              <a:rPr lang="en-US" sz="2400" b="0" i="0" u="none" strike="noStrike" dirty="0">
+                <a:ln>
+                  <a:noFill/>
+                </a:ln>
+                <a:solidFill>
+                  <a:srgbClr val="000000"/>
+                </a:solidFill>
+                <a:ea typeface="Gothic" pitchFamily="2"/>
+                <a:cs typeface="Lucidasans" pitchFamily="2"/>
+              </a:rPr>
+              <a:t> general</a:t>
+            </a:r>
+            <a:endParaRPr lang="en-US" sz="2400" b="0" i="0" u="none" strike="noStrike" baseline="0" dirty="0">
+              <a:ln>
+                <a:noFill/>
+              </a:ln>
+              <a:solidFill>
+                <a:srgbClr val="000000"/>
+              </a:solidFill>
+              <a:ea typeface="Gothic" pitchFamily="2"/>
+              <a:cs typeface="Lucidasans" pitchFamily="2"/>
+            </a:endParaRPr>
+          </a:p>
+          <a:p>
+            <a:pPr marL="800100" lvl="2" indent="-342900" hangingPunct="0">
+              <a:spcBef>
+                <a:spcPts val="598"/>
+              </a:spcBef>
+              <a:buSzPct val="100000"/>
+              <a:buFont typeface="Arial"/>
+              <a:buChar char="•"/>
+              <a:tabLst>
+                <a:tab pos="0" algn="l"/>
+                <a:tab pos="914400" algn="l"/>
+                <a:tab pos="1828800" algn="l"/>
+                <a:tab pos="2743199" algn="l"/>
+                <a:tab pos="3657600" algn="l"/>
+                <a:tab pos="4572000" algn="l"/>
+                <a:tab pos="5486399" algn="l"/>
+                <a:tab pos="6400799" algn="l"/>
+                <a:tab pos="7315200" algn="l"/>
+                <a:tab pos="8229600" algn="l"/>
+                <a:tab pos="9144000" algn="l"/>
+                <a:tab pos="10058400" algn="l"/>
+              </a:tabLst>
+            </a:pPr>
+            <a:r>
+              <a:rPr lang="en-US" sz="2000" b="0" i="0" u="none" strike="noStrike" baseline="0" dirty="0">
+                <a:ln>
+                  <a:noFill/>
+                </a:ln>
+                <a:solidFill>
+                  <a:srgbClr val="000000"/>
+                </a:solidFill>
+                <a:ea typeface="Gothic" pitchFamily="2"/>
+                <a:cs typeface="Lucidasans" pitchFamily="2"/>
+              </a:rPr>
+              <a:t>greedy approach, </a:t>
+            </a:r>
+            <a:r>
+              <a:rPr lang="en-US" sz="2000" b="0" i="1" u="none" strike="noStrike" baseline="0" dirty="0">
+                <a:ln>
+                  <a:noFill/>
+                </a:ln>
+                <a:solidFill>
+                  <a:srgbClr val="000000"/>
+                </a:solidFill>
+                <a:ea typeface="Gothic" pitchFamily="2"/>
+                <a:cs typeface="Lucidasans" pitchFamily="2"/>
+              </a:rPr>
+              <a:t>k</a:t>
+            </a:r>
+            <a:r>
+              <a:rPr lang="en-US" sz="2000" b="0" i="0" u="none" strike="noStrike" baseline="0" dirty="0">
+                <a:ln>
+                  <a:noFill/>
+                </a:ln>
+                <a:solidFill>
+                  <a:srgbClr val="000000"/>
+                </a:solidFill>
+                <a:ea typeface="Gothic" pitchFamily="2"/>
+                <a:cs typeface="Lucidasans" pitchFamily="2"/>
+              </a:rPr>
+              <a:t> attributes </a:t>
+            </a:r>
+            <a:r>
+              <a:rPr lang="en-US" sz="2000" b="1" dirty="0">
+                <a:solidFill>
+                  <a:srgbClr val="000000"/>
+                </a:solidFill>
+                <a:ea typeface="Gothic" pitchFamily="2"/>
+                <a:cs typeface="Lucidasans" pitchFamily="2"/>
+              </a:rPr>
+              <a:t>=&gt;</a:t>
+            </a:r>
+            <a:r>
+              <a:rPr lang="en-US" sz="2000" b="0" i="0" u="none" strike="noStrike" baseline="0" dirty="0">
+                <a:ln>
+                  <a:noFill/>
+                </a:ln>
+                <a:solidFill>
+                  <a:srgbClr val="000000"/>
+                </a:solidFill>
+                <a:ea typeface="Gothic" pitchFamily="2"/>
+                <a:cs typeface="Lucidasans" pitchFamily="2"/>
+              </a:rPr>
+              <a:t>   </a:t>
+            </a:r>
+            <a:r>
+              <a:rPr lang="en-US" sz="2000" b="0" i="1" u="none" strike="noStrike" baseline="0" dirty="0">
+                <a:ln>
+                  <a:noFill/>
+                </a:ln>
+                <a:solidFill>
+                  <a:srgbClr val="000000"/>
+                </a:solidFill>
+                <a:ea typeface="Gothic" pitchFamily="2"/>
+                <a:cs typeface="Lucidasans" pitchFamily="2"/>
+              </a:rPr>
+              <a:t>k</a:t>
+            </a:r>
+            <a:r>
+              <a:rPr lang="en-US" sz="2000" b="0" i="0" u="none" strike="noStrike" baseline="30000" dirty="0">
+                <a:ln>
+                  <a:noFill/>
+                </a:ln>
+                <a:solidFill>
+                  <a:srgbClr val="000000"/>
+                </a:solidFill>
+                <a:ea typeface="Gothic" pitchFamily="2"/>
+                <a:cs typeface="Lucidasans" pitchFamily="2"/>
+              </a:rPr>
+              <a:t>2</a:t>
+            </a:r>
+            <a:r>
+              <a:rPr lang="en-US" sz="2000" b="0" i="0" u="none" strike="noStrike" baseline="0" dirty="0">
+                <a:ln>
+                  <a:noFill/>
+                </a:ln>
+                <a:solidFill>
+                  <a:srgbClr val="000000"/>
+                </a:solidFill>
+                <a:ea typeface="Gothic" pitchFamily="2"/>
+                <a:cs typeface="Lucidasans" pitchFamily="2"/>
+              </a:rPr>
+              <a:t> time</a:t>
+            </a:r>
+          </a:p>
+          <a:p>
+            <a:pPr marL="800100" lvl="2" indent="-342900" hangingPunct="0">
+              <a:spcBef>
+                <a:spcPts val="598"/>
+              </a:spcBef>
+              <a:buSzPct val="100000"/>
+              <a:buFont typeface="Arial"/>
+              <a:buChar char="•"/>
+              <a:tabLst>
+                <a:tab pos="0" algn="l"/>
+                <a:tab pos="914400" algn="l"/>
+                <a:tab pos="1828800" algn="l"/>
+                <a:tab pos="2743199" algn="l"/>
+                <a:tab pos="3657600" algn="l"/>
+                <a:tab pos="4572000" algn="l"/>
+                <a:tab pos="5486399" algn="l"/>
+                <a:tab pos="6400799" algn="l"/>
+                <a:tab pos="7315200" algn="l"/>
+                <a:tab pos="8229600" algn="l"/>
+                <a:tab pos="9144000" algn="l"/>
+                <a:tab pos="10058400" algn="l"/>
+              </a:tabLst>
+            </a:pPr>
+            <a:r>
+              <a:rPr lang="en-US" sz="2000" b="0" i="0" u="none" strike="noStrike" baseline="0" dirty="0">
+                <a:ln>
+                  <a:noFill/>
+                </a:ln>
+                <a:solidFill>
+                  <a:srgbClr val="000000"/>
+                </a:solidFill>
+                <a:ea typeface="Gothic" pitchFamily="2"/>
+                <a:cs typeface="Lucidasans" pitchFamily="2"/>
+              </a:rPr>
+              <a:t>prior ranking of attributes </a:t>
+            </a:r>
+            <a:r>
+              <a:rPr lang="en-US" sz="2000" b="1" dirty="0">
+                <a:solidFill>
+                  <a:srgbClr val="000000"/>
+                </a:solidFill>
+                <a:ea typeface="Gothic" pitchFamily="2"/>
+                <a:cs typeface="Lucidasans" pitchFamily="2"/>
+              </a:rPr>
+              <a:t>=&gt;</a:t>
+            </a:r>
+            <a:r>
+              <a:rPr lang="en-US" sz="2000" b="0" i="0" u="none" strike="noStrike" baseline="0" dirty="0">
+                <a:ln>
+                  <a:noFill/>
+                </a:ln>
+                <a:solidFill>
+                  <a:srgbClr val="000000"/>
+                </a:solidFill>
+                <a:ea typeface="Gothic" pitchFamily="2"/>
+                <a:cs typeface="Lucidasans" pitchFamily="2"/>
+              </a:rPr>
+              <a:t>   linear in </a:t>
+            </a:r>
+            <a:r>
+              <a:rPr lang="en-US" sz="2000" b="0" i="1" u="none" strike="noStrike" baseline="0" dirty="0">
+                <a:ln>
+                  <a:noFill/>
+                </a:ln>
+                <a:solidFill>
+                  <a:srgbClr val="000000"/>
+                </a:solidFill>
+                <a:ea typeface="Gothic" pitchFamily="2"/>
+                <a:cs typeface="Lucidasans" pitchFamily="2"/>
+              </a:rPr>
+              <a:t>k</a:t>
+            </a:r>
+          </a:p>
+          <a:p>
+            <a:pPr marL="457200" marR="0" lvl="0" indent="-457200" algn="l" rtl="0" hangingPunct="0">
+              <a:lnSpc>
+                <a:spcPct val="100000"/>
+              </a:lnSpc>
+              <a:spcBef>
+                <a:spcPts val="598"/>
+              </a:spcBef>
+              <a:spcAft>
+                <a:spcPts val="0"/>
+              </a:spcAft>
+              <a:buSzPct val="100000"/>
+              <a:buFont typeface="Arial"/>
+              <a:buChar char="•"/>
+              <a:tabLst>
+                <a:tab pos="0" algn="l"/>
+                <a:tab pos="914400" algn="l"/>
+                <a:tab pos="1828800" algn="l"/>
+                <a:tab pos="2743199" algn="l"/>
+                <a:tab pos="3657600" algn="l"/>
+                <a:tab pos="4572000" algn="l"/>
+                <a:tab pos="5486399" algn="l"/>
+                <a:tab pos="6400799" algn="l"/>
+                <a:tab pos="7315200" algn="l"/>
+                <a:tab pos="8229600" algn="l"/>
+                <a:tab pos="9144000" algn="l"/>
+                <a:tab pos="10058400" algn="l"/>
+              </a:tabLst>
+            </a:pPr>
+            <a:r>
+              <a:rPr lang="en-US" sz="2400" b="0" i="0" u="none" strike="noStrike" baseline="0" dirty="0">
+                <a:ln>
+                  <a:noFill/>
+                </a:ln>
+                <a:solidFill>
+                  <a:srgbClr val="000000"/>
+                </a:solidFill>
+                <a:ea typeface="Gothic" pitchFamily="2"/>
+                <a:cs typeface="Lucidasans" pitchFamily="2"/>
+              </a:rPr>
+              <a:t>Can use significance test to stop cross-validation for a subset early if it is unlikely to “win” (</a:t>
+            </a:r>
+            <a:r>
+              <a:rPr lang="en-US" sz="2400" b="0" i="1" u="none" strike="noStrike" baseline="0" dirty="0">
+                <a:ln>
+                  <a:noFill/>
+                </a:ln>
+                <a:solidFill>
+                  <a:srgbClr val="000000"/>
+                </a:solidFill>
+                <a:ea typeface="Gothic" pitchFamily="2"/>
+                <a:cs typeface="Lucidasans" pitchFamily="2"/>
+              </a:rPr>
+              <a:t>race search</a:t>
+            </a:r>
+            <a:r>
+              <a:rPr lang="en-US" sz="2400" b="0" i="0" u="none" strike="noStrike" baseline="0" dirty="0">
+                <a:ln>
+                  <a:noFill/>
+                </a:ln>
+                <a:solidFill>
+                  <a:srgbClr val="000000"/>
+                </a:solidFill>
+                <a:ea typeface="Gothic" pitchFamily="2"/>
+                <a:cs typeface="Lucidasans" pitchFamily="2"/>
+              </a:rPr>
+              <a:t>)</a:t>
+            </a:r>
+          </a:p>
+          <a:p>
+            <a:pPr marL="457200" lvl="2" hangingPunct="0">
+              <a:spcBef>
+                <a:spcPts val="598"/>
+              </a:spcBef>
+              <a:buSzPct val="100000"/>
+              <a:tabLst>
+                <a:tab pos="0" algn="l"/>
+                <a:tab pos="914400" algn="l"/>
+                <a:tab pos="1828800" algn="l"/>
+                <a:tab pos="2743199" algn="l"/>
+                <a:tab pos="3657600" algn="l"/>
+                <a:tab pos="4572000" algn="l"/>
+                <a:tab pos="5486399" algn="l"/>
+                <a:tab pos="6400799" algn="l"/>
+                <a:tab pos="7315200" algn="l"/>
+                <a:tab pos="8229600" algn="l"/>
+                <a:tab pos="9144000" algn="l"/>
+                <a:tab pos="10058400" algn="l"/>
+              </a:tabLst>
+            </a:pPr>
+            <a:r>
+              <a:rPr lang="en-US" sz="2000" dirty="0">
+                <a:solidFill>
+                  <a:srgbClr val="000000"/>
+                </a:solidFill>
+                <a:ea typeface="Gothic" pitchFamily="2"/>
+                <a:cs typeface="Lucidasans" pitchFamily="2"/>
+              </a:rPr>
+              <a:t>C</a:t>
+            </a:r>
+            <a:r>
+              <a:rPr lang="en-US" sz="2000" b="0" i="0" u="none" strike="noStrike" baseline="0" dirty="0">
+                <a:ln>
+                  <a:noFill/>
+                </a:ln>
+                <a:solidFill>
+                  <a:srgbClr val="000000"/>
+                </a:solidFill>
+                <a:ea typeface="Gothic" pitchFamily="2"/>
+                <a:cs typeface="Lucidasans" pitchFamily="2"/>
+              </a:rPr>
+              <a:t>an be used with forward, backward selection, prior ranking, or special-purpose </a:t>
+            </a:r>
+            <a:r>
+              <a:rPr lang="en-US" sz="2000" b="0" i="1" u="none" strike="noStrike" baseline="0" dirty="0">
+                <a:ln>
+                  <a:noFill/>
+                </a:ln>
+                <a:solidFill>
+                  <a:srgbClr val="000000"/>
+                </a:solidFill>
+                <a:ea typeface="Gothic" pitchFamily="2"/>
+                <a:cs typeface="Lucidasans" pitchFamily="2"/>
+              </a:rPr>
+              <a:t>schemata search</a:t>
+            </a:r>
+          </a:p>
+          <a:p>
+            <a:pPr marL="457200" marR="0" lvl="0" indent="-457200" algn="l" rtl="0" hangingPunct="0">
+              <a:lnSpc>
+                <a:spcPct val="100000"/>
+              </a:lnSpc>
+              <a:spcBef>
+                <a:spcPts val="697"/>
+              </a:spcBef>
+              <a:spcAft>
+                <a:spcPts val="0"/>
+              </a:spcAft>
+              <a:buSzPct val="100000"/>
+              <a:buFont typeface="Arial"/>
+              <a:buChar char="•"/>
+              <a:tabLst>
+                <a:tab pos="0" algn="l"/>
+                <a:tab pos="914400" algn="l"/>
+                <a:tab pos="1828800" algn="l"/>
+                <a:tab pos="2743199" algn="l"/>
+                <a:tab pos="3657600" algn="l"/>
+                <a:tab pos="4572000" algn="l"/>
+                <a:tab pos="5486399" algn="l"/>
+                <a:tab pos="6400799" algn="l"/>
+                <a:tab pos="7315200" algn="l"/>
+                <a:tab pos="8229600" algn="l"/>
+                <a:tab pos="9144000" algn="l"/>
+                <a:tab pos="10058400" algn="l"/>
+              </a:tabLst>
+            </a:pPr>
+            <a:r>
+              <a:rPr lang="en-US" sz="2400" b="0" i="0" u="none" strike="noStrike" baseline="0" dirty="0">
+                <a:ln>
+                  <a:noFill/>
+                </a:ln>
+                <a:solidFill>
+                  <a:srgbClr val="000000"/>
+                </a:solidFill>
+                <a:ea typeface="Gothic" pitchFamily="2"/>
+                <a:cs typeface="Lucidasans" pitchFamily="2"/>
+              </a:rPr>
+              <a:t>Scheme-specific attribute selection is essential for learning decision tables</a:t>
+            </a:r>
+          </a:p>
+          <a:p>
+            <a:pPr marL="457200" marR="0" lvl="0" indent="-457200" algn="l" rtl="0" hangingPunct="0">
+              <a:lnSpc>
+                <a:spcPct val="100000"/>
+              </a:lnSpc>
+              <a:spcBef>
+                <a:spcPts val="697"/>
+              </a:spcBef>
+              <a:spcAft>
+                <a:spcPts val="0"/>
+              </a:spcAft>
+              <a:buSzPct val="100000"/>
+              <a:buFont typeface="Arial"/>
+              <a:buChar char="•"/>
+              <a:tabLst>
+                <a:tab pos="0" algn="l"/>
+                <a:tab pos="914400" algn="l"/>
+                <a:tab pos="1828800" algn="l"/>
+                <a:tab pos="2743199" algn="l"/>
+                <a:tab pos="3657600" algn="l"/>
+                <a:tab pos="4572000" algn="l"/>
+                <a:tab pos="5486399" algn="l"/>
+                <a:tab pos="6400799" algn="l"/>
+                <a:tab pos="7315200" algn="l"/>
+                <a:tab pos="8229600" algn="l"/>
+                <a:tab pos="9144000" algn="l"/>
+                <a:tab pos="10058400" algn="l"/>
+              </a:tabLst>
+            </a:pPr>
+            <a:r>
+              <a:rPr lang="en-US" sz="2400" b="0" i="0" u="none" strike="noStrike" baseline="0" dirty="0">
+                <a:ln>
+                  <a:noFill/>
+                </a:ln>
+                <a:solidFill>
+                  <a:srgbClr val="000000"/>
+                </a:solidFill>
+                <a:ea typeface="Gothic" pitchFamily="2"/>
+                <a:cs typeface="Lucidasans" pitchFamily="2"/>
+              </a:rPr>
+              <a:t>Efficient for decision tables and Naïve Bayes</a:t>
+            </a:r>
+          </a:p>
+        </p:txBody>
+      </p:sp>
+    </p:spTree>
+  </p:cSld>
+  <p:clrMapOvr>
+    <a:masterClrMapping/>
+  </p:clrMapOvr>
+</p:sld>
+</file>
+
+<file path=ppt/slides/slide12.xml><?xml version="1.0" encoding="utf-8"?>
+<p:sld xmlns:a="http://schemas.openxmlformats.org/drawingml/2006/main" xmlns:r="http://schemas.openxmlformats.org/officeDocument/2006/relationships" xmlns:p="http://schemas.openxmlformats.org/presentationml/2006/main">
+  <p:cSld name="Attribute discretization (numeric attributes only)">
+    <p:spTree>
+      <p:nvGrpSpPr>
+        <p:cNvPr id="1" name=""/>
+        <p:cNvGrpSpPr/>
+        <p:nvPr/>
+      </p:nvGrpSpPr>
+      <p:grpSpPr>
+        <a:xfrm>
+          <a:off x="0" y="0"/>
+          <a:ext cx="0" cy="0"/>
+          <a:chOff x="0" y="0"/>
+          <a:chExt cx="0" cy="0"/>
+        </a:xfrm>
+      </p:grpSpPr>
+      <p:sp>
+        <p:nvSpPr>
+          <p:cNvPr id="2" name="Title 1"/>
+          <p:cNvSpPr txBox="1">
+            <a:spLocks noGrp="1"/>
+          </p:cNvSpPr>
+          <p:nvPr>
+            <p:ph type="title"/>
+          </p:nvPr>
+        </p:nvSpPr>
+        <p:spPr/>
+        <p:txBody>
+          <a:bodyPr/>
+          <a:lstStyle/>
+          <a:p>
+            <a:pPr lvl="0"/>
+            <a:r>
+              <a:rPr lang="en-US"/>
+              <a:t>Attribute discretization</a:t>
+            </a:r>
+          </a:p>
+        </p:txBody>
+      </p:sp>
+      <p:sp>
+        <p:nvSpPr>
+          <p:cNvPr id="6" name="Content Placeholder 5"/>
+          <p:cNvSpPr>
+            <a:spLocks noGrp="1"/>
+          </p:cNvSpPr>
+          <p:nvPr>
+            <p:ph idx="1"/>
+          </p:nvPr>
+        </p:nvSpPr>
+        <p:spPr/>
+        <p:txBody>
+          <a:bodyPr/>
+          <a:lstStyle/>
+          <a:p>
+            <a:r>
+              <a:rPr lang="en-CA" dirty="0"/>
+              <a:t>Discretization can be useful even if a learning algorithm can be run on numeric attributes directly</a:t>
+            </a:r>
+          </a:p>
+          <a:p>
+            <a:r>
+              <a:rPr lang="en-CA" dirty="0"/>
+              <a:t>Avoids normality assumption in Naïve Bayes and clustering</a:t>
+            </a:r>
+          </a:p>
+          <a:p>
+            <a:r>
+              <a:rPr lang="en-CA" dirty="0"/>
+              <a:t>Examples of discretization we have already encountered:</a:t>
+            </a:r>
+          </a:p>
+          <a:p>
+            <a:pPr lvl="1"/>
+            <a:r>
+              <a:rPr lang="en-CA" dirty="0"/>
+              <a:t>1R: uses simple discretization scheme</a:t>
+            </a:r>
+          </a:p>
+          <a:p>
+            <a:pPr lvl="1"/>
+            <a:r>
+              <a:rPr lang="en-CA" dirty="0"/>
+              <a:t>C4.5 performs local discretization</a:t>
+            </a:r>
+          </a:p>
+          <a:p>
+            <a:r>
+              <a:rPr lang="en-CA" dirty="0"/>
+              <a:t>Global discretization can be advantageous because it is based on more data</a:t>
+            </a:r>
+          </a:p>
+          <a:p>
+            <a:r>
+              <a:rPr lang="en-CA" dirty="0"/>
+              <a:t>Apply learner to</a:t>
+            </a:r>
+          </a:p>
+          <a:p>
+            <a:pPr lvl="1"/>
+            <a:r>
+              <a:rPr lang="en-CA" dirty="0"/>
+              <a:t>k -valued discretized attribute or  to</a:t>
+            </a:r>
+          </a:p>
+          <a:p>
+            <a:pPr lvl="1"/>
+            <a:r>
+              <a:rPr lang="en-CA" dirty="0"/>
+              <a:t>k – 1 binary attributes that code the cut points</a:t>
+            </a:r>
+          </a:p>
+          <a:p>
+            <a:r>
+              <a:rPr lang="en-CA" dirty="0"/>
+              <a:t>The latter approach often works better when learning decision trees or rule sets</a:t>
+            </a:r>
+          </a:p>
+        </p:txBody>
+      </p:sp>
+      <p:sp>
+        <p:nvSpPr>
+          <p:cNvPr id="3" name="Slide Number Placeholder 2"/>
+          <p:cNvSpPr>
+            <a:spLocks noGrp="1"/>
+          </p:cNvSpPr>
+          <p:nvPr>
+            <p:ph type="sldNum" sz="quarter" idx="12"/>
+          </p:nvPr>
+        </p:nvSpPr>
+        <p:spPr/>
+        <p:txBody>
+          <a:bodyPr/>
+          <a:lstStyle/>
+          <a:p>
+            <a:fld id="{CC0D3929-19F2-429B-ADDC-CA064EDFCD10}" type="slidenum">
+              <a:rPr lang="en-NZ" smtClean="0"/>
+              <a:pPr/>
+              <a:t>12</a:t>
+            </a:fld>
+            <a:endParaRPr lang="en-NZ"/>
+          </a:p>
+        </p:txBody>
+      </p:sp>
+    </p:spTree>
+  </p:cSld>
+  <p:clrMapOvr>
+    <a:masterClrMapping/>
+  </p:clrMapOvr>
+</p:sld>
+</file>
+
+<file path=ppt/slides/slide13.xml><?xml version="1.0" encoding="utf-8"?>
+<p:sld xmlns:a="http://schemas.openxmlformats.org/drawingml/2006/main" xmlns:r="http://schemas.openxmlformats.org/officeDocument/2006/relationships" xmlns:p="http://schemas.openxmlformats.org/presentationml/2006/main">
+  <p:cSld name="Discretization: unsupervised">
+    <p:spTree>
+      <p:nvGrpSpPr>
+        <p:cNvPr id="1" name=""/>
+        <p:cNvGrpSpPr/>
+        <p:nvPr/>
+      </p:nvGrpSpPr>
+      <p:grpSpPr>
+        <a:xfrm>
+          <a:off x="0" y="0"/>
+          <a:ext cx="0" cy="0"/>
+          <a:chOff x="0" y="0"/>
+          <a:chExt cx="0" cy="0"/>
+        </a:xfrm>
+      </p:grpSpPr>
+      <p:sp>
+        <p:nvSpPr>
+          <p:cNvPr id="6" name="Slide Number Placeholder 5"/>
+          <p:cNvSpPr>
+            <a:spLocks noGrp="1"/>
+          </p:cNvSpPr>
+          <p:nvPr>
+            <p:ph type="sldNum" sz="quarter" idx="12"/>
+          </p:nvPr>
+        </p:nvSpPr>
+        <p:spPr/>
+        <p:txBody>
+          <a:bodyPr/>
+          <a:lstStyle/>
+          <a:p>
+            <a:fld id="{CC0D3929-19F2-429B-ADDC-CA064EDFCD10}" type="slidenum">
+              <a:rPr lang="en-NZ" smtClean="0"/>
+              <a:pPr/>
+              <a:t>13</a:t>
+            </a:fld>
+            <a:endParaRPr lang="en-NZ"/>
+          </a:p>
+        </p:txBody>
+      </p:sp>
+      <p:sp>
+        <p:nvSpPr>
+          <p:cNvPr id="2" name="Title 1"/>
+          <p:cNvSpPr txBox="1">
+            <a:spLocks noGrp="1"/>
+          </p:cNvSpPr>
+          <p:nvPr>
+            <p:ph type="title" idx="4294967295"/>
+          </p:nvPr>
+        </p:nvSpPr>
+        <p:spPr>
+          <a:xfrm>
+            <a:off x="1600200" y="-77788"/>
+            <a:ext cx="7543800" cy="977901"/>
+          </a:xfrm>
+        </p:spPr>
+        <p:txBody>
+          <a:bodyPr wrap="square" lIns="90360" tIns="44280" rIns="90360" bIns="44280" anchorCtr="0"/>
+          <a:lstStyle/>
+          <a:p>
+            <a:pPr lvl="0"/>
+            <a:r>
+              <a:rPr lang="en-US" dirty="0"/>
+              <a:t>Discretization: unsupervised</a:t>
+            </a:r>
+          </a:p>
+        </p:txBody>
+      </p:sp>
+      <p:sp>
+        <p:nvSpPr>
+          <p:cNvPr id="3" name="TextBox 2"/>
+          <p:cNvSpPr txBox="1"/>
+          <p:nvPr/>
+        </p:nvSpPr>
+        <p:spPr>
+          <a:xfrm>
+            <a:off x="530970" y="1114559"/>
+            <a:ext cx="8158297" cy="4588733"/>
+          </a:xfrm>
+          <a:prstGeom prst="rect">
+            <a:avLst/>
+          </a:prstGeom>
+          <a:noFill/>
+          <a:ln>
+            <a:noFill/>
+          </a:ln>
+        </p:spPr>
+        <p:txBody>
+          <a:bodyPr vert="horz" wrap="square" lIns="90360" tIns="44280" rIns="90360" bIns="44280" anchor="t" anchorCtr="0" compatLnSpc="0">
+            <a:spAutoFit/>
+          </a:bodyPr>
+          <a:lstStyle/>
+          <a:p>
+            <a:pPr marL="457200" marR="0" lvl="0" indent="-457200" algn="l" rtl="0" hangingPunct="0">
+              <a:lnSpc>
+                <a:spcPct val="100000"/>
+              </a:lnSpc>
+              <a:spcBef>
+                <a:spcPts val="697"/>
+              </a:spcBef>
+              <a:spcAft>
+                <a:spcPts val="0"/>
+              </a:spcAft>
+              <a:buSzPct val="100000"/>
+              <a:buFont typeface="Arial"/>
+              <a:buChar char="•"/>
+              <a:tabLst>
+                <a:tab pos="0" algn="l"/>
+                <a:tab pos="914400" algn="l"/>
+                <a:tab pos="1828800" algn="l"/>
+                <a:tab pos="2743199" algn="l"/>
+                <a:tab pos="3657600" algn="l"/>
+                <a:tab pos="4572000" algn="l"/>
+                <a:tab pos="5486399" algn="l"/>
+                <a:tab pos="6400799" algn="l"/>
+                <a:tab pos="7315200" algn="l"/>
+                <a:tab pos="8229600" algn="l"/>
+                <a:tab pos="9144000" algn="l"/>
+                <a:tab pos="10058400" algn="l"/>
+              </a:tabLst>
+            </a:pPr>
+            <a:r>
+              <a:rPr lang="en-US" sz="2400" i="1" dirty="0">
+                <a:solidFill>
+                  <a:srgbClr val="000000"/>
+                </a:solidFill>
+                <a:latin typeface="Calibri"/>
+                <a:ea typeface="Gothic" pitchFamily="2"/>
+                <a:cs typeface="Calibri"/>
+              </a:rPr>
+              <a:t>Unsupervised discretization</a:t>
+            </a:r>
+            <a:r>
+              <a:rPr lang="en-US" sz="2400" dirty="0">
+                <a:solidFill>
+                  <a:srgbClr val="000000"/>
+                </a:solidFill>
+                <a:latin typeface="Calibri"/>
+                <a:ea typeface="Gothic" pitchFamily="2"/>
+                <a:cs typeface="Calibri"/>
+              </a:rPr>
+              <a:t>: d</a:t>
+            </a:r>
+            <a:r>
+              <a:rPr lang="en-US" sz="2400" b="0" i="0" u="none" strike="noStrike" baseline="0" dirty="0">
+                <a:ln>
+                  <a:noFill/>
+                </a:ln>
+                <a:solidFill>
+                  <a:srgbClr val="000000"/>
+                </a:solidFill>
+                <a:latin typeface="Calibri"/>
+                <a:ea typeface="Gothic" pitchFamily="2"/>
+                <a:cs typeface="Calibri"/>
+              </a:rPr>
+              <a:t>etermine intervals without knowing class labels</a:t>
+            </a:r>
+          </a:p>
+          <a:p>
+            <a:pPr marL="457200" lvl="2" hangingPunct="0">
+              <a:spcBef>
+                <a:spcPts val="598"/>
+              </a:spcBef>
+              <a:buSzPct val="100000"/>
+              <a:tabLst>
+                <a:tab pos="0" algn="l"/>
+                <a:tab pos="914400" algn="l"/>
+                <a:tab pos="1828800" algn="l"/>
+                <a:tab pos="2743199" algn="l"/>
+                <a:tab pos="3657600" algn="l"/>
+                <a:tab pos="4572000" algn="l"/>
+                <a:tab pos="5486399" algn="l"/>
+                <a:tab pos="6400799" algn="l"/>
+                <a:tab pos="7315200" algn="l"/>
+                <a:tab pos="8229600" algn="l"/>
+                <a:tab pos="9144000" algn="l"/>
+                <a:tab pos="10058400" algn="l"/>
+              </a:tabLst>
+            </a:pPr>
+            <a:r>
+              <a:rPr lang="en-US" sz="2000" b="0" i="0" u="none" strike="noStrike" baseline="0" dirty="0">
+                <a:ln>
+                  <a:noFill/>
+                </a:ln>
+                <a:solidFill>
+                  <a:srgbClr val="000000"/>
+                </a:solidFill>
+                <a:latin typeface="Calibri"/>
+                <a:ea typeface="Gothic" pitchFamily="2"/>
+                <a:cs typeface="Calibri"/>
+              </a:rPr>
+              <a:t>When clustering, the only possible way!</a:t>
+            </a:r>
+          </a:p>
+          <a:p>
+            <a:pPr marL="457200" marR="0" lvl="0" indent="-457200" algn="l" rtl="0" hangingPunct="0">
+              <a:lnSpc>
+                <a:spcPct val="100000"/>
+              </a:lnSpc>
+              <a:spcBef>
+                <a:spcPts val="697"/>
+              </a:spcBef>
+              <a:spcAft>
+                <a:spcPts val="0"/>
+              </a:spcAft>
+              <a:buSzPct val="100000"/>
+              <a:buFont typeface="Arial"/>
+              <a:buChar char="•"/>
+              <a:tabLst>
+                <a:tab pos="0" algn="l"/>
+                <a:tab pos="914400" algn="l"/>
+                <a:tab pos="1828800" algn="l"/>
+                <a:tab pos="2743199" algn="l"/>
+                <a:tab pos="3657600" algn="l"/>
+                <a:tab pos="4572000" algn="l"/>
+                <a:tab pos="5486399" algn="l"/>
+                <a:tab pos="6400799" algn="l"/>
+                <a:tab pos="7315200" algn="l"/>
+                <a:tab pos="8229600" algn="l"/>
+                <a:tab pos="9144000" algn="l"/>
+                <a:tab pos="10058400" algn="l"/>
+              </a:tabLst>
+            </a:pPr>
+            <a:r>
+              <a:rPr lang="en-US" sz="2400" b="0" i="0" u="none" strike="noStrike" baseline="0" dirty="0">
+                <a:ln>
+                  <a:noFill/>
+                </a:ln>
+                <a:solidFill>
+                  <a:srgbClr val="000000"/>
+                </a:solidFill>
+                <a:latin typeface="Calibri"/>
+                <a:ea typeface="Gothic" pitchFamily="2"/>
+                <a:cs typeface="Calibri"/>
+              </a:rPr>
+              <a:t>Two well-known</a:t>
+            </a:r>
+            <a:r>
+              <a:rPr lang="en-US" sz="2400" b="0" i="0" u="none" strike="noStrike" dirty="0">
+                <a:ln>
+                  <a:noFill/>
+                </a:ln>
+                <a:solidFill>
+                  <a:srgbClr val="000000"/>
+                </a:solidFill>
+                <a:latin typeface="Calibri"/>
+                <a:ea typeface="Gothic" pitchFamily="2"/>
+                <a:cs typeface="Calibri"/>
+              </a:rPr>
+              <a:t> </a:t>
+            </a:r>
+            <a:r>
+              <a:rPr lang="en-US" sz="2400" b="0" i="0" u="none" strike="noStrike" baseline="0" dirty="0">
+                <a:ln>
+                  <a:noFill/>
+                </a:ln>
+                <a:solidFill>
+                  <a:srgbClr val="000000"/>
+                </a:solidFill>
+                <a:latin typeface="Calibri"/>
+                <a:ea typeface="Gothic" pitchFamily="2"/>
+                <a:cs typeface="Calibri"/>
+              </a:rPr>
+              <a:t>strategies:</a:t>
+            </a:r>
+          </a:p>
+          <a:p>
+            <a:pPr marL="800100" lvl="2" indent="-342900" hangingPunct="0">
+              <a:spcBef>
+                <a:spcPts val="598"/>
+              </a:spcBef>
+              <a:buSzPct val="100000"/>
+              <a:buFont typeface="Arial"/>
+              <a:buChar char="•"/>
+              <a:tabLst>
+                <a:tab pos="0" algn="l"/>
+                <a:tab pos="914400" algn="l"/>
+                <a:tab pos="1828800" algn="l"/>
+                <a:tab pos="2743199" algn="l"/>
+                <a:tab pos="3657600" algn="l"/>
+                <a:tab pos="4572000" algn="l"/>
+                <a:tab pos="5486399" algn="l"/>
+                <a:tab pos="6400799" algn="l"/>
+                <a:tab pos="7315200" algn="l"/>
+                <a:tab pos="8229600" algn="l"/>
+                <a:tab pos="9144000" algn="l"/>
+                <a:tab pos="10058400" algn="l"/>
+              </a:tabLst>
+            </a:pPr>
+            <a:r>
+              <a:rPr lang="en-US" sz="2000" b="0" i="1" u="none" strike="noStrike" baseline="0" dirty="0">
+                <a:ln>
+                  <a:noFill/>
+                </a:ln>
+                <a:solidFill>
+                  <a:srgbClr val="000000"/>
+                </a:solidFill>
+                <a:latin typeface="Calibri"/>
+                <a:ea typeface="Gothic" pitchFamily="2"/>
+                <a:cs typeface="Calibri"/>
+              </a:rPr>
+              <a:t>Equal-interval binning</a:t>
+            </a:r>
+          </a:p>
+          <a:p>
+            <a:pPr marL="800100" lvl="2" indent="-342900" hangingPunct="0">
+              <a:spcBef>
+                <a:spcPts val="598"/>
+              </a:spcBef>
+              <a:buSzPct val="100000"/>
+              <a:buFont typeface="Arial"/>
+              <a:buChar char="•"/>
+              <a:tabLst>
+                <a:tab pos="0" algn="l"/>
+                <a:tab pos="914400" algn="l"/>
+                <a:tab pos="1828800" algn="l"/>
+                <a:tab pos="2743199" algn="l"/>
+                <a:tab pos="3657600" algn="l"/>
+                <a:tab pos="4572000" algn="l"/>
+                <a:tab pos="5486399" algn="l"/>
+                <a:tab pos="6400799" algn="l"/>
+                <a:tab pos="7315200" algn="l"/>
+                <a:tab pos="8229600" algn="l"/>
+                <a:tab pos="9144000" algn="l"/>
+                <a:tab pos="10058400" algn="l"/>
+              </a:tabLst>
+            </a:pPr>
+            <a:r>
+              <a:rPr lang="en-US" sz="2000" b="0" i="1" u="none" strike="noStrike" baseline="0" dirty="0">
+                <a:ln>
+                  <a:noFill/>
+                </a:ln>
+                <a:solidFill>
+                  <a:srgbClr val="000000"/>
+                </a:solidFill>
+                <a:latin typeface="Calibri"/>
+                <a:ea typeface="Gothic" pitchFamily="2"/>
+                <a:cs typeface="Calibri"/>
+              </a:rPr>
+              <a:t>Equal-frequency binning</a:t>
+            </a:r>
+            <a:br>
+              <a:rPr lang="en-US" sz="2000" b="0" i="1" u="none" strike="noStrike" baseline="0" dirty="0">
+                <a:ln>
+                  <a:noFill/>
+                </a:ln>
+                <a:solidFill>
+                  <a:srgbClr val="000000"/>
+                </a:solidFill>
+                <a:latin typeface="Calibri"/>
+                <a:ea typeface="Gothic" pitchFamily="2"/>
+                <a:cs typeface="Calibri"/>
+              </a:rPr>
+            </a:br>
+            <a:r>
+              <a:rPr lang="en-US" sz="2000" b="0" i="0" u="none" strike="noStrike" baseline="0" dirty="0">
+                <a:ln>
+                  <a:noFill/>
+                </a:ln>
+                <a:solidFill>
+                  <a:srgbClr val="000000"/>
+                </a:solidFill>
+                <a:latin typeface="Calibri"/>
+                <a:ea typeface="Gothic" pitchFamily="2"/>
+                <a:cs typeface="Calibri"/>
+              </a:rPr>
+              <a:t>(also called </a:t>
+            </a:r>
+            <a:r>
+              <a:rPr lang="en-US" sz="2000" b="0" i="1" u="none" strike="noStrike" baseline="0" dirty="0">
+                <a:ln>
+                  <a:noFill/>
+                </a:ln>
+                <a:solidFill>
+                  <a:srgbClr val="000000"/>
+                </a:solidFill>
+                <a:latin typeface="Calibri"/>
+                <a:ea typeface="Gothic" pitchFamily="2"/>
+                <a:cs typeface="Calibri"/>
+              </a:rPr>
+              <a:t>histogram equalization</a:t>
+            </a:r>
+            <a:r>
+              <a:rPr lang="en-US" sz="2000" b="0" i="0" u="none" strike="noStrike" baseline="0" dirty="0">
+                <a:ln>
+                  <a:noFill/>
+                </a:ln>
+                <a:solidFill>
+                  <a:srgbClr val="000000"/>
+                </a:solidFill>
+                <a:latin typeface="Calibri"/>
+                <a:ea typeface="Gothic" pitchFamily="2"/>
+                <a:cs typeface="Calibri"/>
+              </a:rPr>
+              <a:t>)</a:t>
+            </a:r>
+          </a:p>
+          <a:p>
+            <a:pPr marL="457200" marR="0" lvl="0" indent="-457200" algn="l" rtl="0" hangingPunct="0">
+              <a:lnSpc>
+                <a:spcPct val="100000"/>
+              </a:lnSpc>
+              <a:spcBef>
+                <a:spcPts val="697"/>
+              </a:spcBef>
+              <a:spcAft>
+                <a:spcPts val="0"/>
+              </a:spcAft>
+              <a:buSzPct val="100000"/>
+              <a:buFont typeface="Arial"/>
+              <a:buChar char="•"/>
+              <a:tabLst>
+                <a:tab pos="0" algn="l"/>
+                <a:tab pos="914400" algn="l"/>
+                <a:tab pos="1828800" algn="l"/>
+                <a:tab pos="2743199" algn="l"/>
+                <a:tab pos="3657600" algn="l"/>
+                <a:tab pos="4572000" algn="l"/>
+                <a:tab pos="5486399" algn="l"/>
+                <a:tab pos="6400799" algn="l"/>
+                <a:tab pos="7315200" algn="l"/>
+                <a:tab pos="8229600" algn="l"/>
+                <a:tab pos="9144000" algn="l"/>
+                <a:tab pos="10058400" algn="l"/>
+              </a:tabLst>
+            </a:pPr>
+            <a:r>
               <a:rPr lang="en-US" sz="2400" dirty="0">
                 <a:solidFill>
                   <a:srgbClr val="000000"/>
@@ -20142,7 +21013,7 @@
 </p:sld>
 </file>
 
-<file path=ppt/slides/slide12.xml><?xml version="1.0" encoding="utf-8"?>
+<file path=ppt/slides/slide14.xml><?xml version="1.0" encoding="utf-8"?>
 <p:sld xmlns:a="http://schemas.openxmlformats.org/drawingml/2006/main" xmlns:r="http://schemas.openxmlformats.org/officeDocument/2006/relationships" xmlns:p="http://schemas.openxmlformats.org/presentationml/2006/main">
   <p:cSld>
     <p:spTree>
@@ -20303,7 +21174,7 @@
             <a:fld id="{CC0D3929-19F2-429B-ADDC-CA064EDFCD10}" type="slidenum">
               <a:rPr lang="en-NZ" smtClean="0"/>
               <a:pPr/>
-              <a:t>12</a:t>
+              <a:t>14</a:t>
             </a:fld>
             <a:endParaRPr lang="en-NZ"/>
           </a:p>
@@ -20317,7 +21188,7 @@
 </p:sld>
 </file>
 
-<file path=ppt/slides/slide13.xml><?xml version="1.0" encoding="utf-8"?>
+<file path=ppt/slides/slide15.xml><?xml version="1.0" encoding="utf-8"?>
 <p:sld xmlns:a="http://schemas.openxmlformats.org/drawingml/2006/main" xmlns:r="http://schemas.openxmlformats.org/officeDocument/2006/relationships" xmlns:p="http://schemas.openxmlformats.org/presentationml/2006/main">
   <p:cSld>
     <p:spTree>
@@ -20352,7 +21223,7 @@
             <a:fld id="{CC0D3929-19F2-429B-ADDC-CA064EDFCD10}" type="slidenum">
               <a:rPr lang="en-NZ" smtClean="0"/>
               <a:pPr/>
-              <a:t>13</a:t>
+              <a:t>15</a:t>
             </a:fld>
             <a:endParaRPr lang="en-NZ"/>
           </a:p>
@@ -21177,7 +22048,7 @@
 </p:sld>
 </file>
 
-<file path=ppt/slides/slide14.xml><?xml version="1.0" encoding="utf-8"?>
+<file path=ppt/slides/slide16.xml><?xml version="1.0" encoding="utf-8"?>
 <p:sld xmlns:a="http://schemas.openxmlformats.org/drawingml/2006/main" xmlns:r="http://schemas.openxmlformats.org/officeDocument/2006/relationships" xmlns:p="http://schemas.openxmlformats.org/presentationml/2006/main">
   <p:cSld>
     <p:spTree>
@@ -21212,7 +22083,7 @@
             <a:fld id="{CC0D3929-19F2-429B-ADDC-CA064EDFCD10}" type="slidenum">
               <a:rPr lang="en-NZ" smtClean="0"/>
               <a:pPr/>
-              <a:t>14</a:t>
+              <a:t>16</a:t>
             </a:fld>
             <a:endParaRPr lang="en-NZ"/>
           </a:p>
@@ -21952,303 +22823,6 @@
 </p:sld>
 </file>
 
-<file path=ppt/slides/slide15.xml><?xml version="1.0" encoding="utf-8"?>
-<p:sld xmlns:a="http://schemas.openxmlformats.org/drawingml/2006/main" xmlns:r="http://schemas.openxmlformats.org/officeDocument/2006/relationships" xmlns:p="http://schemas.openxmlformats.org/presentationml/2006/main">
-  <p:cSld>
-    <p:spTree>
-      <p:nvGrpSpPr>
-        <p:cNvPr id="1" name=""/>
-        <p:cNvGrpSpPr/>
-        <p:nvPr/>
-      </p:nvGrpSpPr>
-      <p:grpSpPr>
-        <a:xfrm>
-          <a:off x="0" y="0"/>
-          <a:ext cx="0" cy="0"/>
-          <a:chOff x="0" y="0"/>
-          <a:chExt cx="0" cy="0"/>
-        </a:xfrm>
-      </p:grpSpPr>
-      <p:sp>
-        <p:nvSpPr>
-          <p:cNvPr id="2" name="Title 1"/>
-          <p:cNvSpPr txBox="1">
-            <a:spLocks noGrp="1"/>
-          </p:cNvSpPr>
-          <p:nvPr>
-            <p:ph type="title"/>
-          </p:nvPr>
-        </p:nvSpPr>
-        <p:spPr>
-          <a:xfrm>
-            <a:off x="502271" y="64689"/>
-            <a:ext cx="8013080" cy="700062"/>
-          </a:xfrm>
-        </p:spPr>
-        <p:txBody>
-          <a:bodyPr>
-            <a:normAutofit/>
-          </a:bodyPr>
-          <a:lstStyle/>
-          <a:p>
-            <a:pPr lvl="0"/>
-            <a:r>
-              <a:rPr lang="en-US" dirty="0"/>
-              <a:t>Supervised discretization: other methods</a:t>
-            </a:r>
-          </a:p>
-        </p:txBody>
-      </p:sp>
-      <p:sp>
-        <p:nvSpPr>
-          <p:cNvPr id="6" name="Content Placeholder 5"/>
-          <p:cNvSpPr>
-            <a:spLocks noGrp="1"/>
-          </p:cNvSpPr>
-          <p:nvPr>
-            <p:ph idx="1"/>
-          </p:nvPr>
-        </p:nvSpPr>
-        <p:spPr/>
-        <p:txBody>
-          <a:bodyPr/>
-          <a:lstStyle/>
-          <a:p>
-            <a:r>
-              <a:rPr lang="en-CA" dirty="0"/>
-              <a:t>Can replace top-down procedure by bottom-up method</a:t>
-            </a:r>
-          </a:p>
-          <a:p>
-            <a:r>
-              <a:rPr lang="en-CA" dirty="0"/>
-              <a:t>This bottom-up method has been applied in conjunction with the chi-squared test</a:t>
-            </a:r>
-          </a:p>
-          <a:p>
-            <a:pPr lvl="1"/>
-            <a:r>
-              <a:rPr lang="en-CA" dirty="0"/>
-              <a:t>Continue to merge intervals until they become significantly different</a:t>
-            </a:r>
-          </a:p>
-          <a:p>
-            <a:r>
-              <a:rPr lang="en-CA" dirty="0"/>
-              <a:t>Can use dynamic programming to find optimum </a:t>
-            </a:r>
-            <a:r>
-              <a:rPr lang="en-CA" i="1" dirty="0"/>
-              <a:t>k</a:t>
-            </a:r>
-            <a:r>
-              <a:rPr lang="en-CA" dirty="0"/>
-              <a:t>-way split for given additive criterion</a:t>
-            </a:r>
-          </a:p>
-          <a:p>
-            <a:pPr lvl="1"/>
-            <a:r>
-              <a:rPr lang="en-CA" dirty="0"/>
-              <a:t>Requires time quadratic in the number of instances</a:t>
-            </a:r>
-          </a:p>
-          <a:p>
-            <a:pPr lvl="1"/>
-            <a:r>
-              <a:rPr lang="en-CA" dirty="0"/>
-              <a:t>But can be done in linear time if error rate is used instead of entropy</a:t>
-            </a:r>
-          </a:p>
-          <a:p>
-            <a:pPr lvl="1"/>
-            <a:r>
-              <a:rPr lang="en-CA" dirty="0"/>
-              <a:t>However, using error rate is generally not a good idea when discretizing an attribute as we will see</a:t>
-            </a:r>
-          </a:p>
-        </p:txBody>
-      </p:sp>
-      <p:sp>
-        <p:nvSpPr>
-          <p:cNvPr id="3" name="Slide Number Placeholder 2"/>
-          <p:cNvSpPr>
-            <a:spLocks noGrp="1"/>
-          </p:cNvSpPr>
-          <p:nvPr>
-            <p:ph type="sldNum" sz="quarter" idx="12"/>
-          </p:nvPr>
-        </p:nvSpPr>
-        <p:spPr/>
-        <p:txBody>
-          <a:bodyPr/>
-          <a:lstStyle/>
-          <a:p>
-            <a:fld id="{CC0D3929-19F2-429B-ADDC-CA064EDFCD10}" type="slidenum">
-              <a:rPr lang="en-NZ" smtClean="0"/>
-              <a:pPr/>
-              <a:t>15</a:t>
-            </a:fld>
-            <a:endParaRPr lang="en-NZ"/>
-          </a:p>
-        </p:txBody>
-      </p:sp>
-    </p:spTree>
-  </p:cSld>
-  <p:clrMapOvr>
-    <a:masterClrMapping/>
-  </p:clrMapOvr>
-</p:sld>
-</file>
-
-<file path=ppt/slides/slide16.xml><?xml version="1.0" encoding="utf-8"?>
-<p:sld xmlns:a="http://schemas.openxmlformats.org/drawingml/2006/main" xmlns:r="http://schemas.openxmlformats.org/officeDocument/2006/relationships" xmlns:p="http://schemas.openxmlformats.org/presentationml/2006/main">
-  <p:cSld>
-    <p:spTree>
-      <p:nvGrpSpPr>
-        <p:cNvPr id="1" name=""/>
-        <p:cNvGrpSpPr/>
-        <p:nvPr/>
-      </p:nvGrpSpPr>
-      <p:grpSpPr>
-        <a:xfrm>
-          <a:off x="0" y="0"/>
-          <a:ext cx="0" cy="0"/>
-          <a:chOff x="0" y="0"/>
-          <a:chExt cx="0" cy="0"/>
-        </a:xfrm>
-      </p:grpSpPr>
-      <p:sp>
-        <p:nvSpPr>
-          <p:cNvPr id="2" name="Title 1"/>
-          <p:cNvSpPr txBox="1">
-            <a:spLocks noGrp="1"/>
-          </p:cNvSpPr>
-          <p:nvPr>
-            <p:ph type="title"/>
-          </p:nvPr>
-        </p:nvSpPr>
-        <p:spPr/>
-        <p:txBody>
-          <a:bodyPr/>
-          <a:lstStyle/>
-          <a:p>
-            <a:pPr lvl="0"/>
-            <a:r>
-              <a:rPr lang="en-US" dirty="0"/>
-              <a:t>Error-based vs. entropy-based</a:t>
-            </a:r>
-          </a:p>
-        </p:txBody>
-      </p:sp>
-      <p:sp>
-        <p:nvSpPr>
-          <p:cNvPr id="6" name="Content Placeholder 5"/>
-          <p:cNvSpPr>
-            <a:spLocks noGrp="1"/>
-          </p:cNvSpPr>
-          <p:nvPr>
-            <p:ph idx="1"/>
-          </p:nvPr>
-        </p:nvSpPr>
-        <p:spPr/>
-        <p:txBody>
-          <a:bodyPr/>
-          <a:lstStyle/>
-          <a:p>
-            <a:r>
-              <a:rPr lang="en-CA" dirty="0"/>
-              <a:t>Question:</a:t>
-            </a:r>
-            <a:br>
-              <a:rPr lang="en-CA" dirty="0"/>
-            </a:br>
-            <a:r>
-              <a:rPr lang="en-CA" dirty="0"/>
-              <a:t>could the best discretization ever have two adjacent intervals with the same class?</a:t>
-            </a:r>
-          </a:p>
-          <a:p>
-            <a:r>
-              <a:rPr lang="en-CA" dirty="0"/>
-              <a:t>Wrong answer: No. For if so,</a:t>
-            </a:r>
-          </a:p>
-          <a:p>
-            <a:pPr lvl="1"/>
-            <a:r>
-              <a:rPr lang="en-CA" dirty="0"/>
-              <a:t>Collapse the two</a:t>
-            </a:r>
-          </a:p>
-          <a:p>
-            <a:pPr lvl="1"/>
-            <a:r>
-              <a:rPr lang="en-CA" dirty="0"/>
-              <a:t>Free up an interval</a:t>
-            </a:r>
-          </a:p>
-          <a:p>
-            <a:pPr lvl="1"/>
-            <a:r>
-              <a:rPr lang="en-CA" dirty="0"/>
-              <a:t>Use it somewhere else</a:t>
-            </a:r>
-          </a:p>
-          <a:p>
-            <a:pPr lvl="1"/>
-            <a:r>
-              <a:rPr lang="en-CA" dirty="0"/>
-              <a:t>(This is what error-based discretization will do)</a:t>
-            </a:r>
-          </a:p>
-          <a:p>
-            <a:r>
-              <a:rPr lang="en-CA" dirty="0"/>
-              <a:t>Right answer: Surprisingly, yes.</a:t>
-            </a:r>
-          </a:p>
-          <a:p>
-            <a:pPr lvl="1"/>
-            <a:r>
-              <a:rPr lang="en-CA" dirty="0"/>
-              <a:t>(and entropy-based discretization can do it)</a:t>
-            </a:r>
-          </a:p>
-        </p:txBody>
-      </p:sp>
-      <p:sp>
-        <p:nvSpPr>
-          <p:cNvPr id="3" name="Slide Number Placeholder 2"/>
-          <p:cNvSpPr>
-            <a:spLocks noGrp="1"/>
-          </p:cNvSpPr>
-          <p:nvPr>
-            <p:ph type="sldNum" sz="quarter" idx="12"/>
-          </p:nvPr>
-        </p:nvSpPr>
-        <p:spPr/>
-        <p:txBody>
-          <a:bodyPr/>
-          <a:lstStyle/>
-          <a:p>
-            <a:fld id="{CC0D3929-19F2-429B-ADDC-CA064EDFCD10}" type="slidenum">
-              <a:rPr lang="en-NZ" smtClean="0"/>
-              <a:pPr/>
-              <a:t>16</a:t>
-            </a:fld>
-            <a:endParaRPr lang="en-NZ"/>
-          </a:p>
-        </p:txBody>
-      </p:sp>
-    </p:spTree>
-  </p:cSld>
-  <p:clrMapOvr>
-    <a:masterClrMapping/>
-  </p:clrMapOvr>
-</p:sld>
-</file>
-
 <file path=ppt/slides/slide17.xml><?xml version="1.0" encoding="utf-8"?>
 <p:sld xmlns:a="http://schemas.openxmlformats.org/drawingml/2006/main" xmlns:r="http://schemas.openxmlformats.org/officeDocument/2006/relationships" xmlns:p="http://schemas.openxmlformats.org/presentationml/2006/main">
   <p:cSld>
@@ -22268,7 +22842,107 @@
       </p:grpSpPr>
       <p:sp>
         <p:nvSpPr>
-          <p:cNvPr id="20" name="Slide Number Placeholder 19"/>
+          <p:cNvPr id="2" name="Title 1"/>
+          <p:cNvSpPr txBox="1">
+            <a:spLocks noGrp="1"/>
+          </p:cNvSpPr>
+          <p:nvPr>
+            <p:ph type="title"/>
+          </p:nvPr>
+        </p:nvSpPr>
+        <p:spPr>
+          <a:xfrm>
+            <a:off x="502271" y="64689"/>
+            <a:ext cx="8013080" cy="700062"/>
+          </a:xfrm>
+        </p:spPr>
+        <p:txBody>
+          <a:bodyPr>
+            <a:normAutofit/>
+          </a:bodyPr>
+          <a:lstStyle/>
+          <a:p>
+            <a:pPr lvl="0"/>
+            <a:r>
+              <a:rPr lang="en-US" dirty="0"/>
+              <a:t>Supervised discretization: other methods</a:t>
+            </a:r>
+          </a:p>
+        </p:txBody>
+      </p:sp>
+      <p:sp>
+        <p:nvSpPr>
+          <p:cNvPr id="6" name="Content Placeholder 5"/>
+          <p:cNvSpPr>
+            <a:spLocks noGrp="1"/>
+          </p:cNvSpPr>
+          <p:nvPr>
+            <p:ph idx="1"/>
+          </p:nvPr>
+        </p:nvSpPr>
+        <p:spPr/>
+        <p:txBody>
+          <a:bodyPr/>
+          <a:lstStyle/>
+          <a:p>
+            <a:r>
+              <a:rPr lang="en-CA" dirty="0"/>
+              <a:t>Can replace top-down procedure by bottom-up method</a:t>
+            </a:r>
+          </a:p>
+          <a:p>
+            <a:r>
+              <a:rPr lang="en-CA" dirty="0"/>
+              <a:t>This bottom-up method has been applied in conjunction with the chi-squared test</a:t>
+            </a:r>
+          </a:p>
+          <a:p>
+            <a:pPr lvl="1"/>
+            <a:r>
+              <a:rPr lang="en-CA" dirty="0"/>
+              <a:t>Continue to merge intervals until they become significantly different</a:t>
+            </a:r>
+          </a:p>
+          <a:p>
+            <a:r>
+              <a:rPr lang="en-CA" dirty="0"/>
+              <a:t>Can use dynamic programming to find optimum </a:t>
+            </a:r>
+            <a:r>
+              <a:rPr lang="en-CA" i="1" dirty="0"/>
+              <a:t>k</a:t>
+            </a:r>
+            <a:r>
+              <a:rPr lang="en-CA" dirty="0"/>
+              <a:t>-way split for given additive criterion</a:t>
+            </a:r>
+          </a:p>
+          <a:p>
+            <a:pPr lvl="1"/>
+            <a:r>
+              <a:rPr lang="en-CA" dirty="0"/>
+              <a:t>Requires time quadratic in the number of instances</a:t>
+            </a:r>
+          </a:p>
+          <a:p>
+            <a:pPr lvl="1"/>
+            <a:r>
+              <a:rPr lang="en-CA" dirty="0"/>
+              <a:t>But can be done in linear time if error rate is used instead of entropy</a:t>
+            </a:r>
+          </a:p>
+          <a:p>
+            <a:pPr lvl="1"/>
+            <a:r>
+              <a:rPr lang="en-CA" dirty="0"/>
+              <a:t>However, using error rate is generally not a good idea when discretizing an attribute as we will see</a:t>
+            </a:r>
+          </a:p>
+        </p:txBody>
+      </p:sp>
+      <p:sp>
+        <p:nvSpPr>
+          <p:cNvPr id="3" name="Slide Number Placeholder 2"/>
           <p:cNvSpPr>
             <a:spLocks noGrp="1"/>
           </p:cNvSpPr>
@@ -22285,6 +22959,203 @@
               <a:rPr lang="en-NZ" smtClean="0"/>
               <a:pPr/>
               <a:t>17</a:t>
+            </a:fld>
+            <a:endParaRPr lang="en-NZ"/>
+          </a:p>
+        </p:txBody>
+      </p:sp>
+    </p:spTree>
+  </p:cSld>
+  <p:clrMapOvr>
+    <a:masterClrMapping/>
+  </p:clrMapOvr>
+</p:sld>
+</file>
+
+<file path=ppt/slides/slide18.xml><?xml version="1.0" encoding="utf-8"?>
+<p:sld xmlns:a="http://schemas.openxmlformats.org/drawingml/2006/main" xmlns:r="http://schemas.openxmlformats.org/officeDocument/2006/relationships" xmlns:p="http://schemas.openxmlformats.org/presentationml/2006/main">
+  <p:cSld>
+    <p:spTree>
+      <p:nvGrpSpPr>
+        <p:cNvPr id="1" name=""/>
+        <p:cNvGrpSpPr/>
+        <p:nvPr/>
+      </p:nvGrpSpPr>
+      <p:grpSpPr>
+        <a:xfrm>
+          <a:off x="0" y="0"/>
+          <a:ext cx="0" cy="0"/>
+          <a:chOff x="0" y="0"/>
+          <a:chExt cx="0" cy="0"/>
+        </a:xfrm>
+      </p:grpSpPr>
+      <p:sp>
+        <p:nvSpPr>
+          <p:cNvPr id="2" name="Title 1"/>
+          <p:cNvSpPr txBox="1">
+            <a:spLocks noGrp="1"/>
+          </p:cNvSpPr>
+          <p:nvPr>
+            <p:ph type="title"/>
+          </p:nvPr>
+        </p:nvSpPr>
+        <p:spPr/>
+        <p:txBody>
+          <a:bodyPr/>
+          <a:lstStyle/>
+          <a:p>
+            <a:pPr lvl="0"/>
+            <a:r>
+              <a:rPr lang="en-US" dirty="0"/>
+              <a:t>Error-based vs. entropy-based</a:t>
+            </a:r>
+          </a:p>
+        </p:txBody>
+      </p:sp>
+      <p:sp>
+        <p:nvSpPr>
+          <p:cNvPr id="6" name="Content Placeholder 5"/>
+          <p:cNvSpPr>
+            <a:spLocks noGrp="1"/>
+          </p:cNvSpPr>
+          <p:nvPr>
+            <p:ph idx="1"/>
+          </p:nvPr>
+        </p:nvSpPr>
+        <p:spPr/>
+        <p:txBody>
+          <a:bodyPr/>
+          <a:lstStyle/>
+          <a:p>
+            <a:r>
+              <a:rPr lang="en-CA" dirty="0"/>
+              <a:t>Question:</a:t>
+            </a:r>
+            <a:br>
+              <a:rPr lang="en-CA" dirty="0"/>
+            </a:br>
+            <a:r>
+              <a:rPr lang="en-CA" dirty="0"/>
+              <a:t>could the best discretization ever have two adjacent intervals with the same class?</a:t>
+            </a:r>
+          </a:p>
+          <a:p>
+            <a:r>
+              <a:rPr lang="en-CA" dirty="0"/>
+              <a:t>Wrong answer: No. For if so,</a:t>
+            </a:r>
+          </a:p>
+          <a:p>
+            <a:pPr lvl="1"/>
+            <a:r>
+              <a:rPr lang="en-CA" dirty="0"/>
+              <a:t>Collapse the two</a:t>
+            </a:r>
+          </a:p>
+          <a:p>
+            <a:pPr lvl="1"/>
+            <a:r>
+              <a:rPr lang="en-CA" dirty="0"/>
+              <a:t>Free up an interval</a:t>
+            </a:r>
+          </a:p>
+          <a:p>
+            <a:pPr lvl="1"/>
+            <a:r>
+              <a:rPr lang="en-CA" dirty="0"/>
+              <a:t>Use it somewhere else</a:t>
+            </a:r>
+          </a:p>
+          <a:p>
+            <a:pPr lvl="1"/>
+            <a:r>
+              <a:rPr lang="en-CA" dirty="0"/>
+              <a:t>(This is what error-based discretization will do)</a:t>
+            </a:r>
+          </a:p>
+          <a:p>
+            <a:r>
+              <a:rPr lang="en-CA" dirty="0"/>
+              <a:t>Right answer: Surprisingly, yes.</a:t>
+            </a:r>
+          </a:p>
+          <a:p>
+            <a:pPr lvl="1"/>
+            <a:r>
+              <a:rPr lang="en-CA" dirty="0"/>
+              <a:t>(and entropy-based discretization can do it)</a:t>
+            </a:r>
+          </a:p>
+        </p:txBody>
+      </p:sp>
+      <p:sp>
+        <p:nvSpPr>
+          <p:cNvPr id="3" name="Slide Number Placeholder 2"/>
+          <p:cNvSpPr>
+            <a:spLocks noGrp="1"/>
+          </p:cNvSpPr>
+          <p:nvPr>
+            <p:ph type="sldNum" sz="quarter" idx="12"/>
+          </p:nvPr>
+        </p:nvSpPr>
+        <p:spPr/>
+        <p:txBody>
+          <a:bodyPr/>
+          <a:lstStyle/>
+          <a:p>
+            <a:fld id="{CC0D3929-19F2-429B-ADDC-CA064EDFCD10}" type="slidenum">
+              <a:rPr lang="en-NZ" smtClean="0"/>
+              <a:pPr/>
+              <a:t>18</a:t>
+            </a:fld>
+            <a:endParaRPr lang="en-NZ"/>
+          </a:p>
+        </p:txBody>
+      </p:sp>
+    </p:spTree>
+  </p:cSld>
+  <p:clrMapOvr>
+    <a:masterClrMapping/>
+  </p:clrMapOvr>
+</p:sld>
+</file>
+
+<file path=ppt/slides/slide19.xml><?xml version="1.0" encoding="utf-8"?>
+<p:sld xmlns:a="http://schemas.openxmlformats.org/drawingml/2006/main" xmlns:r="http://schemas.openxmlformats.org/officeDocument/2006/relationships" xmlns:p="http://schemas.openxmlformats.org/presentationml/2006/main">
+  <p:cSld>
+    <p:spTree>
+      <p:nvGrpSpPr>
+        <p:cNvPr id="1" name=""/>
+        <p:cNvGrpSpPr/>
+        <p:nvPr/>
+      </p:nvGrpSpPr>
+      <p:grpSpPr>
+        <a:xfrm>
+          <a:off x="0" y="0"/>
+          <a:ext cx="0" cy="0"/>
+          <a:chOff x="0" y="0"/>
+          <a:chExt cx="0" cy="0"/>
+        </a:xfrm>
+      </p:grpSpPr>
+      <p:sp>
+        <p:nvSpPr>
+          <p:cNvPr id="20" name="Slide Number Placeholder 19"/>
+          <p:cNvSpPr>
+            <a:spLocks noGrp="1"/>
+          </p:cNvSpPr>
+          <p:nvPr>
+            <p:ph type="sldNum" sz="quarter" idx="12"/>
+          </p:nvPr>
+        </p:nvSpPr>
+        <p:spPr/>
+        <p:txBody>
+          <a:bodyPr/>
+          <a:lstStyle/>
+          <a:p>
+            <a:fld id="{CC0D3929-19F2-429B-ADDC-CA064EDFCD10}" type="slidenum">
+              <a:rPr lang="en-NZ" smtClean="0"/>
+              <a:pPr/>
+              <a:t>19</a:t>
             </a:fld>
             <a:endParaRPr lang="en-NZ"/>
           </a:p>
@@ -23377,339 +24248,6 @@
 </p:sld>
 </file>
 
-<file path=ppt/slides/slide18.xml><?xml version="1.0" encoding="utf-8"?>
-<p:sld xmlns:a="http://schemas.openxmlformats.org/drawingml/2006/main" xmlns:r="http://schemas.openxmlformats.org/officeDocument/2006/relationships" xmlns:p="http://schemas.openxmlformats.org/presentationml/2006/main">
-  <p:cSld>
-    <p:spTree>
-      <p:nvGrpSpPr>
-        <p:cNvPr id="1" name=""/>
-        <p:cNvGrpSpPr/>
-        <p:nvPr/>
-      </p:nvGrpSpPr>
-      <p:grpSpPr>
-        <a:xfrm>
-          <a:off x="0" y="0"/>
-          <a:ext cx="0" cy="0"/>
-          <a:chOff x="0" y="0"/>
-          <a:chExt cx="0" cy="0"/>
-        </a:xfrm>
-      </p:grpSpPr>
-      <p:sp>
-        <p:nvSpPr>
-          <p:cNvPr id="2" name="Title 1"/>
-          <p:cNvSpPr txBox="1">
-            <a:spLocks noGrp="1"/>
-          </p:cNvSpPr>
-          <p:nvPr>
-            <p:ph type="title"/>
-          </p:nvPr>
-        </p:nvSpPr>
-        <p:spPr/>
-        <p:txBody>
-          <a:bodyPr/>
-          <a:lstStyle/>
-          <a:p>
-            <a:pPr lvl="0"/>
-            <a:r>
-              <a:rPr lang="en-US" dirty="0"/>
-              <a:t>The converse of discretization</a:t>
-            </a:r>
-          </a:p>
-        </p:txBody>
-      </p:sp>
-      <p:sp>
-        <p:nvSpPr>
-          <p:cNvPr id="6" name="Content Placeholder 5"/>
-          <p:cNvSpPr>
-            <a:spLocks noGrp="1"/>
-          </p:cNvSpPr>
-          <p:nvPr>
-            <p:ph idx="1"/>
-          </p:nvPr>
-        </p:nvSpPr>
-        <p:spPr/>
-        <p:txBody>
-          <a:bodyPr/>
-          <a:lstStyle/>
-          <a:p>
-            <a:r>
-              <a:rPr lang="en-CA" dirty="0"/>
-              <a:t>Make nominal values into “numeric” ones</a:t>
-            </a:r>
-          </a:p>
-          <a:p>
-            <a:r>
-              <a:rPr lang="en-CA" dirty="0"/>
-              <a:t>Can use indicator attributes (as in IB1)</a:t>
-            </a:r>
-          </a:p>
-          <a:p>
-            <a:r>
-              <a:rPr lang="en-CA" dirty="0"/>
-              <a:t>Makes no use of potential ordering information if “nominal” attribute is actually ordinal</a:t>
-            </a:r>
-          </a:p>
-          <a:p>
-            <a:r>
-              <a:rPr lang="en-CA" dirty="0"/>
-              <a:t>Alternative: code an ordered nominal attribute into binary	ones as in M5’</a:t>
-            </a:r>
-          </a:p>
-          <a:p>
-            <a:pPr lvl="1"/>
-            <a:r>
-              <a:rPr lang="en-CA" dirty="0"/>
-              <a:t>Inequalities are explicitly represented as binary attributes, e.g., </a:t>
-            </a:r>
-            <a:r>
-              <a:rPr lang="en-CA" i="1" dirty="0"/>
-              <a:t>temperature</a:t>
-            </a:r>
-            <a:r>
-              <a:rPr lang="en-CA" dirty="0"/>
-              <a:t> &lt; </a:t>
-            </a:r>
-            <a:r>
-              <a:rPr lang="en-CA" i="1" dirty="0"/>
-              <a:t>hot</a:t>
-            </a:r>
-            <a:r>
-              <a:rPr lang="en-CA" dirty="0"/>
-              <a:t> in the </a:t>
-            </a:r>
-            <a:r>
-              <a:rPr lang="en-CA" i="1" dirty="0"/>
-              <a:t>weather</a:t>
-            </a:r>
-            <a:r>
-              <a:rPr lang="en-CA" dirty="0"/>
-              <a:t> data</a:t>
-            </a:r>
-          </a:p>
-          <a:p>
-            <a:pPr lvl="1"/>
-            <a:r>
-              <a:rPr lang="en-CA" dirty="0"/>
-              <a:t>Can be used for any ordered attribute</a:t>
-            </a:r>
-          </a:p>
-          <a:p>
-            <a:pPr lvl="1"/>
-            <a:r>
-              <a:rPr lang="en-CA" dirty="0"/>
-              <a:t>Better than coding ordering into an integer (which implies a metric)</a:t>
-            </a:r>
-          </a:p>
-          <a:p>
-            <a:r>
-              <a:rPr lang="en-CA" dirty="0"/>
-              <a:t>In general: can code binary partition of a set of attribute values as a binary attribute</a:t>
-            </a:r>
-          </a:p>
-        </p:txBody>
-      </p:sp>
-      <p:sp>
-        <p:nvSpPr>
-          <p:cNvPr id="3" name="Slide Number Placeholder 2"/>
-          <p:cNvSpPr>
-            <a:spLocks noGrp="1"/>
-          </p:cNvSpPr>
-          <p:nvPr>
-            <p:ph type="sldNum" sz="quarter" idx="12"/>
-          </p:nvPr>
-        </p:nvSpPr>
-        <p:spPr/>
-        <p:txBody>
-          <a:bodyPr/>
-          <a:lstStyle/>
-          <a:p>
-            <a:fld id="{CC0D3929-19F2-429B-ADDC-CA064EDFCD10}" type="slidenum">
-              <a:rPr lang="en-NZ" smtClean="0"/>
-              <a:pPr/>
-              <a:t>18</a:t>
-            </a:fld>
-            <a:endParaRPr lang="en-NZ"/>
-          </a:p>
-        </p:txBody>
-      </p:sp>
-    </p:spTree>
-  </p:cSld>
-  <p:clrMapOvr>
-    <a:masterClrMapping/>
-  </p:clrMapOvr>
-</p:sld>
-</file>
-
-<file path=ppt/slides/slide19.xml><?xml version="1.0" encoding="utf-8"?>
-<p:sld xmlns:a="http://schemas.openxmlformats.org/drawingml/2006/main" xmlns:r="http://schemas.openxmlformats.org/officeDocument/2006/relationships" xmlns:p="http://schemas.openxmlformats.org/presentationml/2006/main">
-  <p:cSld name="page18">
-    <p:spTree>
-      <p:nvGrpSpPr>
-        <p:cNvPr id="1" name=""/>
-        <p:cNvGrpSpPr/>
-        <p:nvPr/>
-      </p:nvGrpSpPr>
-      <p:grpSpPr>
-        <a:xfrm>
-          <a:off x="0" y="0"/>
-          <a:ext cx="0" cy="0"/>
-          <a:chOff x="0" y="0"/>
-          <a:chExt cx="0" cy="0"/>
-        </a:xfrm>
-      </p:grpSpPr>
-      <p:sp>
-        <p:nvSpPr>
-          <p:cNvPr id="6" name="Slide Number Placeholder 5"/>
-          <p:cNvSpPr>
-            <a:spLocks noGrp="1"/>
-          </p:cNvSpPr>
-          <p:nvPr>
-            <p:ph type="sldNum" sz="quarter" idx="12"/>
-          </p:nvPr>
-        </p:nvSpPr>
-        <p:spPr/>
-        <p:txBody>
-          <a:bodyPr/>
-          <a:lstStyle/>
-          <a:p>
-            <a:fld id="{CC0D3929-19F2-429B-ADDC-CA064EDFCD10}" type="slidenum">
-              <a:rPr lang="en-NZ" smtClean="0"/>
-              <a:pPr/>
-              <a:t>19</a:t>
-            </a:fld>
-            <a:endParaRPr lang="en-NZ"/>
-          </a:p>
-        </p:txBody>
-      </p:sp>
-      <p:sp>
-        <p:nvSpPr>
-          <p:cNvPr id="2" name="Title 1"/>
-          <p:cNvSpPr txBox="1">
-            <a:spLocks noGrp="1"/>
-          </p:cNvSpPr>
-          <p:nvPr>
-            <p:ph type="title" idx="4294967295"/>
-          </p:nvPr>
-        </p:nvSpPr>
-        <p:spPr>
-          <a:xfrm>
-            <a:off x="2360668" y="-179388"/>
-            <a:ext cx="5289495" cy="1144588"/>
-          </a:xfrm>
-        </p:spPr>
-        <p:txBody>
-          <a:bodyPr/>
-          <a:lstStyle/>
-          <a:p>
-            <a:pPr lvl="0"/>
-            <a:r>
-              <a:rPr lang="en-US" dirty="0"/>
-              <a:t>Projections</a:t>
-            </a:r>
-          </a:p>
-        </p:txBody>
-      </p:sp>
-      <p:sp>
-        <p:nvSpPr>
-          <p:cNvPr id="3" name="Text Placeholder 2"/>
-          <p:cNvSpPr txBox="1">
-            <a:spLocks noGrp="1"/>
-          </p:cNvSpPr>
-          <p:nvPr>
-            <p:ph type="body" idx="4294967295"/>
-          </p:nvPr>
-        </p:nvSpPr>
-        <p:spPr>
-          <a:xfrm>
-            <a:off x="863600" y="1079500"/>
-            <a:ext cx="7651750" cy="3798861"/>
-          </a:xfrm>
-        </p:spPr>
-        <p:txBody>
-          <a:bodyPr wrap="square">
-            <a:spAutoFit/>
-          </a:bodyPr>
-          <a:lstStyle/>
-          <a:p>
-            <a:pPr marL="457200" lvl="0" indent="-457200">
-              <a:buFont typeface="Arial"/>
-              <a:buChar char="•"/>
-            </a:pPr>
-            <a:r>
-              <a:rPr lang="en-US" dirty="0"/>
-              <a:t>Simple transformations can often make a large difference in performance</a:t>
-            </a:r>
-          </a:p>
-          <a:p>
-            <a:pPr marL="457200" lvl="0" indent="-457200">
-              <a:buFont typeface="Arial"/>
-              <a:buChar char="•"/>
-            </a:pPr>
-            <a:r>
-              <a:rPr lang="en-US" dirty="0"/>
-              <a:t>Example transformations (not necessarily for performance improvement):</a:t>
-            </a:r>
-          </a:p>
-          <a:p>
-            <a:pPr lvl="1"/>
-            <a:r>
-              <a:rPr lang="en-US" dirty="0"/>
-              <a:t>Difference of two date attributes</a:t>
-            </a:r>
-          </a:p>
-          <a:p>
-            <a:pPr lvl="1"/>
-            <a:r>
-              <a:rPr lang="en-US" dirty="0"/>
-              <a:t>Ratio of two numeric (ratio-scale) attributes</a:t>
-            </a:r>
-          </a:p>
-          <a:p>
-            <a:pPr lvl="1"/>
-            <a:r>
-              <a:rPr lang="en-US" dirty="0"/>
-              <a:t>Concatenating the values of nominal attributes</a:t>
-            </a:r>
-          </a:p>
-          <a:p>
-            <a:pPr lvl="1"/>
-            <a:r>
-              <a:rPr lang="en-US" dirty="0"/>
-              <a:t>Encoding cluster membership</a:t>
-            </a:r>
-          </a:p>
-          <a:p>
-            <a:pPr lvl="1"/>
-            <a:r>
-              <a:rPr lang="en-US" dirty="0"/>
-              <a:t>Adding noise to data</a:t>
-            </a:r>
-          </a:p>
-          <a:p>
-            <a:pPr lvl="1"/>
-            <a:r>
-              <a:rPr lang="en-US" dirty="0"/>
-              <a:t>Removing data randomly or selectively</a:t>
-            </a:r>
-          </a:p>
-          <a:p>
-            <a:pPr lvl="1"/>
-            <a:r>
-              <a:rPr lang="en-US" dirty="0"/>
-              <a:t>Obfuscating the data</a:t>
-            </a:r>
-            <a:endParaRPr lang="en-US" sz="2400" dirty="0"/>
-          </a:p>
-        </p:txBody>
-      </p:sp>
-    </p:spTree>
-  </p:cSld>
-  <p:clrMapOvr>
-    <a:masterClrMapping/>
-  </p:clrMapOvr>
-</p:sld>
-</file>
-
 <file path=ppt/slides/slide2.xml><?xml version="1.0" encoding="utf-8"?>
 <p:sld xmlns:a="http://schemas.openxmlformats.org/drawingml/2006/main" xmlns:r="http://schemas.openxmlformats.org/officeDocument/2006/relationships" xmlns:p="http://schemas.openxmlformats.org/presentationml/2006/main">
   <p:cSld name="Engineering the input and output">
@@ -24012,6 +24550,339 @@
 
 <file path=ppt/slides/slide20.xml><?xml version="1.0" encoding="utf-8"?>
 <p:sld xmlns:a="http://schemas.openxmlformats.org/drawingml/2006/main" xmlns:r="http://schemas.openxmlformats.org/officeDocument/2006/relationships" xmlns:p="http://schemas.openxmlformats.org/presentationml/2006/main">
+  <p:cSld>
+    <p:spTree>
+      <p:nvGrpSpPr>
+        <p:cNvPr id="1" name=""/>
+        <p:cNvGrpSpPr/>
+        <p:nvPr/>
+      </p:nvGrpSpPr>
+      <p:grpSpPr>
+        <a:xfrm>
+          <a:off x="0" y="0"/>
+          <a:ext cx="0" cy="0"/>
+          <a:chOff x="0" y="0"/>
+          <a:chExt cx="0" cy="0"/>
+        </a:xfrm>
+      </p:grpSpPr>
+      <p:sp>
+        <p:nvSpPr>
+          <p:cNvPr id="2" name="Title 1"/>
+          <p:cNvSpPr txBox="1">
+            <a:spLocks noGrp="1"/>
+          </p:cNvSpPr>
+          <p:nvPr>
+            <p:ph type="title"/>
+          </p:nvPr>
+        </p:nvSpPr>
+        <p:spPr/>
+        <p:txBody>
+          <a:bodyPr/>
+          <a:lstStyle/>
+          <a:p>
+            <a:pPr lvl="0"/>
+            <a:r>
+              <a:rPr lang="en-US" dirty="0"/>
+              <a:t>The converse of discretization</a:t>
+            </a:r>
+          </a:p>
+        </p:txBody>
+      </p:sp>
+      <p:sp>
+        <p:nvSpPr>
+          <p:cNvPr id="6" name="Content Placeholder 5"/>
+          <p:cNvSpPr>
+            <a:spLocks noGrp="1"/>
+          </p:cNvSpPr>
+          <p:nvPr>
+            <p:ph idx="1"/>
+          </p:nvPr>
+        </p:nvSpPr>
+        <p:spPr/>
+        <p:txBody>
+          <a:bodyPr/>
+          <a:lstStyle/>
+          <a:p>
+            <a:r>
+              <a:rPr lang="en-CA" dirty="0"/>
+              <a:t>Make nominal values into “numeric” ones</a:t>
+            </a:r>
+          </a:p>
+          <a:p>
+            <a:r>
+              <a:rPr lang="en-CA" dirty="0"/>
+              <a:t>Can use indicator attributes (as in IB1)</a:t>
+            </a:r>
+          </a:p>
+          <a:p>
+            <a:r>
+              <a:rPr lang="en-CA" dirty="0"/>
+              <a:t>Makes no use of potential ordering information if “nominal” attribute is actually ordinal</a:t>
+            </a:r>
+          </a:p>
+          <a:p>
+            <a:r>
+              <a:rPr lang="en-CA" dirty="0"/>
+              <a:t>Alternative: code an ordered nominal attribute into binary	ones as in M5’</a:t>
+            </a:r>
+          </a:p>
+          <a:p>
+            <a:pPr lvl="1"/>
+            <a:r>
+              <a:rPr lang="en-CA" dirty="0"/>
+              <a:t>Inequalities are explicitly represented as binary attributes, e.g., </a:t>
+            </a:r>
+            <a:r>
+              <a:rPr lang="en-CA" i="1" dirty="0"/>
+              <a:t>temperature</a:t>
+            </a:r>
+            <a:r>
+              <a:rPr lang="en-CA" dirty="0"/>
+              <a:t> &lt; </a:t>
+            </a:r>
+            <a:r>
+              <a:rPr lang="en-CA" i="1" dirty="0"/>
+              <a:t>hot</a:t>
+            </a:r>
+            <a:r>
+              <a:rPr lang="en-CA" dirty="0"/>
+              <a:t> in the </a:t>
+            </a:r>
+            <a:r>
+              <a:rPr lang="en-CA" i="1" dirty="0"/>
+              <a:t>weather</a:t>
+            </a:r>
+            <a:r>
+              <a:rPr lang="en-CA" dirty="0"/>
+              <a:t> data</a:t>
+            </a:r>
+          </a:p>
+          <a:p>
+            <a:pPr lvl="1"/>
+            <a:r>
+              <a:rPr lang="en-CA" dirty="0"/>
+              <a:t>Can be used for any ordered attribute</a:t>
+            </a:r>
+          </a:p>
+          <a:p>
+            <a:pPr lvl="1"/>
+            <a:r>
+              <a:rPr lang="en-CA" dirty="0"/>
+              <a:t>Better than coding ordering into an integer (which implies a metric)</a:t>
+            </a:r>
+          </a:p>
+          <a:p>
+            <a:r>
+              <a:rPr lang="en-CA" dirty="0"/>
+              <a:t>In general: can code binary partition of a set of attribute values as a binary attribute</a:t>
+            </a:r>
+          </a:p>
+        </p:txBody>
+      </p:sp>
+      <p:sp>
+        <p:nvSpPr>
+          <p:cNvPr id="3" name="Slide Number Placeholder 2"/>
+          <p:cNvSpPr>
+            <a:spLocks noGrp="1"/>
+          </p:cNvSpPr>
+          <p:nvPr>
+            <p:ph type="sldNum" sz="quarter" idx="12"/>
+          </p:nvPr>
+        </p:nvSpPr>
+        <p:spPr/>
+        <p:txBody>
+          <a:bodyPr/>
+          <a:lstStyle/>
+          <a:p>
+            <a:fld id="{CC0D3929-19F2-429B-ADDC-CA064EDFCD10}" type="slidenum">
+              <a:rPr lang="en-NZ" smtClean="0"/>
+              <a:pPr/>
+              <a:t>20</a:t>
+            </a:fld>
+            <a:endParaRPr lang="en-NZ"/>
+          </a:p>
+        </p:txBody>
+      </p:sp>
+    </p:spTree>
+  </p:cSld>
+  <p:clrMapOvr>
+    <a:masterClrMapping/>
+  </p:clrMapOvr>
+</p:sld>
+</file>
+
+<file path=ppt/slides/slide21.xml><?xml version="1.0" encoding="utf-8"?>
+<p:sld xmlns:a="http://schemas.openxmlformats.org/drawingml/2006/main" xmlns:r="http://schemas.openxmlformats.org/officeDocument/2006/relationships" xmlns:p="http://schemas.openxmlformats.org/presentationml/2006/main">
+  <p:cSld name="page18">
+    <p:spTree>
+      <p:nvGrpSpPr>
+        <p:cNvPr id="1" name=""/>
+        <p:cNvGrpSpPr/>
+        <p:nvPr/>
+      </p:nvGrpSpPr>
+      <p:grpSpPr>
+        <a:xfrm>
+          <a:off x="0" y="0"/>
+          <a:ext cx="0" cy="0"/>
+          <a:chOff x="0" y="0"/>
+          <a:chExt cx="0" cy="0"/>
+        </a:xfrm>
+      </p:grpSpPr>
+      <p:sp>
+        <p:nvSpPr>
+          <p:cNvPr id="6" name="Slide Number Placeholder 5"/>
+          <p:cNvSpPr>
+            <a:spLocks noGrp="1"/>
+          </p:cNvSpPr>
+          <p:nvPr>
+            <p:ph type="sldNum" sz="quarter" idx="12"/>
+          </p:nvPr>
+        </p:nvSpPr>
+        <p:spPr/>
+        <p:txBody>
+          <a:bodyPr/>
+          <a:lstStyle/>
+          <a:p>
+            <a:fld id="{CC0D3929-19F2-429B-ADDC-CA064EDFCD10}" type="slidenum">
+              <a:rPr lang="en-NZ" smtClean="0"/>
+              <a:pPr/>
+              <a:t>21</a:t>
+            </a:fld>
+            <a:endParaRPr lang="en-NZ"/>
+          </a:p>
+        </p:txBody>
+      </p:sp>
+      <p:sp>
+        <p:nvSpPr>
+          <p:cNvPr id="2" name="Title 1"/>
+          <p:cNvSpPr txBox="1">
+            <a:spLocks noGrp="1"/>
+          </p:cNvSpPr>
+          <p:nvPr>
+            <p:ph type="title" idx="4294967295"/>
+          </p:nvPr>
+        </p:nvSpPr>
+        <p:spPr>
+          <a:xfrm>
+            <a:off x="2360668" y="-179388"/>
+            <a:ext cx="5289495" cy="1144588"/>
+          </a:xfrm>
+        </p:spPr>
+        <p:txBody>
+          <a:bodyPr/>
+          <a:lstStyle/>
+          <a:p>
+            <a:pPr lvl="0"/>
+            <a:r>
+              <a:rPr lang="en-US" dirty="0"/>
+              <a:t>Projections</a:t>
+            </a:r>
+          </a:p>
+        </p:txBody>
+      </p:sp>
+      <p:sp>
+        <p:nvSpPr>
+          <p:cNvPr id="3" name="Text Placeholder 2"/>
+          <p:cNvSpPr txBox="1">
+            <a:spLocks noGrp="1"/>
+          </p:cNvSpPr>
+          <p:nvPr>
+            <p:ph type="body" idx="4294967295"/>
+          </p:nvPr>
+        </p:nvSpPr>
+        <p:spPr>
+          <a:xfrm>
+            <a:off x="863600" y="1079500"/>
+            <a:ext cx="7651750" cy="3798861"/>
+          </a:xfrm>
+        </p:spPr>
+        <p:txBody>
+          <a:bodyPr wrap="square">
+            <a:spAutoFit/>
+          </a:bodyPr>
+          <a:lstStyle/>
+          <a:p>
+            <a:pPr marL="457200" lvl="0" indent="-457200">
+              <a:buFont typeface="Arial"/>
+              <a:buChar char="•"/>
+            </a:pPr>
+            <a:r>
+              <a:rPr lang="en-US" dirty="0"/>
+              <a:t>Simple transformations can often make a large difference in performance</a:t>
+            </a:r>
+          </a:p>
+          <a:p>
+            <a:pPr marL="457200" lvl="0" indent="-457200">
+              <a:buFont typeface="Arial"/>
+              <a:buChar char="•"/>
+            </a:pPr>
+            <a:r>
+              <a:rPr lang="en-US" dirty="0"/>
+              <a:t>Example transformations (not necessarily for performance improvement):</a:t>
+            </a:r>
+          </a:p>
+          <a:p>
+            <a:pPr lvl="1"/>
+            <a:r>
+              <a:rPr lang="en-US" dirty="0"/>
+              <a:t>Difference of two date attributes</a:t>
+            </a:r>
+          </a:p>
+          <a:p>
+            <a:pPr lvl="1"/>
+            <a:r>
+              <a:rPr lang="en-US" dirty="0"/>
+              <a:t>Ratio of two numeric (ratio-scale) attributes</a:t>
+            </a:r>
+          </a:p>
+          <a:p>
+            <a:pPr lvl="1"/>
+            <a:r>
+              <a:rPr lang="en-US" dirty="0"/>
+              <a:t>Concatenating the values of nominal attributes</a:t>
+            </a:r>
+          </a:p>
+          <a:p>
+            <a:pPr lvl="1"/>
+            <a:r>
+              <a:rPr lang="en-US" dirty="0"/>
+              <a:t>Encoding cluster membership</a:t>
+            </a:r>
+          </a:p>
+          <a:p>
+            <a:pPr lvl="1"/>
+            <a:r>
+              <a:rPr lang="en-US" dirty="0"/>
+              <a:t>Adding noise to data</a:t>
+            </a:r>
+          </a:p>
+          <a:p>
+            <a:pPr lvl="1"/>
+            <a:r>
+              <a:rPr lang="en-US" dirty="0"/>
+              <a:t>Removing data randomly or selectively</a:t>
+            </a:r>
+          </a:p>
+          <a:p>
+            <a:pPr lvl="1"/>
+            <a:r>
+              <a:rPr lang="en-US" dirty="0"/>
+              <a:t>Obfuscating the data</a:t>
+            </a:r>
+            <a:endParaRPr lang="en-US" sz="2400" dirty="0"/>
+          </a:p>
+        </p:txBody>
+      </p:sp>
+    </p:spTree>
+  </p:cSld>
+  <p:clrMapOvr>
+    <a:masterClrMapping/>
+  </p:clrMapOvr>
+</p:sld>
+</file>
+
+<file path=ppt/slides/slide22.xml><?xml version="1.0" encoding="utf-8"?>
+<p:sld xmlns:a="http://schemas.openxmlformats.org/drawingml/2006/main" xmlns:r="http://schemas.openxmlformats.org/officeDocument/2006/relationships" xmlns:p="http://schemas.openxmlformats.org/presentationml/2006/main">
   <p:cSld name="page19">
     <p:spTree>
       <p:nvGrpSpPr>
@@ -24045,7 +24916,7 @@
             <a:fld id="{CC0D3929-19F2-429B-ADDC-CA064EDFCD10}" type="slidenum">
               <a:rPr lang="en-NZ" smtClean="0"/>
               <a:pPr/>
-              <a:t>20</a:t>
+              <a:t>22</a:t>
             </a:fld>
             <a:endParaRPr lang="en-NZ"/>
           </a:p>
@@ -24204,7 +25075,7 @@
 </p:sld>
 </file>
 
-<file path=ppt/slides/slide21.xml><?xml version="1.0" encoding="utf-8"?>
+<file path=ppt/slides/slide23.xml><?xml version="1.0" encoding="utf-8"?>
 <p:sld xmlns:a="http://schemas.openxmlformats.org/drawingml/2006/main" xmlns:r="http://schemas.openxmlformats.org/officeDocument/2006/relationships" xmlns:p="http://schemas.openxmlformats.org/presentationml/2006/main">
   <p:cSld name="page20">
     <p:spTree>
@@ -24239,7 +25110,7 @@
             <a:fld id="{CC0D3929-19F2-429B-ADDC-CA064EDFCD10}" type="slidenum">
               <a:rPr lang="en-NZ" smtClean="0"/>
               <a:pPr/>
-              <a:t>21</a:t>
+              <a:t>23</a:t>
             </a:fld>
             <a:endParaRPr lang="en-NZ"/>
           </a:p>
@@ -24356,7 +25227,7 @@
 </p:sld>
 </file>
 
-<file path=ppt/slides/slide22.xml><?xml version="1.0" encoding="utf-8"?>
+<file path=ppt/slides/slide24.xml><?xml version="1.0" encoding="utf-8"?>
 <p:sld xmlns:a="http://schemas.openxmlformats.org/drawingml/2006/main" xmlns:r="http://schemas.openxmlformats.org/officeDocument/2006/relationships" xmlns:p="http://schemas.openxmlformats.org/presentationml/2006/main">
   <p:cSld name="page21">
     <p:spTree>
@@ -24391,7 +25262,7 @@
             <a:fld id="{CC0D3929-19F2-429B-ADDC-CA064EDFCD10}" type="slidenum">
               <a:rPr lang="en-NZ" smtClean="0"/>
               <a:pPr/>
-              <a:t>22</a:t>
+              <a:t>24</a:t>
             </a:fld>
             <a:endParaRPr lang="en-NZ"/>
           </a:p>
@@ -24522,7 +25393,7 @@
 </p:sld>
 </file>
 
-<file path=ppt/slides/slide23.xml><?xml version="1.0" encoding="utf-8"?>
+<file path=ppt/slides/slide25.xml><?xml version="1.0" encoding="utf-8"?>
 <p:sld xmlns:a="http://schemas.openxmlformats.org/drawingml/2006/main" xmlns:r="http://schemas.openxmlformats.org/officeDocument/2006/relationships" xmlns:p="http://schemas.openxmlformats.org/presentationml/2006/main">
   <p:cSld name="page22">
     <p:spTree>
@@ -24557,7 +25428,7 @@
             <a:fld id="{CC0D3929-19F2-429B-ADDC-CA064EDFCD10}" type="slidenum">
               <a:rPr lang="en-NZ" smtClean="0"/>
               <a:pPr/>
-              <a:t>23</a:t>
+              <a:t>25</a:t>
             </a:fld>
             <a:endParaRPr lang="en-NZ"/>
           </a:p>
@@ -24699,7 +25570,7 @@
 </p:sld>
 </file>
 
-<file path=ppt/slides/slide24.xml><?xml version="1.0" encoding="utf-8"?>
+<file path=ppt/slides/slide26.xml><?xml version="1.0" encoding="utf-8"?>
 <p:sld xmlns:a="http://schemas.openxmlformats.org/drawingml/2006/main" xmlns:r="http://schemas.openxmlformats.org/officeDocument/2006/relationships" xmlns:p="http://schemas.openxmlformats.org/presentationml/2006/main">
   <p:cSld name="page23">
     <p:spTree>
@@ -24734,7 +25605,7 @@
             <a:fld id="{CC0D3929-19F2-429B-ADDC-CA064EDFCD10}" type="slidenum">
               <a:rPr lang="en-NZ" smtClean="0"/>
               <a:pPr/>
-              <a:t>24</a:t>
+              <a:t>26</a:t>
             </a:fld>
             <a:endParaRPr lang="en-NZ"/>
           </a:p>
@@ -24872,7 +25743,7 @@
 </p:sld>
 </file>
 
-<file path=ppt/slides/slide25.xml><?xml version="1.0" encoding="utf-8"?>
+<file path=ppt/slides/slide27.xml><?xml version="1.0" encoding="utf-8"?>
 <p:sld xmlns:a="http://schemas.openxmlformats.org/drawingml/2006/main" xmlns:r="http://schemas.openxmlformats.org/officeDocument/2006/relationships" xmlns:p="http://schemas.openxmlformats.org/presentationml/2006/main">
   <p:cSld>
     <p:spTree>
@@ -24991,7 +25862,7 @@
             <a:fld id="{CC0D3929-19F2-429B-ADDC-CA064EDFCD10}" type="slidenum">
               <a:rPr lang="en-NZ" smtClean="0"/>
               <a:pPr/>
-              <a:t>25</a:t>
+              <a:t>27</a:t>
             </a:fld>
             <a:endParaRPr lang="en-NZ"/>
           </a:p>
@@ -25010,7 +25881,7 @@
 </p:sld>
 </file>
 
-<file path=ppt/slides/slide26.xml><?xml version="1.0" encoding="utf-8"?>
+<file path=ppt/slides/slide28.xml><?xml version="1.0" encoding="utf-8"?>
 <p:sld xmlns:a="http://schemas.openxmlformats.org/drawingml/2006/main" xmlns:r="http://schemas.openxmlformats.org/officeDocument/2006/relationships" xmlns:p="http://schemas.openxmlformats.org/presentationml/2006/main">
   <p:cSld>
     <p:spTree>
@@ -25149,7 +26020,7 @@
             <a:fld id="{CC0D3929-19F2-429B-ADDC-CA064EDFCD10}" type="slidenum">
               <a:rPr lang="en-NZ" smtClean="0"/>
               <a:pPr/>
-              <a:t>26</a:t>
+              <a:t>28</a:t>
             </a:fld>
             <a:endParaRPr lang="en-NZ"/>
           </a:p>
@@ -25225,7 +26096,7 @@
 </p:sld>
 </file>
 
-<file path=ppt/slides/slide27.xml><?xml version="1.0" encoding="utf-8"?>
+<file path=ppt/slides/slide29.xml><?xml version="1.0" encoding="utf-8"?>
 <p:sld xmlns:a="http://schemas.openxmlformats.org/drawingml/2006/main" xmlns:r="http://schemas.openxmlformats.org/officeDocument/2006/relationships" xmlns:p="http://schemas.openxmlformats.org/presentationml/2006/main">
   <p:cSld>
     <p:spTree>
@@ -25378,7 +26249,7 @@
             <a:fld id="{CC0D3929-19F2-429B-ADDC-CA064EDFCD10}" type="slidenum">
               <a:rPr lang="en-NZ" smtClean="0"/>
               <a:pPr/>
-              <a:t>27</a:t>
+              <a:t>29</a:t>
             </a:fld>
             <a:endParaRPr lang="en-NZ"/>
           </a:p>
@@ -25397,7 +26268,146 @@
 </p:sld>
 </file>
 
-<file path=ppt/slides/slide28.xml><?xml version="1.0" encoding="utf-8"?>
+<file path=ppt/slides/slide3.xml><?xml version="1.0" encoding="utf-8"?>
+<p:sld xmlns:a="http://schemas.openxmlformats.org/drawingml/2006/main" xmlns:r="http://schemas.openxmlformats.org/officeDocument/2006/relationships" xmlns:p="http://schemas.openxmlformats.org/presentationml/2006/main">
+  <p:cSld name="Just apply a learner? NO!">
+    <p:spTree>
+      <p:nvGrpSpPr>
+        <p:cNvPr id="1" name=""/>
+        <p:cNvGrpSpPr/>
+        <p:nvPr/>
+      </p:nvGrpSpPr>
+      <p:grpSpPr>
+        <a:xfrm>
+          <a:off x="0" y="0"/>
+          <a:ext cx="0" cy="0"/>
+          <a:chOff x="0" y="0"/>
+          <a:chExt cx="0" cy="0"/>
+        </a:xfrm>
+      </p:grpSpPr>
+      <p:sp>
+        <p:nvSpPr>
+          <p:cNvPr id="2" name="Title 1"/>
+          <p:cNvSpPr txBox="1">
+            <a:spLocks noGrp="1"/>
+          </p:cNvSpPr>
+          <p:nvPr>
+            <p:ph type="title"/>
+          </p:nvPr>
+        </p:nvSpPr>
+        <p:spPr/>
+        <p:txBody>
+          <a:bodyPr/>
+          <a:lstStyle/>
+          <a:p>
+            <a:pPr lvl="0"/>
+            <a:r>
+              <a:rPr lang="en-US"/>
+              <a:t>Just apply a learner? NO!</a:t>
+            </a:r>
+            <a:endParaRPr lang="en-US" dirty="0"/>
+          </a:p>
+        </p:txBody>
+      </p:sp>
+      <p:sp>
+        <p:nvSpPr>
+          <p:cNvPr id="6" name="Content Placeholder 5"/>
+          <p:cNvSpPr>
+            <a:spLocks noGrp="1"/>
+          </p:cNvSpPr>
+          <p:nvPr>
+            <p:ph idx="1"/>
+          </p:nvPr>
+        </p:nvSpPr>
+        <p:spPr/>
+        <p:txBody>
+          <a:bodyPr/>
+          <a:lstStyle/>
+          <a:p>
+            <a:pPr lvl="0"/>
+            <a:r>
+              <a:rPr lang="en-US" dirty="0"/>
+              <a:t>Scheme/parameter selection</a:t>
+            </a:r>
+          </a:p>
+          <a:p>
+            <a:pPr lvl="1"/>
+            <a:r>
+              <a:rPr lang="en-US" dirty="0"/>
+              <a:t>Treat selection process as part of the learning process to avoid optimistic performance estimates</a:t>
+            </a:r>
+          </a:p>
+          <a:p>
+            <a:pPr lvl="0"/>
+            <a:r>
+              <a:rPr lang="en-US" dirty="0"/>
+              <a:t>Modifying the input:</a:t>
+            </a:r>
+          </a:p>
+          <a:p>
+            <a:pPr lvl="1"/>
+            <a:r>
+              <a:rPr lang="en-US" dirty="0"/>
+              <a:t>Data engineering to make learning possible or easier</a:t>
+            </a:r>
+          </a:p>
+          <a:p>
+            <a:pPr lvl="0"/>
+            <a:r>
+              <a:rPr lang="en-US" dirty="0"/>
+              <a:t>Modifying the output</a:t>
+            </a:r>
+          </a:p>
+          <a:p>
+            <a:pPr lvl="1"/>
+            <a:r>
+              <a:rPr lang="en-US" dirty="0"/>
+              <a:t>Converting multi-class problems into </a:t>
+            </a:r>
+            <a:r>
+              <a:rPr lang="en-US"/>
+              <a:t>two-class ones</a:t>
+            </a:r>
+            <a:endParaRPr lang="en-US" dirty="0"/>
+          </a:p>
+          <a:p>
+            <a:endParaRPr lang="en-CA" dirty="0"/>
+          </a:p>
+        </p:txBody>
+      </p:sp>
+      <p:sp>
+        <p:nvSpPr>
+          <p:cNvPr id="3" name="Slide Number Placeholder 2"/>
+          <p:cNvSpPr>
+            <a:spLocks noGrp="1"/>
+          </p:cNvSpPr>
+          <p:nvPr>
+            <p:ph type="sldNum" sz="quarter" idx="12"/>
+          </p:nvPr>
+        </p:nvSpPr>
+        <p:spPr/>
+        <p:txBody>
+          <a:bodyPr/>
+          <a:lstStyle/>
+          <a:p>
+            <a:fld id="{CC0D3929-19F2-429B-ADDC-CA064EDFCD10}" type="slidenum">
+              <a:rPr lang="en-NZ" smtClean="0"/>
+              <a:pPr/>
+              <a:t>3</a:t>
+            </a:fld>
+            <a:endParaRPr lang="en-NZ"/>
+          </a:p>
+        </p:txBody>
+      </p:sp>
+    </p:spTree>
+  </p:cSld>
+  <p:clrMapOvr>
+    <a:masterClrMapping/>
+  </p:clrMapOvr>
+</p:sld>
+</file>
+
+<file path=ppt/slides/slide30.xml><?xml version="1.0" encoding="utf-8"?>
 <p:sld xmlns:a="http://schemas.openxmlformats.org/drawingml/2006/main" xmlns:r="http://schemas.openxmlformats.org/officeDocument/2006/relationships" xmlns:p="http://schemas.openxmlformats.org/presentationml/2006/main">
   <p:cSld>
     <p:spTree>
@@ -25554,7 +26564,7 @@
             <a:fld id="{CC0D3929-19F2-429B-ADDC-CA064EDFCD10}" type="slidenum">
               <a:rPr lang="en-NZ" smtClean="0"/>
               <a:pPr/>
-              <a:t>28</a:t>
+              <a:t>30</a:t>
             </a:fld>
             <a:endParaRPr lang="en-NZ"/>
           </a:p>
@@ -25630,7 +26640,7 @@
 </p:sld>
 </file>
 
-<file path=ppt/slides/slide29.xml><?xml version="1.0" encoding="utf-8"?>
+<file path=ppt/slides/slide31.xml><?xml version="1.0" encoding="utf-8"?>
 <p:sld xmlns:a="http://schemas.openxmlformats.org/drawingml/2006/main" xmlns:r="http://schemas.openxmlformats.org/officeDocument/2006/relationships" xmlns:p="http://schemas.openxmlformats.org/presentationml/2006/main">
   <p:cSld name="page24">
     <p:spTree>
@@ -25665,7 +26675,7 @@
             <a:fld id="{CC0D3929-19F2-429B-ADDC-CA064EDFCD10}" type="slidenum">
               <a:rPr lang="en-NZ" smtClean="0"/>
               <a:pPr/>
-              <a:t>29</a:t>
+              <a:t>31</a:t>
             </a:fld>
             <a:endParaRPr lang="en-NZ"/>
           </a:p>
@@ -25955,146 +26965,7 @@
 </p:sld>
 </file>
 
-<file path=ppt/slides/slide3.xml><?xml version="1.0" encoding="utf-8"?>
-<p:sld xmlns:a="http://schemas.openxmlformats.org/drawingml/2006/main" xmlns:r="http://schemas.openxmlformats.org/officeDocument/2006/relationships" xmlns:p="http://schemas.openxmlformats.org/presentationml/2006/main">
-  <p:cSld name="Just apply a learner? NO!">
-    <p:spTree>
-      <p:nvGrpSpPr>
-        <p:cNvPr id="1" name=""/>
-        <p:cNvGrpSpPr/>
-        <p:nvPr/>
-      </p:nvGrpSpPr>
-      <p:grpSpPr>
-        <a:xfrm>
-          <a:off x="0" y="0"/>
-          <a:ext cx="0" cy="0"/>
-          <a:chOff x="0" y="0"/>
-          <a:chExt cx="0" cy="0"/>
-        </a:xfrm>
-      </p:grpSpPr>
-      <p:sp>
-        <p:nvSpPr>
-          <p:cNvPr id="2" name="Title 1"/>
-          <p:cNvSpPr txBox="1">
-            <a:spLocks noGrp="1"/>
-          </p:cNvSpPr>
-          <p:nvPr>
-            <p:ph type="title"/>
-          </p:nvPr>
-        </p:nvSpPr>
-        <p:spPr/>
-        <p:txBody>
-          <a:bodyPr/>
-          <a:lstStyle/>
-          <a:p>
-            <a:pPr lvl="0"/>
-            <a:r>
-              <a:rPr lang="en-US"/>
-              <a:t>Just apply a learner? NO!</a:t>
-            </a:r>
-            <a:endParaRPr lang="en-US" dirty="0"/>
-          </a:p>
-        </p:txBody>
-      </p:sp>
-      <p:sp>
-        <p:nvSpPr>
-          <p:cNvPr id="6" name="Content Placeholder 5"/>
-          <p:cNvSpPr>
-            <a:spLocks noGrp="1"/>
-          </p:cNvSpPr>
-          <p:nvPr>
-            <p:ph idx="1"/>
-          </p:nvPr>
-        </p:nvSpPr>
-        <p:spPr/>
-        <p:txBody>
-          <a:bodyPr/>
-          <a:lstStyle/>
-          <a:p>
-            <a:pPr lvl="0"/>
-            <a:r>
-              <a:rPr lang="en-US" dirty="0"/>
-              <a:t>Scheme/parameter selection</a:t>
-            </a:r>
-          </a:p>
-          <a:p>
-            <a:pPr lvl="1"/>
-            <a:r>
-              <a:rPr lang="en-US" dirty="0"/>
-              <a:t>Treat selection process as part of the learning process to avoid optimistic performance estimates</a:t>
-            </a:r>
-          </a:p>
-          <a:p>
-            <a:pPr lvl="0"/>
-            <a:r>
-              <a:rPr lang="en-US" dirty="0"/>
-              <a:t>Modifying the input:</a:t>
-            </a:r>
-          </a:p>
-          <a:p>
-            <a:pPr lvl="1"/>
-            <a:r>
-              <a:rPr lang="en-US" dirty="0"/>
-              <a:t>Data engineering to make learning possible or easier</a:t>
-            </a:r>
-          </a:p>
-          <a:p>
-            <a:pPr lvl="0"/>
-            <a:r>
-              <a:rPr lang="en-US" dirty="0"/>
-              <a:t>Modifying the output</a:t>
-            </a:r>
-          </a:p>
-          <a:p>
-            <a:pPr lvl="1"/>
-            <a:r>
-              <a:rPr lang="en-US" dirty="0"/>
-              <a:t>Converting multi-class problems into </a:t>
-            </a:r>
-            <a:r>
-              <a:rPr lang="en-US"/>
-              <a:t>two-class ones</a:t>
-            </a:r>
-            <a:endParaRPr lang="en-US" dirty="0"/>
-          </a:p>
-          <a:p>
-            <a:endParaRPr lang="en-CA" dirty="0"/>
-          </a:p>
-        </p:txBody>
-      </p:sp>
-      <p:sp>
-        <p:nvSpPr>
-          <p:cNvPr id="3" name="Slide Number Placeholder 2"/>
-          <p:cNvSpPr>
-            <a:spLocks noGrp="1"/>
-          </p:cNvSpPr>
-          <p:nvPr>
-            <p:ph type="sldNum" sz="quarter" idx="12"/>
-          </p:nvPr>
-        </p:nvSpPr>
-        <p:spPr/>
-        <p:txBody>
-          <a:bodyPr/>
-          <a:lstStyle/>
-          <a:p>
-            <a:fld id="{CC0D3929-19F2-429B-ADDC-CA064EDFCD10}" type="slidenum">
-              <a:rPr lang="en-NZ" smtClean="0"/>
-              <a:pPr/>
-              <a:t>3</a:t>
-            </a:fld>
-            <a:endParaRPr lang="en-NZ"/>
-          </a:p>
-        </p:txBody>
-      </p:sp>
-    </p:spTree>
-  </p:cSld>
-  <p:clrMapOvr>
-    <a:masterClrMapping/>
-  </p:clrMapOvr>
-</p:sld>
-</file>
-
-<file path=ppt/slides/slide30.xml><?xml version="1.0" encoding="utf-8"?>
+<file path=ppt/slides/slide32.xml><?xml version="1.0" encoding="utf-8"?>
 <p:sld xmlns:a="http://schemas.openxmlformats.org/drawingml/2006/main" xmlns:r="http://schemas.openxmlformats.org/officeDocument/2006/relationships" xmlns:p="http://schemas.openxmlformats.org/presentationml/2006/main">
   <p:cSld name="page25">
     <p:spTree>
@@ -26129,7 +27000,7 @@
             <a:fld id="{CC0D3929-19F2-429B-ADDC-CA064EDFCD10}" type="slidenum">
               <a:rPr lang="en-NZ" smtClean="0"/>
               <a:pPr/>
-              <a:t>30</a:t>
+              <a:t>32</a:t>
             </a:fld>
             <a:endParaRPr lang="en-NZ"/>
           </a:p>
@@ -26271,7 +27142,7 @@
 </p:sld>
 </file>
 
-<file path=ppt/slides/slide31.xml><?xml version="1.0" encoding="utf-8"?>
+<file path=ppt/slides/slide33.xml><?xml version="1.0" encoding="utf-8"?>
 <p:sld xmlns:a="http://schemas.openxmlformats.org/drawingml/2006/main" xmlns:r="http://schemas.openxmlformats.org/officeDocument/2006/relationships" xmlns:p="http://schemas.openxmlformats.org/presentationml/2006/main">
   <p:cSld name="page26">
     <p:spTree>
@@ -26306,7 +27177,7 @@
             <a:fld id="{CC0D3929-19F2-429B-ADDC-CA064EDFCD10}" type="slidenum">
               <a:rPr lang="en-NZ" smtClean="0"/>
               <a:pPr/>
-              <a:t>31</a:t>
+              <a:t>33</a:t>
             </a:fld>
             <a:endParaRPr lang="en-NZ"/>
           </a:p>
@@ -26476,7 +27347,7 @@
 </p:sld>
 </file>
 
-<file path=ppt/slides/slide32.xml><?xml version="1.0" encoding="utf-8"?>
+<file path=ppt/slides/slide34.xml><?xml version="1.0" encoding="utf-8"?>
 <p:sld xmlns:a="http://schemas.openxmlformats.org/drawingml/2006/main" xmlns:r="http://schemas.openxmlformats.org/officeDocument/2006/relationships" xmlns:p="http://schemas.openxmlformats.org/presentationml/2006/main">
   <p:cSld name="Automatic data cleansing">
     <p:spTree>
@@ -26611,7 +27482,7 @@
             <a:fld id="{CC0D3929-19F2-429B-ADDC-CA064EDFCD10}" type="slidenum">
               <a:rPr lang="en-NZ" smtClean="0"/>
               <a:pPr/>
-              <a:t>32</a:t>
+              <a:t>34</a:t>
             </a:fld>
             <a:endParaRPr lang="en-NZ"/>
           </a:p>
@@ -26625,7 +27496,7 @@
 </p:sld>
 </file>
 
-<file path=ppt/slides/slide33.xml><?xml version="1.0" encoding="utf-8"?>
+<file path=ppt/slides/slide35.xml><?xml version="1.0" encoding="utf-8"?>
 <p:sld xmlns:a="http://schemas.openxmlformats.org/drawingml/2006/main" xmlns:r="http://schemas.openxmlformats.org/officeDocument/2006/relationships" xmlns:p="http://schemas.openxmlformats.org/presentationml/2006/main">
   <p:cSld name="Robust regression">
     <p:spTree>
@@ -26758,7 +27629,7 @@
             <a:fld id="{CC0D3929-19F2-429B-ADDC-CA064EDFCD10}" type="slidenum">
               <a:rPr lang="en-NZ" smtClean="0"/>
               <a:pPr/>
-              <a:t>33</a:t>
+              <a:t>35</a:t>
             </a:fld>
             <a:endParaRPr lang="en-NZ"/>
           </a:p>
@@ -26772,7 +27643,7 @@
 </p:sld>
 </file>
 
-<file path=ppt/slides/slide34.xml><?xml version="1.0" encoding="utf-8"?>
+<file path=ppt/slides/slide36.xml><?xml version="1.0" encoding="utf-8"?>
 <p:sld xmlns:a="http://schemas.openxmlformats.org/drawingml/2006/main" xmlns:r="http://schemas.openxmlformats.org/officeDocument/2006/relationships" xmlns:p="http://schemas.openxmlformats.org/presentationml/2006/main">
   <p:cSld name="Example: least median of squares">
     <p:spTree>
@@ -26807,7 +27678,7 @@
             <a:fld id="{CC0D3929-19F2-429B-ADDC-CA064EDFCD10}" type="slidenum">
               <a:rPr lang="en-NZ" smtClean="0"/>
               <a:pPr/>
-              <a:t>34</a:t>
+              <a:t>36</a:t>
             </a:fld>
             <a:endParaRPr lang="en-NZ"/>
           </a:p>
@@ -26961,7 +27832,7 @@
 </p:sld>
 </file>
 
-<file path=ppt/slides/slide35.xml><?xml version="1.0" encoding="utf-8"?>
+<file path=ppt/slides/slide37.xml><?xml version="1.0" encoding="utf-8"?>
 <p:sld xmlns:a="http://schemas.openxmlformats.org/drawingml/2006/main" xmlns:r="http://schemas.openxmlformats.org/officeDocument/2006/relationships" xmlns:p="http://schemas.openxmlformats.org/presentationml/2006/main">
   <p:cSld name="Detecting anomalies">
     <p:spTree>
@@ -27101,7 +27972,7 @@
             <a:fld id="{CC0D3929-19F2-429B-ADDC-CA064EDFCD10}" type="slidenum">
               <a:rPr lang="en-NZ" smtClean="0"/>
               <a:pPr/>
-              <a:t>35</a:t>
+              <a:t>37</a:t>
             </a:fld>
             <a:endParaRPr lang="en-NZ"/>
           </a:p>
@@ -27115,7 +27986,7 @@
 </p:sld>
 </file>
 
-<file path=ppt/slides/slide36.xml><?xml version="1.0" encoding="utf-8"?>
+<file path=ppt/slides/slide38.xml><?xml version="1.0" encoding="utf-8"?>
 <p:sld xmlns:a="http://schemas.openxmlformats.org/drawingml/2006/main" xmlns:r="http://schemas.openxmlformats.org/officeDocument/2006/relationships" xmlns:p="http://schemas.openxmlformats.org/presentationml/2006/main">
   <p:cSld name="page31">
     <p:spTree>
@@ -27150,7 +28021,7 @@
             <a:fld id="{CC0D3929-19F2-429B-ADDC-CA064EDFCD10}" type="slidenum">
               <a:rPr lang="en-NZ" smtClean="0"/>
               <a:pPr/>
-              <a:t>36</a:t>
+              <a:t>38</a:t>
             </a:fld>
             <a:endParaRPr lang="en-NZ"/>
           </a:p>
@@ -27305,7 +28176,7 @@
 </p:sld>
 </file>
 
-<file path=ppt/slides/slide37.xml><?xml version="1.0" encoding="utf-8"?>
+<file path=ppt/slides/slide39.xml><?xml version="1.0" encoding="utf-8"?>
 <p:sld xmlns:a="http://schemas.openxmlformats.org/drawingml/2006/main" xmlns:r="http://schemas.openxmlformats.org/officeDocument/2006/relationships" xmlns:p="http://schemas.openxmlformats.org/presentationml/2006/main">
   <p:cSld name="page32">
     <p:spTree>
@@ -27340,7 +28211,7 @@
             <a:fld id="{CC0D3929-19F2-429B-ADDC-CA064EDFCD10}" type="slidenum">
               <a:rPr lang="en-NZ" smtClean="0"/>
               <a:pPr/>
-              <a:t>37</a:t>
+              <a:t>39</a:t>
             </a:fld>
             <a:endParaRPr lang="en-NZ"/>
           </a:p>
@@ -27504,7 +28375,136 @@
 </p:sld>
 </file>
 
-<file path=ppt/slides/slide38.xml><?xml version="1.0" encoding="utf-8"?>
+<file path=ppt/slides/slide4.xml><?xml version="1.0" encoding="utf-8"?>
+<p:sld xmlns:a="http://schemas.openxmlformats.org/drawingml/2006/main" xmlns:r="http://schemas.openxmlformats.org/officeDocument/2006/relationships" xmlns:p="http://schemas.openxmlformats.org/presentationml/2006/main">
+  <p:cSld>
+    <p:spTree>
+      <p:nvGrpSpPr>
+        <p:cNvPr id="1" name=""/>
+        <p:cNvGrpSpPr/>
+        <p:nvPr/>
+      </p:nvGrpSpPr>
+      <p:grpSpPr>
+        <a:xfrm>
+          <a:off x="0" y="0"/>
+          <a:ext cx="0" cy="0"/>
+          <a:chOff x="0" y="0"/>
+          <a:chExt cx="0" cy="0"/>
+        </a:xfrm>
+      </p:grpSpPr>
+      <p:sp>
+        <p:nvSpPr>
+          <p:cNvPr id="17410" name="Rectangle 1026"/>
+          <p:cNvSpPr>
+            <a:spLocks noGrp="1" noChangeArrowheads="1"/>
+          </p:cNvSpPr>
+          <p:nvPr>
+            <p:ph type="title"/>
+          </p:nvPr>
+        </p:nvSpPr>
+        <p:spPr/>
+        <p:txBody>
+          <a:bodyPr/>
+          <a:lstStyle/>
+          <a:p>
+            <a:r>
+              <a:rPr lang="en-US" altLang="en-US" dirty="0"/>
+              <a:t>Machine learning research steps</a:t>
+            </a:r>
+          </a:p>
+        </p:txBody>
+      </p:sp>
+      <p:sp>
+        <p:nvSpPr>
+          <p:cNvPr id="17411" name="Rectangle 1027"/>
+          <p:cNvSpPr>
+            <a:spLocks noGrp="1" noChangeArrowheads="1"/>
+          </p:cNvSpPr>
+          <p:nvPr>
+            <p:ph type="body" idx="1"/>
+          </p:nvPr>
+        </p:nvSpPr>
+        <p:spPr/>
+        <p:txBody>
+          <a:bodyPr>
+            <a:normAutofit/>
+          </a:bodyPr>
+          <a:lstStyle/>
+          <a:p>
+            <a:r>
+              <a:rPr lang="en-US" altLang="en-US" dirty="0"/>
+              <a:t>Data gathering (lab experiments)</a:t>
+            </a:r>
+          </a:p>
+          <a:p>
+            <a:r>
+              <a:rPr lang="en-US" altLang="en-US" dirty="0"/>
+              <a:t>Preprocessing</a:t>
+            </a:r>
+          </a:p>
+          <a:p>
+            <a:pPr lvl="1"/>
+            <a:r>
+              <a:rPr lang="en-US" altLang="en-US" dirty="0"/>
+              <a:t>Normalization, standardization, missing values</a:t>
+            </a:r>
+          </a:p>
+          <a:p>
+            <a:r>
+              <a:rPr lang="en-US" altLang="en-US" dirty="0"/>
+              <a:t>Feature selection</a:t>
+            </a:r>
+          </a:p>
+          <a:p>
+            <a:pPr lvl="1"/>
+            <a:r>
+              <a:rPr lang="en-US" altLang="en-US" dirty="0"/>
+              <a:t>Filter, wrapper and embedded methods</a:t>
+            </a:r>
+          </a:p>
+          <a:p>
+            <a:r>
+              <a:rPr lang="en-US" altLang="en-US" dirty="0"/>
+              <a:t>Model formation (data mining)</a:t>
+            </a:r>
+          </a:p>
+          <a:p>
+            <a:pPr lvl="1"/>
+            <a:r>
+              <a:rPr lang="en-US" altLang="en-US" dirty="0"/>
+              <a:t>Parameter tuning, avoiding over or under fitting</a:t>
+            </a:r>
+          </a:p>
+          <a:p>
+            <a:r>
+              <a:rPr lang="en-US" altLang="en-US" dirty="0"/>
+              <a:t>Model evaluation</a:t>
+            </a:r>
+          </a:p>
+          <a:p>
+            <a:pPr lvl="1"/>
+            <a:r>
+              <a:rPr lang="en-US" altLang="en-US" dirty="0"/>
+              <a:t>Cross-validation</a:t>
+            </a:r>
+          </a:p>
+          <a:p>
+            <a:r>
+              <a:rPr lang="en-US" altLang="en-US" dirty="0"/>
+              <a:t>Ensemble learning</a:t>
+            </a:r>
+          </a:p>
+        </p:txBody>
+      </p:sp>
+    </p:spTree>
+  </p:cSld>
+  <p:clrMapOvr>
+    <a:masterClrMapping/>
+  </p:clrMapOvr>
+</p:sld>
+</file>
+
+<file path=ppt/slides/slide40.xml><?xml version="1.0" encoding="utf-8"?>
 <p:sld xmlns:a="http://schemas.openxmlformats.org/drawingml/2006/main" xmlns:r="http://schemas.openxmlformats.org/officeDocument/2006/relationships" xmlns:p="http://schemas.openxmlformats.org/presentationml/2006/main">
   <p:cSld name="page33">
     <p:spTree>
@@ -27539,7 +28539,7 @@
             <a:fld id="{CC0D3929-19F2-429B-ADDC-CA064EDFCD10}" type="slidenum">
               <a:rPr lang="en-NZ" smtClean="0"/>
               <a:pPr/>
-              <a:t>38</a:t>
+              <a:t>40</a:t>
             </a:fld>
             <a:endParaRPr lang="en-NZ"/>
           </a:p>
@@ -27661,7 +28661,7 @@
 </p:sld>
 </file>
 
-<file path=ppt/slides/slide39.xml><?xml version="1.0" encoding="utf-8"?>
+<file path=ppt/slides/slide41.xml><?xml version="1.0" encoding="utf-8"?>
 <p:sld xmlns:a="http://schemas.openxmlformats.org/drawingml/2006/main" xmlns:r="http://schemas.openxmlformats.org/officeDocument/2006/relationships" xmlns:p="http://schemas.openxmlformats.org/presentationml/2006/main">
   <p:cSld name="page34">
     <p:spTree>
@@ -27696,7 +28696,7 @@
             <a:fld id="{CC0D3929-19F2-429B-ADDC-CA064EDFCD10}" type="slidenum">
               <a:rPr lang="en-NZ" smtClean="0"/>
               <a:pPr/>
-              <a:t>39</a:t>
+              <a:t>41</a:t>
             </a:fld>
             <a:endParaRPr lang="en-NZ"/>
           </a:p>
@@ -28089,582 +29089,6 @@
 </p:sld>
 </file>
 
-<file path=ppt/slides/slide4.xml><?xml version="1.0" encoding="utf-8"?>
-<p:sld xmlns:a="http://schemas.openxmlformats.org/drawingml/2006/main" xmlns:r="http://schemas.openxmlformats.org/officeDocument/2006/relationships" xmlns:p="http://schemas.openxmlformats.org/presentationml/2006/main">
-  <p:cSld name="Attribute selection">
-    <p:spTree>
-      <p:nvGrpSpPr>
-        <p:cNvPr id="1" name=""/>
-        <p:cNvGrpSpPr/>
-        <p:nvPr/>
-      </p:nvGrpSpPr>
-      <p:grpSpPr>
-        <a:xfrm>
-          <a:off x="0" y="0"/>
-          <a:ext cx="0" cy="0"/>
-          <a:chOff x="0" y="0"/>
-          <a:chExt cx="0" cy="0"/>
-        </a:xfrm>
-      </p:grpSpPr>
-      <p:sp>
-        <p:nvSpPr>
-          <p:cNvPr id="2" name="Title 1"/>
-          <p:cNvSpPr txBox="1">
-            <a:spLocks noGrp="1"/>
-          </p:cNvSpPr>
-          <p:nvPr>
-            <p:ph type="title"/>
-          </p:nvPr>
-        </p:nvSpPr>
-        <p:spPr/>
-        <p:txBody>
-          <a:bodyPr/>
-          <a:lstStyle/>
-          <a:p>
-            <a:pPr lvl="0"/>
-            <a:r>
-              <a:rPr lang="en-US" dirty="0"/>
-              <a:t>Attribute selection</a:t>
-            </a:r>
-          </a:p>
-        </p:txBody>
-      </p:sp>
-      <p:sp>
-        <p:nvSpPr>
-          <p:cNvPr id="6" name="Content Placeholder 5"/>
-          <p:cNvSpPr>
-            <a:spLocks noGrp="1"/>
-          </p:cNvSpPr>
-          <p:nvPr>
-            <p:ph idx="1"/>
-          </p:nvPr>
-        </p:nvSpPr>
-        <p:spPr/>
-        <p:txBody>
-          <a:bodyPr/>
-          <a:lstStyle/>
-          <a:p>
-            <a:r>
-              <a:rPr lang="en-CA" dirty="0"/>
-              <a:t>Attribute selection is often important in practice</a:t>
-            </a:r>
-          </a:p>
-          <a:p>
-            <a:r>
-              <a:rPr lang="en-CA" dirty="0"/>
-              <a:t>For example, adding a random (i.e., irrelevant) attribute can significantly degrade C4.5’s performance</a:t>
-            </a:r>
-          </a:p>
-          <a:p>
-            <a:pPr lvl="1"/>
-            <a:r>
-              <a:rPr lang="en-CA" dirty="0"/>
-              <a:t>Problem: C4.5’s built-in attribute selection is based on smaller and smaller amounts of data</a:t>
-            </a:r>
-          </a:p>
-          <a:p>
-            <a:r>
-              <a:rPr lang="en-CA" dirty="0"/>
-              <a:t>Instance-based learning is particularly susceptible to irrelevant attributes</a:t>
-            </a:r>
-          </a:p>
-          <a:p>
-            <a:pPr lvl="1"/>
-            <a:r>
-              <a:rPr lang="en-CA" dirty="0"/>
-              <a:t>Number of training instances required increases exponentially with number of irrelevant attributes</a:t>
-            </a:r>
-          </a:p>
-          <a:p>
-            <a:r>
-              <a:rPr lang="en-CA" dirty="0"/>
-              <a:t>Exception: naïve Bayes can cope well with irrelevant attributes</a:t>
-            </a:r>
-          </a:p>
-          <a:p>
-            <a:r>
-              <a:rPr lang="en-CA" dirty="0"/>
-              <a:t>Note that relevant attributes can also be harmful if they mislead the learning algorithm</a:t>
-            </a:r>
-          </a:p>
-          <a:p>
-            <a:endParaRPr lang="en-CA" dirty="0"/>
-          </a:p>
-        </p:txBody>
-      </p:sp>
-      <p:sp>
-        <p:nvSpPr>
-          <p:cNvPr id="3" name="Slide Number Placeholder 2"/>
-          <p:cNvSpPr>
-            <a:spLocks noGrp="1"/>
-          </p:cNvSpPr>
-          <p:nvPr>
-            <p:ph type="sldNum" sz="quarter" idx="12"/>
-          </p:nvPr>
-        </p:nvSpPr>
-        <p:spPr/>
-        <p:txBody>
-          <a:bodyPr/>
-          <a:lstStyle/>
-          <a:p>
-            <a:fld id="{CC0D3929-19F2-429B-ADDC-CA064EDFCD10}" type="slidenum">
-              <a:rPr lang="en-NZ" smtClean="0"/>
-              <a:pPr/>
-              <a:t>4</a:t>
-            </a:fld>
-            <a:endParaRPr lang="en-NZ"/>
-          </a:p>
-        </p:txBody>
-      </p:sp>
-    </p:spTree>
-  </p:cSld>
-  <p:clrMapOvr>
-    <a:masterClrMapping/>
-  </p:clrMapOvr>
-</p:sld>
-</file>
-
-<file path=ppt/slides/slide40.xml><?xml version="1.0" encoding="utf-8"?>
-<p:sld xmlns:a="http://schemas.openxmlformats.org/drawingml/2006/main" xmlns:r="http://schemas.openxmlformats.org/officeDocument/2006/relationships" xmlns:p="http://schemas.openxmlformats.org/presentationml/2006/main">
-  <p:cSld>
-    <p:spTree>
-      <p:nvGrpSpPr>
-        <p:cNvPr id="1" name=""/>
-        <p:cNvGrpSpPr/>
-        <p:nvPr/>
-      </p:nvGrpSpPr>
-      <p:grpSpPr>
-        <a:xfrm>
-          <a:off x="0" y="0"/>
-          <a:ext cx="0" cy="0"/>
-          <a:chOff x="0" y="0"/>
-          <a:chExt cx="0" cy="0"/>
-        </a:xfrm>
-      </p:grpSpPr>
-      <p:sp>
-        <p:nvSpPr>
-          <p:cNvPr id="6" name="Slide Number Placeholder 5"/>
-          <p:cNvSpPr>
-            <a:spLocks noGrp="1"/>
-          </p:cNvSpPr>
-          <p:nvPr>
-            <p:ph type="sldNum" sz="quarter" idx="12"/>
-          </p:nvPr>
-        </p:nvSpPr>
-        <p:spPr/>
-        <p:txBody>
-          <a:bodyPr/>
-          <a:lstStyle/>
-          <a:p>
-            <a:fld id="{CC0D3929-19F2-429B-ADDC-CA064EDFCD10}" type="slidenum">
-              <a:rPr lang="en-NZ" smtClean="0"/>
-              <a:pPr/>
-              <a:t>40</a:t>
-            </a:fld>
-            <a:endParaRPr lang="en-NZ"/>
-          </a:p>
-        </p:txBody>
-      </p:sp>
-      <p:sp>
-        <p:nvSpPr>
-          <p:cNvPr id="2" name="Title 1"/>
-          <p:cNvSpPr txBox="1">
-            <a:spLocks noGrp="1"/>
-          </p:cNvSpPr>
-          <p:nvPr>
-            <p:ph type="title" idx="4294967295"/>
-          </p:nvPr>
-        </p:nvSpPr>
-        <p:spPr>
-          <a:xfrm>
-            <a:off x="358764" y="-179388"/>
-            <a:ext cx="8452482" cy="1144588"/>
-          </a:xfrm>
-        </p:spPr>
-        <p:txBody>
-          <a:bodyPr>
-            <a:normAutofit/>
-          </a:bodyPr>
-          <a:lstStyle/>
-          <a:p>
-            <a:pPr lvl="0"/>
-            <a:r>
-              <a:rPr lang="en-US" dirty="0"/>
-              <a:t>Transforming multiple classes to binary ones</a:t>
-            </a:r>
-          </a:p>
-        </p:txBody>
-      </p:sp>
-      <p:sp>
-        <p:nvSpPr>
-          <p:cNvPr id="3" name="Text Placeholder 2"/>
-          <p:cNvSpPr txBox="1">
-            <a:spLocks noGrp="1"/>
-          </p:cNvSpPr>
-          <p:nvPr>
-            <p:ph type="body" idx="4294967295"/>
-          </p:nvPr>
-        </p:nvSpPr>
-        <p:spPr>
-          <a:xfrm>
-            <a:off x="358764" y="1224215"/>
-            <a:ext cx="8229600" cy="4674060"/>
-          </a:xfrm>
-        </p:spPr>
-        <p:txBody>
-          <a:bodyPr>
-            <a:normAutofit/>
-          </a:bodyPr>
-          <a:lstStyle/>
-          <a:p>
-            <a:pPr marL="457200" lvl="0" indent="-457200">
-              <a:buFont typeface="Arial"/>
-              <a:buChar char="•"/>
-            </a:pPr>
-            <a:r>
-              <a:rPr lang="en-US" dirty="0"/>
-              <a:t>Some learning algorithms only work with two class problems</a:t>
-            </a:r>
-          </a:p>
-          <a:p>
-            <a:pPr marL="457200" lvl="0" indent="-457200">
-              <a:buFont typeface="Arial"/>
-              <a:buChar char="•"/>
-            </a:pPr>
-            <a:r>
-              <a:rPr lang="en-US" dirty="0"/>
-              <a:t>Sophisticated multi-class variants exist in many cases but can be very slow or difficult to implement</a:t>
-            </a:r>
-          </a:p>
-          <a:p>
-            <a:pPr marL="457200" lvl="0" indent="-457200">
-              <a:buFont typeface="Arial"/>
-              <a:buChar char="•"/>
-            </a:pPr>
-            <a:r>
-              <a:rPr lang="en-US" dirty="0"/>
-              <a:t>A common alternative is to transform multi-class problems into multiple two-class ones</a:t>
-            </a:r>
-          </a:p>
-          <a:p>
-            <a:pPr marL="457200" lvl="0" indent="-457200">
-              <a:buFont typeface="Arial"/>
-              <a:buChar char="•"/>
-            </a:pPr>
-            <a:r>
-              <a:rPr lang="en-US" dirty="0"/>
-              <a:t>Simple methods:</a:t>
-            </a:r>
-          </a:p>
-          <a:p>
-            <a:pPr lvl="1"/>
-            <a:r>
-              <a:rPr lang="en-US" dirty="0"/>
-              <a:t>Discriminate each class against the union of the others – </a:t>
-            </a:r>
-            <a:r>
-              <a:rPr lang="en-US" i="1" dirty="0"/>
-              <a:t>one-vs.-rest</a:t>
-            </a:r>
-          </a:p>
-          <a:p>
-            <a:pPr lvl="1"/>
-            <a:r>
-              <a:rPr lang="en-US" dirty="0"/>
-              <a:t>Build a classifier for every pair of classes – </a:t>
-            </a:r>
-            <a:r>
-              <a:rPr lang="en-US" i="1"/>
-              <a:t>pairwise classification</a:t>
-            </a:r>
-            <a:endParaRPr lang="en-US" i="1" dirty="0"/>
-          </a:p>
-        </p:txBody>
-      </p:sp>
-    </p:spTree>
-  </p:cSld>
-  <p:clrMapOvr>
-    <a:masterClrMapping/>
-  </p:clrMapOvr>
-</p:sld>
-</file>
-
-<file path=ppt/slides/slide41.xml><?xml version="1.0" encoding="utf-8"?>
-<p:sld xmlns:a="http://schemas.openxmlformats.org/drawingml/2006/main" xmlns:r="http://schemas.openxmlformats.org/officeDocument/2006/relationships" xmlns:p="http://schemas.openxmlformats.org/presentationml/2006/main">
-  <p:cSld>
-    <p:spTree>
-      <p:nvGrpSpPr>
-        <p:cNvPr id="1" name=""/>
-        <p:cNvGrpSpPr/>
-        <p:nvPr/>
-      </p:nvGrpSpPr>
-      <p:grpSpPr>
-        <a:xfrm>
-          <a:off x="0" y="0"/>
-          <a:ext cx="0" cy="0"/>
-          <a:chOff x="0" y="0"/>
-          <a:chExt cx="0" cy="0"/>
-        </a:xfrm>
-      </p:grpSpPr>
-      <p:sp>
-        <p:nvSpPr>
-          <p:cNvPr id="2" name="Title 1"/>
-          <p:cNvSpPr>
-            <a:spLocks noGrp="1"/>
-          </p:cNvSpPr>
-          <p:nvPr>
-            <p:ph type="title"/>
-          </p:nvPr>
-        </p:nvSpPr>
-        <p:spPr/>
-        <p:txBody>
-          <a:bodyPr/>
-          <a:lstStyle/>
-          <a:p>
-            <a:r>
-              <a:rPr lang="en-CA" dirty="0" err="1"/>
-              <a:t>Weka</a:t>
-            </a:r>
-            <a:r>
-              <a:rPr lang="en-CA" dirty="0"/>
-              <a:t> implementations</a:t>
-            </a:r>
-          </a:p>
-        </p:txBody>
-      </p:sp>
-      <p:sp>
-        <p:nvSpPr>
-          <p:cNvPr id="3" name="Content Placeholder 2"/>
-          <p:cNvSpPr>
-            <a:spLocks noGrp="1"/>
-          </p:cNvSpPr>
-          <p:nvPr>
-            <p:ph idx="1"/>
-          </p:nvPr>
-        </p:nvSpPr>
-        <p:spPr>
-          <a:xfrm>
-            <a:off x="330063" y="1215407"/>
-            <a:ext cx="8395080" cy="4961556"/>
-          </a:xfrm>
-        </p:spPr>
-        <p:txBody>
-          <a:bodyPr>
-            <a:normAutofit/>
-          </a:bodyPr>
-          <a:lstStyle/>
-          <a:p>
-            <a:r>
-              <a:rPr lang="en-US" dirty="0"/>
-              <a:t>Attribute selection</a:t>
-            </a:r>
-            <a:endParaRPr lang="en-CA" dirty="0"/>
-          </a:p>
-          <a:p>
-            <a:pPr lvl="1"/>
-            <a:r>
-              <a:rPr lang="en-US" sz="1900" dirty="0" err="1"/>
-              <a:t>CfsSubsetEval</a:t>
-            </a:r>
-            <a:r>
-              <a:rPr lang="en-US" sz="1900" dirty="0"/>
-              <a:t> (correlation-based attribute subset evaluator)</a:t>
-            </a:r>
-            <a:endParaRPr lang="en-CA" sz="1900" dirty="0"/>
-          </a:p>
-          <a:p>
-            <a:pPr lvl="1"/>
-            <a:r>
-              <a:rPr lang="en-US" sz="1900" dirty="0" err="1"/>
-              <a:t>ConsistencySubsetEval</a:t>
-            </a:r>
-            <a:r>
-              <a:rPr lang="en-US" sz="1900" dirty="0"/>
-              <a:t> (measures class consistency for a given set of attributes, in the </a:t>
-            </a:r>
-            <a:r>
-              <a:rPr lang="en-US" sz="1900" dirty="0" err="1"/>
-              <a:t>consistencySubsetEval</a:t>
-            </a:r>
-            <a:r>
-              <a:rPr lang="en-US" sz="1900" dirty="0"/>
-              <a:t> package)</a:t>
-            </a:r>
-            <a:endParaRPr lang="en-CA" sz="1900" dirty="0"/>
-          </a:p>
-          <a:p>
-            <a:pPr lvl="1"/>
-            <a:r>
-              <a:rPr lang="en-US" sz="1900" dirty="0" err="1"/>
-              <a:t>ClassifierSubsetEval</a:t>
-            </a:r>
-            <a:r>
-              <a:rPr lang="en-US" sz="1900" dirty="0"/>
-              <a:t> (uses a classifier for evaluating subsets of attributes, in the </a:t>
-            </a:r>
-            <a:r>
-              <a:rPr lang="en-US" sz="1900" dirty="0" err="1"/>
-              <a:t>classifierBasedAttributeSelection</a:t>
-            </a:r>
-            <a:r>
-              <a:rPr lang="en-US" sz="1900" dirty="0"/>
-              <a:t> package)</a:t>
-            </a:r>
-            <a:endParaRPr lang="en-CA" sz="1900" dirty="0"/>
-          </a:p>
-          <a:p>
-            <a:pPr lvl="1"/>
-            <a:r>
-              <a:rPr lang="en-US" sz="1900" dirty="0" err="1"/>
-              <a:t>SVMAttributeEval</a:t>
-            </a:r>
-            <a:r>
-              <a:rPr lang="en-US" sz="1900" dirty="0"/>
-              <a:t> (ranks attributes according to the magnitude of the coefficients learned by an SVM, in the </a:t>
-            </a:r>
-            <a:r>
-              <a:rPr lang="en-US" sz="1900" dirty="0" err="1"/>
-              <a:t>SVMAttributeEval</a:t>
-            </a:r>
-            <a:r>
-              <a:rPr lang="en-US" sz="1900" dirty="0"/>
-              <a:t> package)</a:t>
-            </a:r>
-          </a:p>
-          <a:p>
-            <a:pPr lvl="1"/>
-            <a:r>
-              <a:rPr lang="en-US" sz="1900" dirty="0" err="1"/>
-              <a:t>ReliefF</a:t>
-            </a:r>
-            <a:r>
-              <a:rPr lang="en-US" sz="1900" dirty="0"/>
-              <a:t> (instance-based approach for ranking attributes)</a:t>
-            </a:r>
-          </a:p>
-          <a:p>
-            <a:pPr lvl="1"/>
-            <a:r>
-              <a:rPr lang="en-US" sz="1900" dirty="0" err="1"/>
-              <a:t>WrapperSubsetEval</a:t>
-            </a:r>
-            <a:r>
-              <a:rPr lang="en-US" sz="1900" dirty="0"/>
-              <a:t> (uses a classifier plus cross-validation)</a:t>
-            </a:r>
-            <a:endParaRPr lang="en-CA" sz="1900" dirty="0"/>
-          </a:p>
-          <a:p>
-            <a:pPr lvl="1"/>
-            <a:r>
-              <a:rPr lang="en-US" sz="1900" dirty="0" err="1"/>
-              <a:t>GreedyStepwise</a:t>
-            </a:r>
-            <a:r>
-              <a:rPr lang="en-US" sz="1900" dirty="0"/>
-              <a:t> (forward selection and backward elimination search)</a:t>
-            </a:r>
-            <a:endParaRPr lang="en-CA" sz="1900" dirty="0"/>
-          </a:p>
-          <a:p>
-            <a:pPr lvl="1"/>
-            <a:r>
-              <a:rPr lang="en-US" sz="1900" dirty="0" err="1"/>
-              <a:t>LinearForwardSelection</a:t>
-            </a:r>
-            <a:r>
-              <a:rPr lang="en-US" sz="1900" dirty="0"/>
-              <a:t> (forward selection with a sliding window of attribute choices at each step of the search, in the </a:t>
-            </a:r>
-            <a:r>
-              <a:rPr lang="en-US" sz="1900" dirty="0" err="1"/>
-              <a:t>linearForwardSelection</a:t>
-            </a:r>
-            <a:r>
-              <a:rPr lang="en-US" sz="1900" dirty="0"/>
-              <a:t> package)</a:t>
-            </a:r>
-            <a:endParaRPr lang="en-CA" sz="1900" dirty="0"/>
-          </a:p>
-          <a:p>
-            <a:pPr lvl="1"/>
-            <a:r>
-              <a:rPr lang="en-US" sz="1900" dirty="0" err="1"/>
-              <a:t>BestFirst</a:t>
-            </a:r>
-            <a:r>
-              <a:rPr lang="en-US" sz="1900" dirty="0"/>
-              <a:t> (search method that uses greedy hill-climbing with backtracking)</a:t>
-            </a:r>
-            <a:endParaRPr lang="en-CA" sz="1900" dirty="0"/>
-          </a:p>
-          <a:p>
-            <a:pPr lvl="1"/>
-            <a:r>
-              <a:rPr lang="en-US" sz="1900" dirty="0" err="1"/>
-              <a:t>RaceSearch</a:t>
-            </a:r>
-            <a:r>
-              <a:rPr lang="en-US" sz="1900" dirty="0"/>
-              <a:t> (uses the race search methodology, in the </a:t>
-            </a:r>
-            <a:r>
-              <a:rPr lang="en-US" sz="1900" dirty="0" err="1"/>
-              <a:t>raceSearch</a:t>
-            </a:r>
-            <a:r>
-              <a:rPr lang="en-US" sz="1900" dirty="0"/>
-              <a:t> package)</a:t>
-            </a:r>
-            <a:endParaRPr lang="en-CA" sz="1900" dirty="0"/>
-          </a:p>
-          <a:p>
-            <a:pPr lvl="1"/>
-            <a:r>
-              <a:rPr lang="en-US" sz="1900" dirty="0"/>
-              <a:t>Ranker (ranks individual attributes according to their evaluation)</a:t>
-            </a:r>
-            <a:endParaRPr lang="en-CA" sz="1900" dirty="0"/>
-          </a:p>
-        </p:txBody>
-      </p:sp>
-      <p:sp>
-        <p:nvSpPr>
-          <p:cNvPr id="4" name="Slide Number Placeholder 3"/>
-          <p:cNvSpPr>
-            <a:spLocks noGrp="1"/>
-          </p:cNvSpPr>
-          <p:nvPr>
-            <p:ph type="sldNum" sz="quarter" idx="12"/>
-          </p:nvPr>
-        </p:nvSpPr>
-        <p:spPr/>
-        <p:txBody>
-          <a:bodyPr/>
-          <a:lstStyle/>
-          <a:p>
-            <a:fld id="{CC0D3929-19F2-429B-ADDC-CA064EDFCD10}" type="slidenum">
-              <a:rPr lang="en-NZ" smtClean="0"/>
-              <a:pPr/>
-              <a:t>41</a:t>
-            </a:fld>
-            <a:endParaRPr lang="en-NZ"/>
-          </a:p>
-        </p:txBody>
-      </p:sp>
-    </p:spTree>
-    <p:extLst>
-      <p:ext uri="{BB962C8B-B14F-4D97-AF65-F5344CB8AC3E}">
-        <p14:creationId xmlns:p14="http://schemas.microsoft.com/office/powerpoint/2010/main" val="2440831861"/>
-      </p:ext>
-    </p:extLst>
-  </p:cSld>
-  <p:clrMapOvr>
-    <a:masterClrMapping/>
-  </p:clrMapOvr>
-</p:sld>
-</file>
-
 <file path=ppt/slides/slide42.xml><?xml version="1.0" encoding="utf-8"?>
 <p:sld xmlns:a="http://schemas.openxmlformats.org/drawingml/2006/main" xmlns:r="http://schemas.openxmlformats.org/officeDocument/2006/relationships" xmlns:p="http://schemas.openxmlformats.org/presentationml/2006/main">
   <p:cSld>
@@ -28684,166 +29108,7 @@
       </p:grpSpPr>
       <p:sp>
         <p:nvSpPr>
-          <p:cNvPr id="2" name="Title 1"/>
-          <p:cNvSpPr>
-            <a:spLocks noGrp="1"/>
-          </p:cNvSpPr>
-          <p:nvPr>
-            <p:ph type="title"/>
-          </p:nvPr>
-        </p:nvSpPr>
-        <p:spPr/>
-        <p:txBody>
-          <a:bodyPr/>
-          <a:lstStyle/>
-          <a:p>
-            <a:r>
-              <a:rPr lang="en-CA" dirty="0" err="1"/>
-              <a:t>Weka</a:t>
-            </a:r>
-            <a:r>
-              <a:rPr lang="en-CA" dirty="0"/>
-              <a:t> implementations</a:t>
-            </a:r>
-          </a:p>
-        </p:txBody>
-      </p:sp>
-      <p:sp>
-        <p:nvSpPr>
-          <p:cNvPr id="3" name="Content Placeholder 2"/>
-          <p:cNvSpPr>
-            <a:spLocks noGrp="1"/>
-          </p:cNvSpPr>
-          <p:nvPr>
-            <p:ph idx="1"/>
-          </p:nvPr>
-        </p:nvSpPr>
-        <p:spPr/>
-        <p:txBody>
-          <a:bodyPr>
-            <a:normAutofit/>
-          </a:bodyPr>
-          <a:lstStyle/>
-          <a:p>
-            <a:r>
-              <a:rPr lang="en-US" sz="2600" dirty="0"/>
-              <a:t>Learning decision tables: </a:t>
-            </a:r>
-            <a:r>
-              <a:rPr lang="en-US" sz="2600" dirty="0" err="1"/>
-              <a:t>DecisionTable</a:t>
-            </a:r>
-            <a:endParaRPr lang="en-CA" sz="2600" dirty="0"/>
-          </a:p>
-          <a:p>
-            <a:r>
-              <a:rPr lang="en-US" dirty="0"/>
-              <a:t>Discretization</a:t>
-            </a:r>
-            <a:endParaRPr lang="en-CA" dirty="0"/>
-          </a:p>
-          <a:p>
-            <a:pPr lvl="1"/>
-            <a:r>
-              <a:rPr lang="en-US" dirty="0"/>
-              <a:t>Discretize (unsupervised and supervised versions)</a:t>
-            </a:r>
-            <a:endParaRPr lang="en-CA" dirty="0"/>
-          </a:p>
-          <a:p>
-            <a:pPr lvl="1"/>
-            <a:r>
-              <a:rPr lang="en-US" dirty="0" err="1"/>
-              <a:t>PKIDiscretize</a:t>
-            </a:r>
-            <a:r>
-              <a:rPr lang="en-US" dirty="0"/>
-              <a:t> (proportional k-interval discretization)</a:t>
-            </a:r>
-            <a:endParaRPr lang="en-CA" dirty="0"/>
-          </a:p>
-          <a:p>
-            <a:pPr lvl="0"/>
-            <a:r>
-              <a:rPr lang="en-US" dirty="0" err="1"/>
-              <a:t>PrincipalComponents</a:t>
-            </a:r>
-            <a:r>
-              <a:rPr lang="en-US" dirty="0"/>
-              <a:t> and </a:t>
-            </a:r>
-            <a:r>
-              <a:rPr lang="en-US" dirty="0" err="1"/>
-              <a:t>RandomProjection</a:t>
-            </a:r>
-            <a:r>
-              <a:rPr lang="en-US" dirty="0"/>
-              <a:t> </a:t>
-            </a:r>
-          </a:p>
-          <a:p>
-            <a:pPr lvl="0"/>
-            <a:r>
-              <a:rPr lang="en-US" dirty="0" err="1"/>
-              <a:t>FastICA</a:t>
-            </a:r>
-            <a:r>
-              <a:rPr lang="en-US" dirty="0"/>
-              <a:t> (independent component analysis, in the </a:t>
-            </a:r>
-            <a:r>
-              <a:rPr lang="en-US" dirty="0" err="1"/>
-              <a:t>StudentFilters</a:t>
-            </a:r>
-            <a:r>
-              <a:rPr lang="en-US" dirty="0"/>
-              <a:t> package)</a:t>
-            </a:r>
-            <a:endParaRPr lang="en-CA" dirty="0"/>
-          </a:p>
-          <a:p>
-            <a:pPr lvl="0"/>
-            <a:r>
-              <a:rPr lang="en-US" dirty="0" err="1"/>
-              <a:t>StringToWordVector</a:t>
-            </a:r>
-            <a:r>
-              <a:rPr lang="en-US" dirty="0"/>
-              <a:t> (text to attribute vectors)</a:t>
-            </a:r>
-            <a:endParaRPr lang="en-CA" dirty="0"/>
-          </a:p>
-          <a:p>
-            <a:pPr lvl="0"/>
-            <a:r>
-              <a:rPr lang="en-US" dirty="0" err="1"/>
-              <a:t>PLSFilter</a:t>
-            </a:r>
-            <a:r>
-              <a:rPr lang="en-US" dirty="0"/>
-              <a:t> (partial least squares transformation) </a:t>
-            </a:r>
-            <a:endParaRPr lang="en-CA" dirty="0"/>
-          </a:p>
-          <a:p>
-            <a:pPr lvl="0"/>
-            <a:r>
-              <a:rPr lang="en-US" dirty="0"/>
-              <a:t>Resampling and reservoir sampling</a:t>
-            </a:r>
-            <a:endParaRPr lang="en-CA" dirty="0"/>
-          </a:p>
-          <a:p>
-            <a:endParaRPr lang="en-CA" dirty="0"/>
-          </a:p>
-          <a:p>
-            <a:endParaRPr lang="en-CA" dirty="0"/>
-          </a:p>
-        </p:txBody>
-      </p:sp>
-      <p:sp>
-        <p:nvSpPr>
-          <p:cNvPr id="4" name="Slide Number Placeholder 3"/>
+          <p:cNvPr id="6" name="Slide Number Placeholder 5"/>
           <p:cNvSpPr>
             <a:spLocks noGrp="1"/>
           </p:cNvSpPr>
@@ -28865,12 +29130,123 @@
           </a:p>
         </p:txBody>
       </p:sp>
+      <p:sp>
+        <p:nvSpPr>
+          <p:cNvPr id="2" name="Title 1"/>
+          <p:cNvSpPr txBox="1">
+            <a:spLocks noGrp="1"/>
+          </p:cNvSpPr>
+          <p:nvPr>
+            <p:ph type="title" idx="4294967295"/>
+          </p:nvPr>
+        </p:nvSpPr>
+        <p:spPr>
+          <a:xfrm>
+            <a:off x="358764" y="-179388"/>
+            <a:ext cx="8452482" cy="1144588"/>
+          </a:xfrm>
+        </p:spPr>
+        <p:txBody>
+          <a:bodyPr>
+            <a:normAutofit/>
+          </a:bodyPr>
+          <a:lstStyle/>
+          <a:p>
+            <a:pPr lvl="0"/>
+            <a:r>
+              <a:rPr lang="en-US" dirty="0"/>
+              <a:t>Transforming multiple classes to binary ones</a:t>
+            </a:r>
+          </a:p>
+        </p:txBody>
+      </p:sp>
+      <p:sp>
+        <p:nvSpPr>
+          <p:cNvPr id="3" name="Text Placeholder 2"/>
+          <p:cNvSpPr txBox="1">
+            <a:spLocks noGrp="1"/>
+          </p:cNvSpPr>
+          <p:nvPr>
+            <p:ph type="body" idx="4294967295"/>
+          </p:nvPr>
+        </p:nvSpPr>
+        <p:spPr>
+          <a:xfrm>
+            <a:off x="358764" y="1224215"/>
+            <a:ext cx="8229600" cy="4674060"/>
+          </a:xfrm>
+        </p:spPr>
+        <p:txBody>
+          <a:bodyPr>
+            <a:normAutofit/>
+          </a:bodyPr>
+          <a:lstStyle/>
+          <a:p>
+            <a:pPr marL="457200" lvl="0" indent="-457200">
+              <a:buFont typeface="Arial"/>
+              <a:buChar char="•"/>
+            </a:pPr>
+            <a:r>
+              <a:rPr lang="en-US" dirty="0"/>
+              <a:t>Some learning algorithms only work with two class problems</a:t>
+            </a:r>
+          </a:p>
+          <a:p>
+            <a:pPr marL="457200" lvl="0" indent="-457200">
+              <a:buFont typeface="Arial"/>
+              <a:buChar char="•"/>
+            </a:pPr>
+            <a:r>
+              <a:rPr lang="en-US" dirty="0"/>
+              <a:t>Sophisticated multi-class variants exist in many cases but can be very slow or difficult to implement</a:t>
+            </a:r>
+          </a:p>
+          <a:p>
+            <a:pPr marL="457200" lvl="0" indent="-457200">
+              <a:buFont typeface="Arial"/>
+              <a:buChar char="•"/>
+            </a:pPr>
+            <a:r>
+              <a:rPr lang="en-US" dirty="0"/>
+              <a:t>A common alternative is to transform multi-class problems into multiple two-class ones</a:t>
+            </a:r>
+          </a:p>
+          <a:p>
+            <a:pPr marL="457200" lvl="0" indent="-457200">
+              <a:buFont typeface="Arial"/>
+              <a:buChar char="•"/>
+            </a:pPr>
+            <a:r>
+              <a:rPr lang="en-US" dirty="0"/>
+              <a:t>Simple methods:</a:t>
+            </a:r>
+          </a:p>
+          <a:p>
+            <a:pPr lvl="1"/>
+            <a:r>
+              <a:rPr lang="en-US" dirty="0"/>
+              <a:t>Discriminate each class against the union of the others – </a:t>
+            </a:r>
+            <a:r>
+              <a:rPr lang="en-US" i="1" dirty="0"/>
+              <a:t>one-vs.-rest</a:t>
+            </a:r>
+          </a:p>
+          <a:p>
+            <a:pPr lvl="1"/>
+            <a:r>
+              <a:rPr lang="en-US" dirty="0"/>
+              <a:t>Build a classifier for every pair of classes – </a:t>
+            </a:r>
+            <a:r>
+              <a:rPr lang="en-US" i="1"/>
+              <a:t>pairwise classification</a:t>
+            </a:r>
+            <a:endParaRPr lang="en-US" i="1" dirty="0"/>
+          </a:p>
+        </p:txBody>
+      </p:sp>
     </p:spTree>
-    <p:extLst>
-      <p:ext uri="{BB962C8B-B14F-4D97-AF65-F5344CB8AC3E}">
-        <p14:creationId xmlns:p14="http://schemas.microsoft.com/office/powerpoint/2010/main" val="2810373431"/>
-      </p:ext>
-    </p:extLst>
   </p:cSld>
   <p:clrMapOvr>
     <a:masterClrMapping/>
@@ -28931,49 +29307,189 @@
             <p:ph idx="1"/>
           </p:nvPr>
         </p:nvSpPr>
-        <p:spPr/>
-        <p:txBody>
-          <a:bodyPr/>
-          <a:lstStyle/>
-          <a:p>
-            <a:pPr lvl="0"/>
-            <a:r>
-              <a:rPr lang="en-US" dirty="0" err="1"/>
-              <a:t>OneClassClassifier</a:t>
-            </a:r>
-            <a:endParaRPr lang="en-US" dirty="0"/>
+        <p:spPr>
+          <a:xfrm>
+            <a:off x="330063" y="1215407"/>
+            <a:ext cx="8395080" cy="4961556"/>
+          </a:xfrm>
+        </p:spPr>
+        <p:txBody>
+          <a:bodyPr>
+            <a:normAutofit/>
+          </a:bodyPr>
+          <a:lstStyle/>
+          <a:p>
+            <a:r>
+              <a:rPr lang="en-US" dirty="0"/>
+              <a:t>Attribute selection</a:t>
+            </a:r>
+            <a:endParaRPr lang="en-CA" dirty="0"/>
           </a:p>
           <a:p>
             <a:pPr lvl="1"/>
             <a:r>
-              <a:rPr lang="en-US" dirty="0"/>
-              <a:t>Implements one-class classification using artificial data (available in the </a:t>
-            </a:r>
-            <a:r>
-              <a:rPr lang="en-US" dirty="0" err="1"/>
-              <a:t>oneClassClassifier</a:t>
-            </a:r>
-            <a:r>
-              <a:rPr lang="en-US" dirty="0"/>
-              <a:t> package) </a:t>
-            </a:r>
-          </a:p>
-          <a:p>
-            <a:r>
-              <a:rPr lang="en-US" dirty="0"/>
-              <a:t>Many other preprocessing tools are available:</a:t>
-            </a:r>
+              <a:rPr lang="en-US" sz="1900" dirty="0" err="1"/>
+              <a:t>CfsSubsetEval</a:t>
+            </a:r>
+            <a:r>
+              <a:rPr lang="en-US" sz="1900" dirty="0"/>
+              <a:t> (correlation-based attribute subset evaluator)</a:t>
+            </a:r>
+            <a:endParaRPr lang="en-CA" sz="1900" dirty="0"/>
           </a:p>
           <a:p>
             <a:pPr lvl="1"/>
             <a:r>
-              <a:rPr lang="en-US" dirty="0"/>
-              <a:t>Arithmetic operations; time-series operations; obfuscation; generating cluster membership values; adding noise; various conversions between numeric, binary, and nominal attributes; and various data cleansing operations </a:t>
-            </a:r>
-            <a:endParaRPr lang="en-CA" dirty="0"/>
-          </a:p>
-          <a:p>
-            <a:endParaRPr lang="en-CA" dirty="0"/>
+              <a:rPr lang="en-US" sz="1900" dirty="0" err="1"/>
+              <a:t>ConsistencySubsetEval</a:t>
+            </a:r>
+            <a:r>
+              <a:rPr lang="en-US" sz="1900" dirty="0"/>
+              <a:t> (measures class consistency for a given set of attributes, in the </a:t>
+            </a:r>
+            <a:r>
+              <a:rPr lang="en-US" sz="1900" dirty="0" err="1"/>
+              <a:t>consistencySubsetEval</a:t>
+            </a:r>
+            <a:r>
+              <a:rPr lang="en-US" sz="1900" dirty="0"/>
+              <a:t> package)</a:t>
+            </a:r>
+            <a:endParaRPr lang="en-CA" sz="1900" dirty="0"/>
+          </a:p>
+          <a:p>
+            <a:pPr lvl="1"/>
+            <a:r>
+              <a:rPr lang="en-US" sz="1900" dirty="0" err="1"/>
+              <a:t>ClassifierSubsetEval</a:t>
+            </a:r>
+            <a:r>
+              <a:rPr lang="en-US" sz="1900" dirty="0"/>
+              <a:t> (uses a classifier for evaluating subsets of attributes, in the </a:t>
+            </a:r>
+            <a:r>
+              <a:rPr lang="en-US" sz="1900" dirty="0" err="1"/>
+              <a:t>classifierBasedAttributeSelection</a:t>
+            </a:r>
+            <a:r>
+              <a:rPr lang="en-US" sz="1900" dirty="0"/>
+              <a:t> package)</a:t>
+            </a:r>
+            <a:endParaRPr lang="en-CA" sz="1900" dirty="0"/>
+          </a:p>
+          <a:p>
+            <a:pPr lvl="1"/>
+            <a:r>
+              <a:rPr lang="en-US" sz="1900" dirty="0" err="1"/>
+              <a:t>SVMAttributeEval</a:t>
+            </a:r>
+            <a:r>
+              <a:rPr lang="en-US" sz="1900" dirty="0"/>
+              <a:t> (ranks attributes according to the magnitude of the coefficients learned by an SVM, in the </a:t>
+            </a:r>
+            <a:r>
+              <a:rPr lang="en-US" sz="1900" dirty="0" err="1"/>
+              <a:t>SVMAttributeEval</a:t>
+            </a:r>
+            <a:r>
+              <a:rPr lang="en-US" sz="1900" dirty="0"/>
+              <a:t> package)</a:t>
+            </a:r>
+          </a:p>
+          <a:p>
+            <a:pPr lvl="1"/>
+            <a:r>
+              <a:rPr lang="en-US" sz="1900" dirty="0" err="1"/>
+              <a:t>ReliefF</a:t>
+            </a:r>
+            <a:r>
+              <a:rPr lang="en-US" sz="1900" dirty="0"/>
+              <a:t> (instance-based approach for ranking attributes)</a:t>
+            </a:r>
+          </a:p>
+          <a:p>
+            <a:pPr lvl="1"/>
+            <a:r>
+              <a:rPr lang="en-US" sz="1900" dirty="0" err="1"/>
+              <a:t>WrapperSubsetEval</a:t>
+            </a:r>
+            <a:r>
+              <a:rPr lang="en-US" sz="1900" dirty="0"/>
+              <a:t> (uses a classifier plus cross-validation)</a:t>
+            </a:r>
+            <a:endParaRPr lang="en-CA" sz="1900" dirty="0"/>
+          </a:p>
+          <a:p>
+            <a:pPr lvl="1"/>
+            <a:r>
+              <a:rPr lang="en-US" sz="1900" dirty="0" err="1"/>
+              <a:t>GreedyStepwise</a:t>
+            </a:r>
+            <a:r>
+              <a:rPr lang="en-US" sz="1900" dirty="0"/>
+              <a:t> (forward selection and backward elimination search)</a:t>
+            </a:r>
+            <a:endParaRPr lang="en-CA" sz="1900" dirty="0"/>
+          </a:p>
+          <a:p>
+            <a:pPr lvl="1"/>
+            <a:r>
+              <a:rPr lang="en-US" sz="1900" dirty="0" err="1"/>
+              <a:t>LinearForwardSelection</a:t>
+            </a:r>
+            <a:r>
+              <a:rPr lang="en-US" sz="1900" dirty="0"/>
+              <a:t> (forward selection with a sliding window of attribute choices at each step of the search, in the </a:t>
+            </a:r>
+            <a:r>
+              <a:rPr lang="en-US" sz="1900" dirty="0" err="1"/>
+              <a:t>linearForwardSelection</a:t>
+            </a:r>
+            <a:r>
+              <a:rPr lang="en-US" sz="1900" dirty="0"/>
+              <a:t> package)</a:t>
+            </a:r>
+            <a:endParaRPr lang="en-CA" sz="1900" dirty="0"/>
+          </a:p>
+          <a:p>
+            <a:pPr lvl="1"/>
+            <a:r>
+              <a:rPr lang="en-US" sz="1900" dirty="0" err="1"/>
+              <a:t>BestFirst</a:t>
+            </a:r>
+            <a:r>
+              <a:rPr lang="en-US" sz="1900" dirty="0"/>
+              <a:t> (search method that uses greedy hill-climbing with backtracking)</a:t>
+            </a:r>
+            <a:endParaRPr lang="en-CA" sz="1900" dirty="0"/>
+          </a:p>
+          <a:p>
+            <a:pPr lvl="1"/>
+            <a:r>
+              <a:rPr lang="en-US" sz="1900" dirty="0" err="1"/>
+              <a:t>RaceSearch</a:t>
+            </a:r>
+            <a:r>
+              <a:rPr lang="en-US" sz="1900" dirty="0"/>
+              <a:t> (uses the race search methodology, in the </a:t>
+            </a:r>
+            <a:r>
+              <a:rPr lang="en-US" sz="1900" dirty="0" err="1"/>
+              <a:t>raceSearch</a:t>
+            </a:r>
+            <a:r>
+              <a:rPr lang="en-US" sz="1900" dirty="0"/>
+              <a:t> package)</a:t>
+            </a:r>
+            <a:endParaRPr lang="en-CA" sz="1900" dirty="0"/>
+          </a:p>
+          <a:p>
+            <a:pPr lvl="1"/>
+            <a:r>
+              <a:rPr lang="en-US" sz="1900" dirty="0"/>
+              <a:t>Ranker (ranks individual attributes according to their evaluation)</a:t>
+            </a:r>
+            <a:endParaRPr lang="en-CA" sz="1900" dirty="0"/>
           </a:p>
         </p:txBody>
       </p:sp>
@@ -28996,6 +29512,355 @@
               <a:rPr lang="en-NZ" smtClean="0"/>
               <a:pPr/>
               <a:t>43</a:t>
+            </a:fld>
+            <a:endParaRPr lang="en-NZ"/>
+          </a:p>
+        </p:txBody>
+      </p:sp>
+    </p:spTree>
+    <p:extLst>
+      <p:ext uri="{BB962C8B-B14F-4D97-AF65-F5344CB8AC3E}">
+        <p14:creationId xmlns:p14="http://schemas.microsoft.com/office/powerpoint/2010/main" val="2440831861"/>
+      </p:ext>
+    </p:extLst>
+  </p:cSld>
+  <p:clrMapOvr>
+    <a:masterClrMapping/>
+  </p:clrMapOvr>
+</p:sld>
+</file>
+
+<file path=ppt/slides/slide44.xml><?xml version="1.0" encoding="utf-8"?>
+<p:sld xmlns:a="http://schemas.openxmlformats.org/drawingml/2006/main" xmlns:r="http://schemas.openxmlformats.org/officeDocument/2006/relationships" xmlns:p="http://schemas.openxmlformats.org/presentationml/2006/main">
+  <p:cSld>
+    <p:spTree>
+      <p:nvGrpSpPr>
+        <p:cNvPr id="1" name=""/>
+        <p:cNvGrpSpPr/>
+        <p:nvPr/>
+      </p:nvGrpSpPr>
+      <p:grpSpPr>
+        <a:xfrm>
+          <a:off x="0" y="0"/>
+          <a:ext cx="0" cy="0"/>
+          <a:chOff x="0" y="0"/>
+          <a:chExt cx="0" cy="0"/>
+        </a:xfrm>
+      </p:grpSpPr>
+      <p:sp>
+        <p:nvSpPr>
+          <p:cNvPr id="2" name="Title 1"/>
+          <p:cNvSpPr>
+            <a:spLocks noGrp="1"/>
+          </p:cNvSpPr>
+          <p:nvPr>
+            <p:ph type="title"/>
+          </p:nvPr>
+        </p:nvSpPr>
+        <p:spPr/>
+        <p:txBody>
+          <a:bodyPr/>
+          <a:lstStyle/>
+          <a:p>
+            <a:r>
+              <a:rPr lang="en-CA" dirty="0" err="1"/>
+              <a:t>Weka</a:t>
+            </a:r>
+            <a:r>
+              <a:rPr lang="en-CA" dirty="0"/>
+              <a:t> implementations</a:t>
+            </a:r>
+          </a:p>
+        </p:txBody>
+      </p:sp>
+      <p:sp>
+        <p:nvSpPr>
+          <p:cNvPr id="3" name="Content Placeholder 2"/>
+          <p:cNvSpPr>
+            <a:spLocks noGrp="1"/>
+          </p:cNvSpPr>
+          <p:nvPr>
+            <p:ph idx="1"/>
+          </p:nvPr>
+        </p:nvSpPr>
+        <p:spPr/>
+        <p:txBody>
+          <a:bodyPr>
+            <a:normAutofit/>
+          </a:bodyPr>
+          <a:lstStyle/>
+          <a:p>
+            <a:r>
+              <a:rPr lang="en-US" sz="2600" dirty="0"/>
+              <a:t>Learning decision tables: </a:t>
+            </a:r>
+            <a:r>
+              <a:rPr lang="en-US" sz="2600" dirty="0" err="1"/>
+              <a:t>DecisionTable</a:t>
+            </a:r>
+            <a:endParaRPr lang="en-CA" sz="2600" dirty="0"/>
+          </a:p>
+          <a:p>
+            <a:r>
+              <a:rPr lang="en-US" dirty="0"/>
+              <a:t>Discretization</a:t>
+            </a:r>
+            <a:endParaRPr lang="en-CA" dirty="0"/>
+          </a:p>
+          <a:p>
+            <a:pPr lvl="1"/>
+            <a:r>
+              <a:rPr lang="en-US" dirty="0"/>
+              <a:t>Discretize (unsupervised and supervised versions)</a:t>
+            </a:r>
+            <a:endParaRPr lang="en-CA" dirty="0"/>
+          </a:p>
+          <a:p>
+            <a:pPr lvl="1"/>
+            <a:r>
+              <a:rPr lang="en-US" dirty="0" err="1"/>
+              <a:t>PKIDiscretize</a:t>
+            </a:r>
+            <a:r>
+              <a:rPr lang="en-US" dirty="0"/>
+              <a:t> (proportional k-interval discretization)</a:t>
+            </a:r>
+            <a:endParaRPr lang="en-CA" dirty="0"/>
+          </a:p>
+          <a:p>
+            <a:pPr lvl="0"/>
+            <a:r>
+              <a:rPr lang="en-US" dirty="0" err="1"/>
+              <a:t>PrincipalComponents</a:t>
+            </a:r>
+            <a:r>
+              <a:rPr lang="en-US" dirty="0"/>
+              <a:t> and </a:t>
+            </a:r>
+            <a:r>
+              <a:rPr lang="en-US" dirty="0" err="1"/>
+              <a:t>RandomProjection</a:t>
+            </a:r>
+            <a:r>
+              <a:rPr lang="en-US" dirty="0"/>
+              <a:t> </a:t>
+            </a:r>
+          </a:p>
+          <a:p>
+            <a:pPr lvl="0"/>
+            <a:r>
+              <a:rPr lang="en-US" dirty="0" err="1"/>
+              <a:t>FastICA</a:t>
+            </a:r>
+            <a:r>
+              <a:rPr lang="en-US" dirty="0"/>
+              <a:t> (independent component analysis, in the </a:t>
+            </a:r>
+            <a:r>
+              <a:rPr lang="en-US" dirty="0" err="1"/>
+              <a:t>StudentFilters</a:t>
+            </a:r>
+            <a:r>
+              <a:rPr lang="en-US" dirty="0"/>
+              <a:t> package)</a:t>
+            </a:r>
+            <a:endParaRPr lang="en-CA" dirty="0"/>
+          </a:p>
+          <a:p>
+            <a:pPr lvl="0"/>
+            <a:r>
+              <a:rPr lang="en-US" dirty="0" err="1"/>
+              <a:t>StringToWordVector</a:t>
+            </a:r>
+            <a:r>
+              <a:rPr lang="en-US" dirty="0"/>
+              <a:t> (text to attribute vectors)</a:t>
+            </a:r>
+            <a:endParaRPr lang="en-CA" dirty="0"/>
+          </a:p>
+          <a:p>
+            <a:pPr lvl="0"/>
+            <a:r>
+              <a:rPr lang="en-US" dirty="0" err="1"/>
+              <a:t>PLSFilter</a:t>
+            </a:r>
+            <a:r>
+              <a:rPr lang="en-US" dirty="0"/>
+              <a:t> (partial least squares transformation) </a:t>
+            </a:r>
+            <a:endParaRPr lang="en-CA" dirty="0"/>
+          </a:p>
+          <a:p>
+            <a:pPr lvl="0"/>
+            <a:r>
+              <a:rPr lang="en-US" dirty="0"/>
+              <a:t>Resampling and reservoir sampling</a:t>
+            </a:r>
+            <a:endParaRPr lang="en-CA" dirty="0"/>
+          </a:p>
+          <a:p>
+            <a:endParaRPr lang="en-CA" dirty="0"/>
+          </a:p>
+          <a:p>
+            <a:endParaRPr lang="en-CA" dirty="0"/>
+          </a:p>
+        </p:txBody>
+      </p:sp>
+      <p:sp>
+        <p:nvSpPr>
+          <p:cNvPr id="4" name="Slide Number Placeholder 3"/>
+          <p:cNvSpPr>
+            <a:spLocks noGrp="1"/>
+          </p:cNvSpPr>
+          <p:nvPr>
+            <p:ph type="sldNum" sz="quarter" idx="12"/>
+          </p:nvPr>
+        </p:nvSpPr>
+        <p:spPr/>
+        <p:txBody>
+          <a:bodyPr/>
+          <a:lstStyle/>
+          <a:p>
+            <a:fld id="{CC0D3929-19F2-429B-ADDC-CA064EDFCD10}" type="slidenum">
+              <a:rPr lang="en-NZ" smtClean="0"/>
+              <a:pPr/>
+              <a:t>44</a:t>
+            </a:fld>
+            <a:endParaRPr lang="en-NZ"/>
+          </a:p>
+        </p:txBody>
+      </p:sp>
+    </p:spTree>
+    <p:extLst>
+      <p:ext uri="{BB962C8B-B14F-4D97-AF65-F5344CB8AC3E}">
+        <p14:creationId xmlns:p14="http://schemas.microsoft.com/office/powerpoint/2010/main" val="2810373431"/>
+      </p:ext>
+    </p:extLst>
+  </p:cSld>
+  <p:clrMapOvr>
+    <a:masterClrMapping/>
+  </p:clrMapOvr>
+</p:sld>
+</file>
+
+<file path=ppt/slides/slide45.xml><?xml version="1.0" encoding="utf-8"?>
+<p:sld xmlns:a="http://schemas.openxmlformats.org/drawingml/2006/main" xmlns:r="http://schemas.openxmlformats.org/officeDocument/2006/relationships" xmlns:p="http://schemas.openxmlformats.org/presentationml/2006/main">
+  <p:cSld>
+    <p:spTree>
+      <p:nvGrpSpPr>
+        <p:cNvPr id="1" name=""/>
+        <p:cNvGrpSpPr/>
+        <p:nvPr/>
+      </p:nvGrpSpPr>
+      <p:grpSpPr>
+        <a:xfrm>
+          <a:off x="0" y="0"/>
+          <a:ext cx="0" cy="0"/>
+          <a:chOff x="0" y="0"/>
+          <a:chExt cx="0" cy="0"/>
+        </a:xfrm>
+      </p:grpSpPr>
+      <p:sp>
+        <p:nvSpPr>
+          <p:cNvPr id="2" name="Title 1"/>
+          <p:cNvSpPr>
+            <a:spLocks noGrp="1"/>
+          </p:cNvSpPr>
+          <p:nvPr>
+            <p:ph type="title"/>
+          </p:nvPr>
+        </p:nvSpPr>
+        <p:spPr/>
+        <p:txBody>
+          <a:bodyPr/>
+          <a:lstStyle/>
+          <a:p>
+            <a:r>
+              <a:rPr lang="en-CA" dirty="0" err="1"/>
+              <a:t>Weka</a:t>
+            </a:r>
+            <a:r>
+              <a:rPr lang="en-CA" dirty="0"/>
+              <a:t> implementations</a:t>
+            </a:r>
+          </a:p>
+        </p:txBody>
+      </p:sp>
+      <p:sp>
+        <p:nvSpPr>
+          <p:cNvPr id="3" name="Content Placeholder 2"/>
+          <p:cNvSpPr>
+            <a:spLocks noGrp="1"/>
+          </p:cNvSpPr>
+          <p:nvPr>
+            <p:ph idx="1"/>
+          </p:nvPr>
+        </p:nvSpPr>
+        <p:spPr/>
+        <p:txBody>
+          <a:bodyPr/>
+          <a:lstStyle/>
+          <a:p>
+            <a:pPr lvl="0"/>
+            <a:r>
+              <a:rPr lang="en-US" dirty="0" err="1"/>
+              <a:t>OneClassClassifier</a:t>
+            </a:r>
+            <a:endParaRPr lang="en-US" dirty="0"/>
+          </a:p>
+          <a:p>
+            <a:pPr lvl="1"/>
+            <a:r>
+              <a:rPr lang="en-US" dirty="0"/>
+              <a:t>Implements one-class classification using artificial data (available in the </a:t>
+            </a:r>
+            <a:r>
+              <a:rPr lang="en-US" dirty="0" err="1"/>
+              <a:t>oneClassClassifier</a:t>
+            </a:r>
+            <a:r>
+              <a:rPr lang="en-US" dirty="0"/>
+              <a:t> package) </a:t>
+            </a:r>
+          </a:p>
+          <a:p>
+            <a:r>
+              <a:rPr lang="en-US" dirty="0"/>
+              <a:t>Many other preprocessing tools are available:</a:t>
+            </a:r>
+          </a:p>
+          <a:p>
+            <a:pPr lvl="1"/>
+            <a:r>
+              <a:rPr lang="en-US" dirty="0"/>
+              <a:t>Arithmetic operations; time-series operations; obfuscation; generating cluster membership values; adding noise; various conversions between numeric, binary, and nominal attributes; and various data cleansing operations </a:t>
+            </a:r>
+            <a:endParaRPr lang="en-CA" dirty="0"/>
+          </a:p>
+          <a:p>
+            <a:endParaRPr lang="en-CA" dirty="0"/>
+          </a:p>
+        </p:txBody>
+      </p:sp>
+      <p:sp>
+        <p:nvSpPr>
+          <p:cNvPr id="4" name="Slide Number Placeholder 3"/>
+          <p:cNvSpPr>
+            <a:spLocks noGrp="1"/>
+          </p:cNvSpPr>
+          <p:nvPr>
+            <p:ph type="sldNum" sz="quarter" idx="12"/>
+          </p:nvPr>
+        </p:nvSpPr>
+        <p:spPr/>
+        <p:txBody>
+          <a:bodyPr/>
+          <a:lstStyle/>
+          <a:p>
+            <a:fld id="{CC0D3929-19F2-429B-ADDC-CA064EDFCD10}" type="slidenum">
+              <a:rPr lang="en-NZ" smtClean="0"/>
+              <a:pPr/>
+              <a:t>45</a:t>
             </a:fld>
             <a:endParaRPr lang="en-NZ"/>
           </a:p>
@@ -29015,6 +29880,256 @@
 </file>
 
 <file path=ppt/slides/slide5.xml><?xml version="1.0" encoding="utf-8"?>
+<p:sld xmlns:a="http://schemas.openxmlformats.org/drawingml/2006/main" xmlns:r="http://schemas.openxmlformats.org/officeDocument/2006/relationships" xmlns:p="http://schemas.openxmlformats.org/presentationml/2006/main">
+  <p:cSld>
+    <p:spTree>
+      <p:nvGrpSpPr>
+        <p:cNvPr id="1" name=""/>
+        <p:cNvGrpSpPr/>
+        <p:nvPr/>
+      </p:nvGrpSpPr>
+      <p:grpSpPr>
+        <a:xfrm>
+          <a:off x="0" y="0"/>
+          <a:ext cx="0" cy="0"/>
+          <a:chOff x="0" y="0"/>
+          <a:chExt cx="0" cy="0"/>
+        </a:xfrm>
+      </p:grpSpPr>
+      <p:sp>
+        <p:nvSpPr>
+          <p:cNvPr id="2" name="Title 1"/>
+          <p:cNvSpPr>
+            <a:spLocks noGrp="1"/>
+          </p:cNvSpPr>
+          <p:nvPr>
+            <p:ph type="title"/>
+          </p:nvPr>
+        </p:nvSpPr>
+        <p:spPr>
+          <a:xfrm>
+            <a:off x="1295400" y="381000"/>
+            <a:ext cx="7772400" cy="1143000"/>
+          </a:xfrm>
+        </p:spPr>
+        <p:txBody>
+          <a:bodyPr/>
+          <a:lstStyle/>
+          <a:p>
+            <a:r>
+              <a:rPr lang="en-US" dirty="0"/>
+              <a:t>Common mistakes</a:t>
+            </a:r>
+          </a:p>
+        </p:txBody>
+      </p:sp>
+      <p:sp>
+        <p:nvSpPr>
+          <p:cNvPr id="3" name="Content Placeholder 2"/>
+          <p:cNvSpPr>
+            <a:spLocks noGrp="1"/>
+          </p:cNvSpPr>
+          <p:nvPr>
+            <p:ph idx="1"/>
+          </p:nvPr>
+        </p:nvSpPr>
+        <p:spPr/>
+        <p:txBody>
+          <a:bodyPr/>
+          <a:lstStyle/>
+          <a:p>
+            <a:r>
+              <a:rPr lang="en-US" dirty="0"/>
+              <a:t>Rushing to the modeling step</a:t>
+            </a:r>
+          </a:p>
+          <a:p>
+            <a:r>
+              <a:rPr lang="en-US" dirty="0"/>
+              <a:t>Only trying a few “popular” approaches</a:t>
+            </a:r>
+          </a:p>
+          <a:p>
+            <a:r>
+              <a:rPr lang="en-US" dirty="0"/>
+              <a:t>Using the default settings of a package</a:t>
+            </a:r>
+          </a:p>
+          <a:p>
+            <a:r>
+              <a:rPr lang="en-US" dirty="0"/>
+              <a:t>Over-fitting or under-fitting at different levels</a:t>
+            </a:r>
+          </a:p>
+          <a:p>
+            <a:r>
+              <a:rPr lang="en-US" dirty="0"/>
+              <a:t>Using wrong/unsuitable performance measures</a:t>
+            </a:r>
+          </a:p>
+          <a:p>
+            <a:r>
+              <a:rPr lang="en-US" dirty="0"/>
+              <a:t>Not paying enough attention to outliers</a:t>
+            </a:r>
+          </a:p>
+          <a:p>
+            <a:r>
+              <a:rPr lang="en-US" dirty="0"/>
+              <a:t>The curse of dimensionality</a:t>
+            </a:r>
+          </a:p>
+        </p:txBody>
+      </p:sp>
+    </p:spTree>
+    <p:extLst>
+      <p:ext uri="{BB962C8B-B14F-4D97-AF65-F5344CB8AC3E}">
+        <p14:creationId xmlns:p14="http://schemas.microsoft.com/office/powerpoint/2010/main" val="3204183549"/>
+      </p:ext>
+    </p:extLst>
+  </p:cSld>
+  <p:clrMapOvr>
+    <a:masterClrMapping/>
+  </p:clrMapOvr>
+</p:sld>
+</file>
+
+<file path=ppt/slides/slide6.xml><?xml version="1.0" encoding="utf-8"?>
+<p:sld xmlns:a="http://schemas.openxmlformats.org/drawingml/2006/main" xmlns:r="http://schemas.openxmlformats.org/officeDocument/2006/relationships" xmlns:p="http://schemas.openxmlformats.org/presentationml/2006/main">
+  <p:cSld name="Attribute selection">
+    <p:spTree>
+      <p:nvGrpSpPr>
+        <p:cNvPr id="1" name=""/>
+        <p:cNvGrpSpPr/>
+        <p:nvPr/>
+      </p:nvGrpSpPr>
+      <p:grpSpPr>
+        <a:xfrm>
+          <a:off x="0" y="0"/>
+          <a:ext cx="0" cy="0"/>
+          <a:chOff x="0" y="0"/>
+          <a:chExt cx="0" cy="0"/>
+        </a:xfrm>
+      </p:grpSpPr>
+      <p:sp>
+        <p:nvSpPr>
+          <p:cNvPr id="2" name="Title 1"/>
+          <p:cNvSpPr txBox="1">
+            <a:spLocks noGrp="1"/>
+          </p:cNvSpPr>
+          <p:nvPr>
+            <p:ph type="title"/>
+          </p:nvPr>
+        </p:nvSpPr>
+        <p:spPr/>
+        <p:txBody>
+          <a:bodyPr/>
+          <a:lstStyle/>
+          <a:p>
+            <a:pPr lvl="0"/>
+            <a:r>
+              <a:rPr lang="en-US" dirty="0"/>
+              <a:t>Attribute selection</a:t>
+            </a:r>
+          </a:p>
+        </p:txBody>
+      </p:sp>
+      <p:sp>
+        <p:nvSpPr>
+          <p:cNvPr id="6" name="Content Placeholder 5"/>
+          <p:cNvSpPr>
+            <a:spLocks noGrp="1"/>
+          </p:cNvSpPr>
+          <p:nvPr>
+            <p:ph idx="1"/>
+          </p:nvPr>
+        </p:nvSpPr>
+        <p:spPr/>
+        <p:txBody>
+          <a:bodyPr/>
+          <a:lstStyle/>
+          <a:p>
+            <a:r>
+              <a:rPr lang="en-CA" dirty="0"/>
+              <a:t>Attribute selection is often important in practice</a:t>
+            </a:r>
+          </a:p>
+          <a:p>
+            <a:r>
+              <a:rPr lang="en-CA" dirty="0"/>
+              <a:t>For example, adding a random (i.e., irrelevant) attribute can significantly degrade C4.5’s performance</a:t>
+            </a:r>
+          </a:p>
+          <a:p>
+            <a:pPr lvl="1"/>
+            <a:r>
+              <a:rPr lang="en-CA" dirty="0"/>
+              <a:t>Problem: C4.5’s built-in attribute selection is based on smaller and smaller amounts of data</a:t>
+            </a:r>
+          </a:p>
+          <a:p>
+            <a:r>
+              <a:rPr lang="en-CA" dirty="0"/>
+              <a:t>Instance-based learning is particularly susceptible to irrelevant attributes</a:t>
+            </a:r>
+          </a:p>
+          <a:p>
+            <a:pPr lvl="1"/>
+            <a:r>
+              <a:rPr lang="en-CA" dirty="0"/>
+              <a:t>Number of training instances required increases exponentially with number of irrelevant attributes</a:t>
+            </a:r>
+          </a:p>
+          <a:p>
+            <a:r>
+              <a:rPr lang="en-CA" dirty="0"/>
+              <a:t>Exception: naïve Bayes can cope well with irrelevant attributes</a:t>
+            </a:r>
+          </a:p>
+          <a:p>
+            <a:r>
+              <a:rPr lang="en-CA" dirty="0"/>
+              <a:t>Note that relevant attributes can also be harmful if they mislead the learning algorithm</a:t>
+            </a:r>
+          </a:p>
+          <a:p>
+            <a:endParaRPr lang="en-CA" dirty="0"/>
+          </a:p>
+        </p:txBody>
+      </p:sp>
+      <p:sp>
+        <p:nvSpPr>
+          <p:cNvPr id="3" name="Slide Number Placeholder 2"/>
+          <p:cNvSpPr>
+            <a:spLocks noGrp="1"/>
+          </p:cNvSpPr>
+          <p:nvPr>
+            <p:ph type="sldNum" sz="quarter" idx="12"/>
+          </p:nvPr>
+        </p:nvSpPr>
+        <p:spPr/>
+        <p:txBody>
+          <a:bodyPr/>
+          <a:lstStyle/>
+          <a:p>
+            <a:fld id="{CC0D3929-19F2-429B-ADDC-CA064EDFCD10}" type="slidenum">
+              <a:rPr lang="en-NZ" smtClean="0"/>
+              <a:pPr/>
+              <a:t>6</a:t>
+            </a:fld>
+            <a:endParaRPr lang="en-NZ"/>
+          </a:p>
+        </p:txBody>
+      </p:sp>
+    </p:spTree>
+  </p:cSld>
+  <p:clrMapOvr>
+    <a:masterClrMapping/>
+  </p:clrMapOvr>
+</p:sld>
+</file>
+
+<file path=ppt/slides/slide7.xml><?xml version="1.0" encoding="utf-8"?>
 <p:sld xmlns:a="http://schemas.openxmlformats.org/drawingml/2006/main" xmlns:r="http://schemas.openxmlformats.org/officeDocument/2006/relationships" xmlns:p="http://schemas.openxmlformats.org/presentationml/2006/main">
   <p:cSld name="Scheme-independent attribute selection">
     <p:spTree>
@@ -29138,7 +30253,7 @@
             <a:fld id="{CC0D3929-19F2-429B-ADDC-CA064EDFCD10}" type="slidenum">
               <a:rPr lang="en-NZ" smtClean="0"/>
               <a:pPr/>
-              <a:t>5</a:t>
+              <a:t>7</a:t>
             </a:fld>
             <a:endParaRPr lang="en-NZ"/>
           </a:p>
@@ -29152,7 +30267,7 @@
 </p:sld>
 </file>
 
-<file path=ppt/slides/slide6.xml><?xml version="1.0" encoding="utf-8"?>
+<file path=ppt/slides/slide8.xml><?xml version="1.0" encoding="utf-8"?>
 <p:sld xmlns:a="http://schemas.openxmlformats.org/drawingml/2006/main" xmlns:r="http://schemas.openxmlformats.org/officeDocument/2006/relationships" xmlns:p="http://schemas.openxmlformats.org/presentationml/2006/main">
   <p:cSld>
     <p:spTree>
@@ -29298,7 +30413,7 @@
             <a:fld id="{CC0D3929-19F2-429B-ADDC-CA064EDFCD10}" type="slidenum">
               <a:rPr lang="en-NZ" smtClean="0"/>
               <a:pPr/>
-              <a:t>6</a:t>
+              <a:t>8</a:t>
             </a:fld>
             <a:endParaRPr lang="en-NZ"/>
           </a:p>
@@ -29431,7 +30546,7 @@
 </p:sld>
 </file>
 
-<file path=ppt/slides/slide7.xml><?xml version="1.0" encoding="utf-8"?>
+<file path=ppt/slides/slide9.xml><?xml version="1.0" encoding="utf-8"?>
 <p:sld xmlns:a="http://schemas.openxmlformats.org/drawingml/2006/main" xmlns:r="http://schemas.openxmlformats.org/officeDocument/2006/relationships" xmlns:p="http://schemas.openxmlformats.org/presentationml/2006/main">
   <p:cSld name="Attribute subsets for weather data">
     <p:spTree>
@@ -29466,7 +30581,7 @@
             <a:fld id="{CC0D3929-19F2-429B-ADDC-CA064EDFCD10}" type="slidenum">
               <a:rPr lang="en-NZ" smtClean="0"/>
               <a:pPr/>
-              <a:t>7</a:t>
+              <a:t>9</a:t>
             </a:fld>
             <a:endParaRPr lang="en-NZ"/>
           </a:p>
@@ -29532,875 +30647,6 @@
           </a:ln>
         </p:spPr>
       </p:pic>
-    </p:spTree>
-  </p:cSld>
-  <p:clrMapOvr>
-    <a:masterClrMapping/>
-  </p:clrMapOvr>
-</p:sld>
-</file>
-
-<file path=ppt/slides/slide8.xml><?xml version="1.0" encoding="utf-8"?>
-<p:sld xmlns:a="http://schemas.openxmlformats.org/drawingml/2006/main" xmlns:r="http://schemas.openxmlformats.org/officeDocument/2006/relationships" xmlns:p="http://schemas.openxmlformats.org/presentationml/2006/main">
-  <p:cSld name="Searching attribute space">
-    <p:spTree>
-      <p:nvGrpSpPr>
-        <p:cNvPr id="1" name=""/>
-        <p:cNvGrpSpPr/>
-        <p:nvPr/>
-      </p:nvGrpSpPr>
-      <p:grpSpPr>
-        <a:xfrm>
-          <a:off x="0" y="0"/>
-          <a:ext cx="0" cy="0"/>
-          <a:chOff x="0" y="0"/>
-          <a:chExt cx="0" cy="0"/>
-        </a:xfrm>
-      </p:grpSpPr>
-      <p:sp>
-        <p:nvSpPr>
-          <p:cNvPr id="2" name="Title 1"/>
-          <p:cNvSpPr txBox="1">
-            <a:spLocks noGrp="1"/>
-          </p:cNvSpPr>
-          <p:nvPr>
-            <p:ph type="title"/>
-          </p:nvPr>
-        </p:nvSpPr>
-        <p:spPr/>
-        <p:txBody>
-          <a:bodyPr/>
-          <a:lstStyle/>
-          <a:p>
-            <a:pPr lvl="0"/>
-            <a:r>
-              <a:rPr lang="en-US" dirty="0"/>
-              <a:t>Searching the attribute space</a:t>
-            </a:r>
-          </a:p>
-        </p:txBody>
-      </p:sp>
-      <p:sp>
-        <p:nvSpPr>
-          <p:cNvPr id="6" name="Content Placeholder 5"/>
-          <p:cNvSpPr>
-            <a:spLocks noGrp="1"/>
-          </p:cNvSpPr>
-          <p:nvPr>
-            <p:ph idx="1"/>
-          </p:nvPr>
-        </p:nvSpPr>
-        <p:spPr/>
-        <p:txBody>
-          <a:bodyPr/>
-          <a:lstStyle/>
-          <a:p>
-            <a:r>
-              <a:rPr lang="en-CA" dirty="0"/>
-              <a:t>Number of attribute subsets is</a:t>
-            </a:r>
-            <a:br>
-              <a:rPr lang="en-CA" dirty="0"/>
-            </a:br>
-            <a:r>
-              <a:rPr lang="en-CA" dirty="0"/>
-              <a:t>exponential in the number of attributes</a:t>
-            </a:r>
-          </a:p>
-          <a:p>
-            <a:r>
-              <a:rPr lang="en-CA" dirty="0"/>
-              <a:t>Common greedy approaches:</a:t>
-            </a:r>
-          </a:p>
-          <a:p>
-            <a:pPr lvl="1"/>
-            <a:r>
-              <a:rPr lang="en-CA" dirty="0"/>
-              <a:t>forward selection</a:t>
-            </a:r>
-          </a:p>
-          <a:p>
-            <a:pPr lvl="1"/>
-            <a:r>
-              <a:rPr lang="en-CA" dirty="0"/>
-              <a:t>backward elimination</a:t>
-            </a:r>
-          </a:p>
-          <a:p>
-            <a:r>
-              <a:rPr lang="en-CA" dirty="0"/>
-              <a:t>More sophisticated strategies:</a:t>
-            </a:r>
-          </a:p>
-          <a:p>
-            <a:pPr lvl="1"/>
-            <a:r>
-              <a:rPr lang="en-CA" dirty="0"/>
-              <a:t>Bidirectional search</a:t>
-            </a:r>
-          </a:p>
-          <a:p>
-            <a:pPr lvl="1"/>
-            <a:r>
-              <a:rPr lang="en-CA" dirty="0"/>
-              <a:t>Best-first search: can find optimum solution</a:t>
-            </a:r>
-          </a:p>
-          <a:p>
-            <a:pPr lvl="1"/>
-            <a:r>
-              <a:rPr lang="en-CA" dirty="0"/>
-              <a:t>Beam search: approximation to best-first search</a:t>
-            </a:r>
-          </a:p>
-          <a:p>
-            <a:pPr lvl="1"/>
-            <a:r>
-              <a:rPr lang="en-CA" dirty="0"/>
-              <a:t>Genetic algorithms</a:t>
-            </a:r>
-          </a:p>
-        </p:txBody>
-      </p:sp>
-      <p:sp>
-        <p:nvSpPr>
-          <p:cNvPr id="3" name="Slide Number Placeholder 2"/>
-          <p:cNvSpPr>
-            <a:spLocks noGrp="1"/>
-          </p:cNvSpPr>
-          <p:nvPr>
-            <p:ph type="sldNum" sz="quarter" idx="12"/>
-          </p:nvPr>
-        </p:nvSpPr>
-        <p:spPr/>
-        <p:txBody>
-          <a:bodyPr/>
-          <a:lstStyle/>
-          <a:p>
-            <a:fld id="{CC0D3929-19F2-429B-ADDC-CA064EDFCD10}" type="slidenum">
-              <a:rPr lang="en-NZ" smtClean="0"/>
-              <a:pPr/>
-              <a:t>8</a:t>
-            </a:fld>
-            <a:endParaRPr lang="en-NZ"/>
-          </a:p>
-        </p:txBody>
-      </p:sp>
-    </p:spTree>
-  </p:cSld>
-  <p:clrMapOvr>
-    <a:masterClrMapping/>
-  </p:clrMapOvr>
-</p:sld>
-</file>
-
-<file path=ppt/slides/slide9.xml><?xml version="1.0" encoding="utf-8"?>
-<p:sld xmlns:a="http://schemas.openxmlformats.org/drawingml/2006/main" xmlns:r="http://schemas.openxmlformats.org/officeDocument/2006/relationships" xmlns:p="http://schemas.openxmlformats.org/presentationml/2006/main">
-  <p:cSld name="Scheme-specific selection">
-    <p:spTree>
-      <p:nvGrpSpPr>
-        <p:cNvPr id="1" name=""/>
-        <p:cNvGrpSpPr/>
-        <p:nvPr/>
-      </p:nvGrpSpPr>
-      <p:grpSpPr>
-        <a:xfrm>
-          <a:off x="0" y="0"/>
-          <a:ext cx="0" cy="0"/>
-          <a:chOff x="0" y="0"/>
-          <a:chExt cx="0" cy="0"/>
-        </a:xfrm>
-      </p:grpSpPr>
-      <p:sp>
-        <p:nvSpPr>
-          <p:cNvPr id="6" name="Slide Number Placeholder 5"/>
-          <p:cNvSpPr>
-            <a:spLocks noGrp="1"/>
-          </p:cNvSpPr>
-          <p:nvPr>
-            <p:ph type="sldNum" sz="quarter" idx="12"/>
-          </p:nvPr>
-        </p:nvSpPr>
-        <p:spPr/>
-        <p:txBody>
-          <a:bodyPr/>
-          <a:lstStyle/>
-          <a:p>
-            <a:fld id="{CC0D3929-19F2-429B-ADDC-CA064EDFCD10}" type="slidenum">
-              <a:rPr lang="en-NZ" smtClean="0"/>
-              <a:pPr/>
-              <a:t>9</a:t>
-            </a:fld>
-            <a:endParaRPr lang="en-NZ"/>
-          </a:p>
-        </p:txBody>
-      </p:sp>
-      <p:sp>
-        <p:nvSpPr>
-          <p:cNvPr id="2" name="Title 1"/>
-          <p:cNvSpPr txBox="1">
-            <a:spLocks noGrp="1"/>
-          </p:cNvSpPr>
-          <p:nvPr>
-            <p:ph type="title" idx="4294967295"/>
-          </p:nvPr>
-        </p:nvSpPr>
-        <p:spPr>
-          <a:xfrm>
-            <a:off x="1600200" y="-77788"/>
-            <a:ext cx="7543800" cy="977901"/>
-          </a:xfrm>
-        </p:spPr>
-        <p:txBody>
-          <a:bodyPr wrap="square" lIns="90360" tIns="44280" rIns="90360" bIns="44280" anchorCtr="0"/>
-          <a:lstStyle/>
-          <a:p>
-            <a:pPr lvl="0"/>
-            <a:r>
-              <a:rPr lang="en-US"/>
-              <a:t>Scheme-specific selection</a:t>
-            </a:r>
-          </a:p>
-        </p:txBody>
-      </p:sp>
-      <p:sp>
-        <p:nvSpPr>
-          <p:cNvPr id="3" name="TextBox 2"/>
-          <p:cNvSpPr txBox="1"/>
-          <p:nvPr/>
-        </p:nvSpPr>
-        <p:spPr>
-          <a:xfrm>
-            <a:off x="408990" y="826559"/>
-            <a:ext cx="8021966" cy="5792653"/>
-          </a:xfrm>
-          <a:prstGeom prst="rect">
-            <a:avLst/>
-          </a:prstGeom>
-          <a:noFill/>
-          <a:ln>
-            <a:noFill/>
-          </a:ln>
-        </p:spPr>
-        <p:txBody>
-          <a:bodyPr vert="horz" wrap="square" lIns="90360" tIns="44280" rIns="90360" bIns="44280" anchor="t" anchorCtr="0" compatLnSpc="0">
-            <a:spAutoFit/>
-          </a:bodyPr>
-          <a:lstStyle/>
-          <a:p>
-            <a:pPr marL="457200" marR="0" lvl="0" indent="-457200" algn="l" rtl="0" hangingPunct="0">
-              <a:lnSpc>
-                <a:spcPct val="100000"/>
-              </a:lnSpc>
-              <a:spcBef>
-                <a:spcPts val="697"/>
-              </a:spcBef>
-              <a:spcAft>
-                <a:spcPts val="0"/>
-              </a:spcAft>
-              <a:buSzPct val="100000"/>
-              <a:buFont typeface="Arial"/>
-              <a:buChar char="•"/>
-              <a:tabLst>
-                <a:tab pos="0" algn="l"/>
-                <a:tab pos="914400" algn="l"/>
-                <a:tab pos="1828800" algn="l"/>
-                <a:tab pos="2743199" algn="l"/>
-                <a:tab pos="3657600" algn="l"/>
-                <a:tab pos="4572000" algn="l"/>
-                <a:tab pos="5486399" algn="l"/>
-                <a:tab pos="6400799" algn="l"/>
-                <a:tab pos="7315200" algn="l"/>
-                <a:tab pos="8229600" algn="l"/>
-                <a:tab pos="9144000" algn="l"/>
-                <a:tab pos="10058400" algn="l"/>
-              </a:tabLst>
-            </a:pPr>
-            <a:r>
-              <a:rPr lang="en-US" sz="2400" b="0" i="1" u="none" strike="noStrike" baseline="0" dirty="0">
-                <a:ln>
-                  <a:noFill/>
-                </a:ln>
-                <a:solidFill>
-                  <a:srgbClr val="000000"/>
-                </a:solidFill>
-                <a:ea typeface="Gothic" pitchFamily="2"/>
-                <a:cs typeface="Lucidasans" pitchFamily="2"/>
-              </a:rPr>
-              <a:t>Wrapper </a:t>
-            </a:r>
-            <a:r>
-              <a:rPr lang="en-US" sz="2400" b="0" i="0" u="none" strike="noStrike" baseline="0" dirty="0">
-                <a:ln>
-                  <a:noFill/>
-                </a:ln>
-                <a:solidFill>
-                  <a:srgbClr val="000000"/>
-                </a:solidFill>
-                <a:ea typeface="Gothic" pitchFamily="2"/>
-                <a:cs typeface="Lucidasans" pitchFamily="2"/>
-              </a:rPr>
-              <a:t>approach to attribute selection: attributes are selected with target scheme in the loop</a:t>
-            </a:r>
-          </a:p>
-          <a:p>
-            <a:pPr marL="457200" marR="0" lvl="0" indent="-457200" algn="l" rtl="0" hangingPunct="0">
-              <a:lnSpc>
-                <a:spcPct val="100000"/>
-              </a:lnSpc>
-              <a:spcBef>
-                <a:spcPts val="697"/>
-              </a:spcBef>
-              <a:spcAft>
-                <a:spcPts val="0"/>
-              </a:spcAft>
-              <a:buSzPct val="100000"/>
-              <a:buFont typeface="Arial"/>
-              <a:buChar char="•"/>
-              <a:tabLst>
-                <a:tab pos="0" algn="l"/>
-                <a:tab pos="914400" algn="l"/>
-                <a:tab pos="1828800" algn="l"/>
-                <a:tab pos="2743199" algn="l"/>
-                <a:tab pos="3657600" algn="l"/>
-                <a:tab pos="4572000" algn="l"/>
-                <a:tab pos="5486399" algn="l"/>
-                <a:tab pos="6400799" algn="l"/>
-                <a:tab pos="7315200" algn="l"/>
-                <a:tab pos="8229600" algn="l"/>
-                <a:tab pos="9144000" algn="l"/>
-                <a:tab pos="10058400" algn="l"/>
-              </a:tabLst>
-            </a:pPr>
-            <a:r>
-              <a:rPr lang="en-US" sz="2400" b="0" i="0" u="none" strike="noStrike" baseline="0" dirty="0">
-                <a:ln>
-                  <a:noFill/>
-                </a:ln>
-                <a:solidFill>
-                  <a:srgbClr val="000000"/>
-                </a:solidFill>
-                <a:ea typeface="Gothic" pitchFamily="2"/>
-                <a:cs typeface="Lucidasans" pitchFamily="2"/>
-              </a:rPr>
-              <a:t>Implement “wrapper” around learning scheme</a:t>
-            </a:r>
-          </a:p>
-          <a:p>
-            <a:pPr lvl="1" hangingPunct="0">
-              <a:spcBef>
-                <a:spcPts val="697"/>
-              </a:spcBef>
-              <a:buSzPct val="100000"/>
-              <a:tabLst>
-                <a:tab pos="0" algn="l"/>
-                <a:tab pos="914400" algn="l"/>
-                <a:tab pos="1828800" algn="l"/>
-                <a:tab pos="2743199" algn="l"/>
-                <a:tab pos="3657600" algn="l"/>
-                <a:tab pos="4572000" algn="l"/>
-                <a:tab pos="5486399" algn="l"/>
-                <a:tab pos="6400799" algn="l"/>
-                <a:tab pos="7315200" algn="l"/>
-                <a:tab pos="8229600" algn="l"/>
-                <a:tab pos="9144000" algn="l"/>
-                <a:tab pos="10058400" algn="l"/>
-              </a:tabLst>
-            </a:pPr>
-            <a:r>
-              <a:rPr lang="en-US" sz="2000" b="0" i="0" u="none" strike="noStrike" baseline="0" dirty="0">
-                <a:ln>
-                  <a:noFill/>
-                </a:ln>
-                <a:solidFill>
-                  <a:srgbClr val="000000"/>
-                </a:solidFill>
-                <a:ea typeface="Gothic" pitchFamily="2"/>
-                <a:cs typeface="Lucidasans" pitchFamily="2"/>
-              </a:rPr>
-              <a:t>Evaluation criterion: cross-validation performance</a:t>
-            </a:r>
-          </a:p>
-          <a:p>
-            <a:pPr marL="457200" marR="0" lvl="0" indent="-457200" algn="l" rtl="0" hangingPunct="0">
-              <a:lnSpc>
-                <a:spcPct val="100000"/>
-              </a:lnSpc>
-              <a:spcBef>
-                <a:spcPts val="697"/>
-              </a:spcBef>
-              <a:spcAft>
-                <a:spcPts val="0"/>
-              </a:spcAft>
-              <a:buSzPct val="100000"/>
-              <a:buFont typeface="Arial"/>
-              <a:buChar char="•"/>
-              <a:tabLst>
-                <a:tab pos="0" algn="l"/>
-                <a:tab pos="914400" algn="l"/>
-                <a:tab pos="1828800" algn="l"/>
-                <a:tab pos="2743199" algn="l"/>
-                <a:tab pos="3657600" algn="l"/>
-                <a:tab pos="4572000" algn="l"/>
-                <a:tab pos="5486399" algn="l"/>
-                <a:tab pos="6400799" algn="l"/>
-                <a:tab pos="7315200" algn="l"/>
-                <a:tab pos="8229600" algn="l"/>
-                <a:tab pos="9144000" algn="l"/>
-                <a:tab pos="10058400" algn="l"/>
-              </a:tabLst>
-            </a:pPr>
-            <a:r>
-              <a:rPr lang="en-US" sz="2400" b="0" i="0" u="none" strike="noStrike" baseline="0" dirty="0">
-                <a:ln>
-                  <a:noFill/>
-                </a:ln>
-                <a:solidFill>
-                  <a:srgbClr val="000000"/>
-                </a:solidFill>
-                <a:ea typeface="Gothic" pitchFamily="2"/>
-                <a:cs typeface="Lucidasans" pitchFamily="2"/>
-              </a:rPr>
-              <a:t>Time consuming in</a:t>
-            </a:r>
-            <a:r>
-              <a:rPr lang="en-US" sz="2400" b="0" i="0" u="none" strike="noStrike" dirty="0">
-                <a:ln>
-                  <a:noFill/>
-                </a:ln>
-                <a:solidFill>
-                  <a:srgbClr val="000000"/>
-                </a:solidFill>
-                <a:ea typeface="Gothic" pitchFamily="2"/>
-                <a:cs typeface="Lucidasans" pitchFamily="2"/>
-              </a:rPr>
-              <a:t> general</a:t>
-            </a:r>
-            <a:endParaRPr lang="en-US" sz="2400" b="0" i="0" u="none" strike="noStrike" baseline="0" dirty="0">
-              <a:ln>
-                <a:noFill/>
-              </a:ln>
-              <a:solidFill>
-                <a:srgbClr val="000000"/>
-              </a:solidFill>
-              <a:ea typeface="Gothic" pitchFamily="2"/>
-              <a:cs typeface="Lucidasans" pitchFamily="2"/>
-            </a:endParaRPr>
-          </a:p>
-          <a:p>
-            <a:pPr marL="800100" lvl="2" indent="-342900" hangingPunct="0">
-              <a:spcBef>
-                <a:spcPts val="598"/>
-              </a:spcBef>
-              <a:buSzPct val="100000"/>
-              <a:buFont typeface="Arial"/>
-              <a:buChar char="•"/>
-              <a:tabLst>
-                <a:tab pos="0" algn="l"/>
-                <a:tab pos="914400" algn="l"/>
-                <a:tab pos="1828800" algn="l"/>
-                <a:tab pos="2743199" algn="l"/>
-                <a:tab pos="3657600" algn="l"/>
-                <a:tab pos="4572000" algn="l"/>
-                <a:tab pos="5486399" algn="l"/>
-                <a:tab pos="6400799" algn="l"/>
-                <a:tab pos="7315200" algn="l"/>
-                <a:tab pos="8229600" algn="l"/>
-                <a:tab pos="9144000" algn="l"/>
-                <a:tab pos="10058400" algn="l"/>
-              </a:tabLst>
-            </a:pPr>
-            <a:r>
-              <a:rPr lang="en-US" sz="2000" b="0" i="0" u="none" strike="noStrike" baseline="0" dirty="0">
-                <a:ln>
-                  <a:noFill/>
-                </a:ln>
-                <a:solidFill>
-                  <a:srgbClr val="000000"/>
-                </a:solidFill>
-                <a:ea typeface="Gothic" pitchFamily="2"/>
-                <a:cs typeface="Lucidasans" pitchFamily="2"/>
-              </a:rPr>
-              <a:t>greedy approach, </a:t>
-            </a:r>
-            <a:r>
-              <a:rPr lang="en-US" sz="2000" b="0" i="1" u="none" strike="noStrike" baseline="0" dirty="0">
-                <a:ln>
-                  <a:noFill/>
-                </a:ln>
-                <a:solidFill>
-                  <a:srgbClr val="000000"/>
-                </a:solidFill>
-                <a:ea typeface="Gothic" pitchFamily="2"/>
-                <a:cs typeface="Lucidasans" pitchFamily="2"/>
-              </a:rPr>
-              <a:t>k</a:t>
-            </a:r>
-            <a:r>
-              <a:rPr lang="en-US" sz="2000" b="0" i="0" u="none" strike="noStrike" baseline="0" dirty="0">
-                <a:ln>
-                  <a:noFill/>
-                </a:ln>
-                <a:solidFill>
-                  <a:srgbClr val="000000"/>
-                </a:solidFill>
-                <a:ea typeface="Gothic" pitchFamily="2"/>
-                <a:cs typeface="Lucidasans" pitchFamily="2"/>
-              </a:rPr>
-              <a:t> attributes </a:t>
-            </a:r>
-            <a:r>
-              <a:rPr lang="en-US" sz="2000" b="1" dirty="0">
-                <a:solidFill>
-                  <a:srgbClr val="000000"/>
-                </a:solidFill>
-                <a:ea typeface="Gothic" pitchFamily="2"/>
-                <a:cs typeface="Lucidasans" pitchFamily="2"/>
-              </a:rPr>
-              <a:t>=&gt;</a:t>
-            </a:r>
-            <a:r>
-              <a:rPr lang="en-US" sz="2000" b="0" i="0" u="none" strike="noStrike" baseline="0" dirty="0">
-                <a:ln>
-                  <a:noFill/>
-                </a:ln>
-                <a:solidFill>
-                  <a:srgbClr val="000000"/>
-                </a:solidFill>
-                <a:ea typeface="Gothic" pitchFamily="2"/>
-                <a:cs typeface="Lucidasans" pitchFamily="2"/>
-              </a:rPr>
-              <a:t>   </a:t>
-            </a:r>
-            <a:r>
-              <a:rPr lang="en-US" sz="2000" b="0" i="1" u="none" strike="noStrike" baseline="0" dirty="0">
-                <a:ln>
-                  <a:noFill/>
-                </a:ln>
-                <a:solidFill>
-                  <a:srgbClr val="000000"/>
-                </a:solidFill>
-                <a:ea typeface="Gothic" pitchFamily="2"/>
-                <a:cs typeface="Lucidasans" pitchFamily="2"/>
-              </a:rPr>
-              <a:t>k</a:t>
-            </a:r>
-            <a:r>
-              <a:rPr lang="en-US" sz="2000" b="0" i="0" u="none" strike="noStrike" baseline="30000" dirty="0">
-                <a:ln>
-                  <a:noFill/>
-                </a:ln>
-                <a:solidFill>
-                  <a:srgbClr val="000000"/>
-                </a:solidFill>
-                <a:ea typeface="Gothic" pitchFamily="2"/>
-                <a:cs typeface="Lucidasans" pitchFamily="2"/>
-              </a:rPr>
-              <a:t>2</a:t>
-            </a:r>
-            <a:r>
-              <a:rPr lang="en-US" sz="2000" b="0" i="0" u="none" strike="noStrike" baseline="0" dirty="0">
-                <a:ln>
-                  <a:noFill/>
-                </a:ln>
-                <a:solidFill>
-                  <a:srgbClr val="000000"/>
-                </a:solidFill>
-                <a:ea typeface="Gothic" pitchFamily="2"/>
-                <a:cs typeface="Lucidasans" pitchFamily="2"/>
-              </a:rPr>
-              <a:t> time</a:t>
-            </a:r>
-          </a:p>
-          <a:p>
-            <a:pPr marL="800100" lvl="2" indent="-342900" hangingPunct="0">
-              <a:spcBef>
-                <a:spcPts val="598"/>
-              </a:spcBef>
-              <a:buSzPct val="100000"/>
-              <a:buFont typeface="Arial"/>
-              <a:buChar char="•"/>
-              <a:tabLst>
-                <a:tab pos="0" algn="l"/>
-                <a:tab pos="914400" algn="l"/>
-                <a:tab pos="1828800" algn="l"/>
-                <a:tab pos="2743199" algn="l"/>
-                <a:tab pos="3657600" algn="l"/>
-                <a:tab pos="4572000" algn="l"/>
-                <a:tab pos="5486399" algn="l"/>
-                <a:tab pos="6400799" algn="l"/>
-                <a:tab pos="7315200" algn="l"/>
-                <a:tab pos="8229600" algn="l"/>
-                <a:tab pos="9144000" algn="l"/>
-                <a:tab pos="10058400" algn="l"/>
-              </a:tabLst>
-            </a:pPr>
-            <a:r>
-              <a:rPr lang="en-US" sz="2000" b="0" i="0" u="none" strike="noStrike" baseline="0" dirty="0">
-                <a:ln>
-                  <a:noFill/>
-                </a:ln>
-                <a:solidFill>
-                  <a:srgbClr val="000000"/>
-                </a:solidFill>
-                <a:ea typeface="Gothic" pitchFamily="2"/>
-                <a:cs typeface="Lucidasans" pitchFamily="2"/>
-              </a:rPr>
-              <a:t>prior ranking of attributes </a:t>
-            </a:r>
-            <a:r>
-              <a:rPr lang="en-US" sz="2000" b="1" dirty="0">
-                <a:solidFill>
-                  <a:srgbClr val="000000"/>
-                </a:solidFill>
-                <a:ea typeface="Gothic" pitchFamily="2"/>
-                <a:cs typeface="Lucidasans" pitchFamily="2"/>
-              </a:rPr>
-              <a:t>=&gt;</a:t>
-            </a:r>
-            <a:r>
-              <a:rPr lang="en-US" sz="2000" b="0" i="0" u="none" strike="noStrike" baseline="0" dirty="0">
-                <a:ln>
-                  <a:noFill/>
-                </a:ln>
-                <a:solidFill>
-                  <a:srgbClr val="000000"/>
-                </a:solidFill>
-                <a:ea typeface="Gothic" pitchFamily="2"/>
-                <a:cs typeface="Lucidasans" pitchFamily="2"/>
-              </a:rPr>
-              <a:t>   linear in </a:t>
-            </a:r>
-            <a:r>
-              <a:rPr lang="en-US" sz="2000" b="0" i="1" u="none" strike="noStrike" baseline="0" dirty="0">
-                <a:ln>
-                  <a:noFill/>
-                </a:ln>
-                <a:solidFill>
-                  <a:srgbClr val="000000"/>
-                </a:solidFill>
-                <a:ea typeface="Gothic" pitchFamily="2"/>
-                <a:cs typeface="Lucidasans" pitchFamily="2"/>
-              </a:rPr>
-              <a:t>k</a:t>
-            </a:r>
-          </a:p>
-          <a:p>
-            <a:pPr marL="457200" marR="0" lvl="0" indent="-457200" algn="l" rtl="0" hangingPunct="0">
-              <a:lnSpc>
-                <a:spcPct val="100000"/>
-              </a:lnSpc>
-              <a:spcBef>
-                <a:spcPts val="598"/>
-              </a:spcBef>
-              <a:spcAft>
-                <a:spcPts val="0"/>
-              </a:spcAft>
-              <a:buSzPct val="100000"/>
-              <a:buFont typeface="Arial"/>
-              <a:buChar char="•"/>
-              <a:tabLst>
-                <a:tab pos="0" algn="l"/>
-                <a:tab pos="914400" algn="l"/>
-                <a:tab pos="1828800" algn="l"/>
-                <a:tab pos="2743199" algn="l"/>
-                <a:tab pos="3657600" algn="l"/>
-                <a:tab pos="4572000" algn="l"/>
-                <a:tab pos="5486399" algn="l"/>
-                <a:tab pos="6400799" algn="l"/>
-                <a:tab pos="7315200" algn="l"/>
-                <a:tab pos="8229600" algn="l"/>
-                <a:tab pos="9144000" algn="l"/>
-                <a:tab pos="10058400" algn="l"/>
-              </a:tabLst>
-            </a:pPr>
-            <a:r>
-              <a:rPr lang="en-US" sz="2400" b="0" i="0" u="none" strike="noStrike" baseline="0" dirty="0">
-                <a:ln>
-                  <a:noFill/>
-                </a:ln>
-                <a:solidFill>
-                  <a:srgbClr val="000000"/>
-                </a:solidFill>
-                <a:ea typeface="Gothic" pitchFamily="2"/>
-                <a:cs typeface="Lucidasans" pitchFamily="2"/>
-              </a:rPr>
-              <a:t>Can use significance test to stop cross-validation for a subset early if it is unlikely to “win” (</a:t>
-            </a:r>
-            <a:r>
-              <a:rPr lang="en-US" sz="2400" b="0" i="1" u="none" strike="noStrike" baseline="0" dirty="0">
-                <a:ln>
-                  <a:noFill/>
-                </a:ln>
-                <a:solidFill>
-                  <a:srgbClr val="000000"/>
-                </a:solidFill>
-                <a:ea typeface="Gothic" pitchFamily="2"/>
-                <a:cs typeface="Lucidasans" pitchFamily="2"/>
-              </a:rPr>
-              <a:t>race search</a:t>
-            </a:r>
-            <a:r>
-              <a:rPr lang="en-US" sz="2400" b="0" i="0" u="none" strike="noStrike" baseline="0" dirty="0">
-                <a:ln>
-                  <a:noFill/>
-                </a:ln>
-                <a:solidFill>
-                  <a:srgbClr val="000000"/>
-                </a:solidFill>
-                <a:ea typeface="Gothic" pitchFamily="2"/>
-                <a:cs typeface="Lucidasans" pitchFamily="2"/>
-              </a:rPr>
-              <a:t>)</a:t>
-            </a:r>
-          </a:p>
-          <a:p>
-            <a:pPr marL="457200" lvl="2" hangingPunct="0">
-              <a:spcBef>
-                <a:spcPts val="598"/>
-              </a:spcBef>
-              <a:buSzPct val="100000"/>
-              <a:tabLst>
-                <a:tab pos="0" algn="l"/>
-                <a:tab pos="914400" algn="l"/>
-                <a:tab pos="1828800" algn="l"/>
-                <a:tab pos="2743199" algn="l"/>
-                <a:tab pos="3657600" algn="l"/>
-                <a:tab pos="4572000" algn="l"/>
-                <a:tab pos="5486399" algn="l"/>
-                <a:tab pos="6400799" algn="l"/>
-                <a:tab pos="7315200" algn="l"/>
-                <a:tab pos="8229600" algn="l"/>
-                <a:tab pos="9144000" algn="l"/>
-                <a:tab pos="10058400" algn="l"/>
-              </a:tabLst>
-            </a:pPr>
-            <a:r>
-              <a:rPr lang="en-US" sz="2000" dirty="0">
-                <a:solidFill>
-                  <a:srgbClr val="000000"/>
-                </a:solidFill>
-                <a:ea typeface="Gothic" pitchFamily="2"/>
-                <a:cs typeface="Lucidasans" pitchFamily="2"/>
-              </a:rPr>
-              <a:t>C</a:t>
-            </a:r>
-            <a:r>
-              <a:rPr lang="en-US" sz="2000" b="0" i="0" u="none" strike="noStrike" baseline="0" dirty="0">
-                <a:ln>
-                  <a:noFill/>
-                </a:ln>
-                <a:solidFill>
-                  <a:srgbClr val="000000"/>
-                </a:solidFill>
-                <a:ea typeface="Gothic" pitchFamily="2"/>
-                <a:cs typeface="Lucidasans" pitchFamily="2"/>
-              </a:rPr>
-              <a:t>an be used with forward, backward selection, prior ranking, or special-purpose </a:t>
-            </a:r>
-            <a:r>
-              <a:rPr lang="en-US" sz="2000" b="0" i="1" u="none" strike="noStrike" baseline="0" dirty="0">
-                <a:ln>
-                  <a:noFill/>
-                </a:ln>
-                <a:solidFill>
-                  <a:srgbClr val="000000"/>
-                </a:solidFill>
-                <a:ea typeface="Gothic" pitchFamily="2"/>
-                <a:cs typeface="Lucidasans" pitchFamily="2"/>
-              </a:rPr>
-              <a:t>schemata search</a:t>
-            </a:r>
-          </a:p>
-          <a:p>
-            <a:pPr marL="457200" marR="0" lvl="0" indent="-457200" algn="l" rtl="0" hangingPunct="0">
-              <a:lnSpc>
-                <a:spcPct val="100000"/>
-              </a:lnSpc>
-              <a:spcBef>
-                <a:spcPts val="697"/>
-              </a:spcBef>
-              <a:spcAft>
-                <a:spcPts val="0"/>
-              </a:spcAft>
-              <a:buSzPct val="100000"/>
-              <a:buFont typeface="Arial"/>
-              <a:buChar char="•"/>
-              <a:tabLst>
-                <a:tab pos="0" algn="l"/>
-                <a:tab pos="914400" algn="l"/>
-                <a:tab pos="1828800" algn="l"/>
-                <a:tab pos="2743199" algn="l"/>
-                <a:tab pos="3657600" algn="l"/>
-                <a:tab pos="4572000" algn="l"/>
-                <a:tab pos="5486399" algn="l"/>
-                <a:tab pos="6400799" algn="l"/>
-                <a:tab pos="7315200" algn="l"/>
-                <a:tab pos="8229600" algn="l"/>
-                <a:tab pos="9144000" algn="l"/>
-                <a:tab pos="10058400" algn="l"/>
-              </a:tabLst>
-            </a:pPr>
-            <a:r>
-              <a:rPr lang="en-US" sz="2400" b="0" i="0" u="none" strike="noStrike" baseline="0" dirty="0">
-                <a:ln>
-                  <a:noFill/>
-                </a:ln>
-                <a:solidFill>
-                  <a:srgbClr val="000000"/>
-                </a:solidFill>
-                <a:ea typeface="Gothic" pitchFamily="2"/>
-                <a:cs typeface="Lucidasans" pitchFamily="2"/>
-              </a:rPr>
-              <a:t>Scheme-specific attribute selection is essential for learning decision tables</a:t>
-            </a:r>
-          </a:p>
-          <a:p>
-            <a:pPr marL="457200" marR="0" lvl="0" indent="-457200" algn="l" rtl="0" hangingPunct="0">
-              <a:lnSpc>
-                <a:spcPct val="100000"/>
-              </a:lnSpc>
-              <a:spcBef>
-                <a:spcPts val="697"/>
-              </a:spcBef>
-              <a:spcAft>
-                <a:spcPts val="0"/>
-              </a:spcAft>
-              <a:buSzPct val="100000"/>
-              <a:buFont typeface="Arial"/>
-              <a:buChar char="•"/>
-              <a:tabLst>
-                <a:tab pos="0" algn="l"/>
-                <a:tab pos="914400" algn="l"/>
-                <a:tab pos="1828800" algn="l"/>
-                <a:tab pos="2743199" algn="l"/>
-                <a:tab pos="3657600" algn="l"/>
-                <a:tab pos="4572000" algn="l"/>
-                <a:tab pos="5486399" algn="l"/>
-                <a:tab pos="6400799" algn="l"/>
-                <a:tab pos="7315200" algn="l"/>
-                <a:tab pos="8229600" algn="l"/>
-                <a:tab pos="9144000" algn="l"/>
-                <a:tab pos="10058400" algn="l"/>
-              </a:tabLst>
-            </a:pPr>
-            <a:r>
-              <a:rPr lang="en-US" sz="2400" b="0" i="0" u="none" strike="noStrike" baseline="0" dirty="0">
-                <a:ln>
-                  <a:noFill/>
-                </a:ln>
-                <a:solidFill>
-                  <a:srgbClr val="000000"/>
-                </a:solidFill>
-                <a:ea typeface="Gothic" pitchFamily="2"/>
-                <a:cs typeface="Lucidasans" pitchFamily="2"/>
-              </a:rPr>
-              <a:t>Efficient for decision tables and Naïve Bayes</a:t>
-            </a:r>
-          </a:p>
-        </p:txBody>
-      </p:sp>
     </p:spTree>
   </p:cSld>
   <p:clrMapOvr>

--- a/DMcourse/Chapter8.pptx
+++ b/DMcourse/Chapter8.pptx
@@ -24963,7 +24963,7 @@
         <p:spPr>
           <a:xfrm>
             <a:off x="487919" y="1086676"/>
-            <a:ext cx="8151121" cy="4690514"/>
+            <a:ext cx="8151121" cy="4423775"/>
           </a:xfrm>
         </p:spPr>
         <p:txBody>
@@ -25053,16 +25053,7 @@
             </a:pPr>
             <a:r>
               <a:rPr lang="en-US" dirty="0"/>
-              <a:t>Eigenvectors (sorted by eigenvalues) are the directions</a:t>
-            </a:r>
-          </a:p>
-          <a:p>
-            <a:pPr lvl="1">
-              <a:buSzPct val="100000"/>
-            </a:pPr>
-            <a:r>
-              <a:rPr lang="en-US" dirty="0"/>
-              <a:t>Mathematical details are covered in chapter on “Probabilistic methods” </a:t>
+              <a:t>Eigenvectors (sorted by eigenvalues) are the directions </a:t>
             </a:r>
           </a:p>
         </p:txBody>
@@ -27924,9 +27915,10 @@
           <a:p>
             <a:pPr lvl="1"/>
             <a:r>
-              <a:rPr lang="en-CA" dirty="0"/>
-              <a:t>linear discriminant function</a:t>
-            </a:r>
+              <a:rPr lang="en-CA"/>
+              <a:t>Support Vector Machines</a:t>
+            </a:r>
+            <a:endParaRPr lang="en-CA" dirty="0"/>
           </a:p>
           <a:p>
             <a:r>
